--- a/examples/01-modular-agent/redraw.pptx
+++ b/examples/01-modular-agent/redraw.pptx
@@ -3431,8 +3431,8 @@
         </p:nvSpPr>
         <p:spPr>
           <a:xfrm>
-            <a:off x="3952875" y="485775"/>
-            <a:ext cx="66675" cy="76200"/>
+            <a:off x="3924300" y="466725"/>
+            <a:ext cx="114300" cy="114300"/>
           </a:xfrm>
           <a:custGeom>
             <a:avLst/>
@@ -3441,25 +3441,23 @@
             <a:cxnLst/>
             <a:rect l="0" t="0" r="0" b="0"/>
             <a:pathLst>
-              <a:path w="66675" h="76200">
+              <a:path w="114300" h="114300">
                 <a:moveTo>
                   <a:pt x="0" y="0"/>
                 </a:moveTo>
                 <a:lnTo>
-                  <a:pt x="66675" y="38100"/>
+                  <a:pt x="114300" y="57150"/>
                 </a:lnTo>
                 <a:lnTo>
-                  <a:pt x="0" y="76200"/>
+                  <a:pt x="0" y="114300"/>
                 </a:lnTo>
+                <a:close/>
               </a:path>
             </a:pathLst>
           </a:custGeom>
-          <a:noFill/>
-          <a:ln w="19050" cap="rnd">
-            <a:solidFill>
-              <a:srgbClr val="777777"/>
-            </a:solidFill>
-          </a:ln>
+          <a:solidFill>
+            <a:srgbClr val="777777"/>
+          </a:solidFill>
         </p:spPr>
       </p:sp>
       <p:sp>
@@ -3621,8 +3619,8 @@
         </p:nvSpPr>
         <p:spPr>
           <a:xfrm>
-            <a:off x="5543550" y="485775"/>
-            <a:ext cx="66675" cy="76200"/>
+            <a:off x="5514975" y="466725"/>
+            <a:ext cx="114300" cy="114300"/>
           </a:xfrm>
           <a:custGeom>
             <a:avLst/>
@@ -3631,25 +3629,23 @@
             <a:cxnLst/>
             <a:rect l="0" t="0" r="0" b="0"/>
             <a:pathLst>
-              <a:path w="66675" h="76200">
+              <a:path w="114300" h="114300">
                 <a:moveTo>
                   <a:pt x="0" y="0"/>
                 </a:moveTo>
                 <a:lnTo>
-                  <a:pt x="66675" y="38100"/>
+                  <a:pt x="114300" y="57150"/>
                 </a:lnTo>
                 <a:lnTo>
-                  <a:pt x="0" y="76200"/>
+                  <a:pt x="0" y="114300"/>
                 </a:lnTo>
+                <a:close/>
               </a:path>
             </a:pathLst>
           </a:custGeom>
-          <a:noFill/>
-          <a:ln w="19050" cap="rnd">
-            <a:solidFill>
-              <a:srgbClr val="777777"/>
-            </a:solidFill>
-          </a:ln>
+          <a:solidFill>
+            <a:srgbClr val="777777"/>
+          </a:solidFill>
         </p:spPr>
       </p:sp>
       <p:sp>
@@ -3901,8 +3897,8 @@
         </p:nvSpPr>
         <p:spPr>
           <a:xfrm>
-            <a:off x="7153275" y="485775"/>
-            <a:ext cx="66675" cy="76200"/>
+            <a:off x="7124700" y="466725"/>
+            <a:ext cx="114300" cy="114300"/>
           </a:xfrm>
           <a:custGeom>
             <a:avLst/>
@@ -3911,25 +3907,23 @@
             <a:cxnLst/>
             <a:rect l="0" t="0" r="0" b="0"/>
             <a:pathLst>
-              <a:path w="66675" h="76200">
+              <a:path w="114300" h="114300">
                 <a:moveTo>
                   <a:pt x="0" y="0"/>
                 </a:moveTo>
                 <a:lnTo>
-                  <a:pt x="66675" y="38100"/>
+                  <a:pt x="114300" y="57150"/>
                 </a:lnTo>
                 <a:lnTo>
-                  <a:pt x="0" y="76200"/>
+                  <a:pt x="0" y="114300"/>
                 </a:lnTo>
+                <a:close/>
               </a:path>
             </a:pathLst>
           </a:custGeom>
-          <a:noFill/>
-          <a:ln w="19050" cap="rnd">
-            <a:solidFill>
-              <a:srgbClr val="777777"/>
-            </a:solidFill>
-          </a:ln>
+          <a:solidFill>
+            <a:srgbClr val="777777"/>
+          </a:solidFill>
         </p:spPr>
       </p:sp>
       <p:sp>
@@ -4019,7 +4013,7 @@
         </p:nvSpPr>
         <p:spPr>
           <a:xfrm>
-            <a:off x="8496300" y="456248"/>
+            <a:off x="8629650" y="456248"/>
             <a:ext cx="380619" cy="214312"/>
           </a:xfrm>
           <a:prstGeom prst="rect">
@@ -4100,8 +4094,8 @@
         </p:nvSpPr>
         <p:spPr>
           <a:xfrm>
-            <a:off x="9709881" y="1305692"/>
-            <a:ext cx="72294" cy="75433"/>
+            <a:off x="9676831" y="1271595"/>
+            <a:ext cx="117728" cy="124006"/>
           </a:xfrm>
           <a:custGeom>
             <a:avLst/>
@@ -4110,25 +4104,23 @@
             <a:cxnLst/>
             <a:rect l="0" t="0" r="0" b="0"/>
             <a:pathLst>
-              <a:path w="72294" h="75433">
+              <a:path w="117728" h="124006">
                 <a:moveTo>
-                  <a:pt x="57905" y="0"/>
+                  <a:pt x="86857" y="0"/>
                 </a:moveTo>
                 <a:lnTo>
-                  <a:pt x="72294" y="75433"/>
+                  <a:pt x="117728" y="124006"/>
                 </a:lnTo>
                 <a:lnTo>
-                  <a:pt x="0" y="49533"/>
+                  <a:pt x="0" y="74299"/>
                 </a:lnTo>
+                <a:close/>
               </a:path>
             </a:pathLst>
           </a:custGeom>
-          <a:noFill/>
-          <a:ln w="19050" cap="rnd">
-            <a:solidFill>
-              <a:srgbClr val="777777"/>
-            </a:solidFill>
-          </a:ln>
+          <a:solidFill>
+            <a:srgbClr val="777777"/>
+          </a:solidFill>
         </p:spPr>
       </p:sp>
       <p:cxnSp>
@@ -4175,8 +4167,8 @@
         </p:nvSpPr>
         <p:spPr>
           <a:xfrm>
-            <a:off x="6257925" y="1123950"/>
-            <a:ext cx="76200" cy="66675"/>
+            <a:off x="6253162" y="1119188"/>
+            <a:ext cx="85725" cy="85725"/>
           </a:xfrm>
           <a:custGeom>
             <a:avLst/>
@@ -4185,25 +4177,23 @@
             <a:cxnLst/>
             <a:rect l="0" t="0" r="0" b="0"/>
             <a:pathLst>
-              <a:path w="76200" h="66675">
+              <a:path w="85725" h="85725">
                 <a:moveTo>
-                  <a:pt x="76200" y="0"/>
+                  <a:pt x="85725" y="0"/>
                 </a:moveTo>
                 <a:lnTo>
-                  <a:pt x="38100" y="66675"/>
+                  <a:pt x="42862" y="85725"/>
                 </a:lnTo>
                 <a:lnTo>
                   <a:pt x="0" y="0"/>
                 </a:lnTo>
+                <a:close/>
               </a:path>
             </a:pathLst>
           </a:custGeom>
-          <a:noFill/>
-          <a:ln w="19050" cap="rnd">
-            <a:solidFill>
-              <a:srgbClr val="3567B7"/>
-            </a:solidFill>
-          </a:ln>
+          <a:solidFill>
+            <a:srgbClr val="3567B7"/>
+          </a:solidFill>
         </p:spPr>
       </p:sp>
       <p:sp>
@@ -4680,12 +4670,12 @@
             <a:gsLst>
               <a:gs pos="0">
                 <a:srgbClr val="C9D8F2">
-                  <a:alpha val="65000"/>
+                  <a:alpha val="80000"/>
                 </a:srgbClr>
               </a:gs>
               <a:gs pos="100000">
                 <a:srgbClr val="9DBCE9">
-                  <a:alpha val="5000"/>
+                  <a:alpha val="20000"/>
                 </a:srgbClr>
               </a:gs>
             </a:gsLst>
@@ -4693,582 +4683,33 @@
           </a:gradFill>
         </p:spPr>
       </p:sp>
-      <p:sp>
-        <p:nvSpPr>
-          <p:cNvPr id="42" name="Rectangle 41"/>
-          <p:cNvSpPr/>
-          <p:nvPr/>
-        </p:nvSpPr>
-        <p:spPr>
-          <a:xfrm>
-            <a:off x="419100" y="2819400"/>
-            <a:ext cx="742950" cy="590550"/>
+      <p:pic>
+        <p:nvPicPr>
+          <p:cNvPr id="42" name="Picture 41" descr="image.png"/>
+          <p:cNvPicPr>
+            <a:picLocks noChangeAspect="1"/>
+          </p:cNvPicPr>
+          <p:nvPr/>
+        </p:nvPicPr>
+        <p:blipFill>
+          <a:blip r:embed="rId2"/>
+          <a:stretch>
+            <a:fillRect/>
+          </a:stretch>
+        </p:blipFill>
+        <p:spPr>
+          <a:xfrm>
+            <a:off x="400050" y="2762250"/>
+            <a:ext cx="1009650" cy="819150"/>
           </a:xfrm>
           <a:prstGeom prst="rect">
             <a:avLst/>
           </a:prstGeom>
-          <a:solidFill>
-            <a:srgbClr val="111111"/>
-          </a:solidFill>
-          <a:ln w="9525">
-            <a:solidFill>
-              <a:srgbClr val="FFFFFF"/>
-            </a:solidFill>
-          </a:ln>
-          <a:effectLst/>
-        </p:spPr>
-        <p:style>
-          <a:lnRef idx="1">
-            <a:schemeClr val="accent1"/>
-          </a:lnRef>
-          <a:fillRef idx="3">
-            <a:schemeClr val="accent1"/>
-          </a:fillRef>
-          <a:effectRef idx="2">
-            <a:schemeClr val="accent1"/>
-          </a:effectRef>
-          <a:fontRef idx="minor">
-            <a:schemeClr val="lt1"/>
-          </a:fontRef>
-        </p:style>
-        <p:txBody>
-          <a:bodyPr rtlCol="0" anchor="ctr"/>
-          <a:lstStyle/>
-          <a:p>
-            <a:pPr algn="ctr"/>
-          </a:p>
-        </p:txBody>
-      </p:sp>
-      <p:sp>
-        <p:nvSpPr>
-          <p:cNvPr id="43" name="Rectangle 42"/>
-          <p:cNvSpPr/>
-          <p:nvPr/>
-        </p:nvSpPr>
-        <p:spPr>
-          <a:xfrm>
-            <a:off x="495300" y="2886075"/>
-            <a:ext cx="742950" cy="590550"/>
-          </a:xfrm>
-          <a:prstGeom prst="rect">
-            <a:avLst/>
-          </a:prstGeom>
-          <a:solidFill>
-            <a:srgbClr val="111111"/>
-          </a:solidFill>
-          <a:ln w="9525">
-            <a:solidFill>
-              <a:srgbClr val="FFFFFF"/>
-            </a:solidFill>
-          </a:ln>
-          <a:effectLst/>
-        </p:spPr>
-        <p:style>
-          <a:lnRef idx="1">
-            <a:schemeClr val="accent1"/>
-          </a:lnRef>
-          <a:fillRef idx="3">
-            <a:schemeClr val="accent1"/>
-          </a:fillRef>
-          <a:effectRef idx="2">
-            <a:schemeClr val="accent1"/>
-          </a:effectRef>
-          <a:fontRef idx="minor">
-            <a:schemeClr val="lt1"/>
-          </a:fontRef>
-        </p:style>
-        <p:txBody>
-          <a:bodyPr rtlCol="0" anchor="ctr"/>
-          <a:lstStyle/>
-          <a:p>
-            <a:pPr algn="ctr"/>
-          </a:p>
-        </p:txBody>
-      </p:sp>
-      <p:sp>
-        <p:nvSpPr>
-          <p:cNvPr id="44" name="Rectangle 43"/>
-          <p:cNvSpPr/>
-          <p:nvPr/>
-        </p:nvSpPr>
-        <p:spPr>
-          <a:xfrm>
-            <a:off x="571500" y="2952750"/>
-            <a:ext cx="742950" cy="590550"/>
-          </a:xfrm>
-          <a:prstGeom prst="rect">
-            <a:avLst/>
-          </a:prstGeom>
-          <a:solidFill>
-            <a:srgbClr val="111111"/>
-          </a:solidFill>
-          <a:ln w="9525">
-            <a:solidFill>
-              <a:srgbClr val="FFFFFF"/>
-            </a:solidFill>
-          </a:ln>
-          <a:effectLst/>
-        </p:spPr>
-        <p:style>
-          <a:lnRef idx="1">
-            <a:schemeClr val="accent1"/>
-          </a:lnRef>
-          <a:fillRef idx="3">
-            <a:schemeClr val="accent1"/>
-          </a:fillRef>
-          <a:effectRef idx="2">
-            <a:schemeClr val="accent1"/>
-          </a:effectRef>
-          <a:fontRef idx="minor">
-            <a:schemeClr val="lt1"/>
-          </a:fontRef>
-        </p:style>
-        <p:txBody>
-          <a:bodyPr rtlCol="0" anchor="ctr"/>
-          <a:lstStyle/>
-          <a:p>
-            <a:pPr algn="ctr"/>
-          </a:p>
-        </p:txBody>
-      </p:sp>
-      <p:sp>
-        <p:nvSpPr>
-          <p:cNvPr id="45" name="Rectangle 44"/>
-          <p:cNvSpPr/>
-          <p:nvPr/>
-        </p:nvSpPr>
-        <p:spPr>
-          <a:xfrm>
-            <a:off x="581025" y="2962275"/>
-            <a:ext cx="733425" cy="581025"/>
-          </a:xfrm>
-          <a:prstGeom prst="rect">
-            <a:avLst/>
-          </a:prstGeom>
-          <a:solidFill>
-            <a:srgbClr val="151515"/>
-          </a:solidFill>
-          <a:ln w="9525">
-            <a:solidFill>
-              <a:srgbClr val="FFFFFF"/>
-            </a:solidFill>
-          </a:ln>
-          <a:effectLst/>
-        </p:spPr>
-        <p:style>
-          <a:lnRef idx="1">
-            <a:schemeClr val="accent1"/>
-          </a:lnRef>
-          <a:fillRef idx="3">
-            <a:schemeClr val="accent1"/>
-          </a:fillRef>
-          <a:effectRef idx="2">
-            <a:schemeClr val="accent1"/>
-          </a:effectRef>
-          <a:fontRef idx="minor">
-            <a:schemeClr val="lt1"/>
-          </a:fontRef>
-        </p:style>
-        <p:txBody>
-          <a:bodyPr rtlCol="0" anchor="ctr"/>
-          <a:lstStyle/>
-          <a:p>
-            <a:pPr algn="ctr"/>
-          </a:p>
-        </p:txBody>
-      </p:sp>
-      <p:sp>
-        <p:nvSpPr>
-          <p:cNvPr id="46" name="Rectangle 45"/>
-          <p:cNvSpPr/>
-          <p:nvPr/>
-        </p:nvSpPr>
-        <p:spPr>
-          <a:xfrm>
-            <a:off x="657225" y="3333750"/>
-            <a:ext cx="323850" cy="161925"/>
-          </a:xfrm>
-          <a:prstGeom prst="rect">
-            <a:avLst/>
-          </a:prstGeom>
-          <a:solidFill>
-            <a:srgbClr val="FFFFFF"/>
-          </a:solidFill>
-          <a:effectLst/>
-        </p:spPr>
-        <p:style>
-          <a:lnRef idx="1">
-            <a:schemeClr val="accent1"/>
-          </a:lnRef>
-          <a:fillRef idx="3">
-            <a:schemeClr val="accent1"/>
-          </a:fillRef>
-          <a:effectRef idx="2">
-            <a:schemeClr val="accent1"/>
-          </a:effectRef>
-          <a:fontRef idx="minor">
-            <a:schemeClr val="lt1"/>
-          </a:fontRef>
-        </p:style>
-        <p:txBody>
-          <a:bodyPr rtlCol="0" anchor="ctr"/>
-          <a:lstStyle/>
-          <a:p>
-            <a:pPr algn="ctr"/>
-          </a:p>
-        </p:txBody>
-      </p:sp>
-      <p:cxnSp>
-        <p:nvCxnSpPr>
-          <p:cNvPr id="47" name="Connector 46"/>
-          <p:cNvCxnSpPr/>
-          <p:nvPr/>
-        </p:nvCxnSpPr>
-        <p:spPr>
-          <a:xfrm>
-            <a:off x="828675" y="3019425"/>
-            <a:ext cx="0" cy="295275"/>
-          </a:xfrm>
-          <a:prstGeom prst="line">
-            <a:avLst/>
-          </a:prstGeom>
-          <a:ln w="66675" cap="rnd">
-            <a:solidFill>
-              <a:srgbClr val="F5F5F5"/>
-            </a:solidFill>
-          </a:ln>
-          <a:effectLst/>
-        </p:spPr>
-        <p:style>
-          <a:lnRef idx="2">
-            <a:schemeClr val="accent1"/>
-          </a:lnRef>
-          <a:fillRef idx="0">
-            <a:schemeClr val="accent1"/>
-          </a:fillRef>
-          <a:effectRef idx="1">
-            <a:schemeClr val="accent1"/>
-          </a:effectRef>
-          <a:fontRef idx="minor">
-            <a:schemeClr val="tx1"/>
-          </a:fontRef>
-        </p:style>
-      </p:cxnSp>
-      <p:sp>
-        <p:nvSpPr>
-          <p:cNvPr id="48" name="Oval 47"/>
-          <p:cNvSpPr/>
-          <p:nvPr/>
-        </p:nvSpPr>
-        <p:spPr>
-          <a:xfrm>
-            <a:off x="771525" y="2990850"/>
-            <a:ext cx="114300" cy="114300"/>
-          </a:xfrm>
-          <a:prstGeom prst="ellipse">
-            <a:avLst/>
-          </a:prstGeom>
-          <a:solidFill>
-            <a:srgbClr val="DDDDDD"/>
-          </a:solidFill>
-          <a:ln w="9525">
-            <a:solidFill>
-              <a:srgbClr val="DDDDDD"/>
-            </a:solidFill>
-          </a:ln>
-          <a:effectLst/>
-        </p:spPr>
-        <p:style>
-          <a:lnRef idx="1">
-            <a:schemeClr val="accent1"/>
-          </a:lnRef>
-          <a:fillRef idx="3">
-            <a:schemeClr val="accent1"/>
-          </a:fillRef>
-          <a:effectRef idx="2">
-            <a:schemeClr val="accent1"/>
-          </a:effectRef>
-          <a:fontRef idx="minor">
-            <a:schemeClr val="lt1"/>
-          </a:fontRef>
-        </p:style>
-        <p:txBody>
-          <a:bodyPr rtlCol="0" anchor="ctr"/>
-          <a:lstStyle/>
-          <a:p>
-            <a:pPr algn="ctr"/>
-          </a:p>
-        </p:txBody>
-      </p:sp>
-      <p:sp>
-        <p:nvSpPr>
-          <p:cNvPr id="49" name="freeform-49"/>
-          <p:cNvSpPr/>
-          <p:nvPr/>
-        </p:nvSpPr>
-        <p:spPr>
-          <a:xfrm>
-            <a:off x="828675" y="3095625"/>
-            <a:ext cx="161925" cy="314325"/>
-          </a:xfrm>
-          <a:custGeom>
-            <a:avLst/>
-            <a:gdLst/>
-            <a:ahLst/>
-            <a:cxnLst/>
-            <a:rect l="0" t="0" r="0" b="0"/>
-            <a:pathLst>
-              <a:path w="161925" h="314325">
-                <a:moveTo>
-                  <a:pt x="0" y="0"/>
-                </a:moveTo>
-                <a:cubicBezTo>
-                  <a:pt x="101600" y="25400"/>
-                  <a:pt x="155575" y="79375"/>
-                  <a:pt x="161925" y="161925"/>
-                </a:cubicBezTo>
-                <a:cubicBezTo>
-                  <a:pt x="161925" y="231775"/>
-                  <a:pt x="133350" y="282575"/>
-                  <a:pt x="76200" y="314325"/>
-                </a:cubicBezTo>
-              </a:path>
-            </a:pathLst>
-          </a:custGeom>
-          <a:noFill/>
-          <a:ln w="57150" cap="rnd">
-            <a:solidFill>
-              <a:srgbClr val="DDDDDD"/>
-            </a:solidFill>
-          </a:ln>
-        </p:spPr>
-      </p:sp>
-      <p:sp>
-        <p:nvSpPr>
-          <p:cNvPr id="50" name="Oval 49"/>
-          <p:cNvSpPr/>
-          <p:nvPr/>
-        </p:nvSpPr>
-        <p:spPr>
-          <a:xfrm>
-            <a:off x="952500" y="3200400"/>
-            <a:ext cx="95250" cy="95250"/>
-          </a:xfrm>
-          <a:prstGeom prst="ellipse">
-            <a:avLst/>
-          </a:prstGeom>
-          <a:solidFill>
-            <a:srgbClr val="EEEEEE"/>
-          </a:solidFill>
-          <a:ln w="9525">
-            <a:solidFill>
-              <a:srgbClr val="EEEEEE"/>
-            </a:solidFill>
-          </a:ln>
-          <a:effectLst/>
-        </p:spPr>
-        <p:style>
-          <a:lnRef idx="1">
-            <a:schemeClr val="accent1"/>
-          </a:lnRef>
-          <a:fillRef idx="3">
-            <a:schemeClr val="accent1"/>
-          </a:fillRef>
-          <a:effectRef idx="2">
-            <a:schemeClr val="accent1"/>
-          </a:effectRef>
-          <a:fontRef idx="minor">
-            <a:schemeClr val="lt1"/>
-          </a:fontRef>
-        </p:style>
-        <p:txBody>
-          <a:bodyPr rtlCol="0" anchor="ctr"/>
-          <a:lstStyle/>
-          <a:p>
-            <a:pPr algn="ctr"/>
-          </a:p>
-        </p:txBody>
-      </p:sp>
-      <p:sp>
-        <p:nvSpPr>
-          <p:cNvPr id="51" name="Rectangle 50"/>
-          <p:cNvSpPr/>
-          <p:nvPr/>
-        </p:nvSpPr>
-        <p:spPr>
-          <a:xfrm>
-            <a:off x="942975" y="3343275"/>
-            <a:ext cx="314325" cy="95250"/>
-          </a:xfrm>
-          <a:prstGeom prst="rect">
-            <a:avLst/>
-          </a:prstGeom>
-          <a:solidFill>
-            <a:srgbClr val="5AA4EA"/>
-          </a:solidFill>
-          <a:effectLst/>
-        </p:spPr>
-        <p:style>
-          <a:lnRef idx="1">
-            <a:schemeClr val="accent1"/>
-          </a:lnRef>
-          <a:fillRef idx="3">
-            <a:schemeClr val="accent1"/>
-          </a:fillRef>
-          <a:effectRef idx="2">
-            <a:schemeClr val="accent1"/>
-          </a:effectRef>
-          <a:fontRef idx="minor">
-            <a:schemeClr val="lt1"/>
-          </a:fontRef>
-        </p:style>
-        <p:txBody>
-          <a:bodyPr rtlCol="0" anchor="ctr"/>
-          <a:lstStyle/>
-          <a:p>
-            <a:pPr algn="ctr"/>
-          </a:p>
-        </p:txBody>
-      </p:sp>
-      <p:sp>
-        <p:nvSpPr>
-          <p:cNvPr id="52" name="Oval 51"/>
-          <p:cNvSpPr/>
-          <p:nvPr/>
-        </p:nvSpPr>
-        <p:spPr>
-          <a:xfrm>
-            <a:off x="1085850" y="3267075"/>
-            <a:ext cx="95250" cy="95250"/>
-          </a:xfrm>
-          <a:prstGeom prst="ellipse">
-            <a:avLst/>
-          </a:prstGeom>
-          <a:solidFill>
-            <a:srgbClr val="F0A94D"/>
-          </a:solidFill>
-          <a:effectLst/>
-        </p:spPr>
-        <p:style>
-          <a:lnRef idx="1">
-            <a:schemeClr val="accent1"/>
-          </a:lnRef>
-          <a:fillRef idx="3">
-            <a:schemeClr val="accent1"/>
-          </a:fillRef>
-          <a:effectRef idx="2">
-            <a:schemeClr val="accent1"/>
-          </a:effectRef>
-          <a:fontRef idx="minor">
-            <a:schemeClr val="lt1"/>
-          </a:fontRef>
-        </p:style>
-        <p:txBody>
-          <a:bodyPr rtlCol="0" anchor="ctr"/>
-          <a:lstStyle/>
-          <a:p>
-            <a:pPr algn="ctr"/>
-          </a:p>
-        </p:txBody>
-      </p:sp>
-      <p:sp>
-        <p:nvSpPr>
-          <p:cNvPr id="53" name="Rectangle 52"/>
-          <p:cNvSpPr/>
-          <p:nvPr/>
-        </p:nvSpPr>
-        <p:spPr>
-          <a:xfrm>
-            <a:off x="1209675" y="3238500"/>
-            <a:ext cx="66675" cy="114300"/>
-          </a:xfrm>
-          <a:prstGeom prst="rect">
-            <a:avLst/>
-          </a:prstGeom>
-          <a:solidFill>
-            <a:srgbClr val="D55B37"/>
-          </a:solidFill>
-          <a:effectLst/>
-        </p:spPr>
-        <p:style>
-          <a:lnRef idx="1">
-            <a:schemeClr val="accent1"/>
-          </a:lnRef>
-          <a:fillRef idx="3">
-            <a:schemeClr val="accent1"/>
-          </a:fillRef>
-          <a:effectRef idx="2">
-            <a:schemeClr val="accent1"/>
-          </a:effectRef>
-          <a:fontRef idx="minor">
-            <a:schemeClr val="lt1"/>
-          </a:fontRef>
-        </p:style>
-        <p:txBody>
-          <a:bodyPr rtlCol="0" anchor="ctr"/>
-          <a:lstStyle/>
-          <a:p>
-            <a:pPr algn="ctr"/>
-          </a:p>
-        </p:txBody>
-      </p:sp>
-      <p:sp>
-        <p:nvSpPr>
-          <p:cNvPr id="54" name="freeform-54"/>
-          <p:cNvSpPr/>
-          <p:nvPr/>
-        </p:nvSpPr>
-        <p:spPr>
-          <a:xfrm>
-            <a:off x="1187450" y="3105150"/>
-            <a:ext cx="98425" cy="133350"/>
-          </a:xfrm>
-          <a:custGeom>
-            <a:avLst/>
-            <a:gdLst/>
-            <a:ahLst/>
-            <a:cxnLst/>
-            <a:rect l="0" t="0" r="0" b="0"/>
-            <a:pathLst>
-              <a:path w="98425" h="133350">
-                <a:moveTo>
-                  <a:pt x="50800" y="133350"/>
-                </a:moveTo>
-                <a:cubicBezTo>
-                  <a:pt x="6350" y="88900"/>
-                  <a:pt x="0" y="57150"/>
-                  <a:pt x="31750" y="38100"/>
-                </a:cubicBezTo>
-                <a:moveTo>
-                  <a:pt x="50800" y="133350"/>
-                </a:moveTo>
-                <a:cubicBezTo>
-                  <a:pt x="88900" y="82550"/>
-                  <a:pt x="98425" y="44450"/>
-                  <a:pt x="79375" y="19050"/>
-                </a:cubicBezTo>
-                <a:moveTo>
-                  <a:pt x="50800" y="133350"/>
-                </a:moveTo>
-                <a:cubicBezTo>
-                  <a:pt x="44450" y="69850"/>
-                  <a:pt x="41275" y="25400"/>
-                  <a:pt x="41275" y="0"/>
-                </a:cubicBezTo>
-              </a:path>
-            </a:pathLst>
-          </a:custGeom>
-          <a:noFill/>
-          <a:ln w="19050" cap="rnd">
-            <a:solidFill>
-              <a:srgbClr val="4C9F42"/>
-            </a:solidFill>
-          </a:ln>
-        </p:spPr>
-      </p:sp>
-      <p:sp>
-        <p:nvSpPr>
-          <p:cNvPr id="55" name="TextBox 54"/>
+        </p:spPr>
+      </p:pic>
+      <p:sp>
+        <p:nvSpPr>
+          <p:cNvPr id="43" name="TextBox 42"/>
           <p:cNvSpPr txBox="1"/>
           <p:nvPr/>
         </p:nvSpPr>
@@ -5304,7 +4745,7 @@
       </p:sp>
       <p:sp>
         <p:nvSpPr>
-          <p:cNvPr id="56" name="TextBox 55"/>
+          <p:cNvPr id="44" name="TextBox 43"/>
           <p:cNvSpPr txBox="1"/>
           <p:nvPr/>
         </p:nvSpPr>
@@ -5340,7 +4781,7 @@
       </p:sp>
       <p:sp>
         <p:nvSpPr>
-          <p:cNvPr id="57" name="freeform-57"/>
+          <p:cNvPr id="45" name="freeform-45"/>
           <p:cNvSpPr/>
           <p:nvPr/>
         </p:nvSpPr>
@@ -5367,7 +4808,7 @@
             </a:pathLst>
           </a:custGeom>
           <a:noFill/>
-          <a:ln w="38100" cap="rnd">
+          <a:ln w="57150" cap="rnd">
             <a:solidFill>
               <a:srgbClr val="EF7D2B"/>
             </a:solidFill>
@@ -5376,14 +4817,14 @@
       </p:sp>
       <p:sp>
         <p:nvSpPr>
-          <p:cNvPr id="58" name="freeform-58"/>
-          <p:cNvSpPr/>
-          <p:nvPr/>
-        </p:nvSpPr>
-        <p:spPr>
-          <a:xfrm>
-            <a:off x="1628185" y="2819400"/>
-            <a:ext cx="76790" cy="66506"/>
+          <p:cNvPr id="46" name="freeform-46"/>
+          <p:cNvSpPr/>
+          <p:nvPr/>
+        </p:nvSpPr>
+        <p:spPr>
+          <a:xfrm>
+            <a:off x="1572649" y="2809801"/>
+            <a:ext cx="148781" cy="124784"/>
           </a:xfrm>
           <a:custGeom>
             <a:avLst/>
@@ -5392,30 +4833,28 @@
             <a:cxnLst/>
             <a:rect l="0" t="0" r="0" b="0"/>
             <a:pathLst>
-              <a:path w="76790" h="66506">
+              <a:path w="148781" h="124784">
                 <a:moveTo>
-                  <a:pt x="0" y="686"/>
+                  <a:pt x="0" y="9599"/>
                 </a:moveTo>
                 <a:lnTo>
-                  <a:pt x="76790" y="0"/>
+                  <a:pt x="148781" y="0"/>
                 </a:lnTo>
                 <a:lnTo>
-                  <a:pt x="38395" y="66506"/>
+                  <a:pt x="67191" y="124784"/>
                 </a:lnTo>
+                <a:close/>
               </a:path>
             </a:pathLst>
           </a:custGeom>
-          <a:noFill/>
-          <a:ln w="19050" cap="rnd">
-            <a:solidFill>
-              <a:srgbClr val="EF7D2B"/>
-            </a:solidFill>
-          </a:ln>
-        </p:spPr>
-      </p:sp>
-      <p:sp>
-        <p:nvSpPr>
-          <p:cNvPr id="59" name="freeform-59"/>
+          <a:solidFill>
+            <a:srgbClr val="EF7D2B"/>
+          </a:solidFill>
+        </p:spPr>
+      </p:sp>
+      <p:sp>
+        <p:nvSpPr>
+          <p:cNvPr id="47" name="freeform-47"/>
           <p:cNvSpPr/>
           <p:nvPr/>
         </p:nvSpPr>
@@ -5442,7 +4881,7 @@
             </a:pathLst>
           </a:custGeom>
           <a:noFill/>
-          <a:ln w="38100" cap="rnd">
+          <a:ln w="57150" cap="rnd">
             <a:solidFill>
               <a:srgbClr val="3567B7"/>
             </a:solidFill>
@@ -5451,14 +4890,14 @@
       </p:sp>
       <p:sp>
         <p:nvSpPr>
-          <p:cNvPr id="60" name="freeform-60"/>
-          <p:cNvSpPr/>
-          <p:nvPr/>
-        </p:nvSpPr>
-        <p:spPr>
-          <a:xfrm>
-            <a:off x="1628276" y="3732471"/>
-            <a:ext cx="76699" cy="68004"/>
+          <p:cNvPr id="48" name="freeform-48"/>
+          <p:cNvSpPr/>
+          <p:nvPr/>
+        </p:nvSpPr>
+        <p:spPr>
+          <a:xfrm>
+            <a:off x="1572758" y="3682750"/>
+            <a:ext cx="148271" cy="127981"/>
           </a:xfrm>
           <a:custGeom>
             <a:avLst/>
@@ -5467,30 +4906,28 @@
             <a:cxnLst/>
             <a:rect l="0" t="0" r="0" b="0"/>
             <a:pathLst>
-              <a:path w="76699" h="68004">
+              <a:path w="148271" h="127981">
                 <a:moveTo>
-                  <a:pt x="41025" y="0"/>
+                  <a:pt x="71794" y="0"/>
                 </a:moveTo>
                 <a:lnTo>
-                  <a:pt x="76699" y="68004"/>
+                  <a:pt x="148271" y="127981"/>
                 </a:lnTo>
                 <a:lnTo>
-                  <a:pt x="0" y="64213"/>
+                  <a:pt x="0" y="112374"/>
                 </a:lnTo>
+                <a:close/>
               </a:path>
             </a:pathLst>
           </a:custGeom>
-          <a:noFill/>
-          <a:ln w="19050" cap="rnd">
-            <a:solidFill>
-              <a:srgbClr val="3567B7"/>
-            </a:solidFill>
-          </a:ln>
-        </p:spPr>
-      </p:sp>
-      <p:sp>
-        <p:nvSpPr>
-          <p:cNvPr id="61" name="Rounded Rectangle 60"/>
+          <a:solidFill>
+            <a:srgbClr val="3567B7"/>
+          </a:solidFill>
+        </p:spPr>
+      </p:sp>
+      <p:sp>
+        <p:nvSpPr>
+          <p:cNvPr id="49" name="Rounded Rectangle 48"/>
           <p:cNvSpPr/>
           <p:nvPr/>
         </p:nvSpPr>
@@ -5533,7 +4970,7 @@
       </p:sp>
       <p:sp>
         <p:nvSpPr>
-          <p:cNvPr id="62" name="TextBox 61"/>
+          <p:cNvPr id="50" name="TextBox 49"/>
           <p:cNvSpPr txBox="1"/>
           <p:nvPr/>
         </p:nvSpPr>
@@ -5569,7 +5006,7 @@
       </p:sp>
       <p:sp>
         <p:nvSpPr>
-          <p:cNvPr id="63" name="TextBox 62"/>
+          <p:cNvPr id="51" name="TextBox 50"/>
           <p:cNvSpPr txBox="1"/>
           <p:nvPr/>
         </p:nvSpPr>
@@ -5605,7 +5042,7 @@
       </p:sp>
       <p:sp>
         <p:nvSpPr>
-          <p:cNvPr id="64" name="Rounded Rectangle 63"/>
+          <p:cNvPr id="52" name="Rounded Rectangle 51"/>
           <p:cNvSpPr/>
           <p:nvPr/>
         </p:nvSpPr>
@@ -5648,7 +5085,7 @@
       </p:sp>
       <p:sp>
         <p:nvSpPr>
-          <p:cNvPr id="65" name="TextBox 64"/>
+          <p:cNvPr id="53" name="TextBox 52"/>
           <p:cNvSpPr txBox="1"/>
           <p:nvPr/>
         </p:nvSpPr>
@@ -5684,7 +5121,7 @@
       </p:sp>
       <p:sp>
         <p:nvSpPr>
-          <p:cNvPr id="66" name="TextBox 65"/>
+          <p:cNvPr id="54" name="TextBox 53"/>
           <p:cNvSpPr txBox="1"/>
           <p:nvPr/>
         </p:nvSpPr>
@@ -5720,7 +5157,7 @@
       </p:sp>
       <p:cxnSp>
         <p:nvCxnSpPr>
-          <p:cNvPr id="67" name="Connector 66"/>
+          <p:cNvPr id="55" name="Connector 54"/>
           <p:cNvCxnSpPr/>
           <p:nvPr/>
         </p:nvCxnSpPr>
@@ -5732,7 +5169,7 @@
           <a:prstGeom prst="line">
             <a:avLst/>
           </a:prstGeom>
-          <a:ln w="38100" cap="rnd">
+          <a:ln w="57150" cap="rnd">
             <a:solidFill>
               <a:srgbClr val="EF7D2B"/>
             </a:solidFill>
@@ -5756,14 +5193,14 @@
       </p:cxnSp>
       <p:sp>
         <p:nvSpPr>
-          <p:cNvPr id="68" name="freeform-68"/>
-          <p:cNvSpPr/>
-          <p:nvPr/>
-        </p:nvSpPr>
-        <p:spPr>
-          <a:xfrm>
-            <a:off x="3181350" y="2571750"/>
-            <a:ext cx="66675" cy="76200"/>
+          <p:cNvPr id="56" name="freeform-56"/>
+          <p:cNvSpPr/>
+          <p:nvPr/>
+        </p:nvSpPr>
+        <p:spPr>
+          <a:xfrm>
+            <a:off x="3133725" y="2543175"/>
+            <a:ext cx="133350" cy="133350"/>
           </a:xfrm>
           <a:custGeom>
             <a:avLst/>
@@ -5772,30 +5209,28 @@
             <a:cxnLst/>
             <a:rect l="0" t="0" r="0" b="0"/>
             <a:pathLst>
-              <a:path w="66675" h="76200">
+              <a:path w="133350" h="133350">
                 <a:moveTo>
                   <a:pt x="0" y="0"/>
                 </a:moveTo>
                 <a:lnTo>
-                  <a:pt x="66675" y="38100"/>
+                  <a:pt x="133350" y="66675"/>
                 </a:lnTo>
                 <a:lnTo>
-                  <a:pt x="0" y="76200"/>
+                  <a:pt x="0" y="133350"/>
                 </a:lnTo>
+                <a:close/>
               </a:path>
             </a:pathLst>
           </a:custGeom>
-          <a:noFill/>
-          <a:ln w="19050" cap="rnd">
-            <a:solidFill>
-              <a:srgbClr val="EF7D2B"/>
-            </a:solidFill>
-          </a:ln>
+          <a:solidFill>
+            <a:srgbClr val="EF7D2B"/>
+          </a:solidFill>
         </p:spPr>
       </p:sp>
       <p:cxnSp>
         <p:nvCxnSpPr>
-          <p:cNvPr id="69" name="Connector 68"/>
+          <p:cNvPr id="57" name="Connector 56"/>
           <p:cNvCxnSpPr/>
           <p:nvPr/>
         </p:nvCxnSpPr>
@@ -5807,7 +5242,7 @@
           <a:prstGeom prst="line">
             <a:avLst/>
           </a:prstGeom>
-          <a:ln w="38100" cap="rnd">
+          <a:ln w="57150" cap="rnd">
             <a:solidFill>
               <a:srgbClr val="3567B7"/>
             </a:solidFill>
@@ -5831,14 +5266,14 @@
       </p:cxnSp>
       <p:sp>
         <p:nvSpPr>
-          <p:cNvPr id="70" name="freeform-70"/>
-          <p:cNvSpPr/>
-          <p:nvPr/>
-        </p:nvSpPr>
-        <p:spPr>
-          <a:xfrm>
-            <a:off x="3181350" y="4114800"/>
-            <a:ext cx="66675" cy="76200"/>
+          <p:cNvPr id="58" name="freeform-58"/>
+          <p:cNvSpPr/>
+          <p:nvPr/>
+        </p:nvSpPr>
+        <p:spPr>
+          <a:xfrm>
+            <a:off x="3133725" y="4086225"/>
+            <a:ext cx="133350" cy="133350"/>
           </a:xfrm>
           <a:custGeom>
             <a:avLst/>
@@ -5847,30 +5282,28 @@
             <a:cxnLst/>
             <a:rect l="0" t="0" r="0" b="0"/>
             <a:pathLst>
-              <a:path w="66675" h="76200">
+              <a:path w="133350" h="133350">
                 <a:moveTo>
                   <a:pt x="0" y="0"/>
                 </a:moveTo>
                 <a:lnTo>
-                  <a:pt x="66675" y="38100"/>
+                  <a:pt x="133350" y="66675"/>
                 </a:lnTo>
                 <a:lnTo>
-                  <a:pt x="0" y="76200"/>
+                  <a:pt x="0" y="133350"/>
                 </a:lnTo>
+                <a:close/>
               </a:path>
             </a:pathLst>
           </a:custGeom>
-          <a:noFill/>
-          <a:ln w="19050" cap="rnd">
-            <a:solidFill>
-              <a:srgbClr val="3567B7"/>
-            </a:solidFill>
-          </a:ln>
-        </p:spPr>
-      </p:sp>
-      <p:sp>
-        <p:nvSpPr>
-          <p:cNvPr id="71" name="Rectangle 70"/>
+          <a:solidFill>
+            <a:srgbClr val="3567B7"/>
+          </a:solidFill>
+        </p:spPr>
+      </p:sp>
+      <p:sp>
+        <p:nvSpPr>
+          <p:cNvPr id="59" name="Rectangle 58"/>
           <p:cNvSpPr/>
           <p:nvPr/>
         </p:nvSpPr>
@@ -5916,7 +5349,7 @@
       </p:sp>
       <p:sp>
         <p:nvSpPr>
-          <p:cNvPr id="72" name="TextBox 71"/>
+          <p:cNvPr id="60" name="TextBox 59"/>
           <p:cNvSpPr txBox="1"/>
           <p:nvPr/>
         </p:nvSpPr>
@@ -5952,7 +5385,7 @@
       </p:sp>
       <p:sp>
         <p:nvSpPr>
-          <p:cNvPr id="73" name="Oval 72"/>
+          <p:cNvPr id="61" name="Oval 60"/>
           <p:cNvSpPr/>
           <p:nvPr/>
         </p:nvSpPr>
@@ -5993,7 +5426,7 @@
       </p:sp>
       <p:sp>
         <p:nvSpPr>
-          <p:cNvPr id="74" name="Oval 73"/>
+          <p:cNvPr id="62" name="Oval 61"/>
           <p:cNvSpPr/>
           <p:nvPr/>
         </p:nvSpPr>
@@ -6034,7 +5467,7 @@
       </p:sp>
       <p:sp>
         <p:nvSpPr>
-          <p:cNvPr id="75" name="Oval 74"/>
+          <p:cNvPr id="63" name="Oval 62"/>
           <p:cNvSpPr/>
           <p:nvPr/>
         </p:nvSpPr>
@@ -6075,7 +5508,7 @@
       </p:sp>
       <p:cxnSp>
         <p:nvCxnSpPr>
-          <p:cNvPr id="76" name="Connector 75"/>
+          <p:cNvPr id="64" name="Connector 63"/>
           <p:cNvCxnSpPr/>
           <p:nvPr/>
         </p:nvCxnSpPr>
@@ -6087,7 +5520,7 @@
           <a:prstGeom prst="line">
             <a:avLst/>
           </a:prstGeom>
-          <a:ln w="38100" cap="rnd">
+          <a:ln w="57150" cap="rnd">
             <a:solidFill>
               <a:srgbClr val="EF7D2B"/>
             </a:solidFill>
@@ -6111,14 +5544,14 @@
       </p:cxnSp>
       <p:sp>
         <p:nvSpPr>
-          <p:cNvPr id="77" name="freeform-77"/>
-          <p:cNvSpPr/>
-          <p:nvPr/>
-        </p:nvSpPr>
-        <p:spPr>
-          <a:xfrm>
-            <a:off x="3943350" y="2571750"/>
-            <a:ext cx="66675" cy="76200"/>
+          <p:cNvPr id="65" name="freeform-65"/>
+          <p:cNvSpPr/>
+          <p:nvPr/>
+        </p:nvSpPr>
+        <p:spPr>
+          <a:xfrm>
+            <a:off x="3895725" y="2543175"/>
+            <a:ext cx="133350" cy="133350"/>
           </a:xfrm>
           <a:custGeom>
             <a:avLst/>
@@ -6127,30 +5560,28 @@
             <a:cxnLst/>
             <a:rect l="0" t="0" r="0" b="0"/>
             <a:pathLst>
-              <a:path w="66675" h="76200">
+              <a:path w="133350" h="133350">
                 <a:moveTo>
                   <a:pt x="0" y="0"/>
                 </a:moveTo>
                 <a:lnTo>
-                  <a:pt x="66675" y="38100"/>
+                  <a:pt x="133350" y="66675"/>
                 </a:lnTo>
                 <a:lnTo>
-                  <a:pt x="0" y="76200"/>
+                  <a:pt x="0" y="133350"/>
                 </a:lnTo>
+                <a:close/>
               </a:path>
             </a:pathLst>
           </a:custGeom>
-          <a:noFill/>
-          <a:ln w="19050" cap="rnd">
-            <a:solidFill>
-              <a:srgbClr val="EF7D2B"/>
-            </a:solidFill>
-          </a:ln>
-        </p:spPr>
-      </p:sp>
-      <p:sp>
-        <p:nvSpPr>
-          <p:cNvPr id="78" name="Rectangle 77"/>
+          <a:solidFill>
+            <a:srgbClr val="EF7D2B"/>
+          </a:solidFill>
+        </p:spPr>
+      </p:sp>
+      <p:sp>
+        <p:nvSpPr>
+          <p:cNvPr id="66" name="Rectangle 65"/>
           <p:cNvSpPr/>
           <p:nvPr/>
         </p:nvSpPr>
@@ -6196,7 +5627,7 @@
       </p:sp>
       <p:sp>
         <p:nvSpPr>
-          <p:cNvPr id="79" name="TextBox 78"/>
+          <p:cNvPr id="67" name="TextBox 66"/>
           <p:cNvSpPr txBox="1"/>
           <p:nvPr/>
         </p:nvSpPr>
@@ -6241,7 +5672,7 @@
       </p:sp>
       <p:sp>
         <p:nvSpPr>
-          <p:cNvPr id="80" name="Oval 79"/>
+          <p:cNvPr id="68" name="Oval 67"/>
           <p:cNvSpPr/>
           <p:nvPr/>
         </p:nvSpPr>
@@ -6282,7 +5713,7 @@
       </p:sp>
       <p:sp>
         <p:nvSpPr>
-          <p:cNvPr id="81" name="Oval 80"/>
+          <p:cNvPr id="69" name="Oval 68"/>
           <p:cNvSpPr/>
           <p:nvPr/>
         </p:nvSpPr>
@@ -6323,7 +5754,7 @@
       </p:sp>
       <p:sp>
         <p:nvSpPr>
-          <p:cNvPr id="82" name="Oval 81"/>
+          <p:cNvPr id="70" name="Oval 69"/>
           <p:cNvSpPr/>
           <p:nvPr/>
         </p:nvSpPr>
@@ -6364,7 +5795,7 @@
       </p:sp>
       <p:cxnSp>
         <p:nvCxnSpPr>
-          <p:cNvPr id="83" name="Connector 82"/>
+          <p:cNvPr id="71" name="Connector 70"/>
           <p:cNvCxnSpPr/>
           <p:nvPr/>
         </p:nvCxnSpPr>
@@ -6376,7 +5807,7 @@
           <a:prstGeom prst="line">
             <a:avLst/>
           </a:prstGeom>
-          <a:ln w="38100" cap="rnd">
+          <a:ln w="57150" cap="rnd">
             <a:solidFill>
               <a:srgbClr val="3567B7"/>
             </a:solidFill>
@@ -6400,14 +5831,14 @@
       </p:cxnSp>
       <p:sp>
         <p:nvSpPr>
-          <p:cNvPr id="84" name="freeform-84"/>
-          <p:cNvSpPr/>
-          <p:nvPr/>
-        </p:nvSpPr>
-        <p:spPr>
-          <a:xfrm>
-            <a:off x="3943350" y="4114800"/>
-            <a:ext cx="66675" cy="76200"/>
+          <p:cNvPr id="72" name="freeform-72"/>
+          <p:cNvSpPr/>
+          <p:nvPr/>
+        </p:nvSpPr>
+        <p:spPr>
+          <a:xfrm>
+            <a:off x="3895725" y="4086225"/>
+            <a:ext cx="133350" cy="133350"/>
           </a:xfrm>
           <a:custGeom>
             <a:avLst/>
@@ -6416,30 +5847,28 @@
             <a:cxnLst/>
             <a:rect l="0" t="0" r="0" b="0"/>
             <a:pathLst>
-              <a:path w="66675" h="76200">
+              <a:path w="133350" h="133350">
                 <a:moveTo>
                   <a:pt x="0" y="0"/>
                 </a:moveTo>
                 <a:lnTo>
-                  <a:pt x="66675" y="38100"/>
+                  <a:pt x="133350" y="66675"/>
                 </a:lnTo>
                 <a:lnTo>
-                  <a:pt x="0" y="76200"/>
+                  <a:pt x="0" y="133350"/>
                 </a:lnTo>
+                <a:close/>
               </a:path>
             </a:pathLst>
           </a:custGeom>
-          <a:noFill/>
-          <a:ln w="19050" cap="rnd">
-            <a:solidFill>
-              <a:srgbClr val="3567B7"/>
-            </a:solidFill>
-          </a:ln>
-        </p:spPr>
-      </p:sp>
-      <p:sp>
-        <p:nvSpPr>
-          <p:cNvPr id="85" name="Rounded Rectangle 84"/>
+          <a:solidFill>
+            <a:srgbClr val="3567B7"/>
+          </a:solidFill>
+        </p:spPr>
+      </p:sp>
+      <p:sp>
+        <p:nvSpPr>
+          <p:cNvPr id="73" name="Rounded Rectangle 72"/>
           <p:cNvSpPr/>
           <p:nvPr/>
         </p:nvSpPr>
@@ -6487,7 +5916,7 @@
       </p:sp>
       <p:sp>
         <p:nvSpPr>
-          <p:cNvPr id="86" name="Rectangle 85"/>
+          <p:cNvPr id="74" name="Rectangle 73"/>
           <p:cNvSpPr/>
           <p:nvPr/>
         </p:nvSpPr>
@@ -6528,7 +5957,7 @@
       </p:sp>
       <p:sp>
         <p:nvSpPr>
-          <p:cNvPr id="87" name="TextBox 86"/>
+          <p:cNvPr id="75" name="TextBox 74"/>
           <p:cNvSpPr txBox="1"/>
           <p:nvPr/>
         </p:nvSpPr>
@@ -6564,7 +5993,7 @@
       </p:sp>
       <p:sp>
         <p:nvSpPr>
-          <p:cNvPr id="88" name="Rectangle 87"/>
+          <p:cNvPr id="76" name="Rectangle 75"/>
           <p:cNvSpPr/>
           <p:nvPr/>
         </p:nvSpPr>
@@ -6605,7 +6034,7 @@
       </p:sp>
       <p:sp>
         <p:nvSpPr>
-          <p:cNvPr id="89" name="TextBox 88"/>
+          <p:cNvPr id="77" name="TextBox 76"/>
           <p:cNvSpPr txBox="1"/>
           <p:nvPr/>
         </p:nvSpPr>
@@ -6641,7 +6070,7 @@
       </p:sp>
       <p:sp>
         <p:nvSpPr>
-          <p:cNvPr id="90" name="Rectangle 89"/>
+          <p:cNvPr id="78" name="Rectangle 77"/>
           <p:cNvSpPr/>
           <p:nvPr/>
         </p:nvSpPr>
@@ -6687,7 +6116,7 @@
       </p:sp>
       <p:sp>
         <p:nvSpPr>
-          <p:cNvPr id="91" name="Rounded Rectangle 90"/>
+          <p:cNvPr id="79" name="Rounded Rectangle 78"/>
           <p:cNvSpPr/>
           <p:nvPr/>
         </p:nvSpPr>
@@ -6730,7 +6159,7 @@
       </p:sp>
       <p:sp>
         <p:nvSpPr>
-          <p:cNvPr id="92" name="Rounded Rectangle 91"/>
+          <p:cNvPr id="80" name="Rounded Rectangle 79"/>
           <p:cNvSpPr/>
           <p:nvPr/>
         </p:nvSpPr>
@@ -6773,7 +6202,7 @@
       </p:sp>
       <p:sp>
         <p:nvSpPr>
-          <p:cNvPr id="93" name="TextBox 92"/>
+          <p:cNvPr id="81" name="TextBox 80"/>
           <p:cNvSpPr txBox="1"/>
           <p:nvPr/>
         </p:nvSpPr>
@@ -6809,7 +6238,7 @@
       </p:sp>
       <p:sp>
         <p:nvSpPr>
-          <p:cNvPr id="94" name="TextBox 93"/>
+          <p:cNvPr id="82" name="TextBox 81"/>
           <p:cNvSpPr txBox="1"/>
           <p:nvPr/>
         </p:nvSpPr>
@@ -6845,7 +6274,7 @@
       </p:sp>
       <p:sp>
         <p:nvSpPr>
-          <p:cNvPr id="95" name="TextBox 94"/>
+          <p:cNvPr id="83" name="TextBox 82"/>
           <p:cNvSpPr txBox="1"/>
           <p:nvPr/>
         </p:nvSpPr>
@@ -6881,7 +6310,7 @@
       </p:sp>
       <p:sp>
         <p:nvSpPr>
-          <p:cNvPr id="96" name="Rectangle 95"/>
+          <p:cNvPr id="84" name="Rectangle 83"/>
           <p:cNvSpPr/>
           <p:nvPr/>
         </p:nvSpPr>
@@ -6927,7 +6356,7 @@
       </p:sp>
       <p:sp>
         <p:nvSpPr>
-          <p:cNvPr id="97" name="Rounded Rectangle 96"/>
+          <p:cNvPr id="85" name="Rounded Rectangle 84"/>
           <p:cNvSpPr/>
           <p:nvPr/>
         </p:nvSpPr>
@@ -6970,7 +6399,7 @@
       </p:sp>
       <p:sp>
         <p:nvSpPr>
-          <p:cNvPr id="98" name="Rounded Rectangle 97"/>
+          <p:cNvPr id="86" name="Rounded Rectangle 85"/>
           <p:cNvSpPr/>
           <p:nvPr/>
         </p:nvSpPr>
@@ -7013,7 +6442,7 @@
       </p:sp>
       <p:sp>
         <p:nvSpPr>
-          <p:cNvPr id="99" name="TextBox 98"/>
+          <p:cNvPr id="87" name="TextBox 86"/>
           <p:cNvSpPr txBox="1"/>
           <p:nvPr/>
         </p:nvSpPr>
@@ -7049,7 +6478,7 @@
       </p:sp>
       <p:sp>
         <p:nvSpPr>
-          <p:cNvPr id="100" name="TextBox 99"/>
+          <p:cNvPr id="88" name="TextBox 87"/>
           <p:cNvSpPr txBox="1"/>
           <p:nvPr/>
         </p:nvSpPr>
@@ -7085,7 +6514,7 @@
       </p:sp>
       <p:sp>
         <p:nvSpPr>
-          <p:cNvPr id="101" name="TextBox 100"/>
+          <p:cNvPr id="89" name="TextBox 88"/>
           <p:cNvSpPr txBox="1"/>
           <p:nvPr/>
         </p:nvSpPr>
@@ -7121,7 +6550,7 @@
       </p:sp>
       <p:sp>
         <p:nvSpPr>
-          <p:cNvPr id="102" name="Rectangle 101"/>
+          <p:cNvPr id="90" name="Rectangle 89"/>
           <p:cNvSpPr/>
           <p:nvPr/>
         </p:nvSpPr>
@@ -7167,7 +6596,7 @@
       </p:sp>
       <p:sp>
         <p:nvSpPr>
-          <p:cNvPr id="103" name="Rounded Rectangle 102"/>
+          <p:cNvPr id="91" name="Rounded Rectangle 90"/>
           <p:cNvSpPr/>
           <p:nvPr/>
         </p:nvSpPr>
@@ -7210,7 +6639,7 @@
       </p:sp>
       <p:sp>
         <p:nvSpPr>
-          <p:cNvPr id="104" name="Rounded Rectangle 103"/>
+          <p:cNvPr id="92" name="Rounded Rectangle 91"/>
           <p:cNvSpPr/>
           <p:nvPr/>
         </p:nvSpPr>
@@ -7253,7 +6682,7 @@
       </p:sp>
       <p:sp>
         <p:nvSpPr>
-          <p:cNvPr id="105" name="TextBox 104"/>
+          <p:cNvPr id="93" name="TextBox 92"/>
           <p:cNvSpPr txBox="1"/>
           <p:nvPr/>
         </p:nvSpPr>
@@ -7289,7 +6718,7 @@
       </p:sp>
       <p:sp>
         <p:nvSpPr>
-          <p:cNvPr id="106" name="TextBox 105"/>
+          <p:cNvPr id="94" name="TextBox 93"/>
           <p:cNvSpPr txBox="1"/>
           <p:nvPr/>
         </p:nvSpPr>
@@ -7325,7 +6754,7 @@
       </p:sp>
       <p:sp>
         <p:nvSpPr>
-          <p:cNvPr id="107" name="TextBox 106"/>
+          <p:cNvPr id="95" name="TextBox 94"/>
           <p:cNvSpPr txBox="1"/>
           <p:nvPr/>
         </p:nvSpPr>
@@ -7361,7 +6790,7 @@
       </p:sp>
       <p:sp>
         <p:nvSpPr>
-          <p:cNvPr id="108" name="Rectangle 107"/>
+          <p:cNvPr id="96" name="Rectangle 95"/>
           <p:cNvSpPr/>
           <p:nvPr/>
         </p:nvSpPr>
@@ -7407,7 +6836,7 @@
       </p:sp>
       <p:sp>
         <p:nvSpPr>
-          <p:cNvPr id="109" name="Rounded Rectangle 108"/>
+          <p:cNvPr id="97" name="Rounded Rectangle 96"/>
           <p:cNvSpPr/>
           <p:nvPr/>
         </p:nvSpPr>
@@ -7450,7 +6879,7 @@
       </p:sp>
       <p:sp>
         <p:nvSpPr>
-          <p:cNvPr id="110" name="Rounded Rectangle 109"/>
+          <p:cNvPr id="98" name="Rounded Rectangle 97"/>
           <p:cNvSpPr/>
           <p:nvPr/>
         </p:nvSpPr>
@@ -7493,7 +6922,7 @@
       </p:sp>
       <p:sp>
         <p:nvSpPr>
-          <p:cNvPr id="111" name="TextBox 110"/>
+          <p:cNvPr id="99" name="TextBox 98"/>
           <p:cNvSpPr txBox="1"/>
           <p:nvPr/>
         </p:nvSpPr>
@@ -7529,7 +6958,7 @@
       </p:sp>
       <p:sp>
         <p:nvSpPr>
-          <p:cNvPr id="112" name="TextBox 111"/>
+          <p:cNvPr id="100" name="TextBox 99"/>
           <p:cNvSpPr txBox="1"/>
           <p:nvPr/>
         </p:nvSpPr>
@@ -7565,7 +6994,7 @@
       </p:sp>
       <p:sp>
         <p:nvSpPr>
-          <p:cNvPr id="113" name="TextBox 112"/>
+          <p:cNvPr id="101" name="TextBox 100"/>
           <p:cNvSpPr txBox="1"/>
           <p:nvPr/>
         </p:nvSpPr>
@@ -7601,7 +7030,7 @@
       </p:sp>
       <p:sp>
         <p:nvSpPr>
-          <p:cNvPr id="114" name="TextBox 113"/>
+          <p:cNvPr id="102" name="TextBox 101"/>
           <p:cNvSpPr txBox="1"/>
           <p:nvPr/>
         </p:nvSpPr>
@@ -7637,7 +7066,7 @@
       </p:sp>
       <p:sp>
         <p:nvSpPr>
-          <p:cNvPr id="115" name="freeform-115"/>
+          <p:cNvPr id="103" name="freeform-103"/>
           <p:cNvSpPr/>
           <p:nvPr/>
         </p:nvSpPr>
@@ -7701,7 +7130,7 @@
       </p:sp>
       <p:sp>
         <p:nvSpPr>
-          <p:cNvPr id="116" name="freeform-116"/>
+          <p:cNvPr id="104" name="freeform-104"/>
           <p:cNvSpPr/>
           <p:nvPr/>
         </p:nvSpPr>
@@ -7760,14 +7189,14 @@
       </p:sp>
       <p:sp>
         <p:nvSpPr>
-          <p:cNvPr id="117" name="freeform-117"/>
-          <p:cNvSpPr/>
-          <p:nvPr/>
-        </p:nvSpPr>
-        <p:spPr>
-          <a:xfrm>
-            <a:off x="5619750" y="2962275"/>
-            <a:ext cx="323850" cy="323850"/>
+          <p:cNvPr id="105" name="freeform-105"/>
+          <p:cNvSpPr/>
+          <p:nvPr/>
+        </p:nvSpPr>
+        <p:spPr>
+          <a:xfrm>
+            <a:off x="5772150" y="3009900"/>
+            <a:ext cx="152400" cy="209550"/>
           </a:xfrm>
           <a:custGeom>
             <a:avLst/>
@@ -7776,12 +7205,12 @@
             <a:cxnLst/>
             <a:rect l="0" t="0" r="0" b="0"/>
             <a:pathLst>
-              <a:path w="323850" h="323850">
+              <a:path w="152400" h="209550">
                 <a:moveTo>
                   <a:pt x="0" y="0"/>
                 </a:moveTo>
                 <a:lnTo>
-                  <a:pt x="323850" y="323850"/>
+                  <a:pt x="152400" y="209550"/>
                 </a:lnTo>
               </a:path>
             </a:pathLst>
@@ -7796,14 +7225,14 @@
       </p:sp>
       <p:sp>
         <p:nvSpPr>
-          <p:cNvPr id="118" name="freeform-118"/>
-          <p:cNvSpPr/>
-          <p:nvPr/>
-        </p:nvSpPr>
-        <p:spPr>
-          <a:xfrm>
-            <a:off x="5882983" y="3225508"/>
-            <a:ext cx="60617" cy="60617"/>
+          <p:cNvPr id="106" name="freeform-106"/>
+          <p:cNvSpPr/>
+          <p:nvPr/>
+        </p:nvSpPr>
+        <p:spPr>
+          <a:xfrm>
+            <a:off x="5847868" y="3136465"/>
+            <a:ext cx="85085" cy="94539"/>
           </a:xfrm>
           <a:custGeom>
             <a:avLst/>
@@ -7812,37 +7241,35 @@
             <a:cxnLst/>
             <a:rect l="0" t="0" r="0" b="0"/>
             <a:pathLst>
-              <a:path w="60617" h="60617">
+              <a:path w="85085" h="94539">
                 <a:moveTo>
-                  <a:pt x="40411" y="0"/>
+                  <a:pt x="69329" y="0"/>
                 </a:moveTo>
                 <a:lnTo>
-                  <a:pt x="60617" y="60617"/>
+                  <a:pt x="85085" y="94539"/>
                 </a:lnTo>
                 <a:lnTo>
-                  <a:pt x="0" y="40411"/>
+                  <a:pt x="0" y="50421"/>
                 </a:lnTo>
+                <a:close/>
               </a:path>
             </a:pathLst>
           </a:custGeom>
-          <a:noFill/>
-          <a:ln w="13335" cap="rnd">
-            <a:solidFill>
-              <a:srgbClr val="111111"/>
-            </a:solidFill>
-          </a:ln>
-        </p:spPr>
-      </p:sp>
-      <p:sp>
-        <p:nvSpPr>
-          <p:cNvPr id="119" name="freeform-119"/>
-          <p:cNvSpPr/>
-          <p:nvPr/>
-        </p:nvSpPr>
-        <p:spPr>
-          <a:xfrm>
-            <a:off x="6515100" y="3181350"/>
-            <a:ext cx="171450" cy="133350"/>
+          <a:solidFill>
+            <a:srgbClr val="111111"/>
+          </a:solidFill>
+        </p:spPr>
+      </p:sp>
+      <p:sp>
+        <p:nvSpPr>
+          <p:cNvPr id="107" name="freeform-107"/>
+          <p:cNvSpPr/>
+          <p:nvPr/>
+        </p:nvSpPr>
+        <p:spPr>
+          <a:xfrm>
+            <a:off x="6515100" y="3028950"/>
+            <a:ext cx="152400" cy="171450"/>
           </a:xfrm>
           <a:custGeom>
             <a:avLst/>
@@ -7851,12 +7278,12 @@
             <a:cxnLst/>
             <a:rect l="0" t="0" r="0" b="0"/>
             <a:pathLst>
-              <a:path w="171450" h="133350">
+              <a:path w="152400" h="171450">
                 <a:moveTo>
                   <a:pt x="0" y="0"/>
                 </a:moveTo>
                 <a:lnTo>
-                  <a:pt x="171450" y="133350"/>
+                  <a:pt x="152400" y="171450"/>
                 </a:lnTo>
               </a:path>
             </a:pathLst>
@@ -7871,14 +7298,14 @@
       </p:sp>
       <p:sp>
         <p:nvSpPr>
-          <p:cNvPr id="120" name="freeform-120"/>
-          <p:cNvSpPr/>
-          <p:nvPr/>
-        </p:nvSpPr>
-        <p:spPr>
-          <a:xfrm>
-            <a:off x="6623895" y="3257058"/>
-            <a:ext cx="62655" cy="57642"/>
+          <p:cNvPr id="108" name="freeform-108"/>
+          <p:cNvSpPr/>
+          <p:nvPr/>
+        </p:nvSpPr>
+        <p:spPr>
+          <a:xfrm>
+            <a:off x="6588004" y="3118531"/>
+            <a:ext cx="88988" cy="92548"/>
           </a:xfrm>
           <a:custGeom>
             <a:avLst/>
@@ -7887,37 +7314,35 @@
             <a:cxnLst/>
             <a:rect l="0" t="0" r="0" b="0"/>
             <a:pathLst>
-              <a:path w="62655" h="57642">
+              <a:path w="88988" h="92548">
                 <a:moveTo>
-                  <a:pt x="35087" y="0"/>
+                  <a:pt x="64072" y="0"/>
                 </a:moveTo>
                 <a:lnTo>
-                  <a:pt x="62655" y="57642"/>
+                  <a:pt x="88988" y="92548"/>
                 </a:lnTo>
                 <a:lnTo>
-                  <a:pt x="0" y="45111"/>
+                  <a:pt x="0" y="56953"/>
                 </a:lnTo>
+                <a:close/>
               </a:path>
             </a:pathLst>
           </a:custGeom>
-          <a:noFill/>
-          <a:ln w="13335" cap="rnd">
-            <a:solidFill>
-              <a:srgbClr val="111111"/>
-            </a:solidFill>
-          </a:ln>
-        </p:spPr>
-      </p:sp>
-      <p:sp>
-        <p:nvSpPr>
-          <p:cNvPr id="121" name="freeform-121"/>
-          <p:cNvSpPr/>
-          <p:nvPr/>
-        </p:nvSpPr>
-        <p:spPr>
-          <a:xfrm>
-            <a:off x="7496175" y="3905250"/>
-            <a:ext cx="419100" cy="9525"/>
+          <a:solidFill>
+            <a:srgbClr val="111111"/>
+          </a:solidFill>
+        </p:spPr>
+      </p:sp>
+      <p:sp>
+        <p:nvSpPr>
+          <p:cNvPr id="109" name="freeform-109"/>
+          <p:cNvSpPr/>
+          <p:nvPr/>
+        </p:nvSpPr>
+        <p:spPr>
+          <a:xfrm>
+            <a:off x="7258050" y="3886200"/>
+            <a:ext cx="314325" cy="28575"/>
           </a:xfrm>
           <a:custGeom>
             <a:avLst/>
@@ -7926,12 +7351,12 @@
             <a:cxnLst/>
             <a:rect l="0" t="0" r="0" b="0"/>
             <a:pathLst>
-              <a:path w="419100" h="9525">
+              <a:path w="314325" h="28575">
                 <a:moveTo>
                   <a:pt x="0" y="0"/>
                 </a:moveTo>
                 <a:lnTo>
-                  <a:pt x="419100" y="9525"/>
+                  <a:pt x="314325" y="28575"/>
                 </a:lnTo>
               </a:path>
             </a:pathLst>
@@ -7946,14 +7371,14 @@
       </p:sp>
       <p:sp>
         <p:nvSpPr>
-          <p:cNvPr id="122" name="freeform-122"/>
-          <p:cNvSpPr/>
-          <p:nvPr/>
-        </p:nvSpPr>
-        <p:spPr>
-          <a:xfrm>
-            <a:off x="7857490" y="3884909"/>
-            <a:ext cx="57785" cy="57135"/>
+          <p:cNvPr id="110" name="freeform-110"/>
+          <p:cNvSpPr/>
+          <p:nvPr/>
+        </p:nvSpPr>
+        <p:spPr>
+          <a:xfrm>
+            <a:off x="7497350" y="3865621"/>
+            <a:ext cx="89254" cy="85373"/>
           </a:xfrm>
           <a:custGeom>
             <a:avLst/>
@@ -7962,30 +7387,28 @@
             <a:cxnLst/>
             <a:rect l="0" t="0" r="0" b="0"/>
             <a:pathLst>
-              <a:path w="57785" h="57135">
+              <a:path w="89254" h="85373">
                 <a:moveTo>
-                  <a:pt x="1299" y="0"/>
+                  <a:pt x="7761" y="0"/>
                 </a:moveTo>
                 <a:lnTo>
-                  <a:pt x="57785" y="29866"/>
+                  <a:pt x="89254" y="50448"/>
                 </a:lnTo>
                 <a:lnTo>
-                  <a:pt x="0" y="57135"/>
+                  <a:pt x="0" y="85373"/>
                 </a:lnTo>
+                <a:close/>
               </a:path>
             </a:pathLst>
           </a:custGeom>
-          <a:noFill/>
-          <a:ln w="13335" cap="rnd">
-            <a:solidFill>
-              <a:srgbClr val="111111"/>
-            </a:solidFill>
-          </a:ln>
-        </p:spPr>
-      </p:sp>
-      <p:sp>
-        <p:nvSpPr>
-          <p:cNvPr id="123" name="TextBox 122"/>
+          <a:solidFill>
+            <a:srgbClr val="111111"/>
+          </a:solidFill>
+        </p:spPr>
+      </p:sp>
+      <p:sp>
+        <p:nvSpPr>
+          <p:cNvPr id="111" name="TextBox 110"/>
           <p:cNvSpPr txBox="1"/>
           <p:nvPr/>
         </p:nvSpPr>
@@ -8030,7 +7453,7 @@
       </p:sp>
       <p:sp>
         <p:nvSpPr>
-          <p:cNvPr id="124" name="Rectangle 123"/>
+          <p:cNvPr id="112" name="Rectangle 111"/>
           <p:cNvSpPr/>
           <p:nvPr/>
         </p:nvSpPr>
@@ -8076,7 +7499,7 @@
       </p:sp>
       <p:sp>
         <p:nvSpPr>
-          <p:cNvPr id="125" name="Oval 124"/>
+          <p:cNvPr id="113" name="Oval 112"/>
           <p:cNvSpPr/>
           <p:nvPr/>
         </p:nvSpPr>
@@ -8131,7 +7554,7 @@
       </p:sp>
       <p:sp>
         <p:nvSpPr>
-          <p:cNvPr id="126" name="Oval 125"/>
+          <p:cNvPr id="114" name="Oval 113"/>
           <p:cNvSpPr/>
           <p:nvPr/>
         </p:nvSpPr>
@@ -8186,7 +7609,7 @@
       </p:sp>
       <p:sp>
         <p:nvSpPr>
-          <p:cNvPr id="127" name="Oval 126"/>
+          <p:cNvPr id="115" name="Oval 114"/>
           <p:cNvSpPr/>
           <p:nvPr/>
         </p:nvSpPr>
@@ -8241,7 +7664,7 @@
       </p:sp>
       <p:sp>
         <p:nvSpPr>
-          <p:cNvPr id="128" name="Rectangle 127"/>
+          <p:cNvPr id="116" name="Rectangle 115"/>
           <p:cNvSpPr/>
           <p:nvPr/>
         </p:nvSpPr>
@@ -8287,7 +7710,7 @@
       </p:sp>
       <p:sp>
         <p:nvSpPr>
-          <p:cNvPr id="129" name="Oval 128"/>
+          <p:cNvPr id="117" name="Oval 116"/>
           <p:cNvSpPr/>
           <p:nvPr/>
         </p:nvSpPr>
@@ -8342,7 +7765,7 @@
       </p:sp>
       <p:sp>
         <p:nvSpPr>
-          <p:cNvPr id="130" name="Oval 129"/>
+          <p:cNvPr id="118" name="Oval 117"/>
           <p:cNvSpPr/>
           <p:nvPr/>
         </p:nvSpPr>
@@ -8397,7 +7820,7 @@
       </p:sp>
       <p:sp>
         <p:nvSpPr>
-          <p:cNvPr id="131" name="Oval 130"/>
+          <p:cNvPr id="119" name="Oval 118"/>
           <p:cNvSpPr/>
           <p:nvPr/>
         </p:nvSpPr>
@@ -8452,7 +7875,7 @@
       </p:sp>
       <p:sp>
         <p:nvSpPr>
-          <p:cNvPr id="132" name="freeform-132"/>
+          <p:cNvPr id="120" name="freeform-120"/>
           <p:cNvSpPr/>
           <p:nvPr/>
         </p:nvSpPr>
@@ -8488,14 +7911,14 @@
       </p:sp>
       <p:sp>
         <p:nvSpPr>
-          <p:cNvPr id="133" name="freeform-133"/>
-          <p:cNvSpPr/>
-          <p:nvPr/>
-        </p:nvSpPr>
-        <p:spPr>
-          <a:xfrm>
-            <a:off x="9518689" y="2916566"/>
-            <a:ext cx="63461" cy="55234"/>
+          <p:cNvPr id="121" name="freeform-121"/>
+          <p:cNvSpPr/>
+          <p:nvPr/>
+        </p:nvSpPr>
+        <p:spPr>
+          <a:xfrm>
+            <a:off x="9498907" y="2896783"/>
+            <a:ext cx="95191" cy="82851"/>
           </a:xfrm>
           <a:custGeom>
             <a:avLst/>
@@ -8504,30 +7927,28 @@
             <a:cxnLst/>
             <a:rect l="0" t="0" r="0" b="0"/>
             <a:pathLst>
-              <a:path w="63461" h="55234">
+              <a:path w="95191" h="82851">
                 <a:moveTo>
-                  <a:pt x="31339" y="0"/>
+                  <a:pt x="47008" y="0"/>
                 </a:moveTo>
                 <a:lnTo>
-                  <a:pt x="63461" y="55234"/>
+                  <a:pt x="95191" y="82851"/>
                 </a:lnTo>
                 <a:lnTo>
-                  <a:pt x="0" y="47791"/>
+                  <a:pt x="0" y="71687"/>
                 </a:lnTo>
+                <a:close/>
               </a:path>
             </a:pathLst>
           </a:custGeom>
-          <a:noFill/>
-          <a:ln w="14288" cap="rnd">
-            <a:solidFill>
-              <a:srgbClr val="8D6A00"/>
-            </a:solidFill>
-          </a:ln>
-        </p:spPr>
-      </p:sp>
-      <p:sp>
-        <p:nvSpPr>
-          <p:cNvPr id="134" name="freeform-134"/>
+          <a:solidFill>
+            <a:srgbClr val="8D6A00"/>
+          </a:solidFill>
+        </p:spPr>
+      </p:sp>
+      <p:sp>
+        <p:nvSpPr>
+          <p:cNvPr id="122" name="freeform-122"/>
           <p:cNvSpPr/>
           <p:nvPr/>
         </p:nvSpPr>
@@ -8563,14 +7984,14 @@
       </p:sp>
       <p:sp>
         <p:nvSpPr>
-          <p:cNvPr id="135" name="freeform-135"/>
-          <p:cNvSpPr/>
-          <p:nvPr/>
-        </p:nvSpPr>
-        <p:spPr>
-          <a:xfrm>
-            <a:off x="9517947" y="3076575"/>
-            <a:ext cx="54678" cy="63579"/>
+          <p:cNvPr id="123" name="freeform-123"/>
+          <p:cNvSpPr/>
+          <p:nvPr/>
+        </p:nvSpPr>
+        <p:spPr>
+          <a:xfrm>
+            <a:off x="9498238" y="3064495"/>
+            <a:ext cx="82016" cy="95368"/>
           </a:xfrm>
           <a:custGeom>
             <a:avLst/>
@@ -8579,30 +8000,28 @@
             <a:cxnLst/>
             <a:rect l="0" t="0" r="0" b="0"/>
             <a:pathLst>
-              <a:path w="54678" h="63579">
+              <a:path w="82016" h="95368">
                 <a:moveTo>
-                  <a:pt x="0" y="33061"/>
+                  <a:pt x="0" y="49591"/>
                 </a:moveTo>
                 <a:lnTo>
-                  <a:pt x="54678" y="0"/>
+                  <a:pt x="82016" y="0"/>
                 </a:lnTo>
                 <a:lnTo>
-                  <a:pt x="48320" y="63579"/>
+                  <a:pt x="72480" y="95368"/>
                 </a:lnTo>
+                <a:close/>
               </a:path>
             </a:pathLst>
           </a:custGeom>
-          <a:noFill/>
-          <a:ln w="14288" cap="rnd">
-            <a:solidFill>
-              <a:srgbClr val="8D6A00"/>
-            </a:solidFill>
-          </a:ln>
-        </p:spPr>
-      </p:sp>
-      <p:sp>
-        <p:nvSpPr>
-          <p:cNvPr id="136" name="Rounded Rectangle 135"/>
+          <a:solidFill>
+            <a:srgbClr val="8D6A00"/>
+          </a:solidFill>
+        </p:spPr>
+      </p:sp>
+      <p:sp>
+        <p:nvSpPr>
+          <p:cNvPr id="124" name="Rounded Rectangle 123"/>
           <p:cNvSpPr/>
           <p:nvPr/>
         </p:nvSpPr>
@@ -8650,7 +8069,7 @@
       </p:sp>
       <p:sp>
         <p:nvSpPr>
-          <p:cNvPr id="137" name="TextBox 136"/>
+          <p:cNvPr id="125" name="TextBox 124"/>
           <p:cNvSpPr txBox="1"/>
           <p:nvPr/>
         </p:nvSpPr>
@@ -8686,7 +8105,7 @@
       </p:sp>
       <p:sp>
         <p:nvSpPr>
-          <p:cNvPr id="138" name="Rounded Rectangle 137"/>
+          <p:cNvPr id="126" name="Rounded Rectangle 125"/>
           <p:cNvSpPr/>
           <p:nvPr/>
         </p:nvSpPr>
@@ -8729,7 +8148,7 @@
       </p:sp>
       <p:sp>
         <p:nvSpPr>
-          <p:cNvPr id="139" name="TextBox 138"/>
+          <p:cNvPr id="127" name="TextBox 126"/>
           <p:cNvSpPr txBox="1"/>
           <p:nvPr/>
         </p:nvSpPr>
@@ -8783,7 +8202,7 @@
       </p:sp>
       <p:sp>
         <p:nvSpPr>
-          <p:cNvPr id="140" name="Rounded Rectangle 139"/>
+          <p:cNvPr id="128" name="Rounded Rectangle 127"/>
           <p:cNvSpPr/>
           <p:nvPr/>
         </p:nvSpPr>
@@ -8826,7 +8245,7 @@
       </p:sp>
       <p:sp>
         <p:nvSpPr>
-          <p:cNvPr id="141" name="TextBox 140"/>
+          <p:cNvPr id="129" name="TextBox 128"/>
           <p:cNvSpPr txBox="1"/>
           <p:nvPr/>
         </p:nvSpPr>
@@ -8880,7 +8299,7 @@
       </p:sp>
       <p:sp>
         <p:nvSpPr>
-          <p:cNvPr id="142" name="Rounded Rectangle 141"/>
+          <p:cNvPr id="130" name="Rounded Rectangle 129"/>
           <p:cNvSpPr/>
           <p:nvPr/>
         </p:nvSpPr>
@@ -8923,7 +8342,7 @@
       </p:sp>
       <p:sp>
         <p:nvSpPr>
-          <p:cNvPr id="143" name="TextBox 142"/>
+          <p:cNvPr id="131" name="TextBox 130"/>
           <p:cNvSpPr txBox="1"/>
           <p:nvPr/>
         </p:nvSpPr>
@@ -8977,7 +8396,7 @@
       </p:sp>
       <p:sp>
         <p:nvSpPr>
-          <p:cNvPr id="144" name="Rounded Rectangle 143"/>
+          <p:cNvPr id="132" name="Rounded Rectangle 131"/>
           <p:cNvSpPr/>
           <p:nvPr/>
         </p:nvSpPr>
@@ -9020,7 +8439,7 @@
       </p:sp>
       <p:sp>
         <p:nvSpPr>
-          <p:cNvPr id="145" name="TextBox 144"/>
+          <p:cNvPr id="133" name="TextBox 132"/>
           <p:cNvSpPr txBox="1"/>
           <p:nvPr/>
         </p:nvSpPr>
@@ -9074,7 +8493,7 @@
       </p:sp>
       <p:cxnSp>
         <p:nvCxnSpPr>
-          <p:cNvPr id="146" name="Connector 145"/>
+          <p:cNvPr id="134" name="Connector 133"/>
           <p:cNvCxnSpPr/>
           <p:nvPr/>
         </p:nvCxnSpPr>
@@ -9110,14 +8529,14 @@
       </p:cxnSp>
       <p:sp>
         <p:nvSpPr>
-          <p:cNvPr id="147" name="freeform-147"/>
-          <p:cNvSpPr/>
-          <p:nvPr/>
-        </p:nvSpPr>
-        <p:spPr>
-          <a:xfrm>
-            <a:off x="10458450" y="1704975"/>
-            <a:ext cx="57150" cy="57150"/>
+          <p:cNvPr id="135" name="freeform-135"/>
+          <p:cNvSpPr/>
+          <p:nvPr/>
+        </p:nvSpPr>
+        <p:spPr>
+          <a:xfrm>
+            <a:off x="10444162" y="1690688"/>
+            <a:ext cx="85725" cy="85725"/>
           </a:xfrm>
           <a:custGeom>
             <a:avLst/>
@@ -9126,30 +8545,28 @@
             <a:cxnLst/>
             <a:rect l="0" t="0" r="0" b="0"/>
             <a:pathLst>
-              <a:path w="57150" h="57150">
+              <a:path w="85725" h="85725">
                 <a:moveTo>
                   <a:pt x="0" y="0"/>
                 </a:moveTo>
                 <a:lnTo>
-                  <a:pt x="57150" y="28575"/>
+                  <a:pt x="85725" y="42862"/>
                 </a:lnTo>
                 <a:lnTo>
-                  <a:pt x="0" y="57150"/>
+                  <a:pt x="0" y="85725"/>
                 </a:lnTo>
+                <a:close/>
               </a:path>
             </a:pathLst>
           </a:custGeom>
-          <a:noFill/>
-          <a:ln w="14288" cap="rnd">
-            <a:solidFill>
-              <a:srgbClr val="8D6A00"/>
-            </a:solidFill>
-          </a:ln>
+          <a:solidFill>
+            <a:srgbClr val="8D6A00"/>
+          </a:solidFill>
         </p:spPr>
       </p:sp>
       <p:cxnSp>
         <p:nvCxnSpPr>
-          <p:cNvPr id="148" name="Connector 147"/>
+          <p:cNvPr id="136" name="Connector 135"/>
           <p:cNvCxnSpPr/>
           <p:nvPr/>
         </p:nvCxnSpPr>
@@ -9185,14 +8602,14 @@
       </p:cxnSp>
       <p:sp>
         <p:nvSpPr>
-          <p:cNvPr id="149" name="freeform-149"/>
-          <p:cNvSpPr/>
-          <p:nvPr/>
-        </p:nvSpPr>
-        <p:spPr>
-          <a:xfrm>
-            <a:off x="11391900" y="1704975"/>
-            <a:ext cx="57150" cy="57150"/>
+          <p:cNvPr id="137" name="freeform-137"/>
+          <p:cNvSpPr/>
+          <p:nvPr/>
+        </p:nvSpPr>
+        <p:spPr>
+          <a:xfrm>
+            <a:off x="11377612" y="1690688"/>
+            <a:ext cx="85725" cy="85725"/>
           </a:xfrm>
           <a:custGeom>
             <a:avLst/>
@@ -9201,30 +8618,28 @@
             <a:cxnLst/>
             <a:rect l="0" t="0" r="0" b="0"/>
             <a:pathLst>
-              <a:path w="57150" h="57150">
+              <a:path w="85725" h="85725">
                 <a:moveTo>
                   <a:pt x="0" y="0"/>
                 </a:moveTo>
                 <a:lnTo>
-                  <a:pt x="57150" y="28575"/>
+                  <a:pt x="85725" y="42862"/>
                 </a:lnTo>
                 <a:lnTo>
-                  <a:pt x="0" y="57150"/>
+                  <a:pt x="0" y="85725"/>
                 </a:lnTo>
+                <a:close/>
               </a:path>
             </a:pathLst>
           </a:custGeom>
-          <a:noFill/>
-          <a:ln w="14288" cap="rnd">
-            <a:solidFill>
-              <a:srgbClr val="8D6A00"/>
-            </a:solidFill>
-          </a:ln>
+          <a:solidFill>
+            <a:srgbClr val="8D6A00"/>
+          </a:solidFill>
         </p:spPr>
       </p:sp>
       <p:cxnSp>
         <p:nvCxnSpPr>
-          <p:cNvPr id="150" name="Connector 149"/>
+          <p:cNvPr id="138" name="Connector 137"/>
           <p:cNvCxnSpPr/>
           <p:nvPr/>
         </p:nvCxnSpPr>
@@ -9260,14 +8675,14 @@
       </p:cxnSp>
       <p:sp>
         <p:nvSpPr>
-          <p:cNvPr id="151" name="freeform-151"/>
-          <p:cNvSpPr/>
-          <p:nvPr/>
-        </p:nvSpPr>
-        <p:spPr>
-          <a:xfrm>
-            <a:off x="12649200" y="1704975"/>
-            <a:ext cx="57150" cy="57150"/>
+          <p:cNvPr id="139" name="freeform-139"/>
+          <p:cNvSpPr/>
+          <p:nvPr/>
+        </p:nvSpPr>
+        <p:spPr>
+          <a:xfrm>
+            <a:off x="12634912" y="1690688"/>
+            <a:ext cx="85725" cy="85725"/>
           </a:xfrm>
           <a:custGeom>
             <a:avLst/>
@@ -9276,30 +8691,28 @@
             <a:cxnLst/>
             <a:rect l="0" t="0" r="0" b="0"/>
             <a:pathLst>
-              <a:path w="57150" h="57150">
+              <a:path w="85725" h="85725">
                 <a:moveTo>
                   <a:pt x="0" y="0"/>
                 </a:moveTo>
                 <a:lnTo>
-                  <a:pt x="57150" y="28575"/>
+                  <a:pt x="85725" y="42862"/>
                 </a:lnTo>
                 <a:lnTo>
-                  <a:pt x="0" y="57150"/>
+                  <a:pt x="0" y="85725"/>
                 </a:lnTo>
+                <a:close/>
               </a:path>
             </a:pathLst>
           </a:custGeom>
-          <a:noFill/>
-          <a:ln w="14288" cap="rnd">
-            <a:solidFill>
-              <a:srgbClr val="8D6A00"/>
-            </a:solidFill>
-          </a:ln>
-        </p:spPr>
-      </p:sp>
-      <p:sp>
-        <p:nvSpPr>
-          <p:cNvPr id="152" name="TextBox 151"/>
+          <a:solidFill>
+            <a:srgbClr val="8D6A00"/>
+          </a:solidFill>
+        </p:spPr>
+      </p:sp>
+      <p:sp>
+        <p:nvSpPr>
+          <p:cNvPr id="140" name="TextBox 139"/>
           <p:cNvSpPr txBox="1"/>
           <p:nvPr/>
         </p:nvSpPr>
@@ -9335,7 +8748,7 @@
       </p:sp>
       <p:cxnSp>
         <p:nvCxnSpPr>
-          <p:cNvPr id="153" name="Connector 152"/>
+          <p:cNvPr id="141" name="Connector 140"/>
           <p:cNvCxnSpPr/>
           <p:nvPr/>
         </p:nvCxnSpPr>
@@ -9371,14 +8784,14 @@
       </p:cxnSp>
       <p:sp>
         <p:nvSpPr>
-          <p:cNvPr id="154" name="freeform-154"/>
-          <p:cNvSpPr/>
-          <p:nvPr/>
-        </p:nvSpPr>
-        <p:spPr>
-          <a:xfrm>
-            <a:off x="9801225" y="2095500"/>
-            <a:ext cx="57150" cy="57150"/>
+          <p:cNvPr id="142" name="freeform-142"/>
+          <p:cNvSpPr/>
+          <p:nvPr/>
+        </p:nvSpPr>
+        <p:spPr>
+          <a:xfrm>
+            <a:off x="9786938" y="2081212"/>
+            <a:ext cx="85725" cy="85725"/>
           </a:xfrm>
           <a:custGeom>
             <a:avLst/>
@@ -9387,30 +8800,28 @@
             <a:cxnLst/>
             <a:rect l="0" t="0" r="0" b="0"/>
             <a:pathLst>
-              <a:path w="57150" h="57150">
+              <a:path w="85725" h="85725">
                 <a:moveTo>
-                  <a:pt x="57150" y="0"/>
+                  <a:pt x="85725" y="0"/>
                 </a:moveTo>
                 <a:lnTo>
-                  <a:pt x="28575" y="57150"/>
+                  <a:pt x="42862" y="85725"/>
                 </a:lnTo>
                 <a:lnTo>
                   <a:pt x="0" y="0"/>
                 </a:lnTo>
+                <a:close/>
               </a:path>
             </a:pathLst>
           </a:custGeom>
-          <a:noFill/>
-          <a:ln w="14288" cap="rnd">
-            <a:solidFill>
-              <a:srgbClr val="8D6A00"/>
-            </a:solidFill>
-          </a:ln>
+          <a:solidFill>
+            <a:srgbClr val="8D6A00"/>
+          </a:solidFill>
         </p:spPr>
       </p:sp>
       <p:cxnSp>
         <p:nvCxnSpPr>
-          <p:cNvPr id="155" name="Connector 154"/>
+          <p:cNvPr id="143" name="Connector 142"/>
           <p:cNvCxnSpPr/>
           <p:nvPr/>
         </p:nvCxnSpPr>
@@ -9446,14 +8857,14 @@
       </p:cxnSp>
       <p:sp>
         <p:nvSpPr>
-          <p:cNvPr id="156" name="freeform-156"/>
-          <p:cNvSpPr/>
-          <p:nvPr/>
-        </p:nvSpPr>
-        <p:spPr>
-          <a:xfrm>
-            <a:off x="10725150" y="2095500"/>
-            <a:ext cx="57150" cy="57150"/>
+          <p:cNvPr id="144" name="freeform-144"/>
+          <p:cNvSpPr/>
+          <p:nvPr/>
+        </p:nvSpPr>
+        <p:spPr>
+          <a:xfrm>
+            <a:off x="10710862" y="2081212"/>
+            <a:ext cx="85725" cy="85725"/>
           </a:xfrm>
           <a:custGeom>
             <a:avLst/>
@@ -9462,30 +8873,28 @@
             <a:cxnLst/>
             <a:rect l="0" t="0" r="0" b="0"/>
             <a:pathLst>
-              <a:path w="57150" h="57150">
+              <a:path w="85725" h="85725">
                 <a:moveTo>
-                  <a:pt x="57150" y="0"/>
+                  <a:pt x="85725" y="0"/>
                 </a:moveTo>
                 <a:lnTo>
-                  <a:pt x="28575" y="57150"/>
+                  <a:pt x="42862" y="85725"/>
                 </a:lnTo>
                 <a:lnTo>
                   <a:pt x="0" y="0"/>
                 </a:lnTo>
+                <a:close/>
               </a:path>
             </a:pathLst>
           </a:custGeom>
-          <a:noFill/>
-          <a:ln w="14288" cap="rnd">
-            <a:solidFill>
-              <a:srgbClr val="8D6A00"/>
-            </a:solidFill>
-          </a:ln>
+          <a:solidFill>
+            <a:srgbClr val="8D6A00"/>
+          </a:solidFill>
         </p:spPr>
       </p:sp>
       <p:cxnSp>
         <p:nvCxnSpPr>
-          <p:cNvPr id="157" name="Connector 156"/>
+          <p:cNvPr id="145" name="Connector 144"/>
           <p:cNvCxnSpPr/>
           <p:nvPr/>
         </p:nvCxnSpPr>
@@ -9521,14 +8930,14 @@
       </p:cxnSp>
       <p:sp>
         <p:nvSpPr>
-          <p:cNvPr id="158" name="freeform-158"/>
-          <p:cNvSpPr/>
-          <p:nvPr/>
-        </p:nvSpPr>
-        <p:spPr>
-          <a:xfrm>
-            <a:off x="11658600" y="2095500"/>
-            <a:ext cx="57150" cy="57150"/>
+          <p:cNvPr id="146" name="freeform-146"/>
+          <p:cNvSpPr/>
+          <p:nvPr/>
+        </p:nvSpPr>
+        <p:spPr>
+          <a:xfrm>
+            <a:off x="11644312" y="2081212"/>
+            <a:ext cx="85725" cy="85725"/>
           </a:xfrm>
           <a:custGeom>
             <a:avLst/>
@@ -9537,30 +8946,28 @@
             <a:cxnLst/>
             <a:rect l="0" t="0" r="0" b="0"/>
             <a:pathLst>
-              <a:path w="57150" h="57150">
+              <a:path w="85725" h="85725">
                 <a:moveTo>
-                  <a:pt x="57150" y="0"/>
+                  <a:pt x="85725" y="0"/>
                 </a:moveTo>
                 <a:lnTo>
-                  <a:pt x="28575" y="57150"/>
+                  <a:pt x="42862" y="85725"/>
                 </a:lnTo>
                 <a:lnTo>
                   <a:pt x="0" y="0"/>
                 </a:lnTo>
+                <a:close/>
               </a:path>
             </a:pathLst>
           </a:custGeom>
-          <a:noFill/>
-          <a:ln w="14288" cap="rnd">
-            <a:solidFill>
-              <a:srgbClr val="8D6A00"/>
-            </a:solidFill>
-          </a:ln>
-        </p:spPr>
-      </p:sp>
-      <p:sp>
-        <p:nvSpPr>
-          <p:cNvPr id="159" name="Oval 158"/>
+          <a:solidFill>
+            <a:srgbClr val="8D6A00"/>
+          </a:solidFill>
+        </p:spPr>
+      </p:sp>
+      <p:sp>
+        <p:nvSpPr>
+          <p:cNvPr id="147" name="Oval 146"/>
           <p:cNvSpPr/>
           <p:nvPr/>
         </p:nvSpPr>
@@ -9601,7 +9008,7 @@
       </p:sp>
       <p:sp>
         <p:nvSpPr>
-          <p:cNvPr id="160" name="Oval 159"/>
+          <p:cNvPr id="148" name="Oval 147"/>
           <p:cNvSpPr/>
           <p:nvPr/>
         </p:nvSpPr>
@@ -9642,7 +9049,7 @@
       </p:sp>
       <p:sp>
         <p:nvSpPr>
-          <p:cNvPr id="161" name="Oval 160"/>
+          <p:cNvPr id="149" name="Oval 148"/>
           <p:cNvSpPr/>
           <p:nvPr/>
         </p:nvSpPr>
@@ -9683,7 +9090,7 @@
       </p:sp>
       <p:sp>
         <p:nvSpPr>
-          <p:cNvPr id="162" name="TextBox 161"/>
+          <p:cNvPr id="150" name="TextBox 149"/>
           <p:cNvSpPr txBox="1"/>
           <p:nvPr/>
         </p:nvSpPr>
@@ -9728,7 +9135,7 @@
       </p:sp>
       <p:sp>
         <p:nvSpPr>
-          <p:cNvPr id="163" name="TextBox 162"/>
+          <p:cNvPr id="151" name="TextBox 150"/>
           <p:cNvSpPr txBox="1"/>
           <p:nvPr/>
         </p:nvSpPr>
@@ -9773,7 +9180,7 @@
       </p:sp>
       <p:sp>
         <p:nvSpPr>
-          <p:cNvPr id="164" name="TextBox 163"/>
+          <p:cNvPr id="152" name="TextBox 151"/>
           <p:cNvSpPr txBox="1"/>
           <p:nvPr/>
         </p:nvSpPr>
@@ -9818,7 +9225,7 @@
       </p:sp>
       <p:sp>
         <p:nvSpPr>
-          <p:cNvPr id="165" name="freeform-165"/>
+          <p:cNvPr id="153" name="freeform-153"/>
           <p:cNvSpPr/>
           <p:nvPr/>
         </p:nvSpPr>
@@ -9863,7 +9270,7 @@
       </p:sp>
       <p:sp>
         <p:nvSpPr>
-          <p:cNvPr id="166" name="freeform-166"/>
+          <p:cNvPr id="154" name="freeform-154"/>
           <p:cNvSpPr/>
           <p:nvPr/>
         </p:nvSpPr>
@@ -9906,7 +9313,7 @@
       </p:sp>
       <p:sp>
         <p:nvSpPr>
-          <p:cNvPr id="167" name="freeform-167"/>
+          <p:cNvPr id="155" name="freeform-155"/>
           <p:cNvSpPr/>
           <p:nvPr/>
         </p:nvSpPr>
@@ -9949,7 +9356,7 @@
       </p:sp>
       <p:cxnSp>
         <p:nvCxnSpPr>
-          <p:cNvPr id="168" name="Connector 167"/>
+          <p:cNvPr id="156" name="Connector 155"/>
           <p:cNvCxnSpPr/>
           <p:nvPr/>
         </p:nvCxnSpPr>
@@ -9985,7 +9392,7 @@
       </p:cxnSp>
       <p:cxnSp>
         <p:nvCxnSpPr>
-          <p:cNvPr id="169" name="Connector 168"/>
+          <p:cNvPr id="157" name="Connector 156"/>
           <p:cNvCxnSpPr/>
           <p:nvPr/>
         </p:nvCxnSpPr>
@@ -10021,7 +9428,7 @@
       </p:cxnSp>
       <p:sp>
         <p:nvSpPr>
-          <p:cNvPr id="170" name="TextBox 169"/>
+          <p:cNvPr id="158" name="TextBox 157"/>
           <p:cNvSpPr txBox="1"/>
           <p:nvPr/>
         </p:nvSpPr>
@@ -10057,7 +9464,7 @@
       </p:sp>
       <p:sp>
         <p:nvSpPr>
-          <p:cNvPr id="171" name="TextBox 170"/>
+          <p:cNvPr id="159" name="TextBox 158"/>
           <p:cNvSpPr txBox="1"/>
           <p:nvPr/>
         </p:nvSpPr>
@@ -10093,7 +9500,7 @@
       </p:sp>
       <p:sp>
         <p:nvSpPr>
-          <p:cNvPr id="172" name="Rounded Rectangle 171"/>
+          <p:cNvPr id="160" name="Rounded Rectangle 159"/>
           <p:cNvSpPr/>
           <p:nvPr/>
         </p:nvSpPr>
@@ -10141,7 +9548,7 @@
       </p:sp>
       <p:sp>
         <p:nvSpPr>
-          <p:cNvPr id="173" name="Rounded Rectangle 172"/>
+          <p:cNvPr id="161" name="Rounded Rectangle 160"/>
           <p:cNvSpPr/>
           <p:nvPr/>
         </p:nvSpPr>
@@ -10184,7 +9591,7 @@
       </p:sp>
       <p:sp>
         <p:nvSpPr>
-          <p:cNvPr id="174" name="TextBox 173"/>
+          <p:cNvPr id="162" name="TextBox 161"/>
           <p:cNvSpPr txBox="1"/>
           <p:nvPr/>
         </p:nvSpPr>
@@ -10229,7 +9636,7 @@
       </p:sp>
       <p:sp>
         <p:nvSpPr>
-          <p:cNvPr id="175" name="Rounded Rectangle 174"/>
+          <p:cNvPr id="163" name="Rounded Rectangle 162"/>
           <p:cNvSpPr/>
           <p:nvPr/>
         </p:nvSpPr>
@@ -10272,7 +9679,7 @@
       </p:sp>
       <p:sp>
         <p:nvSpPr>
-          <p:cNvPr id="176" name="TextBox 175"/>
+          <p:cNvPr id="164" name="TextBox 163"/>
           <p:cNvSpPr txBox="1"/>
           <p:nvPr/>
         </p:nvSpPr>
@@ -10317,7 +9724,7 @@
       </p:sp>
       <p:sp>
         <p:nvSpPr>
-          <p:cNvPr id="177" name="Rounded Rectangle 176"/>
+          <p:cNvPr id="165" name="Rounded Rectangle 164"/>
           <p:cNvSpPr/>
           <p:nvPr/>
         </p:nvSpPr>
@@ -10360,7 +9767,7 @@
       </p:sp>
       <p:sp>
         <p:nvSpPr>
-          <p:cNvPr id="178" name="TextBox 177"/>
+          <p:cNvPr id="166" name="TextBox 165"/>
           <p:cNvSpPr txBox="1"/>
           <p:nvPr/>
         </p:nvSpPr>
@@ -10405,7 +9812,7 @@
       </p:sp>
       <p:sp>
         <p:nvSpPr>
-          <p:cNvPr id="179" name="Rounded Rectangle 178"/>
+          <p:cNvPr id="167" name="Rounded Rectangle 166"/>
           <p:cNvSpPr/>
           <p:nvPr/>
         </p:nvSpPr>
@@ -10448,7 +9855,7 @@
       </p:sp>
       <p:sp>
         <p:nvSpPr>
-          <p:cNvPr id="180" name="TextBox 179"/>
+          <p:cNvPr id="168" name="TextBox 167"/>
           <p:cNvSpPr txBox="1"/>
           <p:nvPr/>
         </p:nvSpPr>
@@ -10493,7 +9900,7 @@
       </p:sp>
       <p:cxnSp>
         <p:nvCxnSpPr>
-          <p:cNvPr id="181" name="Connector 180"/>
+          <p:cNvPr id="169" name="Connector 168"/>
           <p:cNvCxnSpPr/>
           <p:nvPr/>
         </p:nvCxnSpPr>
@@ -10529,14 +9936,14 @@
       </p:cxnSp>
       <p:sp>
         <p:nvSpPr>
-          <p:cNvPr id="182" name="freeform-182"/>
-          <p:cNvSpPr/>
-          <p:nvPr/>
-        </p:nvSpPr>
-        <p:spPr>
-          <a:xfrm>
-            <a:off x="10467975" y="2962275"/>
-            <a:ext cx="57150" cy="57150"/>
+          <p:cNvPr id="170" name="freeform-170"/>
+          <p:cNvSpPr/>
+          <p:nvPr/>
+        </p:nvSpPr>
+        <p:spPr>
+          <a:xfrm>
+            <a:off x="10453688" y="2947988"/>
+            <a:ext cx="85725" cy="85725"/>
           </a:xfrm>
           <a:custGeom>
             <a:avLst/>
@@ -10545,30 +9952,28 @@
             <a:cxnLst/>
             <a:rect l="0" t="0" r="0" b="0"/>
             <a:pathLst>
-              <a:path w="57150" h="57150">
+              <a:path w="85725" h="85725">
                 <a:moveTo>
                   <a:pt x="0" y="0"/>
                 </a:moveTo>
                 <a:lnTo>
-                  <a:pt x="57150" y="28575"/>
+                  <a:pt x="85725" y="42862"/>
                 </a:lnTo>
                 <a:lnTo>
-                  <a:pt x="0" y="57150"/>
+                  <a:pt x="0" y="85725"/>
                 </a:lnTo>
+                <a:close/>
               </a:path>
             </a:pathLst>
           </a:custGeom>
-          <a:noFill/>
-          <a:ln w="14288" cap="rnd">
-            <a:solidFill>
-              <a:srgbClr val="8D6A00"/>
-            </a:solidFill>
-          </a:ln>
+          <a:solidFill>
+            <a:srgbClr val="8D6A00"/>
+          </a:solidFill>
         </p:spPr>
       </p:sp>
       <p:cxnSp>
         <p:nvCxnSpPr>
-          <p:cNvPr id="183" name="Connector 182"/>
+          <p:cNvPr id="171" name="Connector 170"/>
           <p:cNvCxnSpPr/>
           <p:nvPr/>
         </p:nvCxnSpPr>
@@ -10604,14 +10009,14 @@
       </p:cxnSp>
       <p:sp>
         <p:nvSpPr>
-          <p:cNvPr id="184" name="freeform-184"/>
-          <p:cNvSpPr/>
-          <p:nvPr/>
-        </p:nvSpPr>
-        <p:spPr>
-          <a:xfrm>
-            <a:off x="11391900" y="2962275"/>
-            <a:ext cx="57150" cy="57150"/>
+          <p:cNvPr id="172" name="freeform-172"/>
+          <p:cNvSpPr/>
+          <p:nvPr/>
+        </p:nvSpPr>
+        <p:spPr>
+          <a:xfrm>
+            <a:off x="11377612" y="2947988"/>
+            <a:ext cx="85725" cy="85725"/>
           </a:xfrm>
           <a:custGeom>
             <a:avLst/>
@@ -10620,30 +10025,28 @@
             <a:cxnLst/>
             <a:rect l="0" t="0" r="0" b="0"/>
             <a:pathLst>
-              <a:path w="57150" h="57150">
+              <a:path w="85725" h="85725">
                 <a:moveTo>
                   <a:pt x="0" y="0"/>
                 </a:moveTo>
                 <a:lnTo>
-                  <a:pt x="57150" y="28575"/>
+                  <a:pt x="85725" y="42862"/>
                 </a:lnTo>
                 <a:lnTo>
-                  <a:pt x="0" y="57150"/>
+                  <a:pt x="0" y="85725"/>
                 </a:lnTo>
+                <a:close/>
               </a:path>
             </a:pathLst>
           </a:custGeom>
-          <a:noFill/>
-          <a:ln w="14288" cap="rnd">
-            <a:solidFill>
-              <a:srgbClr val="8D6A00"/>
-            </a:solidFill>
-          </a:ln>
+          <a:solidFill>
+            <a:srgbClr val="8D6A00"/>
+          </a:solidFill>
         </p:spPr>
       </p:sp>
       <p:cxnSp>
         <p:nvCxnSpPr>
-          <p:cNvPr id="185" name="Connector 184"/>
+          <p:cNvPr id="173" name="Connector 172"/>
           <p:cNvCxnSpPr/>
           <p:nvPr/>
         </p:nvCxnSpPr>
@@ -10679,14 +10082,14 @@
       </p:cxnSp>
       <p:sp>
         <p:nvSpPr>
-          <p:cNvPr id="186" name="freeform-186"/>
-          <p:cNvSpPr/>
-          <p:nvPr/>
-        </p:nvSpPr>
-        <p:spPr>
-          <a:xfrm>
-            <a:off x="12639675" y="2962275"/>
-            <a:ext cx="57150" cy="57150"/>
+          <p:cNvPr id="174" name="freeform-174"/>
+          <p:cNvSpPr/>
+          <p:nvPr/>
+        </p:nvSpPr>
+        <p:spPr>
+          <a:xfrm>
+            <a:off x="12625388" y="2947988"/>
+            <a:ext cx="85725" cy="85725"/>
           </a:xfrm>
           <a:custGeom>
             <a:avLst/>
@@ -10695,30 +10098,28 @@
             <a:cxnLst/>
             <a:rect l="0" t="0" r="0" b="0"/>
             <a:pathLst>
-              <a:path w="57150" h="57150">
+              <a:path w="85725" h="85725">
                 <a:moveTo>
                   <a:pt x="0" y="0"/>
                 </a:moveTo>
                 <a:lnTo>
-                  <a:pt x="57150" y="28575"/>
+                  <a:pt x="85725" y="42862"/>
                 </a:lnTo>
                 <a:lnTo>
-                  <a:pt x="0" y="57150"/>
+                  <a:pt x="0" y="85725"/>
                 </a:lnTo>
+                <a:close/>
               </a:path>
             </a:pathLst>
           </a:custGeom>
-          <a:noFill/>
-          <a:ln w="14288" cap="rnd">
-            <a:solidFill>
-              <a:srgbClr val="8D6A00"/>
-            </a:solidFill>
-          </a:ln>
-        </p:spPr>
-      </p:sp>
-      <p:sp>
-        <p:nvSpPr>
-          <p:cNvPr id="187" name="TextBox 186"/>
+          <a:solidFill>
+            <a:srgbClr val="8D6A00"/>
+          </a:solidFill>
+        </p:spPr>
+      </p:sp>
+      <p:sp>
+        <p:nvSpPr>
+          <p:cNvPr id="175" name="TextBox 174"/>
           <p:cNvSpPr txBox="1"/>
           <p:nvPr/>
         </p:nvSpPr>
@@ -10754,7 +10155,7 @@
       </p:sp>
       <p:sp>
         <p:nvSpPr>
-          <p:cNvPr id="188" name="Oval 187"/>
+          <p:cNvPr id="176" name="Oval 175"/>
           <p:cNvSpPr/>
           <p:nvPr/>
         </p:nvSpPr>
@@ -10795,7 +10196,7 @@
       </p:sp>
       <p:sp>
         <p:nvSpPr>
-          <p:cNvPr id="189" name="TextBox 188"/>
+          <p:cNvPr id="177" name="TextBox 176"/>
           <p:cNvSpPr txBox="1"/>
           <p:nvPr/>
         </p:nvSpPr>
@@ -10831,7 +10232,7 @@
       </p:sp>
       <p:sp>
         <p:nvSpPr>
-          <p:cNvPr id="190" name="Oval 189"/>
+          <p:cNvPr id="178" name="Oval 177"/>
           <p:cNvSpPr/>
           <p:nvPr/>
         </p:nvSpPr>
@@ -10872,7 +10273,7 @@
       </p:sp>
       <p:sp>
         <p:nvSpPr>
-          <p:cNvPr id="191" name="TextBox 190"/>
+          <p:cNvPr id="179" name="TextBox 178"/>
           <p:cNvSpPr txBox="1"/>
           <p:nvPr/>
         </p:nvSpPr>
@@ -10908,7 +10309,7 @@
       </p:sp>
       <p:sp>
         <p:nvSpPr>
-          <p:cNvPr id="192" name="Oval 191"/>
+          <p:cNvPr id="180" name="Oval 179"/>
           <p:cNvSpPr/>
           <p:nvPr/>
         </p:nvSpPr>
@@ -10949,7 +10350,7 @@
       </p:sp>
       <p:sp>
         <p:nvSpPr>
-          <p:cNvPr id="193" name="TextBox 192"/>
+          <p:cNvPr id="181" name="TextBox 180"/>
           <p:cNvSpPr txBox="1"/>
           <p:nvPr/>
         </p:nvSpPr>
@@ -10985,7 +10386,7 @@
       </p:sp>
       <p:sp>
         <p:nvSpPr>
-          <p:cNvPr id="194" name="Oval 193"/>
+          <p:cNvPr id="182" name="Oval 181"/>
           <p:cNvSpPr/>
           <p:nvPr/>
         </p:nvSpPr>
@@ -11026,7 +10427,7 @@
       </p:sp>
       <p:sp>
         <p:nvSpPr>
-          <p:cNvPr id="195" name="TextBox 194"/>
+          <p:cNvPr id="183" name="TextBox 182"/>
           <p:cNvSpPr txBox="1"/>
           <p:nvPr/>
         </p:nvSpPr>
@@ -11071,7 +10472,7 @@
       </p:sp>
       <p:sp>
         <p:nvSpPr>
-          <p:cNvPr id="196" name="Oval 195"/>
+          <p:cNvPr id="184" name="Oval 183"/>
           <p:cNvSpPr/>
           <p:nvPr/>
         </p:nvSpPr>
@@ -11112,7 +10513,7 @@
       </p:sp>
       <p:sp>
         <p:nvSpPr>
-          <p:cNvPr id="197" name="TextBox 196"/>
+          <p:cNvPr id="185" name="TextBox 184"/>
           <p:cNvSpPr txBox="1"/>
           <p:nvPr/>
         </p:nvSpPr>
@@ -11157,7 +10558,7 @@
       </p:sp>
       <p:sp>
         <p:nvSpPr>
-          <p:cNvPr id="198" name="Oval 197"/>
+          <p:cNvPr id="186" name="Oval 185"/>
           <p:cNvSpPr/>
           <p:nvPr/>
         </p:nvSpPr>
@@ -11198,7 +10599,7 @@
       </p:sp>
       <p:sp>
         <p:nvSpPr>
-          <p:cNvPr id="199" name="TextBox 198"/>
+          <p:cNvPr id="187" name="TextBox 186"/>
           <p:cNvSpPr txBox="1"/>
           <p:nvPr/>
         </p:nvSpPr>
@@ -11243,7 +10644,7 @@
       </p:sp>
       <p:cxnSp>
         <p:nvCxnSpPr>
-          <p:cNvPr id="200" name="Connector 199"/>
+          <p:cNvPr id="188" name="Connector 187"/>
           <p:cNvCxnSpPr/>
           <p:nvPr/>
         </p:nvCxnSpPr>
@@ -11279,14 +10680,14 @@
       </p:cxnSp>
       <p:sp>
         <p:nvSpPr>
-          <p:cNvPr id="201" name="freeform-201"/>
-          <p:cNvSpPr/>
-          <p:nvPr/>
-        </p:nvSpPr>
-        <p:spPr>
-          <a:xfrm>
-            <a:off x="9810750" y="3819525"/>
-            <a:ext cx="57150" cy="57150"/>
+          <p:cNvPr id="189" name="freeform-189"/>
+          <p:cNvSpPr/>
+          <p:nvPr/>
+        </p:nvSpPr>
+        <p:spPr>
+          <a:xfrm>
+            <a:off x="9796462" y="3805238"/>
+            <a:ext cx="85725" cy="85725"/>
           </a:xfrm>
           <a:custGeom>
             <a:avLst/>
@@ -11295,30 +10696,28 @@
             <a:cxnLst/>
             <a:rect l="0" t="0" r="0" b="0"/>
             <a:pathLst>
-              <a:path w="57150" h="57150">
+              <a:path w="85725" h="85725">
                 <a:moveTo>
-                  <a:pt x="57150" y="0"/>
+                  <a:pt x="85725" y="0"/>
                 </a:moveTo>
                 <a:lnTo>
-                  <a:pt x="28575" y="57150"/>
+                  <a:pt x="42862" y="85725"/>
                 </a:lnTo>
                 <a:lnTo>
                   <a:pt x="0" y="0"/>
                 </a:lnTo>
+                <a:close/>
               </a:path>
             </a:pathLst>
           </a:custGeom>
-          <a:noFill/>
-          <a:ln w="14288" cap="rnd">
-            <a:solidFill>
-              <a:srgbClr val="8D6A00"/>
-            </a:solidFill>
-          </a:ln>
+          <a:solidFill>
+            <a:srgbClr val="8D6A00"/>
+          </a:solidFill>
         </p:spPr>
       </p:sp>
       <p:cxnSp>
         <p:nvCxnSpPr>
-          <p:cNvPr id="202" name="Connector 201"/>
+          <p:cNvPr id="190" name="Connector 189"/>
           <p:cNvCxnSpPr/>
           <p:nvPr/>
         </p:nvCxnSpPr>
@@ -11354,14 +10753,14 @@
       </p:cxnSp>
       <p:sp>
         <p:nvSpPr>
-          <p:cNvPr id="203" name="freeform-203"/>
-          <p:cNvSpPr/>
-          <p:nvPr/>
-        </p:nvSpPr>
-        <p:spPr>
-          <a:xfrm>
-            <a:off x="10744200" y="3819525"/>
-            <a:ext cx="57150" cy="57150"/>
+          <p:cNvPr id="191" name="freeform-191"/>
+          <p:cNvSpPr/>
+          <p:nvPr/>
+        </p:nvSpPr>
+        <p:spPr>
+          <a:xfrm>
+            <a:off x="10729912" y="3805238"/>
+            <a:ext cx="85725" cy="85725"/>
           </a:xfrm>
           <a:custGeom>
             <a:avLst/>
@@ -11370,30 +10769,28 @@
             <a:cxnLst/>
             <a:rect l="0" t="0" r="0" b="0"/>
             <a:pathLst>
-              <a:path w="57150" h="57150">
+              <a:path w="85725" h="85725">
                 <a:moveTo>
-                  <a:pt x="57150" y="0"/>
+                  <a:pt x="85725" y="0"/>
                 </a:moveTo>
                 <a:lnTo>
-                  <a:pt x="28575" y="57150"/>
+                  <a:pt x="42862" y="85725"/>
                 </a:lnTo>
                 <a:lnTo>
                   <a:pt x="0" y="0"/>
                 </a:lnTo>
+                <a:close/>
               </a:path>
             </a:pathLst>
           </a:custGeom>
-          <a:noFill/>
-          <a:ln w="14288" cap="rnd">
-            <a:solidFill>
-              <a:srgbClr val="8D6A00"/>
-            </a:solidFill>
-          </a:ln>
+          <a:solidFill>
+            <a:srgbClr val="8D6A00"/>
+          </a:solidFill>
         </p:spPr>
       </p:sp>
       <p:cxnSp>
         <p:nvCxnSpPr>
-          <p:cNvPr id="204" name="Connector 203"/>
+          <p:cNvPr id="192" name="Connector 191"/>
           <p:cNvCxnSpPr/>
           <p:nvPr/>
         </p:nvCxnSpPr>
@@ -11429,14 +10826,14 @@
       </p:cxnSp>
       <p:sp>
         <p:nvSpPr>
-          <p:cNvPr id="205" name="freeform-205"/>
-          <p:cNvSpPr/>
-          <p:nvPr/>
-        </p:nvSpPr>
-        <p:spPr>
-          <a:xfrm>
-            <a:off x="11687175" y="3819525"/>
-            <a:ext cx="57150" cy="57150"/>
+          <p:cNvPr id="193" name="freeform-193"/>
+          <p:cNvSpPr/>
+          <p:nvPr/>
+        </p:nvSpPr>
+        <p:spPr>
+          <a:xfrm>
+            <a:off x="11672888" y="3805238"/>
+            <a:ext cx="85725" cy="85725"/>
           </a:xfrm>
           <a:custGeom>
             <a:avLst/>
@@ -11445,30 +10842,28 @@
             <a:cxnLst/>
             <a:rect l="0" t="0" r="0" b="0"/>
             <a:pathLst>
-              <a:path w="57150" h="57150">
+              <a:path w="85725" h="85725">
                 <a:moveTo>
-                  <a:pt x="57150" y="0"/>
+                  <a:pt x="85725" y="0"/>
                 </a:moveTo>
                 <a:lnTo>
-                  <a:pt x="28575" y="57150"/>
+                  <a:pt x="42862" y="85725"/>
                 </a:lnTo>
                 <a:lnTo>
                   <a:pt x="0" y="0"/>
                 </a:lnTo>
+                <a:close/>
               </a:path>
             </a:pathLst>
           </a:custGeom>
-          <a:noFill/>
-          <a:ln w="14288" cap="rnd">
-            <a:solidFill>
-              <a:srgbClr val="8D6A00"/>
-            </a:solidFill>
-          </a:ln>
-        </p:spPr>
-      </p:sp>
-      <p:sp>
-        <p:nvSpPr>
-          <p:cNvPr id="206" name="freeform-206"/>
+          <a:solidFill>
+            <a:srgbClr val="8D6A00"/>
+          </a:solidFill>
+        </p:spPr>
+      </p:sp>
+      <p:sp>
+        <p:nvSpPr>
+          <p:cNvPr id="194" name="freeform-194"/>
           <p:cNvSpPr/>
           <p:nvPr/>
         </p:nvSpPr>
@@ -11506,14 +10901,14 @@
       </p:sp>
       <p:sp>
         <p:nvSpPr>
-          <p:cNvPr id="207" name="freeform-207"/>
-          <p:cNvSpPr/>
-          <p:nvPr/>
-        </p:nvSpPr>
-        <p:spPr>
-          <a:xfrm>
-            <a:off x="10254338" y="3771900"/>
-            <a:ext cx="61237" cy="59934"/>
+          <p:cNvPr id="195" name="freeform-195"/>
+          <p:cNvSpPr/>
+          <p:nvPr/>
+        </p:nvSpPr>
+        <p:spPr>
+          <a:xfrm>
+            <a:off x="10234143" y="3762128"/>
+            <a:ext cx="91855" cy="89901"/>
           </a:xfrm>
           <a:custGeom>
             <a:avLst/>
@@ -11522,30 +10917,28 @@
             <a:cxnLst/>
             <a:rect l="0" t="0" r="0" b="0"/>
             <a:pathLst>
-              <a:path w="61237" h="59934">
+              <a:path w="91855" h="89901">
                 <a:moveTo>
-                  <a:pt x="0" y="18241"/>
+                  <a:pt x="0" y="27361"/>
                 </a:moveTo>
                 <a:lnTo>
-                  <a:pt x="61237" y="0"/>
+                  <a:pt x="91855" y="0"/>
                 </a:lnTo>
                 <a:lnTo>
-                  <a:pt x="39087" y="59934"/>
+                  <a:pt x="58631" y="89901"/>
                 </a:lnTo>
+                <a:close/>
               </a:path>
             </a:pathLst>
           </a:custGeom>
-          <a:noFill/>
-          <a:ln w="14288" cap="rnd">
-            <a:solidFill>
-              <a:srgbClr val="8D6A00"/>
-            </a:solidFill>
-          </a:ln>
-        </p:spPr>
-      </p:sp>
-      <p:sp>
-        <p:nvSpPr>
-          <p:cNvPr id="208" name="freeform-208"/>
+          <a:solidFill>
+            <a:srgbClr val="8D6A00"/>
+          </a:solidFill>
+        </p:spPr>
+      </p:sp>
+      <p:sp>
+        <p:nvSpPr>
+          <p:cNvPr id="196" name="freeform-196"/>
           <p:cNvSpPr/>
           <p:nvPr/>
         </p:nvSpPr>
@@ -11583,14 +10976,14 @@
       </p:sp>
       <p:sp>
         <p:nvSpPr>
-          <p:cNvPr id="209" name="freeform-209"/>
-          <p:cNvSpPr/>
-          <p:nvPr/>
-        </p:nvSpPr>
-        <p:spPr>
-          <a:xfrm>
-            <a:off x="11178560" y="3771900"/>
-            <a:ext cx="60940" cy="60277"/>
+          <p:cNvPr id="197" name="freeform-197"/>
+          <p:cNvSpPr/>
+          <p:nvPr/>
+        </p:nvSpPr>
+        <p:spPr>
+          <a:xfrm>
+            <a:off x="11158357" y="3761964"/>
+            <a:ext cx="91410" cy="90416"/>
           </a:xfrm>
           <a:custGeom>
             <a:avLst/>
@@ -11599,30 +10992,28 @@
             <a:cxnLst/>
             <a:rect l="0" t="0" r="0" b="0"/>
             <a:pathLst>
-              <a:path w="60940" h="60277">
+              <a:path w="91410" h="90416">
                 <a:moveTo>
-                  <a:pt x="0" y="19209"/>
+                  <a:pt x="0" y="28814"/>
                 </a:moveTo>
                 <a:lnTo>
-                  <a:pt x="60940" y="0"/>
+                  <a:pt x="91410" y="0"/>
                 </a:lnTo>
                 <a:lnTo>
-                  <a:pt x="39743" y="60277"/>
+                  <a:pt x="59615" y="90416"/>
                 </a:lnTo>
+                <a:close/>
               </a:path>
             </a:pathLst>
           </a:custGeom>
-          <a:noFill/>
-          <a:ln w="14288" cap="rnd">
-            <a:solidFill>
-              <a:srgbClr val="8D6A00"/>
-            </a:solidFill>
-          </a:ln>
-        </p:spPr>
-      </p:sp>
-      <p:sp>
-        <p:nvSpPr>
-          <p:cNvPr id="210" name="freeform-210"/>
+          <a:solidFill>
+            <a:srgbClr val="8D6A00"/>
+          </a:solidFill>
+        </p:spPr>
+      </p:sp>
+      <p:sp>
+        <p:nvSpPr>
+          <p:cNvPr id="198" name="freeform-198"/>
           <p:cNvSpPr/>
           <p:nvPr/>
         </p:nvSpPr>
@@ -11660,14 +11051,14 @@
       </p:sp>
       <p:sp>
         <p:nvSpPr>
-          <p:cNvPr id="211" name="freeform-211"/>
-          <p:cNvSpPr/>
-          <p:nvPr/>
-        </p:nvSpPr>
-        <p:spPr>
-          <a:xfrm>
-            <a:off x="12121535" y="3771900"/>
-            <a:ext cx="60940" cy="60277"/>
+          <p:cNvPr id="199" name="freeform-199"/>
+          <p:cNvSpPr/>
+          <p:nvPr/>
+        </p:nvSpPr>
+        <p:spPr>
+          <a:xfrm>
+            <a:off x="12101332" y="3761964"/>
+            <a:ext cx="91410" cy="90416"/>
           </a:xfrm>
           <a:custGeom>
             <a:avLst/>
@@ -11676,30 +11067,28 @@
             <a:cxnLst/>
             <a:rect l="0" t="0" r="0" b="0"/>
             <a:pathLst>
-              <a:path w="60940" h="60277">
+              <a:path w="91410" h="90416">
                 <a:moveTo>
-                  <a:pt x="0" y="19209"/>
+                  <a:pt x="0" y="28814"/>
                 </a:moveTo>
                 <a:lnTo>
-                  <a:pt x="60940" y="0"/>
+                  <a:pt x="91410" y="0"/>
                 </a:lnTo>
                 <a:lnTo>
-                  <a:pt x="39743" y="60277"/>
+                  <a:pt x="59615" y="90416"/>
                 </a:lnTo>
+                <a:close/>
               </a:path>
             </a:pathLst>
           </a:custGeom>
-          <a:noFill/>
-          <a:ln w="14288" cap="rnd">
-            <a:solidFill>
-              <a:srgbClr val="8D6A00"/>
-            </a:solidFill>
-          </a:ln>
-        </p:spPr>
-      </p:sp>
-      <p:sp>
-        <p:nvSpPr>
-          <p:cNvPr id="212" name="freeform-212"/>
+          <a:solidFill>
+            <a:srgbClr val="8D6A00"/>
+          </a:solidFill>
+        </p:spPr>
+      </p:sp>
+      <p:sp>
+        <p:nvSpPr>
+          <p:cNvPr id="200" name="freeform-200"/>
           <p:cNvSpPr/>
           <p:nvPr/>
         </p:nvSpPr>
@@ -11737,14 +11126,14 @@
       </p:sp>
       <p:sp>
         <p:nvSpPr>
-          <p:cNvPr id="213" name="freeform-213"/>
-          <p:cNvSpPr/>
-          <p:nvPr/>
-        </p:nvSpPr>
-        <p:spPr>
-          <a:xfrm>
-            <a:off x="10689839" y="3171825"/>
-            <a:ext cx="63886" cy="51770"/>
+          <p:cNvPr id="201" name="freeform-201"/>
+          <p:cNvSpPr/>
+          <p:nvPr/>
+        </p:nvSpPr>
+        <p:spPr>
+          <a:xfrm>
+            <a:off x="10670563" y="3165216"/>
+            <a:ext cx="95829" cy="77655"/>
           </a:xfrm>
           <a:custGeom>
             <a:avLst/>
@@ -11753,30 +11142,28 @@
             <a:cxnLst/>
             <a:rect l="0" t="0" r="0" b="0"/>
             <a:pathLst>
-              <a:path w="63886" h="51770">
+              <a:path w="95829" h="77655">
                 <a:moveTo>
-                  <a:pt x="0" y="1101"/>
+                  <a:pt x="0" y="1652"/>
                 </a:moveTo>
                 <a:lnTo>
-                  <a:pt x="63886" y="0"/>
+                  <a:pt x="95829" y="0"/>
                 </a:lnTo>
                 <a:lnTo>
-                  <a:pt x="26436" y="51770"/>
+                  <a:pt x="39653" y="77655"/>
                 </a:lnTo>
+                <a:close/>
               </a:path>
             </a:pathLst>
           </a:custGeom>
-          <a:noFill/>
-          <a:ln w="14288" cap="rnd">
-            <a:solidFill>
-              <a:srgbClr val="8D6A00"/>
-            </a:solidFill>
-          </a:ln>
-        </p:spPr>
-      </p:sp>
-      <p:sp>
-        <p:nvSpPr>
-          <p:cNvPr id="214" name="freeform-214"/>
+          <a:solidFill>
+            <a:srgbClr val="8D6A00"/>
+          </a:solidFill>
+        </p:spPr>
+      </p:sp>
+      <p:sp>
+        <p:nvSpPr>
+          <p:cNvPr id="202" name="freeform-202"/>
           <p:cNvSpPr/>
           <p:nvPr/>
         </p:nvSpPr>
@@ -11814,14 +11201,14 @@
       </p:sp>
       <p:sp>
         <p:nvSpPr>
-          <p:cNvPr id="215" name="freeform-215"/>
-          <p:cNvSpPr/>
-          <p:nvPr/>
-        </p:nvSpPr>
-        <p:spPr>
-          <a:xfrm>
-            <a:off x="11623282" y="3171825"/>
-            <a:ext cx="63893" cy="51440"/>
+          <p:cNvPr id="203" name="freeform-203"/>
+          <p:cNvSpPr/>
+          <p:nvPr/>
+        </p:nvSpPr>
+        <p:spPr>
+          <a:xfrm>
+            <a:off x="11604060" y="3165327"/>
+            <a:ext cx="95840" cy="77159"/>
           </a:xfrm>
           <a:custGeom>
             <a:avLst/>
@@ -11830,30 +11217,28 @@
             <a:cxnLst/>
             <a:rect l="0" t="0" r="0" b="0"/>
             <a:pathLst>
-              <a:path w="63893" h="51440">
+              <a:path w="95840" h="77159">
                 <a:moveTo>
-                  <a:pt x="0" y="541"/>
+                  <a:pt x="0" y="812"/>
                 </a:moveTo>
                 <a:lnTo>
-                  <a:pt x="63893" y="0"/>
+                  <a:pt x="95840" y="0"/>
                 </a:lnTo>
                 <a:lnTo>
-                  <a:pt x="25991" y="51440"/>
+                  <a:pt x="38986" y="77159"/>
                 </a:lnTo>
+                <a:close/>
               </a:path>
             </a:pathLst>
           </a:custGeom>
-          <a:noFill/>
-          <a:ln w="14288" cap="rnd">
-            <a:solidFill>
-              <a:srgbClr val="8D6A00"/>
-            </a:solidFill>
-          </a:ln>
-        </p:spPr>
-      </p:sp>
-      <p:sp>
-        <p:nvSpPr>
-          <p:cNvPr id="216" name="freeform-216"/>
+          <a:solidFill>
+            <a:srgbClr val="8D6A00"/>
+          </a:solidFill>
+        </p:spPr>
+      </p:sp>
+      <p:sp>
+        <p:nvSpPr>
+          <p:cNvPr id="204" name="freeform-204"/>
           <p:cNvSpPr/>
           <p:nvPr/>
         </p:nvSpPr>
@@ -11891,14 +11276,14 @@
       </p:sp>
       <p:sp>
         <p:nvSpPr>
-          <p:cNvPr id="217" name="freeform-217"/>
-          <p:cNvSpPr/>
-          <p:nvPr/>
-        </p:nvSpPr>
-        <p:spPr>
-          <a:xfrm>
-            <a:off x="12350458" y="3171825"/>
-            <a:ext cx="60617" cy="60617"/>
+          <p:cNvPr id="205" name="freeform-205"/>
+          <p:cNvSpPr/>
+          <p:nvPr/>
+        </p:nvSpPr>
+        <p:spPr>
+          <a:xfrm>
+            <a:off x="12330253" y="3161722"/>
+            <a:ext cx="90925" cy="90925"/>
           </a:xfrm>
           <a:custGeom>
             <a:avLst/>
@@ -11907,30 +11292,28 @@
             <a:cxnLst/>
             <a:rect l="0" t="0" r="0" b="0"/>
             <a:pathLst>
-              <a:path w="60617" h="60617">
+              <a:path w="90925" h="90925">
                 <a:moveTo>
-                  <a:pt x="0" y="20206"/>
+                  <a:pt x="0" y="30308"/>
                 </a:moveTo>
                 <a:lnTo>
-                  <a:pt x="60617" y="0"/>
+                  <a:pt x="90925" y="0"/>
                 </a:lnTo>
                 <a:lnTo>
-                  <a:pt x="40411" y="60617"/>
+                  <a:pt x="60617" y="90925"/>
                 </a:lnTo>
+                <a:close/>
               </a:path>
             </a:pathLst>
           </a:custGeom>
-          <a:noFill/>
-          <a:ln w="14288" cap="rnd">
-            <a:solidFill>
-              <a:srgbClr val="8D6A00"/>
-            </a:solidFill>
-          </a:ln>
+          <a:solidFill>
+            <a:srgbClr val="8D6A00"/>
+          </a:solidFill>
         </p:spPr>
       </p:sp>
       <p:cxnSp>
         <p:nvCxnSpPr>
-          <p:cNvPr id="218" name="Connector 217"/>
+          <p:cNvPr id="206" name="Connector 205"/>
           <p:cNvCxnSpPr/>
           <p:nvPr/>
         </p:nvCxnSpPr>
@@ -11966,14 +11349,14 @@
       </p:cxnSp>
       <p:sp>
         <p:nvSpPr>
-          <p:cNvPr id="219" name="freeform-219"/>
-          <p:cNvSpPr/>
-          <p:nvPr/>
-        </p:nvSpPr>
-        <p:spPr>
-          <a:xfrm>
-            <a:off x="9801225" y="2552700"/>
-            <a:ext cx="57150" cy="57150"/>
+          <p:cNvPr id="207" name="freeform-207"/>
+          <p:cNvSpPr/>
+          <p:nvPr/>
+        </p:nvSpPr>
+        <p:spPr>
+          <a:xfrm>
+            <a:off x="9786938" y="2538412"/>
+            <a:ext cx="85725" cy="85725"/>
           </a:xfrm>
           <a:custGeom>
             <a:avLst/>
@@ -11982,30 +11365,28 @@
             <a:cxnLst/>
             <a:rect l="0" t="0" r="0" b="0"/>
             <a:pathLst>
-              <a:path w="57150" h="57150">
+              <a:path w="85725" h="85725">
                 <a:moveTo>
-                  <a:pt x="0" y="57150"/>
+                  <a:pt x="0" y="85725"/>
                 </a:moveTo>
                 <a:lnTo>
-                  <a:pt x="28575" y="0"/>
+                  <a:pt x="42862" y="0"/>
                 </a:lnTo>
                 <a:lnTo>
-                  <a:pt x="57150" y="57150"/>
+                  <a:pt x="85725" y="85725"/>
                 </a:lnTo>
+                <a:close/>
               </a:path>
             </a:pathLst>
           </a:custGeom>
-          <a:noFill/>
-          <a:ln w="14288" cap="rnd">
-            <a:solidFill>
-              <a:srgbClr val="8D6A00"/>
-            </a:solidFill>
-          </a:ln>
+          <a:solidFill>
+            <a:srgbClr val="8D6A00"/>
+          </a:solidFill>
         </p:spPr>
       </p:sp>
       <p:cxnSp>
         <p:nvCxnSpPr>
-          <p:cNvPr id="220" name="Connector 219"/>
+          <p:cNvPr id="208" name="Connector 207"/>
           <p:cNvCxnSpPr/>
           <p:nvPr/>
         </p:nvCxnSpPr>
@@ -12041,14 +11422,14 @@
       </p:cxnSp>
       <p:sp>
         <p:nvSpPr>
-          <p:cNvPr id="221" name="freeform-221"/>
-          <p:cNvSpPr/>
-          <p:nvPr/>
-        </p:nvSpPr>
-        <p:spPr>
-          <a:xfrm>
-            <a:off x="10725150" y="2552700"/>
-            <a:ext cx="57150" cy="57150"/>
+          <p:cNvPr id="209" name="freeform-209"/>
+          <p:cNvSpPr/>
+          <p:nvPr/>
+        </p:nvSpPr>
+        <p:spPr>
+          <a:xfrm>
+            <a:off x="10710862" y="2538412"/>
+            <a:ext cx="85725" cy="85725"/>
           </a:xfrm>
           <a:custGeom>
             <a:avLst/>
@@ -12057,30 +11438,28 @@
             <a:cxnLst/>
             <a:rect l="0" t="0" r="0" b="0"/>
             <a:pathLst>
-              <a:path w="57150" h="57150">
+              <a:path w="85725" h="85725">
                 <a:moveTo>
-                  <a:pt x="0" y="57150"/>
+                  <a:pt x="0" y="85725"/>
                 </a:moveTo>
                 <a:lnTo>
-                  <a:pt x="28575" y="0"/>
+                  <a:pt x="42862" y="0"/>
                 </a:lnTo>
                 <a:lnTo>
-                  <a:pt x="57150" y="57150"/>
+                  <a:pt x="85725" y="85725"/>
                 </a:lnTo>
+                <a:close/>
               </a:path>
             </a:pathLst>
           </a:custGeom>
-          <a:noFill/>
-          <a:ln w="14288" cap="rnd">
-            <a:solidFill>
-              <a:srgbClr val="8D6A00"/>
-            </a:solidFill>
-          </a:ln>
+          <a:solidFill>
+            <a:srgbClr val="8D6A00"/>
+          </a:solidFill>
         </p:spPr>
       </p:sp>
       <p:cxnSp>
         <p:nvCxnSpPr>
-          <p:cNvPr id="222" name="Connector 221"/>
+          <p:cNvPr id="210" name="Connector 209"/>
           <p:cNvCxnSpPr/>
           <p:nvPr/>
         </p:nvCxnSpPr>
@@ -12116,14 +11495,14 @@
       </p:cxnSp>
       <p:sp>
         <p:nvSpPr>
-          <p:cNvPr id="223" name="freeform-223"/>
-          <p:cNvSpPr/>
-          <p:nvPr/>
-        </p:nvSpPr>
-        <p:spPr>
-          <a:xfrm>
-            <a:off x="11658600" y="2552700"/>
-            <a:ext cx="57150" cy="57150"/>
+          <p:cNvPr id="211" name="freeform-211"/>
+          <p:cNvSpPr/>
+          <p:nvPr/>
+        </p:nvSpPr>
+        <p:spPr>
+          <a:xfrm>
+            <a:off x="11644312" y="2538412"/>
+            <a:ext cx="85725" cy="85725"/>
           </a:xfrm>
           <a:custGeom>
             <a:avLst/>
@@ -12132,30 +11511,28 @@
             <a:cxnLst/>
             <a:rect l="0" t="0" r="0" b="0"/>
             <a:pathLst>
-              <a:path w="57150" h="57150">
+              <a:path w="85725" h="85725">
                 <a:moveTo>
-                  <a:pt x="0" y="57150"/>
+                  <a:pt x="0" y="85725"/>
                 </a:moveTo>
                 <a:lnTo>
-                  <a:pt x="28575" y="0"/>
+                  <a:pt x="42862" y="0"/>
                 </a:lnTo>
                 <a:lnTo>
-                  <a:pt x="57150" y="57150"/>
+                  <a:pt x="85725" y="85725"/>
                 </a:lnTo>
+                <a:close/>
               </a:path>
             </a:pathLst>
           </a:custGeom>
-          <a:noFill/>
-          <a:ln w="14288" cap="rnd">
-            <a:solidFill>
-              <a:srgbClr val="8D6A00"/>
-            </a:solidFill>
-          </a:ln>
-        </p:spPr>
-      </p:sp>
-      <p:sp>
-        <p:nvSpPr>
-          <p:cNvPr id="224" name="TextBox 223"/>
+          <a:solidFill>
+            <a:srgbClr val="8D6A00"/>
+          </a:solidFill>
+        </p:spPr>
+      </p:sp>
+      <p:sp>
+        <p:nvSpPr>
+          <p:cNvPr id="212" name="TextBox 211"/>
           <p:cNvSpPr txBox="1"/>
           <p:nvPr/>
         </p:nvSpPr>
@@ -12191,7 +11568,7 @@
       </p:sp>
       <p:sp>
         <p:nvSpPr>
-          <p:cNvPr id="225" name="TextBox 224"/>
+          <p:cNvPr id="213" name="TextBox 212"/>
           <p:cNvSpPr txBox="1"/>
           <p:nvPr/>
         </p:nvSpPr>
@@ -12227,7 +11604,7 @@
       </p:sp>
       <p:sp>
         <p:nvSpPr>
-          <p:cNvPr id="226" name="Rectangle 225"/>
+          <p:cNvPr id="214" name="Rectangle 213"/>
           <p:cNvSpPr/>
           <p:nvPr/>
         </p:nvSpPr>
@@ -12274,7 +11651,7 @@
       </p:sp>
       <p:sp>
         <p:nvSpPr>
-          <p:cNvPr id="227" name="TextBox 226"/>
+          <p:cNvPr id="215" name="TextBox 214"/>
           <p:cNvSpPr txBox="1"/>
           <p:nvPr/>
         </p:nvSpPr>
@@ -12310,7 +11687,7 @@
       </p:sp>
       <p:sp>
         <p:nvSpPr>
-          <p:cNvPr id="228" name="freeform-228"/>
+          <p:cNvPr id="216" name="freeform-216"/>
           <p:cNvSpPr/>
           <p:nvPr/>
         </p:nvSpPr>
@@ -12345,7 +11722,7 @@
             </a:pathLst>
           </a:custGeom>
           <a:noFill/>
-          <a:ln w="66675" cap="rnd">
+          <a:ln w="95250" cap="rnd">
             <a:solidFill>
               <a:srgbClr val="D87478"/>
             </a:solidFill>
@@ -12354,14 +11731,14 @@
       </p:sp>
       <p:sp>
         <p:nvSpPr>
-          <p:cNvPr id="229" name="freeform-229"/>
-          <p:cNvSpPr/>
-          <p:nvPr/>
-        </p:nvSpPr>
-        <p:spPr>
-          <a:xfrm>
-            <a:off x="1066800" y="5000625"/>
-            <a:ext cx="76200" cy="66675"/>
+          <p:cNvPr id="217" name="freeform-217"/>
+          <p:cNvSpPr/>
+          <p:nvPr/>
+        </p:nvSpPr>
+        <p:spPr>
+          <a:xfrm>
+            <a:off x="1009650" y="4981575"/>
+            <a:ext cx="190500" cy="190500"/>
           </a:xfrm>
           <a:custGeom>
             <a:avLst/>
@@ -12370,30 +11747,28 @@
             <a:cxnLst/>
             <a:rect l="0" t="0" r="0" b="0"/>
             <a:pathLst>
-              <a:path w="76200" h="66675">
+              <a:path w="190500" h="190500">
                 <a:moveTo>
-                  <a:pt x="0" y="66675"/>
+                  <a:pt x="0" y="190500"/>
                 </a:moveTo>
                 <a:lnTo>
-                  <a:pt x="38100" y="0"/>
+                  <a:pt x="95250" y="0"/>
                 </a:lnTo>
                 <a:lnTo>
-                  <a:pt x="76200" y="66675"/>
+                  <a:pt x="190500" y="190500"/>
                 </a:lnTo>
+                <a:close/>
               </a:path>
             </a:pathLst>
           </a:custGeom>
-          <a:noFill/>
-          <a:ln w="19050" cap="rnd">
-            <a:solidFill>
-              <a:srgbClr val="D87478"/>
-            </a:solidFill>
-          </a:ln>
-        </p:spPr>
-      </p:sp>
-      <p:sp>
-        <p:nvSpPr>
-          <p:cNvPr id="230" name="Rounded Rectangle 229"/>
+          <a:solidFill>
+            <a:srgbClr val="D87478"/>
+          </a:solidFill>
+        </p:spPr>
+      </p:sp>
+      <p:sp>
+        <p:nvSpPr>
+          <p:cNvPr id="218" name="Rounded Rectangle 217"/>
           <p:cNvSpPr/>
           <p:nvPr/>
         </p:nvSpPr>
@@ -12441,7 +11816,7 @@
       </p:sp>
       <p:sp>
         <p:nvSpPr>
-          <p:cNvPr id="231" name="freeform-231"/>
+          <p:cNvPr id="219" name="freeform-219"/>
           <p:cNvSpPr/>
           <p:nvPr/>
         </p:nvSpPr>
@@ -12486,7 +11861,7 @@
       </p:sp>
       <p:sp>
         <p:nvSpPr>
-          <p:cNvPr id="232" name="freeform-232"/>
+          <p:cNvPr id="220" name="freeform-220"/>
           <p:cNvSpPr/>
           <p:nvPr/>
         </p:nvSpPr>
@@ -12529,7 +11904,7 @@
       </p:sp>
       <p:sp>
         <p:nvSpPr>
-          <p:cNvPr id="233" name="freeform-233"/>
+          <p:cNvPr id="221" name="freeform-221"/>
           <p:cNvSpPr/>
           <p:nvPr/>
         </p:nvSpPr>
@@ -12572,7 +11947,7 @@
       </p:sp>
       <p:cxnSp>
         <p:nvCxnSpPr>
-          <p:cNvPr id="234" name="Connector 233"/>
+          <p:cNvPr id="222" name="Connector 221"/>
           <p:cNvCxnSpPr/>
           <p:nvPr/>
         </p:nvCxnSpPr>
@@ -12608,7 +11983,7 @@
       </p:cxnSp>
       <p:cxnSp>
         <p:nvCxnSpPr>
-          <p:cNvPr id="235" name="Connector 234"/>
+          <p:cNvPr id="223" name="Connector 222"/>
           <p:cNvCxnSpPr/>
           <p:nvPr/>
         </p:nvCxnSpPr>
@@ -12644,7 +12019,7 @@
       </p:cxnSp>
       <p:sp>
         <p:nvSpPr>
-          <p:cNvPr id="236" name="TextBox 235"/>
+          <p:cNvPr id="224" name="TextBox 223"/>
           <p:cNvSpPr txBox="1"/>
           <p:nvPr/>
         </p:nvSpPr>
@@ -12680,7 +12055,7 @@
       </p:sp>
       <p:sp>
         <p:nvSpPr>
-          <p:cNvPr id="237" name="Oval 236"/>
+          <p:cNvPr id="225" name="Oval 224"/>
           <p:cNvSpPr/>
           <p:nvPr/>
         </p:nvSpPr>
@@ -12724,7 +12099,7 @@
       </p:sp>
       <p:sp>
         <p:nvSpPr>
-          <p:cNvPr id="238" name="freeform-238"/>
+          <p:cNvPr id="226" name="freeform-226"/>
           <p:cNvSpPr/>
           <p:nvPr/>
         </p:nvSpPr>
@@ -12766,7 +12141,7 @@
       </p:sp>
       <p:sp>
         <p:nvSpPr>
-          <p:cNvPr id="239" name="freeform-239"/>
+          <p:cNvPr id="227" name="freeform-227"/>
           <p:cNvSpPr/>
           <p:nvPr/>
         </p:nvSpPr>
@@ -12808,7 +12183,7 @@
       </p:sp>
       <p:cxnSp>
         <p:nvCxnSpPr>
-          <p:cNvPr id="240" name="Connector 239"/>
+          <p:cNvPr id="228" name="Connector 227"/>
           <p:cNvCxnSpPr/>
           <p:nvPr/>
         </p:nvCxnSpPr>
@@ -12844,7 +12219,7 @@
       </p:cxnSp>
       <p:sp>
         <p:nvSpPr>
-          <p:cNvPr id="241" name="TextBox 240"/>
+          <p:cNvPr id="229" name="TextBox 228"/>
           <p:cNvSpPr txBox="1"/>
           <p:nvPr/>
         </p:nvSpPr>
@@ -12880,7 +12255,7 @@
       </p:sp>
       <p:cxnSp>
         <p:nvCxnSpPr>
-          <p:cNvPr id="242" name="Connector 241"/>
+          <p:cNvPr id="230" name="Connector 229"/>
           <p:cNvCxnSpPr/>
           <p:nvPr/>
         </p:nvCxnSpPr>
@@ -12892,7 +12267,7 @@
           <a:prstGeom prst="line">
             <a:avLst/>
           </a:prstGeom>
-          <a:ln w="57150" cap="rnd">
+          <a:ln w="95250" cap="rnd">
             <a:solidFill>
               <a:srgbClr val="D87478"/>
             </a:solidFill>
@@ -12916,14 +12291,14 @@
       </p:cxnSp>
       <p:sp>
         <p:nvSpPr>
-          <p:cNvPr id="243" name="freeform-243"/>
-          <p:cNvSpPr/>
-          <p:nvPr/>
-        </p:nvSpPr>
-        <p:spPr>
-          <a:xfrm>
-            <a:off x="5848350" y="5410200"/>
-            <a:ext cx="66675" cy="76200"/>
+          <p:cNvPr id="231" name="freeform-231"/>
+          <p:cNvSpPr/>
+          <p:nvPr/>
+        </p:nvSpPr>
+        <p:spPr>
+          <a:xfrm>
+            <a:off x="5829300" y="5353050"/>
+            <a:ext cx="190500" cy="190500"/>
           </a:xfrm>
           <a:custGeom>
             <a:avLst/>
@@ -12932,30 +12307,28 @@
             <a:cxnLst/>
             <a:rect l="0" t="0" r="0" b="0"/>
             <a:pathLst>
-              <a:path w="66675" h="76200">
+              <a:path w="190500" h="190500">
                 <a:moveTo>
-                  <a:pt x="66675" y="76200"/>
+                  <a:pt x="190500" y="190500"/>
                 </a:moveTo>
                 <a:lnTo>
-                  <a:pt x="0" y="38100"/>
+                  <a:pt x="0" y="95250"/>
                 </a:lnTo>
                 <a:lnTo>
-                  <a:pt x="66675" y="0"/>
+                  <a:pt x="190500" y="0"/>
                 </a:lnTo>
+                <a:close/>
               </a:path>
             </a:pathLst>
           </a:custGeom>
-          <a:noFill/>
-          <a:ln w="19050" cap="rnd">
-            <a:solidFill>
-              <a:srgbClr val="D87478"/>
-            </a:solidFill>
-          </a:ln>
-        </p:spPr>
-      </p:sp>
-      <p:sp>
-        <p:nvSpPr>
-          <p:cNvPr id="244" name="freeform-244"/>
+          <a:solidFill>
+            <a:srgbClr val="D87478"/>
+          </a:solidFill>
+        </p:spPr>
+      </p:sp>
+      <p:sp>
+        <p:nvSpPr>
+          <p:cNvPr id="232" name="freeform-232"/>
           <p:cNvSpPr/>
           <p:nvPr/>
         </p:nvSpPr>
@@ -12982,7 +12355,7 @@
             </a:pathLst>
           </a:custGeom>
           <a:noFill/>
-          <a:ln w="57150" cap="rnd">
+          <a:ln w="95250" cap="rnd">
             <a:solidFill>
               <a:srgbClr val="D87478"/>
             </a:solidFill>
@@ -12991,14 +12364,14 @@
       </p:sp>
       <p:sp>
         <p:nvSpPr>
-          <p:cNvPr id="245" name="freeform-245"/>
-          <p:cNvSpPr/>
-          <p:nvPr/>
-        </p:nvSpPr>
-        <p:spPr>
-          <a:xfrm>
-            <a:off x="9601200" y="5110445"/>
-            <a:ext cx="76356" cy="69811"/>
+          <p:cNvPr id="233" name="freeform-233"/>
+          <p:cNvSpPr/>
+          <p:nvPr/>
+        </p:nvSpPr>
+        <p:spPr>
+          <a:xfrm>
+            <a:off x="9583747" y="5016091"/>
+            <a:ext cx="212706" cy="174528"/>
           </a:xfrm>
           <a:custGeom>
             <a:avLst/>
@@ -13007,30 +12380,28 @@
             <a:cxnLst/>
             <a:rect l="0" t="0" r="0" b="0"/>
             <a:pathLst>
-              <a:path w="76356" h="69811">
+              <a:path w="212706" h="174528">
                 <a:moveTo>
-                  <a:pt x="76356" y="69811"/>
+                  <a:pt x="212706" y="174528"/>
                 </a:moveTo>
                 <a:lnTo>
-                  <a:pt x="0" y="61630"/>
+                  <a:pt x="0" y="163620"/>
                 </a:lnTo>
                 <a:lnTo>
-                  <a:pt x="45814" y="0"/>
+                  <a:pt x="136350" y="0"/>
                 </a:lnTo>
+                <a:close/>
               </a:path>
             </a:pathLst>
           </a:custGeom>
-          <a:noFill/>
-          <a:ln w="19050" cap="rnd">
-            <a:solidFill>
-              <a:srgbClr val="D87478"/>
-            </a:solidFill>
-          </a:ln>
+          <a:solidFill>
+            <a:srgbClr val="D87478"/>
+          </a:solidFill>
         </p:spPr>
       </p:sp>
       <p:cxnSp>
         <p:nvCxnSpPr>
-          <p:cNvPr id="246" name="Connector 245"/>
+          <p:cNvPr id="234" name="Connector 233"/>
           <p:cNvCxnSpPr/>
           <p:nvPr/>
         </p:nvCxnSpPr>
@@ -13066,14 +12437,14 @@
       </p:cxnSp>
       <p:sp>
         <p:nvSpPr>
-          <p:cNvPr id="247" name="freeform-247"/>
-          <p:cNvSpPr/>
-          <p:nvPr/>
-        </p:nvSpPr>
-        <p:spPr>
-          <a:xfrm>
-            <a:off x="9629775" y="5410200"/>
-            <a:ext cx="66675" cy="76200"/>
+          <p:cNvPr id="235" name="freeform-235"/>
+          <p:cNvSpPr/>
+          <p:nvPr/>
+        </p:nvSpPr>
+        <p:spPr>
+          <a:xfrm>
+            <a:off x="9601200" y="5391150"/>
+            <a:ext cx="114300" cy="114300"/>
           </a:xfrm>
           <a:custGeom>
             <a:avLst/>
@@ -13082,37 +12453,35 @@
             <a:cxnLst/>
             <a:rect l="0" t="0" r="0" b="0"/>
             <a:pathLst>
-              <a:path w="66675" h="76200">
+              <a:path w="114300" h="114300">
                 <a:moveTo>
-                  <a:pt x="0" y="76200"/>
+                  <a:pt x="0" y="114300"/>
                 </a:moveTo>
                 <a:lnTo>
-                  <a:pt x="66675" y="38100"/>
+                  <a:pt x="114300" y="57150"/>
                 </a:lnTo>
                 <a:lnTo>
                   <a:pt x="0" y="0"/>
                 </a:lnTo>
+                <a:close/>
               </a:path>
             </a:pathLst>
           </a:custGeom>
-          <a:noFill/>
-          <a:ln w="19050" cap="rnd">
-            <a:solidFill>
-              <a:srgbClr val="777777"/>
-            </a:solidFill>
-          </a:ln>
-        </p:spPr>
-      </p:sp>
-      <p:sp>
-        <p:nvSpPr>
-          <p:cNvPr id="248" name="freeform-248"/>
-          <p:cNvSpPr/>
-          <p:nvPr/>
-        </p:nvSpPr>
-        <p:spPr>
-          <a:xfrm>
-            <a:off x="11106150" y="5410200"/>
-            <a:ext cx="66675" cy="76200"/>
+          <a:solidFill>
+            <a:srgbClr val="777777"/>
+          </a:solidFill>
+        </p:spPr>
+      </p:sp>
+      <p:sp>
+        <p:nvSpPr>
+          <p:cNvPr id="236" name="freeform-236"/>
+          <p:cNvSpPr/>
+          <p:nvPr/>
+        </p:nvSpPr>
+        <p:spPr>
+          <a:xfrm>
+            <a:off x="11077575" y="5391150"/>
+            <a:ext cx="114300" cy="114300"/>
           </a:xfrm>
           <a:custGeom>
             <a:avLst/>
@@ -13121,30 +12490,28 @@
             <a:cxnLst/>
             <a:rect l="0" t="0" r="0" b="0"/>
             <a:pathLst>
-              <a:path w="66675" h="76200">
+              <a:path w="114300" h="114300">
                 <a:moveTo>
                   <a:pt x="0" y="0"/>
                 </a:moveTo>
                 <a:lnTo>
-                  <a:pt x="66675" y="38100"/>
+                  <a:pt x="114300" y="57150"/>
                 </a:lnTo>
                 <a:lnTo>
-                  <a:pt x="0" y="76200"/>
+                  <a:pt x="0" y="114300"/>
                 </a:lnTo>
+                <a:close/>
               </a:path>
             </a:pathLst>
           </a:custGeom>
-          <a:noFill/>
-          <a:ln w="19050" cap="rnd">
-            <a:solidFill>
-              <a:srgbClr val="777777"/>
-            </a:solidFill>
-          </a:ln>
-        </p:spPr>
-      </p:sp>
-      <p:sp>
-        <p:nvSpPr>
-          <p:cNvPr id="249" name="TextBox 248"/>
+          <a:solidFill>
+            <a:srgbClr val="777777"/>
+          </a:solidFill>
+        </p:spPr>
+      </p:sp>
+      <p:sp>
+        <p:nvSpPr>
+          <p:cNvPr id="237" name="TextBox 236"/>
           <p:cNvSpPr txBox="1"/>
           <p:nvPr/>
         </p:nvSpPr>
@@ -13180,7 +12547,7 @@
       </p:sp>
       <p:sp>
         <p:nvSpPr>
-          <p:cNvPr id="250" name="Oval 249"/>
+          <p:cNvPr id="238" name="Oval 237"/>
           <p:cNvSpPr/>
           <p:nvPr/>
         </p:nvSpPr>
@@ -13226,7 +12593,7 @@
       </p:sp>
       <p:sp>
         <p:nvSpPr>
-          <p:cNvPr id="251" name="freeform-251"/>
+          <p:cNvPr id="239" name="freeform-239"/>
           <p:cNvSpPr/>
           <p:nvPr/>
         </p:nvSpPr>
@@ -13282,7 +12649,7 @@
       </p:sp>
       <p:sp>
         <p:nvSpPr>
-          <p:cNvPr id="252" name="freeform-252"/>
+          <p:cNvPr id="240" name="freeform-240"/>
           <p:cNvSpPr/>
           <p:nvPr/>
         </p:nvSpPr>
@@ -13339,7 +12706,7 @@
       </p:sp>
       <p:sp>
         <p:nvSpPr>
-          <p:cNvPr id="253" name="freeform-253"/>
+          <p:cNvPr id="241" name="freeform-241"/>
           <p:cNvSpPr/>
           <p:nvPr/>
         </p:nvSpPr>
@@ -13392,7 +12759,7 @@
       </p:sp>
       <p:sp>
         <p:nvSpPr>
-          <p:cNvPr id="254" name="freeform-254"/>
+          <p:cNvPr id="242" name="freeform-242"/>
           <p:cNvSpPr/>
           <p:nvPr/>
         </p:nvSpPr>
@@ -13446,7 +12813,7 @@
       </p:sp>
       <p:sp>
         <p:nvSpPr>
-          <p:cNvPr id="255" name="freeform-255"/>
+          <p:cNvPr id="243" name="freeform-243"/>
           <p:cNvSpPr/>
           <p:nvPr/>
         </p:nvSpPr>
@@ -13492,7 +12859,7 @@
       </p:sp>
       <p:sp>
         <p:nvSpPr>
-          <p:cNvPr id="256" name="TextBox 255"/>
+          <p:cNvPr id="244" name="TextBox 243"/>
           <p:cNvSpPr txBox="1"/>
           <p:nvPr/>
         </p:nvSpPr>

--- a/examples/01-modular-agent/redraw.pptx
+++ b/examples/01-modular-agent/redraw.pptx
@@ -5378,7 +5378,16 @@
                 </a:solidFill>
                 <a:latin typeface="Times New Roman"/>
               </a:rPr>
-              <a:t>eᵥ</a:t>
+              <a:t>e</a:t>
+            </a:r>
+            <a:r>
+              <a:rPr sz="975" i="1" b="1" baseline="-25000">
+                <a:solidFill>
+                  <a:srgbClr val="111111"/>
+                </a:solidFill>
+                <a:latin typeface="Times New Roman"/>
+              </a:rPr>
+              <a:t>v</a:t>
             </a:r>
           </a:p>
         </p:txBody>

--- a/examples/01-modular-agent/redraw.pptx
+++ b/examples/01-modular-agent/redraw.pptx
@@ -3314,6 +3314,10 @@
             </a:solidFill>
           </a:ln>
         </p:spPr>
+        <p:txBody>
+          <a:bodyPr/>
+          <a:p/>
+        </p:txBody>
       </p:sp>
       <p:sp>
         <p:nvSpPr>
@@ -3459,6 +3463,10 @@
             <a:srgbClr val="777777"/>
           </a:solidFill>
         </p:spPr>
+        <p:txBody>
+          <a:bodyPr/>
+          <a:p/>
+        </p:txBody>
       </p:sp>
       <p:sp>
         <p:nvSpPr>
@@ -3647,6 +3655,10 @@
             <a:srgbClr val="777777"/>
           </a:solidFill>
         </p:spPr>
+        <p:txBody>
+          <a:bodyPr/>
+          <a:p/>
+        </p:txBody>
       </p:sp>
       <p:sp>
         <p:nvSpPr>
@@ -3817,42 +3829,98 @@
           </a:p>
         </p:txBody>
       </p:sp>
-      <p:sp>
-        <p:nvSpPr>
-          <p:cNvPr id="20" name="TextBox 19"/>
-          <p:cNvSpPr txBox="1"/>
-          <p:nvPr/>
-        </p:nvSpPr>
-        <p:spPr>
-          <a:xfrm>
-            <a:off x="6243638" y="58103"/>
-            <a:ext cx="104775" cy="261938"/>
-          </a:xfrm>
-          <a:prstGeom prst="rect">
-            <a:avLst/>
-          </a:prstGeom>
-          <a:noFill/>
-          <a:effectLst/>
-        </p:spPr>
-        <p:txBody>
-          <a:bodyPr wrap="none" anchor="t" lIns="0" rIns="0" tIns="0" bIns="0">
-            <a:spAutoFit/>
-          </a:bodyPr>
-          <a:lstStyle/>
-          <a:p>
-            <a:pPr algn="ctr"/>
-            <a:r>
-              <a:rPr sz="1650" i="1" b="1">
-                <a:solidFill>
-                  <a:srgbClr val="111111"/>
-                </a:solidFill>
-                <a:latin typeface="Times New Roman"/>
-              </a:rPr>
-              <a:t>τ</a:t>
-            </a:r>
-          </a:p>
-        </p:txBody>
-      </p:sp>
+      <mc:AlternateContent xmlns:mc="http://schemas.openxmlformats.org/markup-compatibility/2006">
+        <mc:Choice xmlns:a14="http://schemas.microsoft.com/office/drawing/2010/main" Requires="a14">
+          <p:sp>
+            <p:nvSpPr>
+              <p:cNvPr id="20" name="math:001" descr="AI_AUTOFIGURE_NATIVE_MATH_V1:eyJjb250ZW50X3J1bnMiOlt7ImNhbm9uaWNhbF9sYXRleCI6IlxcdGF1IiwiZm9ybXVsYV9pZCI6IkVRMDAxIiwia2luZCI6Im1hdGgiLCJsYXRleF9zaGEyNTYiOiI1NWQxODIzNTQ1YjViNGMzY2JjNDJiNzg0YzVlODQ2MDVmZmJlOGU1OWQxZGVlOTc4MmNkODc3NDFlZWY5ZGMzIiwibW9kZSI6ImlubGluZSIsIm9tbWxfc2hhMjU2IjoiNjI3NThjYWJiNjU4Yjc3NjgxYmFhNjE0ZmE0MDA1M2M0NDliNWZjZTkzMmYxYzlhNGQxZTNhMTBlZjI2MWFiMiIsInNlbWFudGljX29tbWxfcHJvZmlsZSI6Im9mZmljZS1tYXRoLXNlbWFudGljLXYyIiwic2VtYW50aWNfb21tbF9zaGEyNTYiOiIxZjMyN2Q3M2RkZGIzMWY1YWJjZmZiY2QwODNlMWJmOGIwNWEzMGY2ZGZkMDk2ZWFjZjdlYjljYTBlMTBhMzY4In1dLCJmb3JtdWxhcyI6W3siY2Fub25pY2FsX2xhdGV4IjoiXFx0YXUiLCJmb3JtdWxhX2lkIjoiRVEwMDEiLCJsYXRleF9zaGEyNTYiOiI1NWQxODIzNTQ1YjViNGMzY2JjNDJiNzg0YzVlODQ2MDVmZmJlOGU1OWQxZGVlOTc4MmNkODc3NDFlZWY5ZGMzIiwibW9kZSI6ImlubGluZSIsIm9tbWxfc2hhMjU2IjoiNjI3NThjYWJiNjU4Yjc3NjgxYmFhNjE0ZmE0MDA1M2M0NDliNWZjZTkzMmYxYzlhNGQxZTNhMTBlZjI2MWFiMiIsInNlbWFudGljX29tbWxfcHJvZmlsZSI6Im9mZmljZS1tYXRoLXNlbWFudGljLXYyIiwic2VtYW50aWNfb21tbF9zaGEyNTYiOiIxZjMyN2Q3M2RkZGIzMWY1YWJjZmZiY2QwODNlMWJmOGIwNWEzMGY2ZGZkMDk2ZWFjZjdlYjljYTBlMTBhMzY4In1dLCJraW5kIjoibmF0aXZlX29mZmljZV9tYXRoIiwicGxhY2Vob2xkZXJfbmFtZSI6Im1hdGg6MDAxIiwic2NoZW1hX3ZlcnNpb24iOiIxLjAifQ=="/>
+              <p:cNvSpPr txBox="1"/>
+              <p:nvPr/>
+            </p:nvSpPr>
+            <p:spPr>
+              <a:xfrm>
+                <a:off x="6243638" y="58103"/>
+                <a:ext cx="104775" cy="261938"/>
+              </a:xfrm>
+              <a:prstGeom prst="rect">
+                <a:avLst/>
+              </a:prstGeom>
+              <a:noFill/>
+              <a:effectLst/>
+            </p:spPr>
+            <p:txBody>
+              <a:bodyPr wrap="none" anchor="t" lIns="0" rIns="0" tIns="0" bIns="0">
+                <a:spAutoFit/>
+              </a:bodyPr>
+              <a:lstStyle/>
+              <a:p>
+                <a:pPr algn="ctr"/>
+                <a14:m>
+                  <m:oMath xmlns:m="http://schemas.openxmlformats.org/officeDocument/2006/math">
+                    <m:r>
+                      <a:rPr lang="en-US" dirty="0" sz="1650">
+                        <a:solidFill>
+                          <a:srgbClr val="111111"/>
+                        </a:solidFill>
+                        <a:latin typeface="Cambria Math"/>
+                      </a:rPr>
+                      <m:t>τ</m:t>
+                    </m:r>
+                  </m:oMath>
+                </a14:m>
+                <a:endParaRPr lang="en-US" dirty="0" sz="1650">
+                  <a:solidFill>
+                    <a:srgbClr val="111111"/>
+                  </a:solidFill>
+                  <a:latin typeface="Cambria Math"/>
+                </a:endParaRPr>
+              </a:p>
+            </p:txBody>
+          </p:sp>
+        </mc:Choice>
+        <mc:Fallback>
+          <p:sp>
+            <p:nvSpPr>
+              <p:cNvPr id="20" name="math:001" descr="AI_AUTOFIGURE_MATH_FALLBACK_ONLY_V1:eyJjb250ZW50X3J1bnMiOlt7ImNhbm9uaWNhbF9sYXRleCI6IlxcdGF1IiwiZm9ybXVsYV9pZCI6IkVRMDAxIiwia2luZCI6Im1hdGgiLCJsYXRleF9zaGEyNTYiOiI1NWQxODIzNTQ1YjViNGMzY2JjNDJiNzg0YzVlODQ2MDVmZmJlOGU1OWQxZGVlOTc4MmNkODc3NDFlZWY5ZGMzIiwibW9kZSI6ImlubGluZSIsIm9tbWxfc2hhMjU2IjoiNjI3NThjYWJiNjU4Yjc3NjgxYmFhNjE0ZmE0MDA1M2M0NDliNWZjZTkzMmYxYzlhNGQxZTNhMTBlZjI2MWFiMiIsInNlbWFudGljX29tbWxfcHJvZmlsZSI6Im9mZmljZS1tYXRoLXNlbWFudGljLXYyIiwic2VtYW50aWNfb21tbF9zaGEyNTYiOiIxZjMyN2Q3M2RkZGIzMWY1YWJjZmZiY2QwODNlMWJmOGIwNWEzMGY2ZGZkMDk2ZWFjZjdlYjljYTBlMTBhMzY4In1dLCJmb3JtdWxhcyI6W3siY2Fub25pY2FsX2xhdGV4IjoiXFx0YXUiLCJmb3JtdWxhX2lkIjoiRVEwMDEiLCJsYXRleF9zaGEyNTYiOiI1NWQxODIzNTQ1YjViNGMzY2JjNDJiNzg0YzVlODQ2MDVmZmJlOGU1OWQxZGVlOTc4MmNkODc3NDFlZWY5ZGMzIiwibW9kZSI6ImlubGluZSIsIm9tbWxfc2hhMjU2IjoiNjI3NThjYWJiNjU4Yjc3NjgxYmFhNjE0ZmE0MDA1M2M0NDliNWZjZTkzMmYxYzlhNGQxZTNhMTBlZjI2MWFiMiIsInNlbWFudGljX29tbWxfcHJvZmlsZSI6Im9mZmljZS1tYXRoLXNlbWFudGljLXYyIiwic2VtYW50aWNfb21tbF9zaGEyNTYiOiIxZjMyN2Q3M2RkZGIzMWY1YWJjZmZiY2QwODNlMWJmOGIwNWEzMGY2ZGZkMDk2ZWFjZjdlYjljYTBlMTBhMzY4In1dLCJraW5kIjoibmF0aXZlX29mZmljZV9tYXRoIiwicGxhY2Vob2xkZXJfbmFtZSI6Im1hdGg6MDAxIiwic2NoZW1hX3ZlcnNpb24iOiIxLjAifQ=="/>
+              <p:cNvSpPr txBox="1"/>
+              <p:nvPr/>
+            </p:nvSpPr>
+            <p:spPr>
+              <a:xfrm>
+                <a:off x="6243638" y="58103"/>
+                <a:ext cx="104775" cy="261938"/>
+              </a:xfrm>
+              <a:prstGeom prst="rect">
+                <a:avLst/>
+              </a:prstGeom>
+              <a:noFill/>
+              <a:effectLst/>
+            </p:spPr>
+            <p:txBody>
+              <a:bodyPr wrap="none" anchor="t" lIns="0" rIns="0" tIns="0" bIns="0">
+                <a:spAutoFit/>
+              </a:bodyPr>
+              <a:lstStyle/>
+              <a:p>
+                <a:pPr algn="ctr"/>
+                <a:r>
+                  <a:rPr lang="en-US" dirty="0" sz="1650">
+                    <a:solidFill>
+                      <a:srgbClr val="111111"/>
+                    </a:solidFill>
+                  </a:rPr>
+                  <a:t>\(\tau\)</a:t>
+                </a:r>
+                <a:endParaRPr lang="en-US" dirty="0" sz="1650">
+                  <a:solidFill>
+                    <a:srgbClr val="111111"/>
+                  </a:solidFill>
+                </a:endParaRPr>
+              </a:p>
+            </p:txBody>
+          </p:sp>
+        </mc:Fallback>
+      </mc:AlternateContent>
       <p:cxnSp>
         <p:nvCxnSpPr>
           <p:cNvPr id="21" name="Connector 20"/>
@@ -3925,6 +3993,10 @@
             <a:srgbClr val="777777"/>
           </a:solidFill>
         </p:spPr>
+        <p:txBody>
+          <a:bodyPr/>
+          <a:p/>
+        </p:txBody>
       </p:sp>
       <p:sp>
         <p:nvSpPr>
@@ -4005,51 +4077,113 @@
           </a:p>
         </p:txBody>
       </p:sp>
-      <p:sp>
-        <p:nvSpPr>
-          <p:cNvPr id="25" name="TextBox 24"/>
-          <p:cNvSpPr txBox="1"/>
-          <p:nvPr/>
-        </p:nvSpPr>
-        <p:spPr>
-          <a:xfrm>
-            <a:off x="8629650" y="456248"/>
-            <a:ext cx="380619" cy="214312"/>
-          </a:xfrm>
-          <a:prstGeom prst="rect">
-            <a:avLst/>
-          </a:prstGeom>
-          <a:noFill/>
-          <a:effectLst/>
-        </p:spPr>
-        <p:txBody>
-          <a:bodyPr wrap="none" anchor="t" lIns="0" rIns="0" tIns="0" bIns="0">
-            <a:spAutoFit/>
-          </a:bodyPr>
-          <a:lstStyle/>
-          <a:p>
-            <a:pPr algn="l"/>
-            <a:r>
-              <a:rPr sz="1350" i="1" b="1">
-                <a:solidFill>
-                  <a:srgbClr val="111111"/>
-                </a:solidFill>
-                <a:latin typeface="Times New Roman"/>
-              </a:rPr>
-              <a:t>f</a:t>
-            </a:r>
-            <a:r>
-              <a:rPr sz="975" i="1" b="1" baseline="-25000">
-                <a:solidFill>
-                  <a:srgbClr val="111111"/>
-                </a:solidFill>
-                <a:latin typeface="Times New Roman"/>
-              </a:rPr>
-              <a:t>map</a:t>
-            </a:r>
-          </a:p>
-        </p:txBody>
-      </p:sp>
+      <mc:AlternateContent xmlns:mc="http://schemas.openxmlformats.org/markup-compatibility/2006">
+        <mc:Choice xmlns:a14="http://schemas.microsoft.com/office/drawing/2010/main" Requires="a14">
+          <p:sp>
+            <p:nvSpPr>
+              <p:cNvPr id="25" name="math:002" descr="AI_AUTOFIGURE_NATIVE_MATH_V1:eyJjb250ZW50X3J1bnMiOlt7ImNhbm9uaWNhbF9sYXRleCI6ImZfe21hcH0iLCJmb3JtdWxhX2lkIjoiRVEwMDIiLCJraW5kIjoibWF0aCIsImxhdGV4X3NoYTI1NiI6IjU3MWIwZGZjYzU5NDUzMDFiMDU2Y2I1Mzc2YzZhYzQ1MDM5ODY0ZTYxYjU0OGQ2ZWM2NDhhNGQ2NzgxZTAyZmQiLCJtb2RlIjoiaW5saW5lIiwib21tbF9zaGEyNTYiOiIwYjY0N2UwMjhhZjI2MTk5NjIyNDYwZjhhNGFkYzNkN2I1M2U3MGMxZTRlM2RjYjcyN2IwZjlmOWMzODc3OGJjIiwic2VtYW50aWNfb21tbF9wcm9maWxlIjoib2ZmaWNlLW1hdGgtc2VtYW50aWMtdjIiLCJzZW1hbnRpY19vbW1sX3NoYTI1NiI6ImI4Yzg4NzY2ZWQ2NDRiZGVlYTJkZThkMTUyOWYyYzg5N2U5NzM4ODYyMTllOTI1ODBmODExZjAyOGVhNmRjYzcifV0sImZvcm11bGFzIjpbeyJjYW5vbmljYWxfbGF0ZXgiOiJmX3ttYXB9IiwiZm9ybXVsYV9pZCI6IkVRMDAyIiwibGF0ZXhfc2hhMjU2IjoiNTcxYjBkZmNjNTk0NTMwMWIwNTZjYjUzNzZjNmFjNDUwMzk4NjRlNjFiNTQ4ZDZlYzY0OGE0ZDY3ODFlMDJmZCIsIm1vZGUiOiJpbmxpbmUiLCJvbW1sX3NoYTI1NiI6IjBiNjQ3ZTAyOGFmMjYxOTk2MjI0NjBmOGE0YWRjM2Q3YjUzZTcwYzFlNGUzZGNiNzI3YjBmOWY5YzM4Nzc4YmMiLCJzZW1hbnRpY19vbW1sX3Byb2ZpbGUiOiJvZmZpY2UtbWF0aC1zZW1hbnRpYy12MiIsInNlbWFudGljX29tbWxfc2hhMjU2IjoiYjhjODg3NjZlZDY0NGJkZWVhMmRlOGQxNTI5ZjJjODk3ZTk3Mzg4NjIxOWU5MjU4MGY4MTFmMDI4ZWE2ZGNjNyJ9XSwia2luZCI6Im5hdGl2ZV9vZmZpY2VfbWF0aCIsInBsYWNlaG9sZGVyX25hbWUiOiJtYXRoOjAwMiIsInNjaGVtYV92ZXJzaW9uIjoiMS4wIn0="/>
+              <p:cNvSpPr txBox="1"/>
+              <p:nvPr/>
+            </p:nvSpPr>
+            <p:spPr>
+              <a:xfrm>
+                <a:off x="8629650" y="456248"/>
+                <a:ext cx="380619" cy="214312"/>
+              </a:xfrm>
+              <a:prstGeom prst="rect">
+                <a:avLst/>
+              </a:prstGeom>
+              <a:noFill/>
+              <a:effectLst/>
+            </p:spPr>
+            <p:txBody>
+              <a:bodyPr wrap="none" anchor="t" lIns="0" rIns="0" tIns="0" bIns="0">
+                <a:spAutoFit/>
+              </a:bodyPr>
+              <a:lstStyle/>
+              <a:p>
+                <a:pPr algn="l"/>
+                <a14:m>
+                  <m:oMath xmlns:m="http://schemas.openxmlformats.org/officeDocument/2006/math">
+                    <m:sSub>
+                      <m:e>
+                        <m:r>
+                          <a:rPr lang="en-US" dirty="0" sz="1350">
+                            <a:solidFill>
+                              <a:srgbClr val="111111"/>
+                            </a:solidFill>
+                            <a:latin typeface="Cambria Math"/>
+                          </a:rPr>
+                          <m:t>f</m:t>
+                        </m:r>
+                      </m:e>
+                      <m:sub>
+                        <m:r>
+                          <a:rPr lang="en-US" dirty="0" sz="1350">
+                            <a:solidFill>
+                              <a:srgbClr val="111111"/>
+                            </a:solidFill>
+                            <a:latin typeface="Cambria Math"/>
+                          </a:rPr>
+                          <m:t>map</m:t>
+                        </m:r>
+                      </m:sub>
+                    </m:sSub>
+                  </m:oMath>
+                </a14:m>
+                <a:endParaRPr lang="en-US" dirty="0" sz="1350">
+                  <a:solidFill>
+                    <a:srgbClr val="111111"/>
+                  </a:solidFill>
+                  <a:latin typeface="Cambria Math"/>
+                </a:endParaRPr>
+              </a:p>
+            </p:txBody>
+          </p:sp>
+        </mc:Choice>
+        <mc:Fallback>
+          <p:sp>
+            <p:nvSpPr>
+              <p:cNvPr id="25" name="math:002" descr="AI_AUTOFIGURE_MATH_FALLBACK_ONLY_V1:eyJjb250ZW50X3J1bnMiOlt7ImNhbm9uaWNhbF9sYXRleCI6ImZfe21hcH0iLCJmb3JtdWxhX2lkIjoiRVEwMDIiLCJraW5kIjoibWF0aCIsImxhdGV4X3NoYTI1NiI6IjU3MWIwZGZjYzU5NDUzMDFiMDU2Y2I1Mzc2YzZhYzQ1MDM5ODY0ZTYxYjU0OGQ2ZWM2NDhhNGQ2NzgxZTAyZmQiLCJtb2RlIjoiaW5saW5lIiwib21tbF9zaGEyNTYiOiIwYjY0N2UwMjhhZjI2MTk5NjIyNDYwZjhhNGFkYzNkN2I1M2U3MGMxZTRlM2RjYjcyN2IwZjlmOWMzODc3OGJjIiwic2VtYW50aWNfb21tbF9wcm9maWxlIjoib2ZmaWNlLW1hdGgtc2VtYW50aWMtdjIiLCJzZW1hbnRpY19vbW1sX3NoYTI1NiI6ImI4Yzg4NzY2ZWQ2NDRiZGVlYTJkZThkMTUyOWYyYzg5N2U5NzM4ODYyMTllOTI1ODBmODExZjAyOGVhNmRjYzcifV0sImZvcm11bGFzIjpbeyJjYW5vbmljYWxfbGF0ZXgiOiJmX3ttYXB9IiwiZm9ybXVsYV9pZCI6IkVRMDAyIiwibGF0ZXhfc2hhMjU2IjoiNTcxYjBkZmNjNTk0NTMwMWIwNTZjYjUzNzZjNmFjNDUwMzk4NjRlNjFiNTQ4ZDZlYzY0OGE0ZDY3ODFlMDJmZCIsIm1vZGUiOiJpbmxpbmUiLCJvbW1sX3NoYTI1NiI6IjBiNjQ3ZTAyOGFmMjYxOTk2MjI0NjBmOGE0YWRjM2Q3YjUzZTcwYzFlNGUzZGNiNzI3YjBmOWY5YzM4Nzc4YmMiLCJzZW1hbnRpY19vbW1sX3Byb2ZpbGUiOiJvZmZpY2UtbWF0aC1zZW1hbnRpYy12MiIsInNlbWFudGljX29tbWxfc2hhMjU2IjoiYjhjODg3NjZlZDY0NGJkZWVhMmRlOGQxNTI5ZjJjODk3ZTk3Mzg4NjIxOWU5MjU4MGY4MTFmMDI4ZWE2ZGNjNyJ9XSwia2luZCI6Im5hdGl2ZV9vZmZpY2VfbWF0aCIsInBsYWNlaG9sZGVyX25hbWUiOiJtYXRoOjAwMiIsInNjaGVtYV92ZXJzaW9uIjoiMS4wIn0="/>
+              <p:cNvSpPr txBox="1"/>
+              <p:nvPr/>
+            </p:nvSpPr>
+            <p:spPr>
+              <a:xfrm>
+                <a:off x="8629650" y="456248"/>
+                <a:ext cx="380619" cy="214312"/>
+              </a:xfrm>
+              <a:prstGeom prst="rect">
+                <a:avLst/>
+              </a:prstGeom>
+              <a:noFill/>
+              <a:effectLst/>
+            </p:spPr>
+            <p:txBody>
+              <a:bodyPr wrap="none" anchor="t" lIns="0" rIns="0" tIns="0" bIns="0">
+                <a:spAutoFit/>
+              </a:bodyPr>
+              <a:lstStyle/>
+              <a:p>
+                <a:pPr algn="l"/>
+                <a:r>
+                  <a:rPr lang="en-US" dirty="0" sz="1350">
+                    <a:solidFill>
+                      <a:srgbClr val="111111"/>
+                    </a:solidFill>
+                  </a:rPr>
+                  <a:t>\(f_{map}\)</a:t>
+                </a:r>
+                <a:endParaRPr lang="en-US" dirty="0" sz="1350">
+                  <a:solidFill>
+                    <a:srgbClr val="111111"/>
+                  </a:solidFill>
+                </a:endParaRPr>
+              </a:p>
+            </p:txBody>
+          </p:sp>
+        </mc:Fallback>
+      </mc:AlternateContent>
       <p:sp>
         <p:nvSpPr>
           <p:cNvPr id="26" name="freeform-26"/>
@@ -4085,6 +4219,10 @@
             </a:solidFill>
           </a:ln>
         </p:spPr>
+        <p:txBody>
+          <a:bodyPr/>
+          <a:p/>
+        </p:txBody>
       </p:sp>
       <p:sp>
         <p:nvSpPr>
@@ -4122,6 +4260,10 @@
             <a:srgbClr val="777777"/>
           </a:solidFill>
         </p:spPr>
+        <p:txBody>
+          <a:bodyPr/>
+          <a:p/>
+        </p:txBody>
       </p:sp>
       <p:cxnSp>
         <p:nvCxnSpPr>
@@ -4195,6 +4337,10 @@
             <a:srgbClr val="3567B7"/>
           </a:solidFill>
         </p:spPr>
+        <p:txBody>
+          <a:bodyPr/>
+          <a:p/>
+        </p:txBody>
       </p:sp>
       <p:sp>
         <p:nvSpPr>
@@ -4682,6 +4828,10 @@
             <a:lin ang="5400000" scaled="1"/>
           </a:gradFill>
         </p:spPr>
+        <p:txBody>
+          <a:bodyPr/>
+          <a:p/>
+        </p:txBody>
       </p:sp>
       <p:pic>
         <p:nvPicPr>
@@ -4814,6 +4964,10 @@
             </a:solidFill>
           </a:ln>
         </p:spPr>
+        <p:txBody>
+          <a:bodyPr/>
+          <a:p/>
+        </p:txBody>
       </p:sp>
       <p:sp>
         <p:nvSpPr>
@@ -4851,6 +5005,10 @@
             <a:srgbClr val="EF7D2B"/>
           </a:solidFill>
         </p:spPr>
+        <p:txBody>
+          <a:bodyPr/>
+          <a:p/>
+        </p:txBody>
       </p:sp>
       <p:sp>
         <p:nvSpPr>
@@ -4887,6 +5045,10 @@
             </a:solidFill>
           </a:ln>
         </p:spPr>
+        <p:txBody>
+          <a:bodyPr/>
+          <a:p/>
+        </p:txBody>
       </p:sp>
       <p:sp>
         <p:nvSpPr>
@@ -4924,6 +5086,10 @@
             <a:srgbClr val="3567B7"/>
           </a:solidFill>
         </p:spPr>
+        <p:txBody>
+          <a:bodyPr/>
+          <a:p/>
+        </p:txBody>
       </p:sp>
       <p:sp>
         <p:nvSpPr>
@@ -5227,6 +5393,10 @@
             <a:srgbClr val="EF7D2B"/>
           </a:solidFill>
         </p:spPr>
+        <p:txBody>
+          <a:bodyPr/>
+          <a:p/>
+        </p:txBody>
       </p:sp>
       <p:cxnSp>
         <p:nvCxnSpPr>
@@ -5300,6 +5470,10 @@
             <a:srgbClr val="3567B7"/>
           </a:solidFill>
         </p:spPr>
+        <p:txBody>
+          <a:bodyPr/>
+          <a:p/>
+        </p:txBody>
       </p:sp>
       <p:sp>
         <p:nvSpPr>
@@ -5347,51 +5521,113 @@
           </a:p>
         </p:txBody>
       </p:sp>
-      <p:sp>
-        <p:nvSpPr>
-          <p:cNvPr id="60" name="TextBox 59"/>
-          <p:cNvSpPr txBox="1"/>
-          <p:nvPr/>
-        </p:nvSpPr>
-        <p:spPr>
-          <a:xfrm>
-            <a:off x="3401568" y="1742599"/>
-            <a:ext cx="188214" cy="226219"/>
-          </a:xfrm>
-          <a:prstGeom prst="rect">
-            <a:avLst/>
-          </a:prstGeom>
-          <a:noFill/>
-          <a:effectLst/>
-        </p:spPr>
-        <p:txBody>
-          <a:bodyPr wrap="none" anchor="t" lIns="0" rIns="0" tIns="0" bIns="0">
-            <a:spAutoFit/>
-          </a:bodyPr>
-          <a:lstStyle/>
-          <a:p>
-            <a:pPr algn="ctr"/>
-            <a:r>
-              <a:rPr sz="1425" i="1" b="1">
-                <a:solidFill>
-                  <a:srgbClr val="111111"/>
-                </a:solidFill>
-                <a:latin typeface="Times New Roman"/>
-              </a:rPr>
-              <a:t>e</a:t>
-            </a:r>
-            <a:r>
-              <a:rPr sz="975" i="1" b="1" baseline="-25000">
-                <a:solidFill>
-                  <a:srgbClr val="111111"/>
-                </a:solidFill>
-                <a:latin typeface="Times New Roman"/>
-              </a:rPr>
-              <a:t>v</a:t>
-            </a:r>
-          </a:p>
-        </p:txBody>
-      </p:sp>
+      <mc:AlternateContent xmlns:mc="http://schemas.openxmlformats.org/markup-compatibility/2006">
+        <mc:Choice xmlns:a14="http://schemas.microsoft.com/office/drawing/2010/main" Requires="a14">
+          <p:sp>
+            <p:nvSpPr>
+              <p:cNvPr id="60" name="math:003" descr="AI_AUTOFIGURE_NATIVE_MATH_V1:eyJjb250ZW50X3J1bnMiOlt7ImNhbm9uaWNhbF9sYXRleCI6ImVfe3Z9IiwiZm9ybXVsYV9pZCI6IkVRMDAzIiwia2luZCI6Im1hdGgiLCJsYXRleF9zaGEyNTYiOiIyZWZkODE5ZTcyNTZiNTkwYTRmNTFkMTVkMWIzZjdmYzgwODhhMGE0Mzc3ZWQyZTExMWUwZmQ5NDAyNjc5YzhkIiwibW9kZSI6ImlubGluZSIsIm9tbWxfc2hhMjU2IjoiNjM1YTA1MmI0MjllMzI3Y2I5ZmZlNTI5MTI0YjJjOGRlMDBlYzlkMmRiZDI3ZjE1MWJmZTM4ZmIwZjhjNzc3MiIsInNlbWFudGljX29tbWxfcHJvZmlsZSI6Im9mZmljZS1tYXRoLXNlbWFudGljLXYyIiwic2VtYW50aWNfb21tbF9zaGEyNTYiOiIyZjRlZjJkZTQ0NjBlNTJiN2I5NjdlNWFiZjRmZGI5OTQ5NzIzYWVlNmNkMzc5MTlkNGNlOTY2NmVmZTAyN2E4In1dLCJmb3JtdWxhcyI6W3siY2Fub25pY2FsX2xhdGV4IjoiZV97dn0iLCJmb3JtdWxhX2lkIjoiRVEwMDMiLCJsYXRleF9zaGEyNTYiOiIyZWZkODE5ZTcyNTZiNTkwYTRmNTFkMTVkMWIzZjdmYzgwODhhMGE0Mzc3ZWQyZTExMWUwZmQ5NDAyNjc5YzhkIiwibW9kZSI6ImlubGluZSIsIm9tbWxfc2hhMjU2IjoiNjM1YTA1MmI0MjllMzI3Y2I5ZmZlNTI5MTI0YjJjOGRlMDBlYzlkMmRiZDI3ZjE1MWJmZTM4ZmIwZjhjNzc3MiIsInNlbWFudGljX29tbWxfcHJvZmlsZSI6Im9mZmljZS1tYXRoLXNlbWFudGljLXYyIiwic2VtYW50aWNfb21tbF9zaGEyNTYiOiIyZjRlZjJkZTQ0NjBlNTJiN2I5NjdlNWFiZjRmZGI5OTQ5NzIzYWVlNmNkMzc5MTlkNGNlOTY2NmVmZTAyN2E4In1dLCJraW5kIjoibmF0aXZlX29mZmljZV9tYXRoIiwicGxhY2Vob2xkZXJfbmFtZSI6Im1hdGg6MDAzIiwic2NoZW1hX3ZlcnNpb24iOiIxLjAifQ=="/>
+              <p:cNvSpPr txBox="1"/>
+              <p:nvPr/>
+            </p:nvSpPr>
+            <p:spPr>
+              <a:xfrm>
+                <a:off x="3401568" y="1742599"/>
+                <a:ext cx="188214" cy="226219"/>
+              </a:xfrm>
+              <a:prstGeom prst="rect">
+                <a:avLst/>
+              </a:prstGeom>
+              <a:noFill/>
+              <a:effectLst/>
+            </p:spPr>
+            <p:txBody>
+              <a:bodyPr wrap="none" anchor="t" lIns="0" rIns="0" tIns="0" bIns="0">
+                <a:spAutoFit/>
+              </a:bodyPr>
+              <a:lstStyle/>
+              <a:p>
+                <a:pPr algn="ctr"/>
+                <a14:m>
+                  <m:oMath xmlns:m="http://schemas.openxmlformats.org/officeDocument/2006/math">
+                    <m:sSub>
+                      <m:e>
+                        <m:r>
+                          <a:rPr lang="en-US" dirty="0" sz="1425">
+                            <a:solidFill>
+                              <a:srgbClr val="111111"/>
+                            </a:solidFill>
+                            <a:latin typeface="Cambria Math"/>
+                          </a:rPr>
+                          <m:t>e</m:t>
+                        </m:r>
+                      </m:e>
+                      <m:sub>
+                        <m:r>
+                          <a:rPr lang="en-US" dirty="0" sz="1425">
+                            <a:solidFill>
+                              <a:srgbClr val="111111"/>
+                            </a:solidFill>
+                            <a:latin typeface="Cambria Math"/>
+                          </a:rPr>
+                          <m:t>v</m:t>
+                        </m:r>
+                      </m:sub>
+                    </m:sSub>
+                  </m:oMath>
+                </a14:m>
+                <a:endParaRPr lang="en-US" dirty="0" sz="1425">
+                  <a:solidFill>
+                    <a:srgbClr val="111111"/>
+                  </a:solidFill>
+                  <a:latin typeface="Cambria Math"/>
+                </a:endParaRPr>
+              </a:p>
+            </p:txBody>
+          </p:sp>
+        </mc:Choice>
+        <mc:Fallback>
+          <p:sp>
+            <p:nvSpPr>
+              <p:cNvPr id="60" name="math:003" descr="AI_AUTOFIGURE_MATH_FALLBACK_ONLY_V1:eyJjb250ZW50X3J1bnMiOlt7ImNhbm9uaWNhbF9sYXRleCI6ImVfe3Z9IiwiZm9ybXVsYV9pZCI6IkVRMDAzIiwia2luZCI6Im1hdGgiLCJsYXRleF9zaGEyNTYiOiIyZWZkODE5ZTcyNTZiNTkwYTRmNTFkMTVkMWIzZjdmYzgwODhhMGE0Mzc3ZWQyZTExMWUwZmQ5NDAyNjc5YzhkIiwibW9kZSI6ImlubGluZSIsIm9tbWxfc2hhMjU2IjoiNjM1YTA1MmI0MjllMzI3Y2I5ZmZlNTI5MTI0YjJjOGRlMDBlYzlkMmRiZDI3ZjE1MWJmZTM4ZmIwZjhjNzc3MiIsInNlbWFudGljX29tbWxfcHJvZmlsZSI6Im9mZmljZS1tYXRoLXNlbWFudGljLXYyIiwic2VtYW50aWNfb21tbF9zaGEyNTYiOiIyZjRlZjJkZTQ0NjBlNTJiN2I5NjdlNWFiZjRmZGI5OTQ5NzIzYWVlNmNkMzc5MTlkNGNlOTY2NmVmZTAyN2E4In1dLCJmb3JtdWxhcyI6W3siY2Fub25pY2FsX2xhdGV4IjoiZV97dn0iLCJmb3JtdWxhX2lkIjoiRVEwMDMiLCJsYXRleF9zaGEyNTYiOiIyZWZkODE5ZTcyNTZiNTkwYTRmNTFkMTVkMWIzZjdmYzgwODhhMGE0Mzc3ZWQyZTExMWUwZmQ5NDAyNjc5YzhkIiwibW9kZSI6ImlubGluZSIsIm9tbWxfc2hhMjU2IjoiNjM1YTA1MmI0MjllMzI3Y2I5ZmZlNTI5MTI0YjJjOGRlMDBlYzlkMmRiZDI3ZjE1MWJmZTM4ZmIwZjhjNzc3MiIsInNlbWFudGljX29tbWxfcHJvZmlsZSI6Im9mZmljZS1tYXRoLXNlbWFudGljLXYyIiwic2VtYW50aWNfb21tbF9zaGEyNTYiOiIyZjRlZjJkZTQ0NjBlNTJiN2I5NjdlNWFiZjRmZGI5OTQ5NzIzYWVlNmNkMzc5MTlkNGNlOTY2NmVmZTAyN2E4In1dLCJraW5kIjoibmF0aXZlX29mZmljZV9tYXRoIiwicGxhY2Vob2xkZXJfbmFtZSI6Im1hdGg6MDAzIiwic2NoZW1hX3ZlcnNpb24iOiIxLjAifQ=="/>
+              <p:cNvSpPr txBox="1"/>
+              <p:nvPr/>
+            </p:nvSpPr>
+            <p:spPr>
+              <a:xfrm>
+                <a:off x="3401568" y="1742599"/>
+                <a:ext cx="188214" cy="226219"/>
+              </a:xfrm>
+              <a:prstGeom prst="rect">
+                <a:avLst/>
+              </a:prstGeom>
+              <a:noFill/>
+              <a:effectLst/>
+            </p:spPr>
+            <p:txBody>
+              <a:bodyPr wrap="none" anchor="t" lIns="0" rIns="0" tIns="0" bIns="0">
+                <a:spAutoFit/>
+              </a:bodyPr>
+              <a:lstStyle/>
+              <a:p>
+                <a:pPr algn="ctr"/>
+                <a:r>
+                  <a:rPr lang="en-US" dirty="0" sz="1425">
+                    <a:solidFill>
+                      <a:srgbClr val="111111"/>
+                    </a:solidFill>
+                  </a:rPr>
+                  <a:t>\(e_{v}\)</a:t>
+                </a:r>
+                <a:endParaRPr lang="en-US" dirty="0" sz="1425">
+                  <a:solidFill>
+                    <a:srgbClr val="111111"/>
+                  </a:solidFill>
+                </a:endParaRPr>
+              </a:p>
+            </p:txBody>
+          </p:sp>
+        </mc:Fallback>
+      </mc:AlternateContent>
       <p:sp>
         <p:nvSpPr>
           <p:cNvPr id="61" name="Oval 60"/>
@@ -5587,6 +5823,10 @@
             <a:srgbClr val="EF7D2B"/>
           </a:solidFill>
         </p:spPr>
+        <p:txBody>
+          <a:bodyPr/>
+          <a:p/>
+        </p:txBody>
       </p:sp>
       <p:sp>
         <p:nvSpPr>
@@ -5634,51 +5874,113 @@
           </a:p>
         </p:txBody>
       </p:sp>
-      <p:sp>
-        <p:nvSpPr>
-          <p:cNvPr id="67" name="TextBox 66"/>
-          <p:cNvSpPr txBox="1"/>
-          <p:nvPr/>
-        </p:nvSpPr>
-        <p:spPr>
-          <a:xfrm>
-            <a:off x="3432334" y="3294698"/>
-            <a:ext cx="145732" cy="214312"/>
-          </a:xfrm>
-          <a:prstGeom prst="rect">
-            <a:avLst/>
-          </a:prstGeom>
-          <a:noFill/>
-          <a:effectLst/>
-        </p:spPr>
-        <p:txBody>
-          <a:bodyPr wrap="none" anchor="t" lIns="0" rIns="0" tIns="0" bIns="0">
-            <a:spAutoFit/>
-          </a:bodyPr>
-          <a:lstStyle/>
-          <a:p>
-            <a:pPr algn="ctr"/>
-            <a:r>
-              <a:rPr sz="1350" i="1" b="1">
-                <a:solidFill>
-                  <a:srgbClr val="111111"/>
-                </a:solidFill>
-                <a:latin typeface="Times New Roman"/>
-              </a:rPr>
-              <a:t>s</a:t>
-            </a:r>
-            <a:r>
-              <a:rPr sz="900" i="1" b="1" baseline="-25000">
-                <a:solidFill>
-                  <a:srgbClr val="111111"/>
-                </a:solidFill>
-                <a:latin typeface="Times New Roman"/>
-              </a:rPr>
-              <a:t>t</a:t>
-            </a:r>
-          </a:p>
-        </p:txBody>
-      </p:sp>
+      <mc:AlternateContent xmlns:mc="http://schemas.openxmlformats.org/markup-compatibility/2006">
+        <mc:Choice xmlns:a14="http://schemas.microsoft.com/office/drawing/2010/main" Requires="a14">
+          <p:sp>
+            <p:nvSpPr>
+              <p:cNvPr id="67" name="math:004" descr="AI_AUTOFIGURE_NATIVE_MATH_V1:eyJjb250ZW50X3J1bnMiOlt7ImNhbm9uaWNhbF9sYXRleCI6InNfe3R9IiwiZm9ybXVsYV9pZCI6IkVRMDA0Iiwia2luZCI6Im1hdGgiLCJsYXRleF9zaGEyNTYiOiIwMDE3ZmQ1YjUxNmM2YTU5ZjUxZTM3MWJlZTBmMjQ5ODI4ZWIzZDhlOTNhYTc0NzM3Y2M4ZWYxNTY5YzM1ZTIyIiwibW9kZSI6ImlubGluZSIsIm9tbWxfc2hhMjU2IjoiMWJhZjE4MDU3OTA4OTQ0ZmQxZmFiYzgwMzBhN2RiMWFmMjY1MmUxOGQ1Y2U3YjlhMGJiMWU2MWMzYTU3ZTg3NyIsInNlbWFudGljX29tbWxfcHJvZmlsZSI6Im9mZmljZS1tYXRoLXNlbWFudGljLXYyIiwic2VtYW50aWNfb21tbF9zaGEyNTYiOiI2OWRhZTcyNmY2OTRlNTQ3MDhmYjQ2Y2IxZjRjYTM5NzhhODhjOWIxZmJmMDc2ZjE2MWIxODVlZThhNDdiYzBkIn1dLCJmb3JtdWxhcyI6W3siY2Fub25pY2FsX2xhdGV4Ijoic197dH0iLCJmb3JtdWxhX2lkIjoiRVEwMDQiLCJsYXRleF9zaGEyNTYiOiIwMDE3ZmQ1YjUxNmM2YTU5ZjUxZTM3MWJlZTBmMjQ5ODI4ZWIzZDhlOTNhYTc0NzM3Y2M4ZWYxNTY5YzM1ZTIyIiwibW9kZSI6ImlubGluZSIsIm9tbWxfc2hhMjU2IjoiMWJhZjE4MDU3OTA4OTQ0ZmQxZmFiYzgwMzBhN2RiMWFmMjY1MmUxOGQ1Y2U3YjlhMGJiMWU2MWMzYTU3ZTg3NyIsInNlbWFudGljX29tbWxfcHJvZmlsZSI6Im9mZmljZS1tYXRoLXNlbWFudGljLXYyIiwic2VtYW50aWNfb21tbF9zaGEyNTYiOiI2OWRhZTcyNmY2OTRlNTQ3MDhmYjQ2Y2IxZjRjYTM5NzhhODhjOWIxZmJmMDc2ZjE2MWIxODVlZThhNDdiYzBkIn1dLCJraW5kIjoibmF0aXZlX29mZmljZV9tYXRoIiwicGxhY2Vob2xkZXJfbmFtZSI6Im1hdGg6MDA0Iiwic2NoZW1hX3ZlcnNpb24iOiIxLjAifQ=="/>
+              <p:cNvSpPr txBox="1"/>
+              <p:nvPr/>
+            </p:nvSpPr>
+            <p:spPr>
+              <a:xfrm>
+                <a:off x="3432334" y="3294698"/>
+                <a:ext cx="145732" cy="214312"/>
+              </a:xfrm>
+              <a:prstGeom prst="rect">
+                <a:avLst/>
+              </a:prstGeom>
+              <a:noFill/>
+              <a:effectLst/>
+            </p:spPr>
+            <p:txBody>
+              <a:bodyPr wrap="none" anchor="t" lIns="0" rIns="0" tIns="0" bIns="0">
+                <a:spAutoFit/>
+              </a:bodyPr>
+              <a:lstStyle/>
+              <a:p>
+                <a:pPr algn="ctr"/>
+                <a14:m>
+                  <m:oMath xmlns:m="http://schemas.openxmlformats.org/officeDocument/2006/math">
+                    <m:sSub>
+                      <m:e>
+                        <m:r>
+                          <a:rPr lang="en-US" dirty="0" sz="1350">
+                            <a:solidFill>
+                              <a:srgbClr val="111111"/>
+                            </a:solidFill>
+                            <a:latin typeface="Cambria Math"/>
+                          </a:rPr>
+                          <m:t>s</m:t>
+                        </m:r>
+                      </m:e>
+                      <m:sub>
+                        <m:r>
+                          <a:rPr lang="en-US" dirty="0" sz="1350">
+                            <a:solidFill>
+                              <a:srgbClr val="111111"/>
+                            </a:solidFill>
+                            <a:latin typeface="Cambria Math"/>
+                          </a:rPr>
+                          <m:t>t</m:t>
+                        </m:r>
+                      </m:sub>
+                    </m:sSub>
+                  </m:oMath>
+                </a14:m>
+                <a:endParaRPr lang="en-US" dirty="0" sz="1350">
+                  <a:solidFill>
+                    <a:srgbClr val="111111"/>
+                  </a:solidFill>
+                  <a:latin typeface="Cambria Math"/>
+                </a:endParaRPr>
+              </a:p>
+            </p:txBody>
+          </p:sp>
+        </mc:Choice>
+        <mc:Fallback>
+          <p:sp>
+            <p:nvSpPr>
+              <p:cNvPr id="67" name="math:004" descr="AI_AUTOFIGURE_MATH_FALLBACK_ONLY_V1:eyJjb250ZW50X3J1bnMiOlt7ImNhbm9uaWNhbF9sYXRleCI6InNfe3R9IiwiZm9ybXVsYV9pZCI6IkVRMDA0Iiwia2luZCI6Im1hdGgiLCJsYXRleF9zaGEyNTYiOiIwMDE3ZmQ1YjUxNmM2YTU5ZjUxZTM3MWJlZTBmMjQ5ODI4ZWIzZDhlOTNhYTc0NzM3Y2M4ZWYxNTY5YzM1ZTIyIiwibW9kZSI6ImlubGluZSIsIm9tbWxfc2hhMjU2IjoiMWJhZjE4MDU3OTA4OTQ0ZmQxZmFiYzgwMzBhN2RiMWFmMjY1MmUxOGQ1Y2U3YjlhMGJiMWU2MWMzYTU3ZTg3NyIsInNlbWFudGljX29tbWxfcHJvZmlsZSI6Im9mZmljZS1tYXRoLXNlbWFudGljLXYyIiwic2VtYW50aWNfb21tbF9zaGEyNTYiOiI2OWRhZTcyNmY2OTRlNTQ3MDhmYjQ2Y2IxZjRjYTM5NzhhODhjOWIxZmJmMDc2ZjE2MWIxODVlZThhNDdiYzBkIn1dLCJmb3JtdWxhcyI6W3siY2Fub25pY2FsX2xhdGV4Ijoic197dH0iLCJmb3JtdWxhX2lkIjoiRVEwMDQiLCJsYXRleF9zaGEyNTYiOiIwMDE3ZmQ1YjUxNmM2YTU5ZjUxZTM3MWJlZTBmMjQ5ODI4ZWIzZDhlOTNhYTc0NzM3Y2M4ZWYxNTY5YzM1ZTIyIiwibW9kZSI6ImlubGluZSIsIm9tbWxfc2hhMjU2IjoiMWJhZjE4MDU3OTA4OTQ0ZmQxZmFiYzgwMzBhN2RiMWFmMjY1MmUxOGQ1Y2U3YjlhMGJiMWU2MWMzYTU3ZTg3NyIsInNlbWFudGljX29tbWxfcHJvZmlsZSI6Im9mZmljZS1tYXRoLXNlbWFudGljLXYyIiwic2VtYW50aWNfb21tbF9zaGEyNTYiOiI2OWRhZTcyNmY2OTRlNTQ3MDhmYjQ2Y2IxZjRjYTM5NzhhODhjOWIxZmJmMDc2ZjE2MWIxODVlZThhNDdiYzBkIn1dLCJraW5kIjoibmF0aXZlX29mZmljZV9tYXRoIiwicGxhY2Vob2xkZXJfbmFtZSI6Im1hdGg6MDA0Iiwic2NoZW1hX3ZlcnNpb24iOiIxLjAifQ=="/>
+              <p:cNvSpPr txBox="1"/>
+              <p:nvPr/>
+            </p:nvSpPr>
+            <p:spPr>
+              <a:xfrm>
+                <a:off x="3432334" y="3294698"/>
+                <a:ext cx="145732" cy="214312"/>
+              </a:xfrm>
+              <a:prstGeom prst="rect">
+                <a:avLst/>
+              </a:prstGeom>
+              <a:noFill/>
+              <a:effectLst/>
+            </p:spPr>
+            <p:txBody>
+              <a:bodyPr wrap="none" anchor="t" lIns="0" rIns="0" tIns="0" bIns="0">
+                <a:spAutoFit/>
+              </a:bodyPr>
+              <a:lstStyle/>
+              <a:p>
+                <a:pPr algn="ctr"/>
+                <a:r>
+                  <a:rPr lang="en-US" dirty="0" sz="1350">
+                    <a:solidFill>
+                      <a:srgbClr val="111111"/>
+                    </a:solidFill>
+                  </a:rPr>
+                  <a:t>\(s_{t}\)</a:t>
+                </a:r>
+                <a:endParaRPr lang="en-US" dirty="0" sz="1350">
+                  <a:solidFill>
+                    <a:srgbClr val="111111"/>
+                  </a:solidFill>
+                </a:endParaRPr>
+              </a:p>
+            </p:txBody>
+          </p:sp>
+        </mc:Fallback>
+      </mc:AlternateContent>
       <p:sp>
         <p:nvSpPr>
           <p:cNvPr id="68" name="Oval 67"/>
@@ -5874,6 +6176,10 @@
             <a:srgbClr val="3567B7"/>
           </a:solidFill>
         </p:spPr>
+        <p:txBody>
+          <a:bodyPr/>
+          <a:p/>
+        </p:txBody>
       </p:sp>
       <p:sp>
         <p:nvSpPr>
@@ -7136,6 +7442,10 @@
             <a:prstDash val="dot"/>
           </a:ln>
         </p:spPr>
+        <p:txBody>
+          <a:bodyPr/>
+          <a:p/>
+        </p:txBody>
       </p:sp>
       <p:sp>
         <p:nvSpPr>
@@ -7195,6 +7505,10 @@
             <a:prstDash val="dot"/>
           </a:ln>
         </p:spPr>
+        <p:txBody>
+          <a:bodyPr/>
+          <a:p/>
+        </p:txBody>
       </p:sp>
       <p:sp>
         <p:nvSpPr>
@@ -7231,6 +7545,10 @@
             </a:solidFill>
           </a:ln>
         </p:spPr>
+        <p:txBody>
+          <a:bodyPr/>
+          <a:p/>
+        </p:txBody>
       </p:sp>
       <p:sp>
         <p:nvSpPr>
@@ -7268,6 +7586,10 @@
             <a:srgbClr val="111111"/>
           </a:solidFill>
         </p:spPr>
+        <p:txBody>
+          <a:bodyPr/>
+          <a:p/>
+        </p:txBody>
       </p:sp>
       <p:sp>
         <p:nvSpPr>
@@ -7304,6 +7626,10 @@
             </a:solidFill>
           </a:ln>
         </p:spPr>
+        <p:txBody>
+          <a:bodyPr/>
+          <a:p/>
+        </p:txBody>
       </p:sp>
       <p:sp>
         <p:nvSpPr>
@@ -7341,6 +7667,10 @@
             <a:srgbClr val="111111"/>
           </a:solidFill>
         </p:spPr>
+        <p:txBody>
+          <a:bodyPr/>
+          <a:p/>
+        </p:txBody>
       </p:sp>
       <p:sp>
         <p:nvSpPr>
@@ -7377,6 +7707,10 @@
             </a:solidFill>
           </a:ln>
         </p:spPr>
+        <p:txBody>
+          <a:bodyPr/>
+          <a:p/>
+        </p:txBody>
       </p:sp>
       <p:sp>
         <p:nvSpPr>
@@ -7414,52 +7748,118 @@
             <a:srgbClr val="111111"/>
           </a:solidFill>
         </p:spPr>
-      </p:sp>
-      <p:sp>
-        <p:nvSpPr>
-          <p:cNvPr id="111" name="TextBox 110"/>
-          <p:cNvSpPr txBox="1"/>
-          <p:nvPr/>
-        </p:nvSpPr>
-        <p:spPr>
-          <a:xfrm>
-            <a:off x="8709184" y="1732598"/>
-            <a:ext cx="145732" cy="214312"/>
-          </a:xfrm>
-          <a:prstGeom prst="rect">
-            <a:avLst/>
-          </a:prstGeom>
-          <a:noFill/>
-          <a:effectLst/>
-        </p:spPr>
-        <p:txBody>
-          <a:bodyPr wrap="none" anchor="t" lIns="0" rIns="0" tIns="0" bIns="0">
-            <a:spAutoFit/>
-          </a:bodyPr>
-          <a:lstStyle/>
-          <a:p>
-            <a:pPr algn="ctr"/>
-            <a:r>
-              <a:rPr sz="1350" i="1" b="1">
-                <a:solidFill>
-                  <a:srgbClr val="111111"/>
-                </a:solidFill>
-                <a:latin typeface="Times New Roman"/>
-              </a:rPr>
-              <a:t>z</a:t>
-            </a:r>
-            <a:r>
-              <a:rPr sz="900" i="1" b="1" baseline="-25000">
-                <a:solidFill>
-                  <a:srgbClr val="111111"/>
-                </a:solidFill>
-                <a:latin typeface="Times New Roman"/>
-              </a:rPr>
-              <a:t>t</a:t>
-            </a:r>
-          </a:p>
-        </p:txBody>
-      </p:sp>
+        <p:txBody>
+          <a:bodyPr/>
+          <a:p/>
+        </p:txBody>
+      </p:sp>
+      <mc:AlternateContent xmlns:mc="http://schemas.openxmlformats.org/markup-compatibility/2006">
+        <mc:Choice xmlns:a14="http://schemas.microsoft.com/office/drawing/2010/main" Requires="a14">
+          <p:sp>
+            <p:nvSpPr>
+              <p:cNvPr id="111" name="math:005" descr="AI_AUTOFIGURE_NATIVE_MATH_V1:eyJjb250ZW50X3J1bnMiOlt7ImNhbm9uaWNhbF9sYXRleCI6Inpfe3R9IiwiZm9ybXVsYV9pZCI6IkVRMDA1Iiwia2luZCI6Im1hdGgiLCJsYXRleF9zaGEyNTYiOiI1MTFhZDkzYjNmYWU5ZDczZDU2MzY1NmZlYjNiZTY5M2Y0MjBjM2FkNDNmNjBkY2QzNWRiNjMxYWIwZTUwY2EzIiwibW9kZSI6ImlubGluZSIsIm9tbWxfc2hhMjU2IjoiOWNjMjA3NmY3N2U5ZDBlODdiOWE5Y2ZjYWFmZmRjNTBiNzU4ZDZiYmM1MTBjZWY4ZjNiYTU3NDhmODUyMmM1ZSIsInNlbWFudGljX29tbWxfcHJvZmlsZSI6Im9mZmljZS1tYXRoLXNlbWFudGljLXYyIiwic2VtYW50aWNfb21tbF9zaGEyNTYiOiI3MGQyYWI5NmM3NjkwMTQ0MjFhOGZjMTk5ZjQ0MzE0YjFhYWNlZjVkN2RhZGNiZjU2ZDI3MzJjMWJhMjU0MzI4In1dLCJmb3JtdWxhcyI6W3siY2Fub25pY2FsX2xhdGV4Ijoiel97dH0iLCJmb3JtdWxhX2lkIjoiRVEwMDUiLCJsYXRleF9zaGEyNTYiOiI1MTFhZDkzYjNmYWU5ZDczZDU2MzY1NmZlYjNiZTY5M2Y0MjBjM2FkNDNmNjBkY2QzNWRiNjMxYWIwZTUwY2EzIiwibW9kZSI6ImlubGluZSIsIm9tbWxfc2hhMjU2IjoiOWNjMjA3NmY3N2U5ZDBlODdiOWE5Y2ZjYWFmZmRjNTBiNzU4ZDZiYmM1MTBjZWY4ZjNiYTU3NDhmODUyMmM1ZSIsInNlbWFudGljX29tbWxfcHJvZmlsZSI6Im9mZmljZS1tYXRoLXNlbWFudGljLXYyIiwic2VtYW50aWNfb21tbF9zaGEyNTYiOiI3MGQyYWI5NmM3NjkwMTQ0MjFhOGZjMTk5ZjQ0MzE0YjFhYWNlZjVkN2RhZGNiZjU2ZDI3MzJjMWJhMjU0MzI4In1dLCJraW5kIjoibmF0aXZlX29mZmljZV9tYXRoIiwicGxhY2Vob2xkZXJfbmFtZSI6Im1hdGg6MDA1Iiwic2NoZW1hX3ZlcnNpb24iOiIxLjAifQ=="/>
+              <p:cNvSpPr txBox="1"/>
+              <p:nvPr/>
+            </p:nvSpPr>
+            <p:spPr>
+              <a:xfrm>
+                <a:off x="8709184" y="1732598"/>
+                <a:ext cx="145732" cy="214312"/>
+              </a:xfrm>
+              <a:prstGeom prst="rect">
+                <a:avLst/>
+              </a:prstGeom>
+              <a:noFill/>
+              <a:effectLst/>
+            </p:spPr>
+            <p:txBody>
+              <a:bodyPr wrap="none" anchor="t" lIns="0" rIns="0" tIns="0" bIns="0">
+                <a:spAutoFit/>
+              </a:bodyPr>
+              <a:lstStyle/>
+              <a:p>
+                <a:pPr algn="ctr"/>
+                <a14:m>
+                  <m:oMath xmlns:m="http://schemas.openxmlformats.org/officeDocument/2006/math">
+                    <m:sSub>
+                      <m:e>
+                        <m:r>
+                          <a:rPr lang="en-US" dirty="0" sz="1350">
+                            <a:solidFill>
+                              <a:srgbClr val="111111"/>
+                            </a:solidFill>
+                            <a:latin typeface="Cambria Math"/>
+                          </a:rPr>
+                          <m:t>z</m:t>
+                        </m:r>
+                      </m:e>
+                      <m:sub>
+                        <m:r>
+                          <a:rPr lang="en-US" dirty="0" sz="1350">
+                            <a:solidFill>
+                              <a:srgbClr val="111111"/>
+                            </a:solidFill>
+                            <a:latin typeface="Cambria Math"/>
+                          </a:rPr>
+                          <m:t>t</m:t>
+                        </m:r>
+                      </m:sub>
+                    </m:sSub>
+                  </m:oMath>
+                </a14:m>
+                <a:endParaRPr lang="en-US" dirty="0" sz="1350">
+                  <a:solidFill>
+                    <a:srgbClr val="111111"/>
+                  </a:solidFill>
+                  <a:latin typeface="Cambria Math"/>
+                </a:endParaRPr>
+              </a:p>
+            </p:txBody>
+          </p:sp>
+        </mc:Choice>
+        <mc:Fallback>
+          <p:sp>
+            <p:nvSpPr>
+              <p:cNvPr id="111" name="math:005" descr="AI_AUTOFIGURE_MATH_FALLBACK_ONLY_V1:eyJjb250ZW50X3J1bnMiOlt7ImNhbm9uaWNhbF9sYXRleCI6Inpfe3R9IiwiZm9ybXVsYV9pZCI6IkVRMDA1Iiwia2luZCI6Im1hdGgiLCJsYXRleF9zaGEyNTYiOiI1MTFhZDkzYjNmYWU5ZDczZDU2MzY1NmZlYjNiZTY5M2Y0MjBjM2FkNDNmNjBkY2QzNWRiNjMxYWIwZTUwY2EzIiwibW9kZSI6ImlubGluZSIsIm9tbWxfc2hhMjU2IjoiOWNjMjA3NmY3N2U5ZDBlODdiOWE5Y2ZjYWFmZmRjNTBiNzU4ZDZiYmM1MTBjZWY4ZjNiYTU3NDhmODUyMmM1ZSIsInNlbWFudGljX29tbWxfcHJvZmlsZSI6Im9mZmljZS1tYXRoLXNlbWFudGljLXYyIiwic2VtYW50aWNfb21tbF9zaGEyNTYiOiI3MGQyYWI5NmM3NjkwMTQ0MjFhOGZjMTk5ZjQ0MzE0YjFhYWNlZjVkN2RhZGNiZjU2ZDI3MzJjMWJhMjU0MzI4In1dLCJmb3JtdWxhcyI6W3siY2Fub25pY2FsX2xhdGV4Ijoiel97dH0iLCJmb3JtdWxhX2lkIjoiRVEwMDUiLCJsYXRleF9zaGEyNTYiOiI1MTFhZDkzYjNmYWU5ZDczZDU2MzY1NmZlYjNiZTY5M2Y0MjBjM2FkNDNmNjBkY2QzNWRiNjMxYWIwZTUwY2EzIiwibW9kZSI6ImlubGluZSIsIm9tbWxfc2hhMjU2IjoiOWNjMjA3NmY3N2U5ZDBlODdiOWE5Y2ZjYWFmZmRjNTBiNzU4ZDZiYmM1MTBjZWY4ZjNiYTU3NDhmODUyMmM1ZSIsInNlbWFudGljX29tbWxfcHJvZmlsZSI6Im9mZmljZS1tYXRoLXNlbWFudGljLXYyIiwic2VtYW50aWNfb21tbF9zaGEyNTYiOiI3MGQyYWI5NmM3NjkwMTQ0MjFhOGZjMTk5ZjQ0MzE0YjFhYWNlZjVkN2RhZGNiZjU2ZDI3MzJjMWJhMjU0MzI4In1dLCJraW5kIjoibmF0aXZlX29mZmljZV9tYXRoIiwicGxhY2Vob2xkZXJfbmFtZSI6Im1hdGg6MDA1Iiwic2NoZW1hX3ZlcnNpb24iOiIxLjAifQ=="/>
+              <p:cNvSpPr txBox="1"/>
+              <p:nvPr/>
+            </p:nvSpPr>
+            <p:spPr>
+              <a:xfrm>
+                <a:off x="8709184" y="1732598"/>
+                <a:ext cx="145732" cy="214312"/>
+              </a:xfrm>
+              <a:prstGeom prst="rect">
+                <a:avLst/>
+              </a:prstGeom>
+              <a:noFill/>
+              <a:effectLst/>
+            </p:spPr>
+            <p:txBody>
+              <a:bodyPr wrap="none" anchor="t" lIns="0" rIns="0" tIns="0" bIns="0">
+                <a:spAutoFit/>
+              </a:bodyPr>
+              <a:lstStyle/>
+              <a:p>
+                <a:pPr algn="ctr"/>
+                <a:r>
+                  <a:rPr lang="en-US" dirty="0" sz="1350">
+                    <a:solidFill>
+                      <a:srgbClr val="111111"/>
+                    </a:solidFill>
+                  </a:rPr>
+                  <a:t>\(z_{t}\)</a:t>
+                </a:r>
+                <a:endParaRPr lang="en-US" dirty="0" sz="1350">
+                  <a:solidFill>
+                    <a:srgbClr val="111111"/>
+                  </a:solidFill>
+                </a:endParaRPr>
+              </a:p>
+            </p:txBody>
+          </p:sp>
+        </mc:Fallback>
+      </mc:AlternateContent>
       <p:sp>
         <p:nvSpPr>
           <p:cNvPr id="112" name="Rectangle 111"/>
@@ -7917,6 +8317,10 @@
             </a:solidFill>
           </a:ln>
         </p:spPr>
+        <p:txBody>
+          <a:bodyPr/>
+          <a:p/>
+        </p:txBody>
       </p:sp>
       <p:sp>
         <p:nvSpPr>
@@ -7954,6 +8358,10 @@
             <a:srgbClr val="8D6A00"/>
           </a:solidFill>
         </p:spPr>
+        <p:txBody>
+          <a:bodyPr/>
+          <a:p/>
+        </p:txBody>
       </p:sp>
       <p:sp>
         <p:nvSpPr>
@@ -7990,6 +8398,10 @@
             </a:solidFill>
           </a:ln>
         </p:spPr>
+        <p:txBody>
+          <a:bodyPr/>
+          <a:p/>
+        </p:txBody>
       </p:sp>
       <p:sp>
         <p:nvSpPr>
@@ -8027,6 +8439,10 @@
             <a:srgbClr val="8D6A00"/>
           </a:solidFill>
         </p:spPr>
+        <p:txBody>
+          <a:bodyPr/>
+          <a:p/>
+        </p:txBody>
       </p:sp>
       <p:sp>
         <p:nvSpPr>
@@ -8155,60 +8571,124 @@
           </a:p>
         </p:txBody>
       </p:sp>
-      <p:sp>
-        <p:nvSpPr>
-          <p:cNvPr id="127" name="TextBox 126"/>
-          <p:cNvSpPr txBox="1"/>
-          <p:nvPr/>
-        </p:nvSpPr>
-        <p:spPr>
-          <a:xfrm>
-            <a:off x="9720501" y="1646396"/>
-            <a:ext cx="218599" cy="202406"/>
-          </a:xfrm>
-          <a:prstGeom prst="rect">
-            <a:avLst/>
-          </a:prstGeom>
-          <a:noFill/>
-          <a:effectLst/>
-        </p:spPr>
-        <p:txBody>
-          <a:bodyPr wrap="none" anchor="t" lIns="0" rIns="0" tIns="0" bIns="0">
-            <a:spAutoFit/>
-          </a:bodyPr>
-          <a:lstStyle/>
-          <a:p>
-            <a:pPr algn="ctr"/>
-            <a:r>
-              <a:rPr sz="1275" i="1" b="1">
-                <a:solidFill>
-                  <a:srgbClr val="FFFFFF"/>
-                </a:solidFill>
-                <a:latin typeface="Times New Roman"/>
-              </a:rPr>
-              <a:t>z</a:t>
-            </a:r>
-            <a:r>
-              <a:rPr sz="825" i="1" b="1" baseline="30000">
-                <a:solidFill>
-                  <a:srgbClr val="FFFFFF"/>
-                </a:solidFill>
-                <a:latin typeface="Times New Roman"/>
-              </a:rPr>
-              <a:t>τ</a:t>
-            </a:r>
-            <a:r>
-              <a:rPr sz="825" i="1" b="1" baseline="-25000">
-                <a:solidFill>
-                  <a:srgbClr val="FFFFFF"/>
-                </a:solidFill>
-                <a:latin typeface="Times New Roman"/>
-              </a:rPr>
-              <a:t>t</a:t>
-            </a:r>
-          </a:p>
-        </p:txBody>
-      </p:sp>
+      <mc:AlternateContent xmlns:mc="http://schemas.openxmlformats.org/markup-compatibility/2006">
+        <mc:Choice xmlns:a14="http://schemas.microsoft.com/office/drawing/2010/main" Requires="a14">
+          <p:sp>
+            <p:nvSpPr>
+              <p:cNvPr id="127" name="math:006" descr="AI_AUTOFIGURE_NATIVE_MATH_V1:eyJjb250ZW50X3J1bnMiOlt7ImNhbm9uaWNhbF9sYXRleCI6Inpee1xcdGF1fV97dH0iLCJmb3JtdWxhX2lkIjoiRVEwMDYiLCJraW5kIjoibWF0aCIsImxhdGV4X3NoYTI1NiI6IjgxMmI1YjFjOGFmZDdhYzI0Nzc5YTQxYzhmMmE0ZDNiNzZlODAyYzNlNDk5NDc3MjdlM2Q4OTZhYmI3MmQ3ZjEiLCJtb2RlIjoiaW5saW5lIiwib21tbF9zaGEyNTYiOiIwYjA5Y2ZlY2EzYmZiNzFlMzRjMGY1ZmI2ZTY2NDUzZTMwMWFlZGI1Nzc5YmE1MTFhMGZiZDc0MDljMWZlN2M1Iiwic2VtYW50aWNfb21tbF9wcm9maWxlIjoib2ZmaWNlLW1hdGgtc2VtYW50aWMtdjIiLCJzZW1hbnRpY19vbW1sX3NoYTI1NiI6IjdiMDU0ZTcxNjkxNGEwYjY5OGE4N2NmZWM0NTQ3ZWYwYjY2NTA0YzFhYTU3YmI0NDkwN2Q0NGE0YzQ3NDgxZWQifV0sImZvcm11bGFzIjpbeyJjYW5vbmljYWxfbGF0ZXgiOiJ6XntcXHRhdX1fe3R9IiwiZm9ybXVsYV9pZCI6IkVRMDA2IiwibGF0ZXhfc2hhMjU2IjoiODEyYjViMWM4YWZkN2FjMjQ3NzlhNDFjOGYyYTRkM2I3NmU4MDJjM2U0OTk0NzcyN2UzZDg5NmFiYjcyZDdmMSIsIm1vZGUiOiJpbmxpbmUiLCJvbW1sX3NoYTI1NiI6IjBiMDljZmVjYTNiZmI3MWUzNGMwZjVmYjZlNjY0NTNlMzAxYWVkYjU3NzliYTUxMWEwZmJkNzQwOWMxZmU3YzUiLCJzZW1hbnRpY19vbW1sX3Byb2ZpbGUiOiJvZmZpY2UtbWF0aC1zZW1hbnRpYy12MiIsInNlbWFudGljX29tbWxfc2hhMjU2IjoiN2IwNTRlNzE2OTE0YTBiNjk4YTg3Y2ZlYzQ1NDdlZjBiNjY1MDRjMWFhNTdiYjQ0OTA3ZDQ0YTRjNDc0ODFlZCJ9XSwia2luZCI6Im5hdGl2ZV9vZmZpY2VfbWF0aCIsInBsYWNlaG9sZGVyX25hbWUiOiJtYXRoOjAwNiIsInNjaGVtYV92ZXJzaW9uIjoiMS4wIn0="/>
+              <p:cNvSpPr txBox="1"/>
+              <p:nvPr/>
+            </p:nvSpPr>
+            <p:spPr>
+              <a:xfrm>
+                <a:off x="9720501" y="1646396"/>
+                <a:ext cx="218599" cy="202406"/>
+              </a:xfrm>
+              <a:prstGeom prst="rect">
+                <a:avLst/>
+              </a:prstGeom>
+              <a:noFill/>
+              <a:effectLst/>
+            </p:spPr>
+            <p:txBody>
+              <a:bodyPr wrap="none" anchor="t" lIns="0" rIns="0" tIns="0" bIns="0">
+                <a:spAutoFit/>
+              </a:bodyPr>
+              <a:lstStyle/>
+              <a:p>
+                <a:pPr algn="ctr"/>
+                <a14:m>
+                  <m:oMath xmlns:m="http://schemas.openxmlformats.org/officeDocument/2006/math">
+                    <m:sSubSup>
+                      <m:e>
+                        <m:r>
+                          <a:rPr lang="en-US" dirty="0" sz="1275">
+                            <a:solidFill>
+                              <a:srgbClr val="FFFFFF"/>
+                            </a:solidFill>
+                            <a:latin typeface="Cambria Math"/>
+                          </a:rPr>
+                          <m:t>z</m:t>
+                        </m:r>
+                      </m:e>
+                      <m:sub>
+                        <m:r>
+                          <a:rPr lang="en-US" dirty="0" sz="1275">
+                            <a:solidFill>
+                              <a:srgbClr val="FFFFFF"/>
+                            </a:solidFill>
+                            <a:latin typeface="Cambria Math"/>
+                          </a:rPr>
+                          <m:t>t</m:t>
+                        </m:r>
+                      </m:sub>
+                      <m:sup>
+                        <m:r>
+                          <a:rPr lang="en-US" dirty="0" sz="1275">
+                            <a:solidFill>
+                              <a:srgbClr val="FFFFFF"/>
+                            </a:solidFill>
+                            <a:latin typeface="Cambria Math"/>
+                          </a:rPr>
+                          <m:t>τ</m:t>
+                        </m:r>
+                      </m:sup>
+                    </m:sSubSup>
+                  </m:oMath>
+                </a14:m>
+                <a:endParaRPr lang="en-US" dirty="0" sz="1275">
+                  <a:solidFill>
+                    <a:srgbClr val="FFFFFF"/>
+                  </a:solidFill>
+                  <a:latin typeface="Cambria Math"/>
+                </a:endParaRPr>
+              </a:p>
+            </p:txBody>
+          </p:sp>
+        </mc:Choice>
+        <mc:Fallback>
+          <p:sp>
+            <p:nvSpPr>
+              <p:cNvPr id="127" name="math:006" descr="AI_AUTOFIGURE_MATH_FALLBACK_ONLY_V1:eyJjb250ZW50X3J1bnMiOlt7ImNhbm9uaWNhbF9sYXRleCI6Inpee1xcdGF1fV97dH0iLCJmb3JtdWxhX2lkIjoiRVEwMDYiLCJraW5kIjoibWF0aCIsImxhdGV4X3NoYTI1NiI6IjgxMmI1YjFjOGFmZDdhYzI0Nzc5YTQxYzhmMmE0ZDNiNzZlODAyYzNlNDk5NDc3MjdlM2Q4OTZhYmI3MmQ3ZjEiLCJtb2RlIjoiaW5saW5lIiwib21tbF9zaGEyNTYiOiIwYjA5Y2ZlY2EzYmZiNzFlMzRjMGY1ZmI2ZTY2NDUzZTMwMWFlZGI1Nzc5YmE1MTFhMGZiZDc0MDljMWZlN2M1Iiwic2VtYW50aWNfb21tbF9wcm9maWxlIjoib2ZmaWNlLW1hdGgtc2VtYW50aWMtdjIiLCJzZW1hbnRpY19vbW1sX3NoYTI1NiI6IjdiMDU0ZTcxNjkxNGEwYjY5OGE4N2NmZWM0NTQ3ZWYwYjY2NTA0YzFhYTU3YmI0NDkwN2Q0NGE0YzQ3NDgxZWQifV0sImZvcm11bGFzIjpbeyJjYW5vbmljYWxfbGF0ZXgiOiJ6XntcXHRhdX1fe3R9IiwiZm9ybXVsYV9pZCI6IkVRMDA2IiwibGF0ZXhfc2hhMjU2IjoiODEyYjViMWM4YWZkN2FjMjQ3NzlhNDFjOGYyYTRkM2I3NmU4MDJjM2U0OTk0NzcyN2UzZDg5NmFiYjcyZDdmMSIsIm1vZGUiOiJpbmxpbmUiLCJvbW1sX3NoYTI1NiI6IjBiMDljZmVjYTNiZmI3MWUzNGMwZjVmYjZlNjY0NTNlMzAxYWVkYjU3NzliYTUxMWEwZmJkNzQwOWMxZmU3YzUiLCJzZW1hbnRpY19vbW1sX3Byb2ZpbGUiOiJvZmZpY2UtbWF0aC1zZW1hbnRpYy12MiIsInNlbWFudGljX29tbWxfc2hhMjU2IjoiN2IwNTRlNzE2OTE0YTBiNjk4YTg3Y2ZlYzQ1NDdlZjBiNjY1MDRjMWFhNTdiYjQ0OTA3ZDQ0YTRjNDc0ODFlZCJ9XSwia2luZCI6Im5hdGl2ZV9vZmZpY2VfbWF0aCIsInBsYWNlaG9sZGVyX25hbWUiOiJtYXRoOjAwNiIsInNjaGVtYV92ZXJzaW9uIjoiMS4wIn0="/>
+              <p:cNvSpPr txBox="1"/>
+              <p:nvPr/>
+            </p:nvSpPr>
+            <p:spPr>
+              <a:xfrm>
+                <a:off x="9720501" y="1646396"/>
+                <a:ext cx="218599" cy="202406"/>
+              </a:xfrm>
+              <a:prstGeom prst="rect">
+                <a:avLst/>
+              </a:prstGeom>
+              <a:noFill/>
+              <a:effectLst/>
+            </p:spPr>
+            <p:txBody>
+              <a:bodyPr wrap="none" anchor="t" lIns="0" rIns="0" tIns="0" bIns="0">
+                <a:spAutoFit/>
+              </a:bodyPr>
+              <a:lstStyle/>
+              <a:p>
+                <a:pPr algn="ctr"/>
+                <a:r>
+                  <a:rPr lang="en-US" dirty="0" sz="1275">
+                    <a:solidFill>
+                      <a:srgbClr val="FFFFFF"/>
+                    </a:solidFill>
+                  </a:rPr>
+                  <a:t>\(z^{\tau}_{t}\)</a:t>
+                </a:r>
+                <a:endParaRPr lang="en-US" dirty="0" sz="1275">
+                  <a:solidFill>
+                    <a:srgbClr val="FFFFFF"/>
+                  </a:solidFill>
+                </a:endParaRPr>
+              </a:p>
+            </p:txBody>
+          </p:sp>
+        </mc:Fallback>
+      </mc:AlternateContent>
       <p:sp>
         <p:nvSpPr>
           <p:cNvPr id="128" name="Rounded Rectangle 127"/>
@@ -8252,60 +8732,124 @@
           </a:p>
         </p:txBody>
       </p:sp>
-      <p:sp>
-        <p:nvSpPr>
-          <p:cNvPr id="129" name="TextBox 128"/>
-          <p:cNvSpPr txBox="1"/>
-          <p:nvPr/>
-        </p:nvSpPr>
-        <p:spPr>
-          <a:xfrm>
-            <a:off x="10556986" y="1646396"/>
-            <a:ext cx="393478" cy="202406"/>
-          </a:xfrm>
-          <a:prstGeom prst="rect">
-            <a:avLst/>
-          </a:prstGeom>
-          <a:noFill/>
-          <a:effectLst/>
-        </p:spPr>
-        <p:txBody>
-          <a:bodyPr wrap="none" anchor="t" lIns="0" rIns="0" tIns="0" bIns="0">
-            <a:spAutoFit/>
-          </a:bodyPr>
-          <a:lstStyle/>
-          <a:p>
-            <a:pPr algn="ctr"/>
-            <a:r>
-              <a:rPr sz="1275" i="1" b="1">
-                <a:solidFill>
-                  <a:srgbClr val="FFFFFF"/>
-                </a:solidFill>
-                <a:latin typeface="Times New Roman"/>
-              </a:rPr>
-              <a:t>z</a:t>
-            </a:r>
-            <a:r>
-              <a:rPr sz="825" i="1" b="1" baseline="30000">
-                <a:solidFill>
-                  <a:srgbClr val="FFFFFF"/>
-                </a:solidFill>
-                <a:latin typeface="Times New Roman"/>
-              </a:rPr>
-              <a:t>τ</a:t>
-            </a:r>
-            <a:r>
-              <a:rPr sz="825" i="1" b="1" baseline="-25000">
-                <a:solidFill>
-                  <a:srgbClr val="FFFFFF"/>
-                </a:solidFill>
-                <a:latin typeface="Times New Roman"/>
-              </a:rPr>
-              <a:t>t+1</a:t>
-            </a:r>
-          </a:p>
-        </p:txBody>
-      </p:sp>
+      <mc:AlternateContent xmlns:mc="http://schemas.openxmlformats.org/markup-compatibility/2006">
+        <mc:Choice xmlns:a14="http://schemas.microsoft.com/office/drawing/2010/main" Requires="a14">
+          <p:sp>
+            <p:nvSpPr>
+              <p:cNvPr id="129" name="math:007" descr="AI_AUTOFIGURE_NATIVE_MATH_V1:eyJjb250ZW50X3J1bnMiOlt7ImNhbm9uaWNhbF9sYXRleCI6Inpee1xcdGF1fV97dCsxfSIsImZvcm11bGFfaWQiOiJFUTAwNyIsImtpbmQiOiJtYXRoIiwibGF0ZXhfc2hhMjU2IjoiMmM1ZTJlMzU3Mzg2MTFkZDE4YzEwNzBlZTQ2YjQ1MGU5YjE0ZGViZDFmYmU3ZDJlYzI0OWQ4OWMxZThmODU5MSIsIm1vZGUiOiJpbmxpbmUiLCJvbW1sX3NoYTI1NiI6IjY2YmY1ZjM0M2NjY2YwNTI1M2NjZGI5ODYxM2Y4NTFjZTYzMmVkOWNmMjBhMjE3MDc5MDUyYWE2NjRlYWQ3ZTkiLCJzZW1hbnRpY19vbW1sX3Byb2ZpbGUiOiJvZmZpY2UtbWF0aC1zZW1hbnRpYy12MiIsInNlbWFudGljX29tbWxfc2hhMjU2IjoiMjMzM2NjYjhkM2RjMTg3N2JiNDFkYzBkMmJlM2NmY2MxMjJjMGZjNDQyMzk3Mzk4YmI0MzlkMWMwNzdhMjY5OCJ9XSwiZm9ybXVsYXMiOlt7ImNhbm9uaWNhbF9sYXRleCI6Inpee1xcdGF1fV97dCsxfSIsImZvcm11bGFfaWQiOiJFUTAwNyIsImxhdGV4X3NoYTI1NiI6IjJjNWUyZTM1NzM4NjExZGQxOGMxMDcwZWU0NmI0NTBlOWIxNGRlYmQxZmJlN2QyZWMyNDlkODljMWU4Zjg1OTEiLCJtb2RlIjoiaW5saW5lIiwib21tbF9zaGEyNTYiOiI2NmJmNWYzNDNjY2NmMDUyNTNjY2RiOTg2MTNmODUxY2U2MzJlZDljZjIwYTIxNzA3OTA1MmFhNjY0ZWFkN2U5Iiwic2VtYW50aWNfb21tbF9wcm9maWxlIjoib2ZmaWNlLW1hdGgtc2VtYW50aWMtdjIiLCJzZW1hbnRpY19vbW1sX3NoYTI1NiI6IjIzMzNjY2I4ZDNkYzE4NzdiYjQxZGMwZDJiZTNjZmNjMTIyYzBmYzQ0MjM5NzM5OGJiNDM5ZDFjMDc3YTI2OTgifV0sImtpbmQiOiJuYXRpdmVfb2ZmaWNlX21hdGgiLCJwbGFjZWhvbGRlcl9uYW1lIjoibWF0aDowMDciLCJzY2hlbWFfdmVyc2lvbiI6IjEuMCJ9"/>
+              <p:cNvSpPr txBox="1"/>
+              <p:nvPr/>
+            </p:nvSpPr>
+            <p:spPr>
+              <a:xfrm>
+                <a:off x="10556986" y="1646396"/>
+                <a:ext cx="393478" cy="202406"/>
+              </a:xfrm>
+              <a:prstGeom prst="rect">
+                <a:avLst/>
+              </a:prstGeom>
+              <a:noFill/>
+              <a:effectLst/>
+            </p:spPr>
+            <p:txBody>
+              <a:bodyPr wrap="none" anchor="t" lIns="0" rIns="0" tIns="0" bIns="0">
+                <a:spAutoFit/>
+              </a:bodyPr>
+              <a:lstStyle/>
+              <a:p>
+                <a:pPr algn="ctr"/>
+                <a14:m>
+                  <m:oMath xmlns:m="http://schemas.openxmlformats.org/officeDocument/2006/math">
+                    <m:sSubSup>
+                      <m:e>
+                        <m:r>
+                          <a:rPr lang="en-US" dirty="0" sz="1275">
+                            <a:solidFill>
+                              <a:srgbClr val="FFFFFF"/>
+                            </a:solidFill>
+                            <a:latin typeface="Cambria Math"/>
+                          </a:rPr>
+                          <m:t>z</m:t>
+                        </m:r>
+                      </m:e>
+                      <m:sub>
+                        <m:r>
+                          <a:rPr lang="en-US" dirty="0" sz="1275">
+                            <a:solidFill>
+                              <a:srgbClr val="FFFFFF"/>
+                            </a:solidFill>
+                            <a:latin typeface="Cambria Math"/>
+                          </a:rPr>
+                          <m:t>t+1</m:t>
+                        </m:r>
+                      </m:sub>
+                      <m:sup>
+                        <m:r>
+                          <a:rPr lang="en-US" dirty="0" sz="1275">
+                            <a:solidFill>
+                              <a:srgbClr val="FFFFFF"/>
+                            </a:solidFill>
+                            <a:latin typeface="Cambria Math"/>
+                          </a:rPr>
+                          <m:t>τ</m:t>
+                        </m:r>
+                      </m:sup>
+                    </m:sSubSup>
+                  </m:oMath>
+                </a14:m>
+                <a:endParaRPr lang="en-US" dirty="0" sz="1275">
+                  <a:solidFill>
+                    <a:srgbClr val="FFFFFF"/>
+                  </a:solidFill>
+                  <a:latin typeface="Cambria Math"/>
+                </a:endParaRPr>
+              </a:p>
+            </p:txBody>
+          </p:sp>
+        </mc:Choice>
+        <mc:Fallback>
+          <p:sp>
+            <p:nvSpPr>
+              <p:cNvPr id="129" name="math:007" descr="AI_AUTOFIGURE_MATH_FALLBACK_ONLY_V1:eyJjb250ZW50X3J1bnMiOlt7ImNhbm9uaWNhbF9sYXRleCI6Inpee1xcdGF1fV97dCsxfSIsImZvcm11bGFfaWQiOiJFUTAwNyIsImtpbmQiOiJtYXRoIiwibGF0ZXhfc2hhMjU2IjoiMmM1ZTJlMzU3Mzg2MTFkZDE4YzEwNzBlZTQ2YjQ1MGU5YjE0ZGViZDFmYmU3ZDJlYzI0OWQ4OWMxZThmODU5MSIsIm1vZGUiOiJpbmxpbmUiLCJvbW1sX3NoYTI1NiI6IjY2YmY1ZjM0M2NjY2YwNTI1M2NjZGI5ODYxM2Y4NTFjZTYzMmVkOWNmMjBhMjE3MDc5MDUyYWE2NjRlYWQ3ZTkiLCJzZW1hbnRpY19vbW1sX3Byb2ZpbGUiOiJvZmZpY2UtbWF0aC1zZW1hbnRpYy12MiIsInNlbWFudGljX29tbWxfc2hhMjU2IjoiMjMzM2NjYjhkM2RjMTg3N2JiNDFkYzBkMmJlM2NmY2MxMjJjMGZjNDQyMzk3Mzk4YmI0MzlkMWMwNzdhMjY5OCJ9XSwiZm9ybXVsYXMiOlt7ImNhbm9uaWNhbF9sYXRleCI6Inpee1xcdGF1fV97dCsxfSIsImZvcm11bGFfaWQiOiJFUTAwNyIsImxhdGV4X3NoYTI1NiI6IjJjNWUyZTM1NzM4NjExZGQxOGMxMDcwZWU0NmI0NTBlOWIxNGRlYmQxZmJlN2QyZWMyNDlkODljMWU4Zjg1OTEiLCJtb2RlIjoiaW5saW5lIiwib21tbF9zaGEyNTYiOiI2NmJmNWYzNDNjY2NmMDUyNTNjY2RiOTg2MTNmODUxY2U2MzJlZDljZjIwYTIxNzA3OTA1MmFhNjY0ZWFkN2U5Iiwic2VtYW50aWNfb21tbF9wcm9maWxlIjoib2ZmaWNlLW1hdGgtc2VtYW50aWMtdjIiLCJzZW1hbnRpY19vbW1sX3NoYTI1NiI6IjIzMzNjY2I4ZDNkYzE4NzdiYjQxZGMwZDJiZTNjZmNjMTIyYzBmYzQ0MjM5NzM5OGJiNDM5ZDFjMDc3YTI2OTgifV0sImtpbmQiOiJuYXRpdmVfb2ZmaWNlX21hdGgiLCJwbGFjZWhvbGRlcl9uYW1lIjoibWF0aDowMDciLCJzY2hlbWFfdmVyc2lvbiI6IjEuMCJ9"/>
+              <p:cNvSpPr txBox="1"/>
+              <p:nvPr/>
+            </p:nvSpPr>
+            <p:spPr>
+              <a:xfrm>
+                <a:off x="10556986" y="1646396"/>
+                <a:ext cx="393478" cy="202406"/>
+              </a:xfrm>
+              <a:prstGeom prst="rect">
+                <a:avLst/>
+              </a:prstGeom>
+              <a:noFill/>
+              <a:effectLst/>
+            </p:spPr>
+            <p:txBody>
+              <a:bodyPr wrap="none" anchor="t" lIns="0" rIns="0" tIns="0" bIns="0">
+                <a:spAutoFit/>
+              </a:bodyPr>
+              <a:lstStyle/>
+              <a:p>
+                <a:pPr algn="ctr"/>
+                <a:r>
+                  <a:rPr lang="en-US" dirty="0" sz="1275">
+                    <a:solidFill>
+                      <a:srgbClr val="FFFFFF"/>
+                    </a:solidFill>
+                  </a:rPr>
+                  <a:t>\(z^{\tau}_{t+1}\)</a:t>
+                </a:r>
+                <a:endParaRPr lang="en-US" dirty="0" sz="1275">
+                  <a:solidFill>
+                    <a:srgbClr val="FFFFFF"/>
+                  </a:solidFill>
+                </a:endParaRPr>
+              </a:p>
+            </p:txBody>
+          </p:sp>
+        </mc:Fallback>
+      </mc:AlternateContent>
       <p:sp>
         <p:nvSpPr>
           <p:cNvPr id="130" name="Rounded Rectangle 129"/>
@@ -8349,60 +8893,124 @@
           </a:p>
         </p:txBody>
       </p:sp>
-      <p:sp>
-        <p:nvSpPr>
-          <p:cNvPr id="131" name="TextBox 130"/>
-          <p:cNvSpPr txBox="1"/>
-          <p:nvPr/>
-        </p:nvSpPr>
-        <p:spPr>
-          <a:xfrm>
-            <a:off x="11490436" y="1646396"/>
-            <a:ext cx="393478" cy="202406"/>
-          </a:xfrm>
-          <a:prstGeom prst="rect">
-            <a:avLst/>
-          </a:prstGeom>
-          <a:noFill/>
-          <a:effectLst/>
-        </p:spPr>
-        <p:txBody>
-          <a:bodyPr wrap="none" anchor="t" lIns="0" rIns="0" tIns="0" bIns="0">
-            <a:spAutoFit/>
-          </a:bodyPr>
-          <a:lstStyle/>
-          <a:p>
-            <a:pPr algn="ctr"/>
-            <a:r>
-              <a:rPr sz="1275" i="1" b="1">
-                <a:solidFill>
-                  <a:srgbClr val="FFFFFF"/>
-                </a:solidFill>
-                <a:latin typeface="Times New Roman"/>
-              </a:rPr>
-              <a:t>z</a:t>
-            </a:r>
-            <a:r>
-              <a:rPr sz="825" i="1" b="1" baseline="30000">
-                <a:solidFill>
-                  <a:srgbClr val="FFFFFF"/>
-                </a:solidFill>
-                <a:latin typeface="Times New Roman"/>
-              </a:rPr>
-              <a:t>τ</a:t>
-            </a:r>
-            <a:r>
-              <a:rPr sz="825" i="1" b="1" baseline="-25000">
-                <a:solidFill>
-                  <a:srgbClr val="FFFFFF"/>
-                </a:solidFill>
-                <a:latin typeface="Times New Roman"/>
-              </a:rPr>
-              <a:t>t+2</a:t>
-            </a:r>
-          </a:p>
-        </p:txBody>
-      </p:sp>
+      <mc:AlternateContent xmlns:mc="http://schemas.openxmlformats.org/markup-compatibility/2006">
+        <mc:Choice xmlns:a14="http://schemas.microsoft.com/office/drawing/2010/main" Requires="a14">
+          <p:sp>
+            <p:nvSpPr>
+              <p:cNvPr id="131" name="math:008" descr="AI_AUTOFIGURE_NATIVE_MATH_V1:eyJjb250ZW50X3J1bnMiOlt7ImNhbm9uaWNhbF9sYXRleCI6Inpee1xcdGF1fV97dCsyfSIsImZvcm11bGFfaWQiOiJFUTAwOCIsImtpbmQiOiJtYXRoIiwibGF0ZXhfc2hhMjU2IjoiZjE3MjkyMTZjNmIzNGI3ODc1N2JhN2I1NThmZTBlZjUzN2Q5YjM2ZTg1ZmY4NmE0ZTA0NjQ5ZmI5OTFmMWE0ZiIsIm1vZGUiOiJpbmxpbmUiLCJvbW1sX3NoYTI1NiI6IjU4YTU0YjQ2NDc2NGExYWVlOWMxNDQ1NTdjNjRhMjAxYjBjOGY5Zjk2MDE0ZjVlNDkwNmJhOTM4NDEzZjFmNDUiLCJzZW1hbnRpY19vbW1sX3Byb2ZpbGUiOiJvZmZpY2UtbWF0aC1zZW1hbnRpYy12MiIsInNlbWFudGljX29tbWxfc2hhMjU2IjoiMTc4YzVhMDM3MDY3NGFjYzc2NGI3OGYxNWExMGU0MmM5ZTNlZTRjZmZlY2Y5NjU5ZjgzMzViMjZlNzMyZmZmZSJ9XSwiZm9ybXVsYXMiOlt7ImNhbm9uaWNhbF9sYXRleCI6Inpee1xcdGF1fV97dCsyfSIsImZvcm11bGFfaWQiOiJFUTAwOCIsImxhdGV4X3NoYTI1NiI6ImYxNzI5MjE2YzZiMzRiNzg3NTdiYTdiNTU4ZmUwZWY1MzdkOWIzNmU4NWZmODZhNGUwNDY0OWZiOTkxZjFhNGYiLCJtb2RlIjoiaW5saW5lIiwib21tbF9zaGEyNTYiOiI1OGE1NGI0NjQ3NjRhMWFlZTljMTQ0NTU3YzY0YTIwMWIwYzhmOWY5NjAxNGY1ZTQ5MDZiYTkzODQxM2YxZjQ1Iiwic2VtYW50aWNfb21tbF9wcm9maWxlIjoib2ZmaWNlLW1hdGgtc2VtYW50aWMtdjIiLCJzZW1hbnRpY19vbW1sX3NoYTI1NiI6IjE3OGM1YTAzNzA2NzRhY2M3NjRiNzhmMTVhMTBlNDJjOWUzZWU0Y2ZmZWNmOTY1OWY4MzM1YjI2ZTczMmZmZmUifV0sImtpbmQiOiJuYXRpdmVfb2ZmaWNlX21hdGgiLCJwbGFjZWhvbGRlcl9uYW1lIjoibWF0aDowMDgiLCJzY2hlbWFfdmVyc2lvbiI6IjEuMCJ9"/>
+              <p:cNvSpPr txBox="1"/>
+              <p:nvPr/>
+            </p:nvSpPr>
+            <p:spPr>
+              <a:xfrm>
+                <a:off x="11490436" y="1646396"/>
+                <a:ext cx="393478" cy="202406"/>
+              </a:xfrm>
+              <a:prstGeom prst="rect">
+                <a:avLst/>
+              </a:prstGeom>
+              <a:noFill/>
+              <a:effectLst/>
+            </p:spPr>
+            <p:txBody>
+              <a:bodyPr wrap="none" anchor="t" lIns="0" rIns="0" tIns="0" bIns="0">
+                <a:spAutoFit/>
+              </a:bodyPr>
+              <a:lstStyle/>
+              <a:p>
+                <a:pPr algn="ctr"/>
+                <a14:m>
+                  <m:oMath xmlns:m="http://schemas.openxmlformats.org/officeDocument/2006/math">
+                    <m:sSubSup>
+                      <m:e>
+                        <m:r>
+                          <a:rPr lang="en-US" dirty="0" sz="1275">
+                            <a:solidFill>
+                              <a:srgbClr val="FFFFFF"/>
+                            </a:solidFill>
+                            <a:latin typeface="Cambria Math"/>
+                          </a:rPr>
+                          <m:t>z</m:t>
+                        </m:r>
+                      </m:e>
+                      <m:sub>
+                        <m:r>
+                          <a:rPr lang="en-US" dirty="0" sz="1275">
+                            <a:solidFill>
+                              <a:srgbClr val="FFFFFF"/>
+                            </a:solidFill>
+                            <a:latin typeface="Cambria Math"/>
+                          </a:rPr>
+                          <m:t>t+2</m:t>
+                        </m:r>
+                      </m:sub>
+                      <m:sup>
+                        <m:r>
+                          <a:rPr lang="en-US" dirty="0" sz="1275">
+                            <a:solidFill>
+                              <a:srgbClr val="FFFFFF"/>
+                            </a:solidFill>
+                            <a:latin typeface="Cambria Math"/>
+                          </a:rPr>
+                          <m:t>τ</m:t>
+                        </m:r>
+                      </m:sup>
+                    </m:sSubSup>
+                  </m:oMath>
+                </a14:m>
+                <a:endParaRPr lang="en-US" dirty="0" sz="1275">
+                  <a:solidFill>
+                    <a:srgbClr val="FFFFFF"/>
+                  </a:solidFill>
+                  <a:latin typeface="Cambria Math"/>
+                </a:endParaRPr>
+              </a:p>
+            </p:txBody>
+          </p:sp>
+        </mc:Choice>
+        <mc:Fallback>
+          <p:sp>
+            <p:nvSpPr>
+              <p:cNvPr id="131" name="math:008" descr="AI_AUTOFIGURE_MATH_FALLBACK_ONLY_V1:eyJjb250ZW50X3J1bnMiOlt7ImNhbm9uaWNhbF9sYXRleCI6Inpee1xcdGF1fV97dCsyfSIsImZvcm11bGFfaWQiOiJFUTAwOCIsImtpbmQiOiJtYXRoIiwibGF0ZXhfc2hhMjU2IjoiZjE3MjkyMTZjNmIzNGI3ODc1N2JhN2I1NThmZTBlZjUzN2Q5YjM2ZTg1ZmY4NmE0ZTA0NjQ5ZmI5OTFmMWE0ZiIsIm1vZGUiOiJpbmxpbmUiLCJvbW1sX3NoYTI1NiI6IjU4YTU0YjQ2NDc2NGExYWVlOWMxNDQ1NTdjNjRhMjAxYjBjOGY5Zjk2MDE0ZjVlNDkwNmJhOTM4NDEzZjFmNDUiLCJzZW1hbnRpY19vbW1sX3Byb2ZpbGUiOiJvZmZpY2UtbWF0aC1zZW1hbnRpYy12MiIsInNlbWFudGljX29tbWxfc2hhMjU2IjoiMTc4YzVhMDM3MDY3NGFjYzc2NGI3OGYxNWExMGU0MmM5ZTNlZTRjZmZlY2Y5NjU5ZjgzMzViMjZlNzMyZmZmZSJ9XSwiZm9ybXVsYXMiOlt7ImNhbm9uaWNhbF9sYXRleCI6Inpee1xcdGF1fV97dCsyfSIsImZvcm11bGFfaWQiOiJFUTAwOCIsImxhdGV4X3NoYTI1NiI6ImYxNzI5MjE2YzZiMzRiNzg3NTdiYTdiNTU4ZmUwZWY1MzdkOWIzNmU4NWZmODZhNGUwNDY0OWZiOTkxZjFhNGYiLCJtb2RlIjoiaW5saW5lIiwib21tbF9zaGEyNTYiOiI1OGE1NGI0NjQ3NjRhMWFlZTljMTQ0NTU3YzY0YTIwMWIwYzhmOWY5NjAxNGY1ZTQ5MDZiYTkzODQxM2YxZjQ1Iiwic2VtYW50aWNfb21tbF9wcm9maWxlIjoib2ZmaWNlLW1hdGgtc2VtYW50aWMtdjIiLCJzZW1hbnRpY19vbW1sX3NoYTI1NiI6IjE3OGM1YTAzNzA2NzRhY2M3NjRiNzhmMTVhMTBlNDJjOWUzZWU0Y2ZmZWNmOTY1OWY4MzM1YjI2ZTczMmZmZmUifV0sImtpbmQiOiJuYXRpdmVfb2ZmaWNlX21hdGgiLCJwbGFjZWhvbGRlcl9uYW1lIjoibWF0aDowMDgiLCJzY2hlbWFfdmVyc2lvbiI6IjEuMCJ9"/>
+              <p:cNvSpPr txBox="1"/>
+              <p:nvPr/>
+            </p:nvSpPr>
+            <p:spPr>
+              <a:xfrm>
+                <a:off x="11490436" y="1646396"/>
+                <a:ext cx="393478" cy="202406"/>
+              </a:xfrm>
+              <a:prstGeom prst="rect">
+                <a:avLst/>
+              </a:prstGeom>
+              <a:noFill/>
+              <a:effectLst/>
+            </p:spPr>
+            <p:txBody>
+              <a:bodyPr wrap="none" anchor="t" lIns="0" rIns="0" tIns="0" bIns="0">
+                <a:spAutoFit/>
+              </a:bodyPr>
+              <a:lstStyle/>
+              <a:p>
+                <a:pPr algn="ctr"/>
+                <a:r>
+                  <a:rPr lang="en-US" dirty="0" sz="1275">
+                    <a:solidFill>
+                      <a:srgbClr val="FFFFFF"/>
+                    </a:solidFill>
+                  </a:rPr>
+                  <a:t>\(z^{\tau}_{t+2}\)</a:t>
+                </a:r>
+                <a:endParaRPr lang="en-US" dirty="0" sz="1275">
+                  <a:solidFill>
+                    <a:srgbClr val="FFFFFF"/>
+                  </a:solidFill>
+                </a:endParaRPr>
+              </a:p>
+            </p:txBody>
+          </p:sp>
+        </mc:Fallback>
+      </mc:AlternateContent>
       <p:sp>
         <p:nvSpPr>
           <p:cNvPr id="132" name="Rounded Rectangle 131"/>
@@ -8446,60 +9054,124 @@
           </a:p>
         </p:txBody>
       </p:sp>
-      <p:sp>
-        <p:nvSpPr>
-          <p:cNvPr id="133" name="TextBox 132"/>
-          <p:cNvSpPr txBox="1"/>
-          <p:nvPr/>
-        </p:nvSpPr>
-        <p:spPr>
-          <a:xfrm>
-            <a:off x="12750975" y="1646396"/>
-            <a:ext cx="387001" cy="202406"/>
-          </a:xfrm>
-          <a:prstGeom prst="rect">
-            <a:avLst/>
-          </a:prstGeom>
-          <a:noFill/>
-          <a:effectLst/>
-        </p:spPr>
-        <p:txBody>
-          <a:bodyPr wrap="none" anchor="t" lIns="0" rIns="0" tIns="0" bIns="0">
-            <a:spAutoFit/>
-          </a:bodyPr>
-          <a:lstStyle/>
-          <a:p>
-            <a:pPr algn="ctr"/>
-            <a:r>
-              <a:rPr sz="1275" i="1" b="1">
-                <a:solidFill>
-                  <a:srgbClr val="FFFFFF"/>
-                </a:solidFill>
-                <a:latin typeface="Times New Roman"/>
-              </a:rPr>
-              <a:t>z</a:t>
-            </a:r>
-            <a:r>
-              <a:rPr sz="825" i="1" b="1" baseline="30000">
-                <a:solidFill>
-                  <a:srgbClr val="FFFFFF"/>
-                </a:solidFill>
-                <a:latin typeface="Times New Roman"/>
-              </a:rPr>
-              <a:t>τ</a:t>
-            </a:r>
-            <a:r>
-              <a:rPr sz="825" i="1" b="1" baseline="-25000">
-                <a:solidFill>
-                  <a:srgbClr val="FFFFFF"/>
-                </a:solidFill>
-                <a:latin typeface="Times New Roman"/>
-              </a:rPr>
-              <a:t>t+h</a:t>
-            </a:r>
-          </a:p>
-        </p:txBody>
-      </p:sp>
+      <mc:AlternateContent xmlns:mc="http://schemas.openxmlformats.org/markup-compatibility/2006">
+        <mc:Choice xmlns:a14="http://schemas.microsoft.com/office/drawing/2010/main" Requires="a14">
+          <p:sp>
+            <p:nvSpPr>
+              <p:cNvPr id="133" name="math:009" descr="AI_AUTOFIGURE_NATIVE_MATH_V1:eyJjb250ZW50X3J1bnMiOlt7ImNhbm9uaWNhbF9sYXRleCI6Inpee1xcdGF1fV97dCtofSIsImZvcm11bGFfaWQiOiJFUTAwOSIsImtpbmQiOiJtYXRoIiwibGF0ZXhfc2hhMjU2IjoiMTQ0MmExOTZjN2U5OWJhNTk2OTVjZTY3YzMyNTcyMjgzYjAyZmZlYjg4NDZhMDIxOTY0MDdiY2JiMjQzZjJkYSIsIm1vZGUiOiJpbmxpbmUiLCJvbW1sX3NoYTI1NiI6IjFkMGY2MzMyZDYwMTgwZTEwZTI4MDg1NDA1YmI5ZDc0Y2E2Mzg2NDllNmExOTBiOGE2Mjc1MzZmZmMxMjU4NzEiLCJzZW1hbnRpY19vbW1sX3Byb2ZpbGUiOiJvZmZpY2UtbWF0aC1zZW1hbnRpYy12MiIsInNlbWFudGljX29tbWxfc2hhMjU2IjoiMDM1YjgxMTU3MDY0NWY2YWY4ZGZhYTViMGM3Yzk4N2I2N2E3YmE0OWUxOGE4NWU5MDRjMzhiY2RjODViYWRlOCJ9XSwiZm9ybXVsYXMiOlt7ImNhbm9uaWNhbF9sYXRleCI6Inpee1xcdGF1fV97dCtofSIsImZvcm11bGFfaWQiOiJFUTAwOSIsImxhdGV4X3NoYTI1NiI6IjE0NDJhMTk2YzdlOTliYTU5Njk1Y2U2N2MzMjU3MjI4M2IwMmZmZWI4ODQ2YTAyMTk2NDA3YmNiYjI0M2YyZGEiLCJtb2RlIjoiaW5saW5lIiwib21tbF9zaGEyNTYiOiIxZDBmNjMzMmQ2MDE4MGUxMGUyODA4NTQwNWJiOWQ3NGNhNjM4NjQ5ZTZhMTkwYjhhNjI3NTM2ZmZjMTI1ODcxIiwic2VtYW50aWNfb21tbF9wcm9maWxlIjoib2ZmaWNlLW1hdGgtc2VtYW50aWMtdjIiLCJzZW1hbnRpY19vbW1sX3NoYTI1NiI6IjAzNWI4MTE1NzA2NDVmNmFmOGRmYWE1YjBjN2M5ODdiNjdhN2JhNDllMThhODVlOTA0YzM4YmNkYzg1YmFkZTgifV0sImtpbmQiOiJuYXRpdmVfb2ZmaWNlX21hdGgiLCJwbGFjZWhvbGRlcl9uYW1lIjoibWF0aDowMDkiLCJzY2hlbWFfdmVyc2lvbiI6IjEuMCJ9"/>
+              <p:cNvSpPr txBox="1"/>
+              <p:nvPr/>
+            </p:nvSpPr>
+            <p:spPr>
+              <a:xfrm>
+                <a:off x="12750975" y="1646396"/>
+                <a:ext cx="387001" cy="202406"/>
+              </a:xfrm>
+              <a:prstGeom prst="rect">
+                <a:avLst/>
+              </a:prstGeom>
+              <a:noFill/>
+              <a:effectLst/>
+            </p:spPr>
+            <p:txBody>
+              <a:bodyPr wrap="none" anchor="t" lIns="0" rIns="0" tIns="0" bIns="0">
+                <a:spAutoFit/>
+              </a:bodyPr>
+              <a:lstStyle/>
+              <a:p>
+                <a:pPr algn="ctr"/>
+                <a14:m>
+                  <m:oMath xmlns:m="http://schemas.openxmlformats.org/officeDocument/2006/math">
+                    <m:sSubSup>
+                      <m:e>
+                        <m:r>
+                          <a:rPr lang="en-US" dirty="0" sz="1275">
+                            <a:solidFill>
+                              <a:srgbClr val="FFFFFF"/>
+                            </a:solidFill>
+                            <a:latin typeface="Cambria Math"/>
+                          </a:rPr>
+                          <m:t>z</m:t>
+                        </m:r>
+                      </m:e>
+                      <m:sub>
+                        <m:r>
+                          <a:rPr lang="en-US" dirty="0" sz="1275">
+                            <a:solidFill>
+                              <a:srgbClr val="FFFFFF"/>
+                            </a:solidFill>
+                            <a:latin typeface="Cambria Math"/>
+                          </a:rPr>
+                          <m:t>t+h</m:t>
+                        </m:r>
+                      </m:sub>
+                      <m:sup>
+                        <m:r>
+                          <a:rPr lang="en-US" dirty="0" sz="1275">
+                            <a:solidFill>
+                              <a:srgbClr val="FFFFFF"/>
+                            </a:solidFill>
+                            <a:latin typeface="Cambria Math"/>
+                          </a:rPr>
+                          <m:t>τ</m:t>
+                        </m:r>
+                      </m:sup>
+                    </m:sSubSup>
+                  </m:oMath>
+                </a14:m>
+                <a:endParaRPr lang="en-US" dirty="0" sz="1275">
+                  <a:solidFill>
+                    <a:srgbClr val="FFFFFF"/>
+                  </a:solidFill>
+                  <a:latin typeface="Cambria Math"/>
+                </a:endParaRPr>
+              </a:p>
+            </p:txBody>
+          </p:sp>
+        </mc:Choice>
+        <mc:Fallback>
+          <p:sp>
+            <p:nvSpPr>
+              <p:cNvPr id="133" name="math:009" descr="AI_AUTOFIGURE_MATH_FALLBACK_ONLY_V1:eyJjb250ZW50X3J1bnMiOlt7ImNhbm9uaWNhbF9sYXRleCI6Inpee1xcdGF1fV97dCtofSIsImZvcm11bGFfaWQiOiJFUTAwOSIsImtpbmQiOiJtYXRoIiwibGF0ZXhfc2hhMjU2IjoiMTQ0MmExOTZjN2U5OWJhNTk2OTVjZTY3YzMyNTcyMjgzYjAyZmZlYjg4NDZhMDIxOTY0MDdiY2JiMjQzZjJkYSIsIm1vZGUiOiJpbmxpbmUiLCJvbW1sX3NoYTI1NiI6IjFkMGY2MzMyZDYwMTgwZTEwZTI4MDg1NDA1YmI5ZDc0Y2E2Mzg2NDllNmExOTBiOGE2Mjc1MzZmZmMxMjU4NzEiLCJzZW1hbnRpY19vbW1sX3Byb2ZpbGUiOiJvZmZpY2UtbWF0aC1zZW1hbnRpYy12MiIsInNlbWFudGljX29tbWxfc2hhMjU2IjoiMDM1YjgxMTU3MDY0NWY2YWY4ZGZhYTViMGM3Yzk4N2I2N2E3YmE0OWUxOGE4NWU5MDRjMzhiY2RjODViYWRlOCJ9XSwiZm9ybXVsYXMiOlt7ImNhbm9uaWNhbF9sYXRleCI6Inpee1xcdGF1fV97dCtofSIsImZvcm11bGFfaWQiOiJFUTAwOSIsImxhdGV4X3NoYTI1NiI6IjE0NDJhMTk2YzdlOTliYTU5Njk1Y2U2N2MzMjU3MjI4M2IwMmZmZWI4ODQ2YTAyMTk2NDA3YmNiYjI0M2YyZGEiLCJtb2RlIjoiaW5saW5lIiwib21tbF9zaGEyNTYiOiIxZDBmNjMzMmQ2MDE4MGUxMGUyODA4NTQwNWJiOWQ3NGNhNjM4NjQ5ZTZhMTkwYjhhNjI3NTM2ZmZjMTI1ODcxIiwic2VtYW50aWNfb21tbF9wcm9maWxlIjoib2ZmaWNlLW1hdGgtc2VtYW50aWMtdjIiLCJzZW1hbnRpY19vbW1sX3NoYTI1NiI6IjAzNWI4MTE1NzA2NDVmNmFmOGRmYWE1YjBjN2M5ODdiNjdhN2JhNDllMThhODVlOTA0YzM4YmNkYzg1YmFkZTgifV0sImtpbmQiOiJuYXRpdmVfb2ZmaWNlX21hdGgiLCJwbGFjZWhvbGRlcl9uYW1lIjoibWF0aDowMDkiLCJzY2hlbWFfdmVyc2lvbiI6IjEuMCJ9"/>
+              <p:cNvSpPr txBox="1"/>
+              <p:nvPr/>
+            </p:nvSpPr>
+            <p:spPr>
+              <a:xfrm>
+                <a:off x="12750975" y="1646396"/>
+                <a:ext cx="387001" cy="202406"/>
+              </a:xfrm>
+              <a:prstGeom prst="rect">
+                <a:avLst/>
+              </a:prstGeom>
+              <a:noFill/>
+              <a:effectLst/>
+            </p:spPr>
+            <p:txBody>
+              <a:bodyPr wrap="none" anchor="t" lIns="0" rIns="0" tIns="0" bIns="0">
+                <a:spAutoFit/>
+              </a:bodyPr>
+              <a:lstStyle/>
+              <a:p>
+                <a:pPr algn="ctr"/>
+                <a:r>
+                  <a:rPr lang="en-US" dirty="0" sz="1275">
+                    <a:solidFill>
+                      <a:srgbClr val="FFFFFF"/>
+                    </a:solidFill>
+                  </a:rPr>
+                  <a:t>\(z^{\tau}_{t+h}\)</a:t>
+                </a:r>
+                <a:endParaRPr lang="en-US" dirty="0" sz="1275">
+                  <a:solidFill>
+                    <a:srgbClr val="FFFFFF"/>
+                  </a:solidFill>
+                </a:endParaRPr>
+              </a:p>
+            </p:txBody>
+          </p:sp>
+        </mc:Fallback>
+      </mc:AlternateContent>
       <p:cxnSp>
         <p:nvCxnSpPr>
           <p:cNvPr id="134" name="Connector 133"/>
@@ -8572,6 +9244,10 @@
             <a:srgbClr val="8D6A00"/>
           </a:solidFill>
         </p:spPr>
+        <p:txBody>
+          <a:bodyPr/>
+          <a:p/>
+        </p:txBody>
       </p:sp>
       <p:cxnSp>
         <p:nvCxnSpPr>
@@ -8645,6 +9321,10 @@
             <a:srgbClr val="8D6A00"/>
           </a:solidFill>
         </p:spPr>
+        <p:txBody>
+          <a:bodyPr/>
+          <a:p/>
+        </p:txBody>
       </p:sp>
       <p:cxnSp>
         <p:nvCxnSpPr>
@@ -8718,6 +9398,10 @@
             <a:srgbClr val="8D6A00"/>
           </a:solidFill>
         </p:spPr>
+        <p:txBody>
+          <a:bodyPr/>
+          <a:p/>
+        </p:txBody>
       </p:sp>
       <p:sp>
         <p:nvSpPr>
@@ -8827,6 +9511,10 @@
             <a:srgbClr val="8D6A00"/>
           </a:solidFill>
         </p:spPr>
+        <p:txBody>
+          <a:bodyPr/>
+          <a:p/>
+        </p:txBody>
       </p:sp>
       <p:cxnSp>
         <p:nvCxnSpPr>
@@ -8900,6 +9588,10 @@
             <a:srgbClr val="8D6A00"/>
           </a:solidFill>
         </p:spPr>
+        <p:txBody>
+          <a:bodyPr/>
+          <a:p/>
+        </p:txBody>
       </p:sp>
       <p:cxnSp>
         <p:nvCxnSpPr>
@@ -8973,6 +9665,10 @@
             <a:srgbClr val="8D6A00"/>
           </a:solidFill>
         </p:spPr>
+        <p:txBody>
+          <a:bodyPr/>
+          <a:p/>
+        </p:txBody>
       </p:sp>
       <p:sp>
         <p:nvSpPr>
@@ -9097,141 +9793,327 @@
           </a:p>
         </p:txBody>
       </p:sp>
-      <p:sp>
-        <p:nvSpPr>
-          <p:cNvPr id="150" name="TextBox 149"/>
-          <p:cNvSpPr txBox="1"/>
-          <p:nvPr/>
-        </p:nvSpPr>
-        <p:spPr>
-          <a:xfrm>
-            <a:off x="9773936" y="2255996"/>
-            <a:ext cx="111728" cy="202406"/>
-          </a:xfrm>
-          <a:prstGeom prst="rect">
-            <a:avLst/>
-          </a:prstGeom>
-          <a:noFill/>
-          <a:effectLst/>
-        </p:spPr>
-        <p:txBody>
-          <a:bodyPr wrap="none" anchor="t" lIns="0" rIns="0" tIns="0" bIns="0">
-            <a:spAutoFit/>
-          </a:bodyPr>
-          <a:lstStyle/>
-          <a:p>
-            <a:pPr algn="ctr"/>
-            <a:r>
-              <a:rPr sz="1275" i="1" b="1">
-                <a:solidFill>
-                  <a:srgbClr val="FFFFFF"/>
-                </a:solidFill>
-                <a:latin typeface="Times New Roman"/>
-              </a:rPr>
-              <a:t>r</a:t>
-            </a:r>
-            <a:r>
-              <a:rPr sz="825" i="1" b="1" baseline="-25000">
-                <a:solidFill>
-                  <a:srgbClr val="FFFFFF"/>
-                </a:solidFill>
-                <a:latin typeface="Times New Roman"/>
-              </a:rPr>
-              <a:t>t</a:t>
-            </a:r>
-          </a:p>
-        </p:txBody>
-      </p:sp>
-      <p:sp>
-        <p:nvSpPr>
-          <p:cNvPr id="151" name="TextBox 150"/>
-          <p:cNvSpPr txBox="1"/>
-          <p:nvPr/>
-        </p:nvSpPr>
-        <p:spPr>
-          <a:xfrm>
-            <a:off x="10610421" y="2255996"/>
-            <a:ext cx="286607" cy="202406"/>
-          </a:xfrm>
-          <a:prstGeom prst="rect">
-            <a:avLst/>
-          </a:prstGeom>
-          <a:noFill/>
-          <a:effectLst/>
-        </p:spPr>
-        <p:txBody>
-          <a:bodyPr wrap="none" anchor="t" lIns="0" rIns="0" tIns="0" bIns="0">
-            <a:spAutoFit/>
-          </a:bodyPr>
-          <a:lstStyle/>
-          <a:p>
-            <a:pPr algn="ctr"/>
-            <a:r>
-              <a:rPr sz="1275" i="1" b="1">
-                <a:solidFill>
-                  <a:srgbClr val="FFFFFF"/>
-                </a:solidFill>
-                <a:latin typeface="Times New Roman"/>
-              </a:rPr>
-              <a:t>r</a:t>
-            </a:r>
-            <a:r>
-              <a:rPr sz="825" i="1" b="1" baseline="-25000">
-                <a:solidFill>
-                  <a:srgbClr val="FFFFFF"/>
-                </a:solidFill>
-                <a:latin typeface="Times New Roman"/>
-              </a:rPr>
-              <a:t>t+1</a:t>
-            </a:r>
-          </a:p>
-        </p:txBody>
-      </p:sp>
-      <p:sp>
-        <p:nvSpPr>
-          <p:cNvPr id="152" name="TextBox 151"/>
-          <p:cNvSpPr txBox="1"/>
-          <p:nvPr/>
-        </p:nvSpPr>
-        <p:spPr>
-          <a:xfrm>
-            <a:off x="11543871" y="2255996"/>
-            <a:ext cx="286607" cy="202406"/>
-          </a:xfrm>
-          <a:prstGeom prst="rect">
-            <a:avLst/>
-          </a:prstGeom>
-          <a:noFill/>
-          <a:effectLst/>
-        </p:spPr>
-        <p:txBody>
-          <a:bodyPr wrap="none" anchor="t" lIns="0" rIns="0" tIns="0" bIns="0">
-            <a:spAutoFit/>
-          </a:bodyPr>
-          <a:lstStyle/>
-          <a:p>
-            <a:pPr algn="ctr"/>
-            <a:r>
-              <a:rPr sz="1275" i="1" b="1">
-                <a:solidFill>
-                  <a:srgbClr val="FFFFFF"/>
-                </a:solidFill>
-                <a:latin typeface="Times New Roman"/>
-              </a:rPr>
-              <a:t>r</a:t>
-            </a:r>
-            <a:r>
-              <a:rPr sz="825" i="1" b="1" baseline="-25000">
-                <a:solidFill>
-                  <a:srgbClr val="FFFFFF"/>
-                </a:solidFill>
-                <a:latin typeface="Times New Roman"/>
-              </a:rPr>
-              <a:t>t+2</a:t>
-            </a:r>
-          </a:p>
-        </p:txBody>
-      </p:sp>
+      <mc:AlternateContent xmlns:mc="http://schemas.openxmlformats.org/markup-compatibility/2006">
+        <mc:Choice xmlns:a14="http://schemas.microsoft.com/office/drawing/2010/main" Requires="a14">
+          <p:sp>
+            <p:nvSpPr>
+              <p:cNvPr id="150" name="math:010" descr="AI_AUTOFIGURE_NATIVE_MATH_V1:eyJjb250ZW50X3J1bnMiOlt7ImNhbm9uaWNhbF9sYXRleCI6InJfe3R9IiwiZm9ybXVsYV9pZCI6IkVRMDEwIiwia2luZCI6Im1hdGgiLCJsYXRleF9zaGEyNTYiOiI1YTFlMDA1ZTIwZWQ3NDgxZDU1YmNlODQwNzVhN2NhYzMxOTNkYTI0NDYxYjYzMDE5NzM4OWJlMTkxMmUwZWVhIiwibW9kZSI6ImlubGluZSIsIm9tbWxfc2hhMjU2IjoiMDJhYmViNjg3YzViYzMyOTZiZTYxOWM5NjY5YzQzZDExZDBjN2UyZmVjNmM2NDIyZmQyM2RmOWZjMjQ0MmRhOCIsInNlbWFudGljX29tbWxfcHJvZmlsZSI6Im9mZmljZS1tYXRoLXNlbWFudGljLXYyIiwic2VtYW50aWNfb21tbF9zaGEyNTYiOiI3NzM1OWY2MmNhZDNkODE2MGY5YmQxNTE3ZjkxNjdmNTcxODdlM2EyOTE2N2E2ZmQ1MzEyMmFkMjczYmZiODJlIn1dLCJmb3JtdWxhcyI6W3siY2Fub25pY2FsX2xhdGV4Ijoicl97dH0iLCJmb3JtdWxhX2lkIjoiRVEwMTAiLCJsYXRleF9zaGEyNTYiOiI1YTFlMDA1ZTIwZWQ3NDgxZDU1YmNlODQwNzVhN2NhYzMxOTNkYTI0NDYxYjYzMDE5NzM4OWJlMTkxMmUwZWVhIiwibW9kZSI6ImlubGluZSIsIm9tbWxfc2hhMjU2IjoiMDJhYmViNjg3YzViYzMyOTZiZTYxOWM5NjY5YzQzZDExZDBjN2UyZmVjNmM2NDIyZmQyM2RmOWZjMjQ0MmRhOCIsInNlbWFudGljX29tbWxfcHJvZmlsZSI6Im9mZmljZS1tYXRoLXNlbWFudGljLXYyIiwic2VtYW50aWNfb21tbF9zaGEyNTYiOiI3NzM1OWY2MmNhZDNkODE2MGY5YmQxNTE3ZjkxNjdmNTcxODdlM2EyOTE2N2E2ZmQ1MzEyMmFkMjczYmZiODJlIn1dLCJraW5kIjoibmF0aXZlX29mZmljZV9tYXRoIiwicGxhY2Vob2xkZXJfbmFtZSI6Im1hdGg6MDEwIiwic2NoZW1hX3ZlcnNpb24iOiIxLjAifQ=="/>
+              <p:cNvSpPr txBox="1"/>
+              <p:nvPr/>
+            </p:nvSpPr>
+            <p:spPr>
+              <a:xfrm>
+                <a:off x="9773936" y="2255996"/>
+                <a:ext cx="111728" cy="202406"/>
+              </a:xfrm>
+              <a:prstGeom prst="rect">
+                <a:avLst/>
+              </a:prstGeom>
+              <a:noFill/>
+              <a:effectLst/>
+            </p:spPr>
+            <p:txBody>
+              <a:bodyPr wrap="none" anchor="t" lIns="0" rIns="0" tIns="0" bIns="0">
+                <a:spAutoFit/>
+              </a:bodyPr>
+              <a:lstStyle/>
+              <a:p>
+                <a:pPr algn="ctr"/>
+                <a14:m>
+                  <m:oMath xmlns:m="http://schemas.openxmlformats.org/officeDocument/2006/math">
+                    <m:sSub>
+                      <m:e>
+                        <m:r>
+                          <a:rPr lang="en-US" dirty="0" sz="1275">
+                            <a:solidFill>
+                              <a:srgbClr val="FFFFFF"/>
+                            </a:solidFill>
+                            <a:latin typeface="Cambria Math"/>
+                          </a:rPr>
+                          <m:t>r</m:t>
+                        </m:r>
+                      </m:e>
+                      <m:sub>
+                        <m:r>
+                          <a:rPr lang="en-US" dirty="0" sz="1275">
+                            <a:solidFill>
+                              <a:srgbClr val="FFFFFF"/>
+                            </a:solidFill>
+                            <a:latin typeface="Cambria Math"/>
+                          </a:rPr>
+                          <m:t>t</m:t>
+                        </m:r>
+                      </m:sub>
+                    </m:sSub>
+                  </m:oMath>
+                </a14:m>
+                <a:endParaRPr lang="en-US" dirty="0" sz="1275">
+                  <a:solidFill>
+                    <a:srgbClr val="FFFFFF"/>
+                  </a:solidFill>
+                  <a:latin typeface="Cambria Math"/>
+                </a:endParaRPr>
+              </a:p>
+            </p:txBody>
+          </p:sp>
+        </mc:Choice>
+        <mc:Fallback>
+          <p:sp>
+            <p:nvSpPr>
+              <p:cNvPr id="150" name="math:010" descr="AI_AUTOFIGURE_MATH_FALLBACK_ONLY_V1:eyJjb250ZW50X3J1bnMiOlt7ImNhbm9uaWNhbF9sYXRleCI6InJfe3R9IiwiZm9ybXVsYV9pZCI6IkVRMDEwIiwia2luZCI6Im1hdGgiLCJsYXRleF9zaGEyNTYiOiI1YTFlMDA1ZTIwZWQ3NDgxZDU1YmNlODQwNzVhN2NhYzMxOTNkYTI0NDYxYjYzMDE5NzM4OWJlMTkxMmUwZWVhIiwibW9kZSI6ImlubGluZSIsIm9tbWxfc2hhMjU2IjoiMDJhYmViNjg3YzViYzMyOTZiZTYxOWM5NjY5YzQzZDExZDBjN2UyZmVjNmM2NDIyZmQyM2RmOWZjMjQ0MmRhOCIsInNlbWFudGljX29tbWxfcHJvZmlsZSI6Im9mZmljZS1tYXRoLXNlbWFudGljLXYyIiwic2VtYW50aWNfb21tbF9zaGEyNTYiOiI3NzM1OWY2MmNhZDNkODE2MGY5YmQxNTE3ZjkxNjdmNTcxODdlM2EyOTE2N2E2ZmQ1MzEyMmFkMjczYmZiODJlIn1dLCJmb3JtdWxhcyI6W3siY2Fub25pY2FsX2xhdGV4Ijoicl97dH0iLCJmb3JtdWxhX2lkIjoiRVEwMTAiLCJsYXRleF9zaGEyNTYiOiI1YTFlMDA1ZTIwZWQ3NDgxZDU1YmNlODQwNzVhN2NhYzMxOTNkYTI0NDYxYjYzMDE5NzM4OWJlMTkxMmUwZWVhIiwibW9kZSI6ImlubGluZSIsIm9tbWxfc2hhMjU2IjoiMDJhYmViNjg3YzViYzMyOTZiZTYxOWM5NjY5YzQzZDExZDBjN2UyZmVjNmM2NDIyZmQyM2RmOWZjMjQ0MmRhOCIsInNlbWFudGljX29tbWxfcHJvZmlsZSI6Im9mZmljZS1tYXRoLXNlbWFudGljLXYyIiwic2VtYW50aWNfb21tbF9zaGEyNTYiOiI3NzM1OWY2MmNhZDNkODE2MGY5YmQxNTE3ZjkxNjdmNTcxODdlM2EyOTE2N2E2ZmQ1MzEyMmFkMjczYmZiODJlIn1dLCJraW5kIjoibmF0aXZlX29mZmljZV9tYXRoIiwicGxhY2Vob2xkZXJfbmFtZSI6Im1hdGg6MDEwIiwic2NoZW1hX3ZlcnNpb24iOiIxLjAifQ=="/>
+              <p:cNvSpPr txBox="1"/>
+              <p:nvPr/>
+            </p:nvSpPr>
+            <p:spPr>
+              <a:xfrm>
+                <a:off x="9773936" y="2255996"/>
+                <a:ext cx="111728" cy="202406"/>
+              </a:xfrm>
+              <a:prstGeom prst="rect">
+                <a:avLst/>
+              </a:prstGeom>
+              <a:noFill/>
+              <a:effectLst/>
+            </p:spPr>
+            <p:txBody>
+              <a:bodyPr wrap="none" anchor="t" lIns="0" rIns="0" tIns="0" bIns="0">
+                <a:spAutoFit/>
+              </a:bodyPr>
+              <a:lstStyle/>
+              <a:p>
+                <a:pPr algn="ctr"/>
+                <a:r>
+                  <a:rPr lang="en-US" dirty="0" sz="1275">
+                    <a:solidFill>
+                      <a:srgbClr val="FFFFFF"/>
+                    </a:solidFill>
+                  </a:rPr>
+                  <a:t>\(r_{t}\)</a:t>
+                </a:r>
+                <a:endParaRPr lang="en-US" dirty="0" sz="1275">
+                  <a:solidFill>
+                    <a:srgbClr val="FFFFFF"/>
+                  </a:solidFill>
+                </a:endParaRPr>
+              </a:p>
+            </p:txBody>
+          </p:sp>
+        </mc:Fallback>
+      </mc:AlternateContent>
+      <mc:AlternateContent xmlns:mc="http://schemas.openxmlformats.org/markup-compatibility/2006">
+        <mc:Choice xmlns:a14="http://schemas.microsoft.com/office/drawing/2010/main" Requires="a14">
+          <p:sp>
+            <p:nvSpPr>
+              <p:cNvPr id="151" name="math:011" descr="AI_AUTOFIGURE_NATIVE_MATH_V1:eyJjb250ZW50X3J1bnMiOlt7ImNhbm9uaWNhbF9sYXRleCI6InJfe3QrMX0iLCJmb3JtdWxhX2lkIjoiRVEwMTEiLCJraW5kIjoibWF0aCIsImxhdGV4X3NoYTI1NiI6ImM1ZDA3NDRiNjJjYTM4ZGQ1MDgwMGUyN2Y0MjAwMTVjYTdiMWM3ZTJlM2E5M2M4OTFkYjhlYzU1YTc3MTBiMzEiLCJtb2RlIjoiaW5saW5lIiwib21tbF9zaGEyNTYiOiJlY2NiNGI3MzliOTVkNWI2MmIwNmIzOGI1YjQ5N2E2YjkyOWZlYzUzMmQ1NTdiNmRlN2NjNTM5OTVkMmNmNDZkIiwic2VtYW50aWNfb21tbF9wcm9maWxlIjoib2ZmaWNlLW1hdGgtc2VtYW50aWMtdjIiLCJzZW1hbnRpY19vbW1sX3NoYTI1NiI6ImQwYWY1NTkxZWM4Y2Q5ZDgzYzA4ZDRhMmYxMzk0NDNkNDUxODc3MGRkODQxZmQ2YTIzYjY5Zjk1N2UwYTIxY2IifV0sImZvcm11bGFzIjpbeyJjYW5vbmljYWxfbGF0ZXgiOiJyX3t0KzF9IiwiZm9ybXVsYV9pZCI6IkVRMDExIiwibGF0ZXhfc2hhMjU2IjoiYzVkMDc0NGI2MmNhMzhkZDUwODAwZTI3ZjQyMDAxNWNhN2IxYzdlMmUzYTkzYzg5MWRiOGVjNTVhNzcxMGIzMSIsIm1vZGUiOiJpbmxpbmUiLCJvbW1sX3NoYTI1NiI6ImVjY2I0YjczOWI5NWQ1YjYyYjA2YjM4YjViNDk3YTZiOTI5ZmVjNTMyZDU1N2I2ZGU3Y2M1Mzk5NWQyY2Y0NmQiLCJzZW1hbnRpY19vbW1sX3Byb2ZpbGUiOiJvZmZpY2UtbWF0aC1zZW1hbnRpYy12MiIsInNlbWFudGljX29tbWxfc2hhMjU2IjoiZDBhZjU1OTFlYzhjZDlkODNjMDhkNGEyZjEzOTQ0M2Q0NTE4NzcwZGQ4NDFmZDZhMjNiNjlmOTU3ZTBhMjFjYiJ9XSwia2luZCI6Im5hdGl2ZV9vZmZpY2VfbWF0aCIsInBsYWNlaG9sZGVyX25hbWUiOiJtYXRoOjAxMSIsInNjaGVtYV92ZXJzaW9uIjoiMS4wIn0="/>
+              <p:cNvSpPr txBox="1"/>
+              <p:nvPr/>
+            </p:nvSpPr>
+            <p:spPr>
+              <a:xfrm>
+                <a:off x="10610421" y="2255996"/>
+                <a:ext cx="286607" cy="202406"/>
+              </a:xfrm>
+              <a:prstGeom prst="rect">
+                <a:avLst/>
+              </a:prstGeom>
+              <a:noFill/>
+              <a:effectLst/>
+            </p:spPr>
+            <p:txBody>
+              <a:bodyPr wrap="none" anchor="t" lIns="0" rIns="0" tIns="0" bIns="0">
+                <a:spAutoFit/>
+              </a:bodyPr>
+              <a:lstStyle/>
+              <a:p>
+                <a:pPr algn="ctr"/>
+                <a14:m>
+                  <m:oMath xmlns:m="http://schemas.openxmlformats.org/officeDocument/2006/math">
+                    <m:sSub>
+                      <m:e>
+                        <m:r>
+                          <a:rPr lang="en-US" dirty="0" sz="1275">
+                            <a:solidFill>
+                              <a:srgbClr val="FFFFFF"/>
+                            </a:solidFill>
+                            <a:latin typeface="Cambria Math"/>
+                          </a:rPr>
+                          <m:t>r</m:t>
+                        </m:r>
+                      </m:e>
+                      <m:sub>
+                        <m:r>
+                          <a:rPr lang="en-US" dirty="0" sz="1275">
+                            <a:solidFill>
+                              <a:srgbClr val="FFFFFF"/>
+                            </a:solidFill>
+                            <a:latin typeface="Cambria Math"/>
+                          </a:rPr>
+                          <m:t>t+1</m:t>
+                        </m:r>
+                      </m:sub>
+                    </m:sSub>
+                  </m:oMath>
+                </a14:m>
+                <a:endParaRPr lang="en-US" dirty="0" sz="1275">
+                  <a:solidFill>
+                    <a:srgbClr val="FFFFFF"/>
+                  </a:solidFill>
+                  <a:latin typeface="Cambria Math"/>
+                </a:endParaRPr>
+              </a:p>
+            </p:txBody>
+          </p:sp>
+        </mc:Choice>
+        <mc:Fallback>
+          <p:sp>
+            <p:nvSpPr>
+              <p:cNvPr id="151" name="math:011" descr="AI_AUTOFIGURE_MATH_FALLBACK_ONLY_V1:eyJjb250ZW50X3J1bnMiOlt7ImNhbm9uaWNhbF9sYXRleCI6InJfe3QrMX0iLCJmb3JtdWxhX2lkIjoiRVEwMTEiLCJraW5kIjoibWF0aCIsImxhdGV4X3NoYTI1NiI6ImM1ZDA3NDRiNjJjYTM4ZGQ1MDgwMGUyN2Y0MjAwMTVjYTdiMWM3ZTJlM2E5M2M4OTFkYjhlYzU1YTc3MTBiMzEiLCJtb2RlIjoiaW5saW5lIiwib21tbF9zaGEyNTYiOiJlY2NiNGI3MzliOTVkNWI2MmIwNmIzOGI1YjQ5N2E2YjkyOWZlYzUzMmQ1NTdiNmRlN2NjNTM5OTVkMmNmNDZkIiwic2VtYW50aWNfb21tbF9wcm9maWxlIjoib2ZmaWNlLW1hdGgtc2VtYW50aWMtdjIiLCJzZW1hbnRpY19vbW1sX3NoYTI1NiI6ImQwYWY1NTkxZWM4Y2Q5ZDgzYzA4ZDRhMmYxMzk0NDNkNDUxODc3MGRkODQxZmQ2YTIzYjY5Zjk1N2UwYTIxY2IifV0sImZvcm11bGFzIjpbeyJjYW5vbmljYWxfbGF0ZXgiOiJyX3t0KzF9IiwiZm9ybXVsYV9pZCI6IkVRMDExIiwibGF0ZXhfc2hhMjU2IjoiYzVkMDc0NGI2MmNhMzhkZDUwODAwZTI3ZjQyMDAxNWNhN2IxYzdlMmUzYTkzYzg5MWRiOGVjNTVhNzcxMGIzMSIsIm1vZGUiOiJpbmxpbmUiLCJvbW1sX3NoYTI1NiI6ImVjY2I0YjczOWI5NWQ1YjYyYjA2YjM4YjViNDk3YTZiOTI5ZmVjNTMyZDU1N2I2ZGU3Y2M1Mzk5NWQyY2Y0NmQiLCJzZW1hbnRpY19vbW1sX3Byb2ZpbGUiOiJvZmZpY2UtbWF0aC1zZW1hbnRpYy12MiIsInNlbWFudGljX29tbWxfc2hhMjU2IjoiZDBhZjU1OTFlYzhjZDlkODNjMDhkNGEyZjEzOTQ0M2Q0NTE4NzcwZGQ4NDFmZDZhMjNiNjlmOTU3ZTBhMjFjYiJ9XSwia2luZCI6Im5hdGl2ZV9vZmZpY2VfbWF0aCIsInBsYWNlaG9sZGVyX25hbWUiOiJtYXRoOjAxMSIsInNjaGVtYV92ZXJzaW9uIjoiMS4wIn0="/>
+              <p:cNvSpPr txBox="1"/>
+              <p:nvPr/>
+            </p:nvSpPr>
+            <p:spPr>
+              <a:xfrm>
+                <a:off x="10610421" y="2255996"/>
+                <a:ext cx="286607" cy="202406"/>
+              </a:xfrm>
+              <a:prstGeom prst="rect">
+                <a:avLst/>
+              </a:prstGeom>
+              <a:noFill/>
+              <a:effectLst/>
+            </p:spPr>
+            <p:txBody>
+              <a:bodyPr wrap="none" anchor="t" lIns="0" rIns="0" tIns="0" bIns="0">
+                <a:spAutoFit/>
+              </a:bodyPr>
+              <a:lstStyle/>
+              <a:p>
+                <a:pPr algn="ctr"/>
+                <a:r>
+                  <a:rPr lang="en-US" dirty="0" sz="1275">
+                    <a:solidFill>
+                      <a:srgbClr val="FFFFFF"/>
+                    </a:solidFill>
+                  </a:rPr>
+                  <a:t>\(r_{t+1}\)</a:t>
+                </a:r>
+                <a:endParaRPr lang="en-US" dirty="0" sz="1275">
+                  <a:solidFill>
+                    <a:srgbClr val="FFFFFF"/>
+                  </a:solidFill>
+                </a:endParaRPr>
+              </a:p>
+            </p:txBody>
+          </p:sp>
+        </mc:Fallback>
+      </mc:AlternateContent>
+      <mc:AlternateContent xmlns:mc="http://schemas.openxmlformats.org/markup-compatibility/2006">
+        <mc:Choice xmlns:a14="http://schemas.microsoft.com/office/drawing/2010/main" Requires="a14">
+          <p:sp>
+            <p:nvSpPr>
+              <p:cNvPr id="152" name="math:012" descr="AI_AUTOFIGURE_NATIVE_MATH_V1:eyJjb250ZW50X3J1bnMiOlt7ImNhbm9uaWNhbF9sYXRleCI6InJfe3QrMn0iLCJmb3JtdWxhX2lkIjoiRVEwMTIiLCJraW5kIjoibWF0aCIsImxhdGV4X3NoYTI1NiI6IjgyOTM1MTI4YTcxYzJiYWQ5ZGI1NTU3OGUwOWNiMmUwMjA4ODRjZDQyNDlmYmUwZTIyMTBmZGY5NThhYTFmZGYiLCJtb2RlIjoiaW5saW5lIiwib21tbF9zaGEyNTYiOiJmZDdjNmJjOTUyNjFhOGU1OTg0NmQ1ZGJjYTU0OGRlNTIyMzQ2NDllMTJkYjE5N2MxMTE4NTM1YjRhMDVkNWU0Iiwic2VtYW50aWNfb21tbF9wcm9maWxlIjoib2ZmaWNlLW1hdGgtc2VtYW50aWMtdjIiLCJzZW1hbnRpY19vbW1sX3NoYTI1NiI6ImE1MjM0OTZiOTI1NmNkODU1NDQxOTlhMzY0OGExMzY5YWJjYTI2YjdiYWIyYmI0YTM1YTI5NTM1YWQzNDI3ZTYifV0sImZvcm11bGFzIjpbeyJjYW5vbmljYWxfbGF0ZXgiOiJyX3t0KzJ9IiwiZm9ybXVsYV9pZCI6IkVRMDEyIiwibGF0ZXhfc2hhMjU2IjoiODI5MzUxMjhhNzFjMmJhZDlkYjU1NTc4ZTA5Y2IyZTAyMDg4NGNkNDI0OWZiZTBlMjIxMGZkZjk1OGFhMWZkZiIsIm1vZGUiOiJpbmxpbmUiLCJvbW1sX3NoYTI1NiI6ImZkN2M2YmM5NTI2MWE4ZTU5ODQ2ZDVkYmNhNTQ4ZGU1MjIzNDY0OWUxMmRiMTk3YzExMTg1MzViNGEwNWQ1ZTQiLCJzZW1hbnRpY19vbW1sX3Byb2ZpbGUiOiJvZmZpY2UtbWF0aC1zZW1hbnRpYy12MiIsInNlbWFudGljX29tbWxfc2hhMjU2IjoiYTUyMzQ5NmI5MjU2Y2Q4NTU0NDE5OWEzNjQ4YTEzNjlhYmNhMjZiN2JhYjJiYjRhMzVhMjk1MzVhZDM0MjdlNiJ9XSwia2luZCI6Im5hdGl2ZV9vZmZpY2VfbWF0aCIsInBsYWNlaG9sZGVyX25hbWUiOiJtYXRoOjAxMiIsInNjaGVtYV92ZXJzaW9uIjoiMS4wIn0="/>
+              <p:cNvSpPr txBox="1"/>
+              <p:nvPr/>
+            </p:nvSpPr>
+            <p:spPr>
+              <a:xfrm>
+                <a:off x="11543871" y="2255996"/>
+                <a:ext cx="286607" cy="202406"/>
+              </a:xfrm>
+              <a:prstGeom prst="rect">
+                <a:avLst/>
+              </a:prstGeom>
+              <a:noFill/>
+              <a:effectLst/>
+            </p:spPr>
+            <p:txBody>
+              <a:bodyPr wrap="none" anchor="t" lIns="0" rIns="0" tIns="0" bIns="0">
+                <a:spAutoFit/>
+              </a:bodyPr>
+              <a:lstStyle/>
+              <a:p>
+                <a:pPr algn="ctr"/>
+                <a14:m>
+                  <m:oMath xmlns:m="http://schemas.openxmlformats.org/officeDocument/2006/math">
+                    <m:sSub>
+                      <m:e>
+                        <m:r>
+                          <a:rPr lang="en-US" dirty="0" sz="1275">
+                            <a:solidFill>
+                              <a:srgbClr val="FFFFFF"/>
+                            </a:solidFill>
+                            <a:latin typeface="Cambria Math"/>
+                          </a:rPr>
+                          <m:t>r</m:t>
+                        </m:r>
+                      </m:e>
+                      <m:sub>
+                        <m:r>
+                          <a:rPr lang="en-US" dirty="0" sz="1275">
+                            <a:solidFill>
+                              <a:srgbClr val="FFFFFF"/>
+                            </a:solidFill>
+                            <a:latin typeface="Cambria Math"/>
+                          </a:rPr>
+                          <m:t>t+2</m:t>
+                        </m:r>
+                      </m:sub>
+                    </m:sSub>
+                  </m:oMath>
+                </a14:m>
+                <a:endParaRPr lang="en-US" dirty="0" sz="1275">
+                  <a:solidFill>
+                    <a:srgbClr val="FFFFFF"/>
+                  </a:solidFill>
+                  <a:latin typeface="Cambria Math"/>
+                </a:endParaRPr>
+              </a:p>
+            </p:txBody>
+          </p:sp>
+        </mc:Choice>
+        <mc:Fallback>
+          <p:sp>
+            <p:nvSpPr>
+              <p:cNvPr id="152" name="math:012" descr="AI_AUTOFIGURE_MATH_FALLBACK_ONLY_V1:eyJjb250ZW50X3J1bnMiOlt7ImNhbm9uaWNhbF9sYXRleCI6InJfe3QrMn0iLCJmb3JtdWxhX2lkIjoiRVEwMTIiLCJraW5kIjoibWF0aCIsImxhdGV4X3NoYTI1NiI6IjgyOTM1MTI4YTcxYzJiYWQ5ZGI1NTU3OGUwOWNiMmUwMjA4ODRjZDQyNDlmYmUwZTIyMTBmZGY5NThhYTFmZGYiLCJtb2RlIjoiaW5saW5lIiwib21tbF9zaGEyNTYiOiJmZDdjNmJjOTUyNjFhOGU1OTg0NmQ1ZGJjYTU0OGRlNTIyMzQ2NDllMTJkYjE5N2MxMTE4NTM1YjRhMDVkNWU0Iiwic2VtYW50aWNfb21tbF9wcm9maWxlIjoib2ZmaWNlLW1hdGgtc2VtYW50aWMtdjIiLCJzZW1hbnRpY19vbW1sX3NoYTI1NiI6ImE1MjM0OTZiOTI1NmNkODU1NDQxOTlhMzY0OGExMzY5YWJjYTI2YjdiYWIyYmI0YTM1YTI5NTM1YWQzNDI3ZTYifV0sImZvcm11bGFzIjpbeyJjYW5vbmljYWxfbGF0ZXgiOiJyX3t0KzJ9IiwiZm9ybXVsYV9pZCI6IkVRMDEyIiwibGF0ZXhfc2hhMjU2IjoiODI5MzUxMjhhNzFjMmJhZDlkYjU1NTc4ZTA5Y2IyZTAyMDg4NGNkNDI0OWZiZTBlMjIxMGZkZjk1OGFhMWZkZiIsIm1vZGUiOiJpbmxpbmUiLCJvbW1sX3NoYTI1NiI6ImZkN2M2YmM5NTI2MWE4ZTU5ODQ2ZDVkYmNhNTQ4ZGU1MjIzNDY0OWUxMmRiMTk3YzExMTg1MzViNGEwNWQ1ZTQiLCJzZW1hbnRpY19vbW1sX3Byb2ZpbGUiOiJvZmZpY2UtbWF0aC1zZW1hbnRpYy12MiIsInNlbWFudGljX29tbWxfc2hhMjU2IjoiYTUyMzQ5NmI5MjU2Y2Q4NTU0NDE5OWEzNjQ4YTEzNjlhYmNhMjZiN2JhYjJiYjRhMzVhMjk1MzVhZDM0MjdlNiJ9XSwia2luZCI6Im5hdGl2ZV9vZmZpY2VfbWF0aCIsInBsYWNlaG9sZGVyX25hbWUiOiJtYXRoOjAxMiIsInNjaGVtYV92ZXJzaW9uIjoiMS4wIn0="/>
+              <p:cNvSpPr txBox="1"/>
+              <p:nvPr/>
+            </p:nvSpPr>
+            <p:spPr>
+              <a:xfrm>
+                <a:off x="11543871" y="2255996"/>
+                <a:ext cx="286607" cy="202406"/>
+              </a:xfrm>
+              <a:prstGeom prst="rect">
+                <a:avLst/>
+              </a:prstGeom>
+              <a:noFill/>
+              <a:effectLst/>
+            </p:spPr>
+            <p:txBody>
+              <a:bodyPr wrap="none" anchor="t" lIns="0" rIns="0" tIns="0" bIns="0">
+                <a:spAutoFit/>
+              </a:bodyPr>
+              <a:lstStyle/>
+              <a:p>
+                <a:pPr algn="ctr"/>
+                <a:r>
+                  <a:rPr lang="en-US" dirty="0" sz="1275">
+                    <a:solidFill>
+                      <a:srgbClr val="FFFFFF"/>
+                    </a:solidFill>
+                  </a:rPr>
+                  <a:t>\(r_{t+2}\)</a:t>
+                </a:r>
+                <a:endParaRPr lang="en-US" dirty="0" sz="1275">
+                  <a:solidFill>
+                    <a:srgbClr val="FFFFFF"/>
+                  </a:solidFill>
+                </a:endParaRPr>
+              </a:p>
+            </p:txBody>
+          </p:sp>
+        </mc:Fallback>
+      </mc:AlternateContent>
       <p:sp>
         <p:nvSpPr>
           <p:cNvPr id="153" name="freeform-153"/>
@@ -9276,6 +10158,10 @@
             </a:solidFill>
           </a:ln>
         </p:spPr>
+        <p:txBody>
+          <a:bodyPr/>
+          <a:p/>
+        </p:txBody>
       </p:sp>
       <p:sp>
         <p:nvSpPr>
@@ -9319,6 +10205,10 @@
             </a:solidFill>
           </a:ln>
         </p:spPr>
+        <p:txBody>
+          <a:bodyPr/>
+          <a:p/>
+        </p:txBody>
       </p:sp>
       <p:sp>
         <p:nvSpPr>
@@ -9362,6 +10252,10 @@
             </a:solidFill>
           </a:ln>
         </p:spPr>
+        <p:txBody>
+          <a:bodyPr/>
+          <a:p/>
+        </p:txBody>
       </p:sp>
       <p:cxnSp>
         <p:nvCxnSpPr>
@@ -9598,51 +10492,113 @@
           </a:p>
         </p:txBody>
       </p:sp>
-      <p:sp>
-        <p:nvSpPr>
-          <p:cNvPr id="162" name="TextBox 161"/>
-          <p:cNvSpPr txBox="1"/>
-          <p:nvPr/>
-        </p:nvSpPr>
-        <p:spPr>
-          <a:xfrm>
-            <a:off x="9765744" y="2903696"/>
-            <a:ext cx="137636" cy="202406"/>
-          </a:xfrm>
-          <a:prstGeom prst="rect">
-            <a:avLst/>
-          </a:prstGeom>
-          <a:noFill/>
-          <a:effectLst/>
-        </p:spPr>
-        <p:txBody>
-          <a:bodyPr wrap="none" anchor="t" lIns="0" rIns="0" tIns="0" bIns="0">
-            <a:spAutoFit/>
-          </a:bodyPr>
-          <a:lstStyle/>
-          <a:p>
-            <a:pPr algn="ctr"/>
-            <a:r>
-              <a:rPr sz="1275" i="1" b="1">
-                <a:solidFill>
-                  <a:srgbClr val="FFFFFF"/>
-                </a:solidFill>
-                <a:latin typeface="Times New Roman"/>
-              </a:rPr>
-              <a:t>z</a:t>
-            </a:r>
-            <a:r>
-              <a:rPr sz="825" i="1" b="1" baseline="-25000">
-                <a:solidFill>
-                  <a:srgbClr val="FFFFFF"/>
-                </a:solidFill>
-                <a:latin typeface="Times New Roman"/>
-              </a:rPr>
-              <a:t>t</a:t>
-            </a:r>
-          </a:p>
-        </p:txBody>
-      </p:sp>
+      <mc:AlternateContent xmlns:mc="http://schemas.openxmlformats.org/markup-compatibility/2006">
+        <mc:Choice xmlns:a14="http://schemas.microsoft.com/office/drawing/2010/main" Requires="a14">
+          <p:sp>
+            <p:nvSpPr>
+              <p:cNvPr id="162" name="math:013" descr="AI_AUTOFIGURE_NATIVE_MATH_V1:eyJjb250ZW50X3J1bnMiOlt7ImNhbm9uaWNhbF9sYXRleCI6Inpfe3R9IiwiZm9ybXVsYV9pZCI6IkVRMDEzIiwia2luZCI6Im1hdGgiLCJsYXRleF9zaGEyNTYiOiI1MTFhZDkzYjNmYWU5ZDczZDU2MzY1NmZlYjNiZTY5M2Y0MjBjM2FkNDNmNjBkY2QzNWRiNjMxYWIwZTUwY2EzIiwibW9kZSI6ImlubGluZSIsIm9tbWxfc2hhMjU2IjoiOWNjMjA3NmY3N2U5ZDBlODdiOWE5Y2ZjYWFmZmRjNTBiNzU4ZDZiYmM1MTBjZWY4ZjNiYTU3NDhmODUyMmM1ZSIsInNlbWFudGljX29tbWxfcHJvZmlsZSI6Im9mZmljZS1tYXRoLXNlbWFudGljLXYyIiwic2VtYW50aWNfb21tbF9zaGEyNTYiOiI3MGQyYWI5NmM3NjkwMTQ0MjFhOGZjMTk5ZjQ0MzE0YjFhYWNlZjVkN2RhZGNiZjU2ZDI3MzJjMWJhMjU0MzI4In1dLCJmb3JtdWxhcyI6W3siY2Fub25pY2FsX2xhdGV4Ijoiel97dH0iLCJmb3JtdWxhX2lkIjoiRVEwMTMiLCJsYXRleF9zaGEyNTYiOiI1MTFhZDkzYjNmYWU5ZDczZDU2MzY1NmZlYjNiZTY5M2Y0MjBjM2FkNDNmNjBkY2QzNWRiNjMxYWIwZTUwY2EzIiwibW9kZSI6ImlubGluZSIsIm9tbWxfc2hhMjU2IjoiOWNjMjA3NmY3N2U5ZDBlODdiOWE5Y2ZjYWFmZmRjNTBiNzU4ZDZiYmM1MTBjZWY4ZjNiYTU3NDhmODUyMmM1ZSIsInNlbWFudGljX29tbWxfcHJvZmlsZSI6Im9mZmljZS1tYXRoLXNlbWFudGljLXYyIiwic2VtYW50aWNfb21tbF9zaGEyNTYiOiI3MGQyYWI5NmM3NjkwMTQ0MjFhOGZjMTk5ZjQ0MzE0YjFhYWNlZjVkN2RhZGNiZjU2ZDI3MzJjMWJhMjU0MzI4In1dLCJraW5kIjoibmF0aXZlX29mZmljZV9tYXRoIiwicGxhY2Vob2xkZXJfbmFtZSI6Im1hdGg6MDEzIiwic2NoZW1hX3ZlcnNpb24iOiIxLjAifQ=="/>
+              <p:cNvSpPr txBox="1"/>
+              <p:nvPr/>
+            </p:nvSpPr>
+            <p:spPr>
+              <a:xfrm>
+                <a:off x="9765744" y="2903696"/>
+                <a:ext cx="137636" cy="202406"/>
+              </a:xfrm>
+              <a:prstGeom prst="rect">
+                <a:avLst/>
+              </a:prstGeom>
+              <a:noFill/>
+              <a:effectLst/>
+            </p:spPr>
+            <p:txBody>
+              <a:bodyPr wrap="none" anchor="t" lIns="0" rIns="0" tIns="0" bIns="0">
+                <a:spAutoFit/>
+              </a:bodyPr>
+              <a:lstStyle/>
+              <a:p>
+                <a:pPr algn="ctr"/>
+                <a14:m>
+                  <m:oMath xmlns:m="http://schemas.openxmlformats.org/officeDocument/2006/math">
+                    <m:sSub>
+                      <m:e>
+                        <m:r>
+                          <a:rPr lang="en-US" dirty="0" sz="1275">
+                            <a:solidFill>
+                              <a:srgbClr val="FFFFFF"/>
+                            </a:solidFill>
+                            <a:latin typeface="Cambria Math"/>
+                          </a:rPr>
+                          <m:t>z</m:t>
+                        </m:r>
+                      </m:e>
+                      <m:sub>
+                        <m:r>
+                          <a:rPr lang="en-US" dirty="0" sz="1275">
+                            <a:solidFill>
+                              <a:srgbClr val="FFFFFF"/>
+                            </a:solidFill>
+                            <a:latin typeface="Cambria Math"/>
+                          </a:rPr>
+                          <m:t>t</m:t>
+                        </m:r>
+                      </m:sub>
+                    </m:sSub>
+                  </m:oMath>
+                </a14:m>
+                <a:endParaRPr lang="en-US" dirty="0" sz="1275">
+                  <a:solidFill>
+                    <a:srgbClr val="FFFFFF"/>
+                  </a:solidFill>
+                  <a:latin typeface="Cambria Math"/>
+                </a:endParaRPr>
+              </a:p>
+            </p:txBody>
+          </p:sp>
+        </mc:Choice>
+        <mc:Fallback>
+          <p:sp>
+            <p:nvSpPr>
+              <p:cNvPr id="162" name="math:013" descr="AI_AUTOFIGURE_MATH_FALLBACK_ONLY_V1:eyJjb250ZW50X3J1bnMiOlt7ImNhbm9uaWNhbF9sYXRleCI6Inpfe3R9IiwiZm9ybXVsYV9pZCI6IkVRMDEzIiwia2luZCI6Im1hdGgiLCJsYXRleF9zaGEyNTYiOiI1MTFhZDkzYjNmYWU5ZDczZDU2MzY1NmZlYjNiZTY5M2Y0MjBjM2FkNDNmNjBkY2QzNWRiNjMxYWIwZTUwY2EzIiwibW9kZSI6ImlubGluZSIsIm9tbWxfc2hhMjU2IjoiOWNjMjA3NmY3N2U5ZDBlODdiOWE5Y2ZjYWFmZmRjNTBiNzU4ZDZiYmM1MTBjZWY4ZjNiYTU3NDhmODUyMmM1ZSIsInNlbWFudGljX29tbWxfcHJvZmlsZSI6Im9mZmljZS1tYXRoLXNlbWFudGljLXYyIiwic2VtYW50aWNfb21tbF9zaGEyNTYiOiI3MGQyYWI5NmM3NjkwMTQ0MjFhOGZjMTk5ZjQ0MzE0YjFhYWNlZjVkN2RhZGNiZjU2ZDI3MzJjMWJhMjU0MzI4In1dLCJmb3JtdWxhcyI6W3siY2Fub25pY2FsX2xhdGV4Ijoiel97dH0iLCJmb3JtdWxhX2lkIjoiRVEwMTMiLCJsYXRleF9zaGEyNTYiOiI1MTFhZDkzYjNmYWU5ZDczZDU2MzY1NmZlYjNiZTY5M2Y0MjBjM2FkNDNmNjBkY2QzNWRiNjMxYWIwZTUwY2EzIiwibW9kZSI6ImlubGluZSIsIm9tbWxfc2hhMjU2IjoiOWNjMjA3NmY3N2U5ZDBlODdiOWE5Y2ZjYWFmZmRjNTBiNzU4ZDZiYmM1MTBjZWY4ZjNiYTU3NDhmODUyMmM1ZSIsInNlbWFudGljX29tbWxfcHJvZmlsZSI6Im9mZmljZS1tYXRoLXNlbWFudGljLXYyIiwic2VtYW50aWNfb21tbF9zaGEyNTYiOiI3MGQyYWI5NmM3NjkwMTQ0MjFhOGZjMTk5ZjQ0MzE0YjFhYWNlZjVkN2RhZGNiZjU2ZDI3MzJjMWJhMjU0MzI4In1dLCJraW5kIjoibmF0aXZlX29mZmljZV9tYXRoIiwicGxhY2Vob2xkZXJfbmFtZSI6Im1hdGg6MDEzIiwic2NoZW1hX3ZlcnNpb24iOiIxLjAifQ=="/>
+              <p:cNvSpPr txBox="1"/>
+              <p:nvPr/>
+            </p:nvSpPr>
+            <p:spPr>
+              <a:xfrm>
+                <a:off x="9765744" y="2903696"/>
+                <a:ext cx="137636" cy="202406"/>
+              </a:xfrm>
+              <a:prstGeom prst="rect">
+                <a:avLst/>
+              </a:prstGeom>
+              <a:noFill/>
+              <a:effectLst/>
+            </p:spPr>
+            <p:txBody>
+              <a:bodyPr wrap="none" anchor="t" lIns="0" rIns="0" tIns="0" bIns="0">
+                <a:spAutoFit/>
+              </a:bodyPr>
+              <a:lstStyle/>
+              <a:p>
+                <a:pPr algn="ctr"/>
+                <a:r>
+                  <a:rPr lang="en-US" dirty="0" sz="1275">
+                    <a:solidFill>
+                      <a:srgbClr val="FFFFFF"/>
+                    </a:solidFill>
+                  </a:rPr>
+                  <a:t>\(z_{t}\)</a:t>
+                </a:r>
+                <a:endParaRPr lang="en-US" dirty="0" sz="1275">
+                  <a:solidFill>
+                    <a:srgbClr val="FFFFFF"/>
+                  </a:solidFill>
+                </a:endParaRPr>
+              </a:p>
+            </p:txBody>
+          </p:sp>
+        </mc:Fallback>
+      </mc:AlternateContent>
       <p:sp>
         <p:nvSpPr>
           <p:cNvPr id="163" name="Rounded Rectangle 162"/>
@@ -9686,51 +10642,113 @@
           </a:p>
         </p:txBody>
       </p:sp>
-      <p:sp>
-        <p:nvSpPr>
-          <p:cNvPr id="164" name="TextBox 163"/>
-          <p:cNvSpPr txBox="1"/>
-          <p:nvPr/>
-        </p:nvSpPr>
-        <p:spPr>
-          <a:xfrm>
-            <a:off x="10602230" y="2903696"/>
-            <a:ext cx="312515" cy="202406"/>
-          </a:xfrm>
-          <a:prstGeom prst="rect">
-            <a:avLst/>
-          </a:prstGeom>
-          <a:noFill/>
-          <a:effectLst/>
-        </p:spPr>
-        <p:txBody>
-          <a:bodyPr wrap="none" anchor="t" lIns="0" rIns="0" tIns="0" bIns="0">
-            <a:spAutoFit/>
-          </a:bodyPr>
-          <a:lstStyle/>
-          <a:p>
-            <a:pPr algn="ctr"/>
-            <a:r>
-              <a:rPr sz="1275" i="1" b="1">
-                <a:solidFill>
-                  <a:srgbClr val="FFFFFF"/>
-                </a:solidFill>
-                <a:latin typeface="Times New Roman"/>
-              </a:rPr>
-              <a:t>z</a:t>
-            </a:r>
-            <a:r>
-              <a:rPr sz="825" i="1" b="1" baseline="-25000">
-                <a:solidFill>
-                  <a:srgbClr val="FFFFFF"/>
-                </a:solidFill>
-                <a:latin typeface="Times New Roman"/>
-              </a:rPr>
-              <a:t>t+1</a:t>
-            </a:r>
-          </a:p>
-        </p:txBody>
-      </p:sp>
+      <mc:AlternateContent xmlns:mc="http://schemas.openxmlformats.org/markup-compatibility/2006">
+        <mc:Choice xmlns:a14="http://schemas.microsoft.com/office/drawing/2010/main" Requires="a14">
+          <p:sp>
+            <p:nvSpPr>
+              <p:cNvPr id="164" name="math:014" descr="AI_AUTOFIGURE_NATIVE_MATH_V1:eyJjb250ZW50X3J1bnMiOlt7ImNhbm9uaWNhbF9sYXRleCI6Inpfe3QrMX0iLCJmb3JtdWxhX2lkIjoiRVEwMTQiLCJraW5kIjoibWF0aCIsImxhdGV4X3NoYTI1NiI6IjhlNWQwMDAwYWJiOWNmMDc3M2U3OGZiNTMwMjc1MjMwYjhlZGZiOGNkOTYyYjMyNjM1ZGRlN2NjMjg0NjkwOTEiLCJtb2RlIjoiaW5saW5lIiwib21tbF9zaGEyNTYiOiJhOTVmOTI4NDdlYzgwMmEyMzkyZDQ5YWYwYTZlMTU3NzMxZTdkYzdjMjM4YzEwMGI2ZTlhZDY2NDVhMjhmZTQyIiwic2VtYW50aWNfb21tbF9wcm9maWxlIjoib2ZmaWNlLW1hdGgtc2VtYW50aWMtdjIiLCJzZW1hbnRpY19vbW1sX3NoYTI1NiI6IjY5OTJiMGQ0ODlkYWEyM2Y3ZWViMjgxMjc3NjIyNGU5NDRhNjc1MjQxNGNjYmQ5ZTIzYjQ0OTMyODM3ZjMzZTYifV0sImZvcm11bGFzIjpbeyJjYW5vbmljYWxfbGF0ZXgiOiJ6X3t0KzF9IiwiZm9ybXVsYV9pZCI6IkVRMDE0IiwibGF0ZXhfc2hhMjU2IjoiOGU1ZDAwMDBhYmI5Y2YwNzczZTc4ZmI1MzAyNzUyMzBiOGVkZmI4Y2Q5NjJiMzI2MzVkZGU3Y2MyODQ2OTA5MSIsIm1vZGUiOiJpbmxpbmUiLCJvbW1sX3NoYTI1NiI6ImE5NWY5Mjg0N2VjODAyYTIzOTJkNDlhZjBhNmUxNTc3MzFlN2RjN2MyMzhjMTAwYjZlOWFkNjY0NWEyOGZlNDIiLCJzZW1hbnRpY19vbW1sX3Byb2ZpbGUiOiJvZmZpY2UtbWF0aC1zZW1hbnRpYy12MiIsInNlbWFudGljX29tbWxfc2hhMjU2IjoiNjk5MmIwZDQ4OWRhYTIzZjdlZWIyODEyNzc2MjI0ZTk0NGE2NzUyNDE0Y2NiZDllMjNiNDQ5MzI4MzdmMzNlNiJ9XSwia2luZCI6Im5hdGl2ZV9vZmZpY2VfbWF0aCIsInBsYWNlaG9sZGVyX25hbWUiOiJtYXRoOjAxNCIsInNjaGVtYV92ZXJzaW9uIjoiMS4wIn0="/>
+              <p:cNvSpPr txBox="1"/>
+              <p:nvPr/>
+            </p:nvSpPr>
+            <p:spPr>
+              <a:xfrm>
+                <a:off x="10602230" y="2903696"/>
+                <a:ext cx="312515" cy="202406"/>
+              </a:xfrm>
+              <a:prstGeom prst="rect">
+                <a:avLst/>
+              </a:prstGeom>
+              <a:noFill/>
+              <a:effectLst/>
+            </p:spPr>
+            <p:txBody>
+              <a:bodyPr wrap="none" anchor="t" lIns="0" rIns="0" tIns="0" bIns="0">
+                <a:spAutoFit/>
+              </a:bodyPr>
+              <a:lstStyle/>
+              <a:p>
+                <a:pPr algn="ctr"/>
+                <a14:m>
+                  <m:oMath xmlns:m="http://schemas.openxmlformats.org/officeDocument/2006/math">
+                    <m:sSub>
+                      <m:e>
+                        <m:r>
+                          <a:rPr lang="en-US" dirty="0" sz="1275">
+                            <a:solidFill>
+                              <a:srgbClr val="FFFFFF"/>
+                            </a:solidFill>
+                            <a:latin typeface="Cambria Math"/>
+                          </a:rPr>
+                          <m:t>z</m:t>
+                        </m:r>
+                      </m:e>
+                      <m:sub>
+                        <m:r>
+                          <a:rPr lang="en-US" dirty="0" sz="1275">
+                            <a:solidFill>
+                              <a:srgbClr val="FFFFFF"/>
+                            </a:solidFill>
+                            <a:latin typeface="Cambria Math"/>
+                          </a:rPr>
+                          <m:t>t+1</m:t>
+                        </m:r>
+                      </m:sub>
+                    </m:sSub>
+                  </m:oMath>
+                </a14:m>
+                <a:endParaRPr lang="en-US" dirty="0" sz="1275">
+                  <a:solidFill>
+                    <a:srgbClr val="FFFFFF"/>
+                  </a:solidFill>
+                  <a:latin typeface="Cambria Math"/>
+                </a:endParaRPr>
+              </a:p>
+            </p:txBody>
+          </p:sp>
+        </mc:Choice>
+        <mc:Fallback>
+          <p:sp>
+            <p:nvSpPr>
+              <p:cNvPr id="164" name="math:014" descr="AI_AUTOFIGURE_MATH_FALLBACK_ONLY_V1:eyJjb250ZW50X3J1bnMiOlt7ImNhbm9uaWNhbF9sYXRleCI6Inpfe3QrMX0iLCJmb3JtdWxhX2lkIjoiRVEwMTQiLCJraW5kIjoibWF0aCIsImxhdGV4X3NoYTI1NiI6IjhlNWQwMDAwYWJiOWNmMDc3M2U3OGZiNTMwMjc1MjMwYjhlZGZiOGNkOTYyYjMyNjM1ZGRlN2NjMjg0NjkwOTEiLCJtb2RlIjoiaW5saW5lIiwib21tbF9zaGEyNTYiOiJhOTVmOTI4NDdlYzgwMmEyMzkyZDQ5YWYwYTZlMTU3NzMxZTdkYzdjMjM4YzEwMGI2ZTlhZDY2NDVhMjhmZTQyIiwic2VtYW50aWNfb21tbF9wcm9maWxlIjoib2ZmaWNlLW1hdGgtc2VtYW50aWMtdjIiLCJzZW1hbnRpY19vbW1sX3NoYTI1NiI6IjY5OTJiMGQ0ODlkYWEyM2Y3ZWViMjgxMjc3NjIyNGU5NDRhNjc1MjQxNGNjYmQ5ZTIzYjQ0OTMyODM3ZjMzZTYifV0sImZvcm11bGFzIjpbeyJjYW5vbmljYWxfbGF0ZXgiOiJ6X3t0KzF9IiwiZm9ybXVsYV9pZCI6IkVRMDE0IiwibGF0ZXhfc2hhMjU2IjoiOGU1ZDAwMDBhYmI5Y2YwNzczZTc4ZmI1MzAyNzUyMzBiOGVkZmI4Y2Q5NjJiMzI2MzVkZGU3Y2MyODQ2OTA5MSIsIm1vZGUiOiJpbmxpbmUiLCJvbW1sX3NoYTI1NiI6ImE5NWY5Mjg0N2VjODAyYTIzOTJkNDlhZjBhNmUxNTc3MzFlN2RjN2MyMzhjMTAwYjZlOWFkNjY0NWEyOGZlNDIiLCJzZW1hbnRpY19vbW1sX3Byb2ZpbGUiOiJvZmZpY2UtbWF0aC1zZW1hbnRpYy12MiIsInNlbWFudGljX29tbWxfc2hhMjU2IjoiNjk5MmIwZDQ4OWRhYTIzZjdlZWIyODEyNzc2MjI0ZTk0NGE2NzUyNDE0Y2NiZDllMjNiNDQ5MzI4MzdmMzNlNiJ9XSwia2luZCI6Im5hdGl2ZV9vZmZpY2VfbWF0aCIsInBsYWNlaG9sZGVyX25hbWUiOiJtYXRoOjAxNCIsInNjaGVtYV92ZXJzaW9uIjoiMS4wIn0="/>
+              <p:cNvSpPr txBox="1"/>
+              <p:nvPr/>
+            </p:nvSpPr>
+            <p:spPr>
+              <a:xfrm>
+                <a:off x="10602230" y="2903696"/>
+                <a:ext cx="312515" cy="202406"/>
+              </a:xfrm>
+              <a:prstGeom prst="rect">
+                <a:avLst/>
+              </a:prstGeom>
+              <a:noFill/>
+              <a:effectLst/>
+            </p:spPr>
+            <p:txBody>
+              <a:bodyPr wrap="none" anchor="t" lIns="0" rIns="0" tIns="0" bIns="0">
+                <a:spAutoFit/>
+              </a:bodyPr>
+              <a:lstStyle/>
+              <a:p>
+                <a:pPr algn="ctr"/>
+                <a:r>
+                  <a:rPr lang="en-US" dirty="0" sz="1275">
+                    <a:solidFill>
+                      <a:srgbClr val="FFFFFF"/>
+                    </a:solidFill>
+                  </a:rPr>
+                  <a:t>\(z_{t+1}\)</a:t>
+                </a:r>
+                <a:endParaRPr lang="en-US" dirty="0" sz="1275">
+                  <a:solidFill>
+                    <a:srgbClr val="FFFFFF"/>
+                  </a:solidFill>
+                </a:endParaRPr>
+              </a:p>
+            </p:txBody>
+          </p:sp>
+        </mc:Fallback>
+      </mc:AlternateContent>
       <p:sp>
         <p:nvSpPr>
           <p:cNvPr id="165" name="Rounded Rectangle 164"/>
@@ -9774,51 +10792,113 @@
           </a:p>
         </p:txBody>
       </p:sp>
-      <p:sp>
-        <p:nvSpPr>
-          <p:cNvPr id="166" name="TextBox 165"/>
-          <p:cNvSpPr txBox="1"/>
-          <p:nvPr/>
-        </p:nvSpPr>
-        <p:spPr>
-          <a:xfrm>
-            <a:off x="11526155" y="2903696"/>
-            <a:ext cx="312515" cy="202406"/>
-          </a:xfrm>
-          <a:prstGeom prst="rect">
-            <a:avLst/>
-          </a:prstGeom>
-          <a:noFill/>
-          <a:effectLst/>
-        </p:spPr>
-        <p:txBody>
-          <a:bodyPr wrap="none" anchor="t" lIns="0" rIns="0" tIns="0" bIns="0">
-            <a:spAutoFit/>
-          </a:bodyPr>
-          <a:lstStyle/>
-          <a:p>
-            <a:pPr algn="ctr"/>
-            <a:r>
-              <a:rPr sz="1275" i="1" b="1">
-                <a:solidFill>
-                  <a:srgbClr val="FFFFFF"/>
-                </a:solidFill>
-                <a:latin typeface="Times New Roman"/>
-              </a:rPr>
-              <a:t>z</a:t>
-            </a:r>
-            <a:r>
-              <a:rPr sz="825" i="1" b="1" baseline="-25000">
-                <a:solidFill>
-                  <a:srgbClr val="FFFFFF"/>
-                </a:solidFill>
-                <a:latin typeface="Times New Roman"/>
-              </a:rPr>
-              <a:t>t+2</a:t>
-            </a:r>
-          </a:p>
-        </p:txBody>
-      </p:sp>
+      <mc:AlternateContent xmlns:mc="http://schemas.openxmlformats.org/markup-compatibility/2006">
+        <mc:Choice xmlns:a14="http://schemas.microsoft.com/office/drawing/2010/main" Requires="a14">
+          <p:sp>
+            <p:nvSpPr>
+              <p:cNvPr id="166" name="math:015" descr="AI_AUTOFIGURE_NATIVE_MATH_V1:eyJjb250ZW50X3J1bnMiOlt7ImNhbm9uaWNhbF9sYXRleCI6Inpfe3QrMn0iLCJmb3JtdWxhX2lkIjoiRVEwMTUiLCJraW5kIjoibWF0aCIsImxhdGV4X3NoYTI1NiI6ImVkN2EzM2FmMDZiOTY1M2Y4Mzk2MmMyN2IyMGRkOWI4NDZjYjJlZTBlMDAzMDY1MGNhMTQ0MzZiMzg5NzA5M2EiLCJtb2RlIjoiaW5saW5lIiwib21tbF9zaGEyNTYiOiI2NDc0MzYwMTY3NzVjMGViNTYwYWIzNjYzNDJjNjUxZTVkY2ZhMzBkZWE3ZjU3NTcyNDMxZDEzNjNlYmI3ZDBkIiwic2VtYW50aWNfb21tbF9wcm9maWxlIjoib2ZmaWNlLW1hdGgtc2VtYW50aWMtdjIiLCJzZW1hbnRpY19vbW1sX3NoYTI1NiI6ImE1ZTA0ZjFhNzZiNzc4MjQ5NzY0MzBlYzg4MmNmOGNjMWE4ZTk5YmYzN2FlYTFlMWVlNWI3ODA5MmM4ZTQ4MTMifV0sImZvcm11bGFzIjpbeyJjYW5vbmljYWxfbGF0ZXgiOiJ6X3t0KzJ9IiwiZm9ybXVsYV9pZCI6IkVRMDE1IiwibGF0ZXhfc2hhMjU2IjoiZWQ3YTMzYWYwNmI5NjUzZjgzOTYyYzI3YjIwZGQ5Yjg0NmNiMmVlMGUwMDMwNjUwY2ExNDQzNmIzODk3MDkzYSIsIm1vZGUiOiJpbmxpbmUiLCJvbW1sX3NoYTI1NiI6IjY0NzQzNjAxNjc3NWMwZWI1NjBhYjM2NjM0MmM2NTFlNWRjZmEzMGRlYTdmNTc1NzI0MzFkMTM2M2ViYjdkMGQiLCJzZW1hbnRpY19vbW1sX3Byb2ZpbGUiOiJvZmZpY2UtbWF0aC1zZW1hbnRpYy12MiIsInNlbWFudGljX29tbWxfc2hhMjU2IjoiYTVlMDRmMWE3NmI3NzgyNDk3NjQzMGVjODgyY2Y4Y2MxYThlOTliZjM3YWVhMWUxZWU1Yjc4MDkyYzhlNDgxMyJ9XSwia2luZCI6Im5hdGl2ZV9vZmZpY2VfbWF0aCIsInBsYWNlaG9sZGVyX25hbWUiOiJtYXRoOjAxNSIsInNjaGVtYV92ZXJzaW9uIjoiMS4wIn0="/>
+              <p:cNvSpPr txBox="1"/>
+              <p:nvPr/>
+            </p:nvSpPr>
+            <p:spPr>
+              <a:xfrm>
+                <a:off x="11526155" y="2903696"/>
+                <a:ext cx="312515" cy="202406"/>
+              </a:xfrm>
+              <a:prstGeom prst="rect">
+                <a:avLst/>
+              </a:prstGeom>
+              <a:noFill/>
+              <a:effectLst/>
+            </p:spPr>
+            <p:txBody>
+              <a:bodyPr wrap="none" anchor="t" lIns="0" rIns="0" tIns="0" bIns="0">
+                <a:spAutoFit/>
+              </a:bodyPr>
+              <a:lstStyle/>
+              <a:p>
+                <a:pPr algn="ctr"/>
+                <a14:m>
+                  <m:oMath xmlns:m="http://schemas.openxmlformats.org/officeDocument/2006/math">
+                    <m:sSub>
+                      <m:e>
+                        <m:r>
+                          <a:rPr lang="en-US" dirty="0" sz="1275">
+                            <a:solidFill>
+                              <a:srgbClr val="FFFFFF"/>
+                            </a:solidFill>
+                            <a:latin typeface="Cambria Math"/>
+                          </a:rPr>
+                          <m:t>z</m:t>
+                        </m:r>
+                      </m:e>
+                      <m:sub>
+                        <m:r>
+                          <a:rPr lang="en-US" dirty="0" sz="1275">
+                            <a:solidFill>
+                              <a:srgbClr val="FFFFFF"/>
+                            </a:solidFill>
+                            <a:latin typeface="Cambria Math"/>
+                          </a:rPr>
+                          <m:t>t+2</m:t>
+                        </m:r>
+                      </m:sub>
+                    </m:sSub>
+                  </m:oMath>
+                </a14:m>
+                <a:endParaRPr lang="en-US" dirty="0" sz="1275">
+                  <a:solidFill>
+                    <a:srgbClr val="FFFFFF"/>
+                  </a:solidFill>
+                  <a:latin typeface="Cambria Math"/>
+                </a:endParaRPr>
+              </a:p>
+            </p:txBody>
+          </p:sp>
+        </mc:Choice>
+        <mc:Fallback>
+          <p:sp>
+            <p:nvSpPr>
+              <p:cNvPr id="166" name="math:015" descr="AI_AUTOFIGURE_MATH_FALLBACK_ONLY_V1:eyJjb250ZW50X3J1bnMiOlt7ImNhbm9uaWNhbF9sYXRleCI6Inpfe3QrMn0iLCJmb3JtdWxhX2lkIjoiRVEwMTUiLCJraW5kIjoibWF0aCIsImxhdGV4X3NoYTI1NiI6ImVkN2EzM2FmMDZiOTY1M2Y4Mzk2MmMyN2IyMGRkOWI4NDZjYjJlZTBlMDAzMDY1MGNhMTQ0MzZiMzg5NzA5M2EiLCJtb2RlIjoiaW5saW5lIiwib21tbF9zaGEyNTYiOiI2NDc0MzYwMTY3NzVjMGViNTYwYWIzNjYzNDJjNjUxZTVkY2ZhMzBkZWE3ZjU3NTcyNDMxZDEzNjNlYmI3ZDBkIiwic2VtYW50aWNfb21tbF9wcm9maWxlIjoib2ZmaWNlLW1hdGgtc2VtYW50aWMtdjIiLCJzZW1hbnRpY19vbW1sX3NoYTI1NiI6ImE1ZTA0ZjFhNzZiNzc4MjQ5NzY0MzBlYzg4MmNmOGNjMWE4ZTk5YmYzN2FlYTFlMWVlNWI3ODA5MmM4ZTQ4MTMifV0sImZvcm11bGFzIjpbeyJjYW5vbmljYWxfbGF0ZXgiOiJ6X3t0KzJ9IiwiZm9ybXVsYV9pZCI6IkVRMDE1IiwibGF0ZXhfc2hhMjU2IjoiZWQ3YTMzYWYwNmI5NjUzZjgzOTYyYzI3YjIwZGQ5Yjg0NmNiMmVlMGUwMDMwNjUwY2ExNDQzNmIzODk3MDkzYSIsIm1vZGUiOiJpbmxpbmUiLCJvbW1sX3NoYTI1NiI6IjY0NzQzNjAxNjc3NWMwZWI1NjBhYjM2NjM0MmM2NTFlNWRjZmEzMGRlYTdmNTc1NzI0MzFkMTM2M2ViYjdkMGQiLCJzZW1hbnRpY19vbW1sX3Byb2ZpbGUiOiJvZmZpY2UtbWF0aC1zZW1hbnRpYy12MiIsInNlbWFudGljX29tbWxfc2hhMjU2IjoiYTVlMDRmMWE3NmI3NzgyNDk3NjQzMGVjODgyY2Y4Y2MxYThlOTliZjM3YWVhMWUxZWU1Yjc4MDkyYzhlNDgxMyJ9XSwia2luZCI6Im5hdGl2ZV9vZmZpY2VfbWF0aCIsInBsYWNlaG9sZGVyX25hbWUiOiJtYXRoOjAxNSIsInNjaGVtYV92ZXJzaW9uIjoiMS4wIn0="/>
+              <p:cNvSpPr txBox="1"/>
+              <p:nvPr/>
+            </p:nvSpPr>
+            <p:spPr>
+              <a:xfrm>
+                <a:off x="11526155" y="2903696"/>
+                <a:ext cx="312515" cy="202406"/>
+              </a:xfrm>
+              <a:prstGeom prst="rect">
+                <a:avLst/>
+              </a:prstGeom>
+              <a:noFill/>
+              <a:effectLst/>
+            </p:spPr>
+            <p:txBody>
+              <a:bodyPr wrap="none" anchor="t" lIns="0" rIns="0" tIns="0" bIns="0">
+                <a:spAutoFit/>
+              </a:bodyPr>
+              <a:lstStyle/>
+              <a:p>
+                <a:pPr algn="ctr"/>
+                <a:r>
+                  <a:rPr lang="en-US" dirty="0" sz="1275">
+                    <a:solidFill>
+                      <a:srgbClr val="FFFFFF"/>
+                    </a:solidFill>
+                  </a:rPr>
+                  <a:t>\(z_{t+2}\)</a:t>
+                </a:r>
+                <a:endParaRPr lang="en-US" dirty="0" sz="1275">
+                  <a:solidFill>
+                    <a:srgbClr val="FFFFFF"/>
+                  </a:solidFill>
+                </a:endParaRPr>
+              </a:p>
+            </p:txBody>
+          </p:sp>
+        </mc:Fallback>
+      </mc:AlternateContent>
       <p:sp>
         <p:nvSpPr>
           <p:cNvPr id="167" name="Rounded Rectangle 166"/>
@@ -9862,51 +10942,113 @@
           </a:p>
         </p:txBody>
       </p:sp>
-      <p:sp>
-        <p:nvSpPr>
-          <p:cNvPr id="168" name="TextBox 167"/>
-          <p:cNvSpPr txBox="1"/>
-          <p:nvPr/>
-        </p:nvSpPr>
-        <p:spPr>
-          <a:xfrm>
-            <a:off x="12777168" y="2903696"/>
-            <a:ext cx="306038" cy="202406"/>
-          </a:xfrm>
-          <a:prstGeom prst="rect">
-            <a:avLst/>
-          </a:prstGeom>
-          <a:noFill/>
-          <a:effectLst/>
-        </p:spPr>
-        <p:txBody>
-          <a:bodyPr wrap="none" anchor="t" lIns="0" rIns="0" tIns="0" bIns="0">
-            <a:spAutoFit/>
-          </a:bodyPr>
-          <a:lstStyle/>
-          <a:p>
-            <a:pPr algn="ctr"/>
-            <a:r>
-              <a:rPr sz="1275" i="1" b="1">
-                <a:solidFill>
-                  <a:srgbClr val="FFFFFF"/>
-                </a:solidFill>
-                <a:latin typeface="Times New Roman"/>
-              </a:rPr>
-              <a:t>z</a:t>
-            </a:r>
-            <a:r>
-              <a:rPr sz="825" i="1" b="1" baseline="-25000">
-                <a:solidFill>
-                  <a:srgbClr val="FFFFFF"/>
-                </a:solidFill>
-                <a:latin typeface="Times New Roman"/>
-              </a:rPr>
-              <a:t>t+h</a:t>
-            </a:r>
-          </a:p>
-        </p:txBody>
-      </p:sp>
+      <mc:AlternateContent xmlns:mc="http://schemas.openxmlformats.org/markup-compatibility/2006">
+        <mc:Choice xmlns:a14="http://schemas.microsoft.com/office/drawing/2010/main" Requires="a14">
+          <p:sp>
+            <p:nvSpPr>
+              <p:cNvPr id="168" name="math:016" descr="AI_AUTOFIGURE_NATIVE_MATH_V1:eyJjb250ZW50X3J1bnMiOlt7ImNhbm9uaWNhbF9sYXRleCI6Inpfe3QraH0iLCJmb3JtdWxhX2lkIjoiRVEwMTYiLCJraW5kIjoibWF0aCIsImxhdGV4X3NoYTI1NiI6IjA0ZWYyNTM3NWI3NzI4NDJjNzhlMjkxMGQwZWIyZTkzMTUwZTkzNmRlNGJlMjZiNDI4YTk5MGQwMWZiNDU2ZTAiLCJtb2RlIjoiaW5saW5lIiwib21tbF9zaGEyNTYiOiI2MTJkY2M3MzFjMWJmOWMzNDhmOWQxYmIwNWI5NDVjYzEwNzBlNDVkMzI0ZDJlODVlNDRiNTNkZTIwZjdmZjE0Iiwic2VtYW50aWNfb21tbF9wcm9maWxlIjoib2ZmaWNlLW1hdGgtc2VtYW50aWMtdjIiLCJzZW1hbnRpY19vbW1sX3NoYTI1NiI6IjgxYWM2YzQxYWZmNmFiZWM1NWJhOWFkMzRiNTdkM2U4MDZjYzY0YzUzMjEyYzRkODQ0ZDE5YzgyYjRiZjU0NDAifV0sImZvcm11bGFzIjpbeyJjYW5vbmljYWxfbGF0ZXgiOiJ6X3t0K2h9IiwiZm9ybXVsYV9pZCI6IkVRMDE2IiwibGF0ZXhfc2hhMjU2IjoiMDRlZjI1Mzc1Yjc3Mjg0MmM3OGUyOTEwZDBlYjJlOTMxNTBlOTM2ZGU0YmUyNmI0MjhhOTkwZDAxZmI0NTZlMCIsIm1vZGUiOiJpbmxpbmUiLCJvbW1sX3NoYTI1NiI6IjYxMmRjYzczMWMxYmY5YzM0OGY5ZDFiYjA1Yjk0NWNjMTA3MGU0NWQzMjRkMmU4NWU0NGI1M2RlMjBmN2ZmMTQiLCJzZW1hbnRpY19vbW1sX3Byb2ZpbGUiOiJvZmZpY2UtbWF0aC1zZW1hbnRpYy12MiIsInNlbWFudGljX29tbWxfc2hhMjU2IjoiODFhYzZjNDFhZmY2YWJlYzU1YmE5YWQzNGI1N2QzZTgwNmNjNjRjNTMyMTJjNGQ4NDRkMTljODJiNGJmNTQ0MCJ9XSwia2luZCI6Im5hdGl2ZV9vZmZpY2VfbWF0aCIsInBsYWNlaG9sZGVyX25hbWUiOiJtYXRoOjAxNiIsInNjaGVtYV92ZXJzaW9uIjoiMS4wIn0="/>
+              <p:cNvSpPr txBox="1"/>
+              <p:nvPr/>
+            </p:nvSpPr>
+            <p:spPr>
+              <a:xfrm>
+                <a:off x="12777168" y="2903696"/>
+                <a:ext cx="306038" cy="202406"/>
+              </a:xfrm>
+              <a:prstGeom prst="rect">
+                <a:avLst/>
+              </a:prstGeom>
+              <a:noFill/>
+              <a:effectLst/>
+            </p:spPr>
+            <p:txBody>
+              <a:bodyPr wrap="none" anchor="t" lIns="0" rIns="0" tIns="0" bIns="0">
+                <a:spAutoFit/>
+              </a:bodyPr>
+              <a:lstStyle/>
+              <a:p>
+                <a:pPr algn="ctr"/>
+                <a14:m>
+                  <m:oMath xmlns:m="http://schemas.openxmlformats.org/officeDocument/2006/math">
+                    <m:sSub>
+                      <m:e>
+                        <m:r>
+                          <a:rPr lang="en-US" dirty="0" sz="1275">
+                            <a:solidFill>
+                              <a:srgbClr val="FFFFFF"/>
+                            </a:solidFill>
+                            <a:latin typeface="Cambria Math"/>
+                          </a:rPr>
+                          <m:t>z</m:t>
+                        </m:r>
+                      </m:e>
+                      <m:sub>
+                        <m:r>
+                          <a:rPr lang="en-US" dirty="0" sz="1275">
+                            <a:solidFill>
+                              <a:srgbClr val="FFFFFF"/>
+                            </a:solidFill>
+                            <a:latin typeface="Cambria Math"/>
+                          </a:rPr>
+                          <m:t>t+h</m:t>
+                        </m:r>
+                      </m:sub>
+                    </m:sSub>
+                  </m:oMath>
+                </a14:m>
+                <a:endParaRPr lang="en-US" dirty="0" sz="1275">
+                  <a:solidFill>
+                    <a:srgbClr val="FFFFFF"/>
+                  </a:solidFill>
+                  <a:latin typeface="Cambria Math"/>
+                </a:endParaRPr>
+              </a:p>
+            </p:txBody>
+          </p:sp>
+        </mc:Choice>
+        <mc:Fallback>
+          <p:sp>
+            <p:nvSpPr>
+              <p:cNvPr id="168" name="math:016" descr="AI_AUTOFIGURE_MATH_FALLBACK_ONLY_V1:eyJjb250ZW50X3J1bnMiOlt7ImNhbm9uaWNhbF9sYXRleCI6Inpfe3QraH0iLCJmb3JtdWxhX2lkIjoiRVEwMTYiLCJraW5kIjoibWF0aCIsImxhdGV4X3NoYTI1NiI6IjA0ZWYyNTM3NWI3NzI4NDJjNzhlMjkxMGQwZWIyZTkzMTUwZTkzNmRlNGJlMjZiNDI4YTk5MGQwMWZiNDU2ZTAiLCJtb2RlIjoiaW5saW5lIiwib21tbF9zaGEyNTYiOiI2MTJkY2M3MzFjMWJmOWMzNDhmOWQxYmIwNWI5NDVjYzEwNzBlNDVkMzI0ZDJlODVlNDRiNTNkZTIwZjdmZjE0Iiwic2VtYW50aWNfb21tbF9wcm9maWxlIjoib2ZmaWNlLW1hdGgtc2VtYW50aWMtdjIiLCJzZW1hbnRpY19vbW1sX3NoYTI1NiI6IjgxYWM2YzQxYWZmNmFiZWM1NWJhOWFkMzRiNTdkM2U4MDZjYzY0YzUzMjEyYzRkODQ0ZDE5YzgyYjRiZjU0NDAifV0sImZvcm11bGFzIjpbeyJjYW5vbmljYWxfbGF0ZXgiOiJ6X3t0K2h9IiwiZm9ybXVsYV9pZCI6IkVRMDE2IiwibGF0ZXhfc2hhMjU2IjoiMDRlZjI1Mzc1Yjc3Mjg0MmM3OGUyOTEwZDBlYjJlOTMxNTBlOTM2ZGU0YmUyNmI0MjhhOTkwZDAxZmI0NTZlMCIsIm1vZGUiOiJpbmxpbmUiLCJvbW1sX3NoYTI1NiI6IjYxMmRjYzczMWMxYmY5YzM0OGY5ZDFiYjA1Yjk0NWNjMTA3MGU0NWQzMjRkMmU4NWU0NGI1M2RlMjBmN2ZmMTQiLCJzZW1hbnRpY19vbW1sX3Byb2ZpbGUiOiJvZmZpY2UtbWF0aC1zZW1hbnRpYy12MiIsInNlbWFudGljX29tbWxfc2hhMjU2IjoiODFhYzZjNDFhZmY2YWJlYzU1YmE5YWQzNGI1N2QzZTgwNmNjNjRjNTMyMTJjNGQ4NDRkMTljODJiNGJmNTQ0MCJ9XSwia2luZCI6Im5hdGl2ZV9vZmZpY2VfbWF0aCIsInBsYWNlaG9sZGVyX25hbWUiOiJtYXRoOjAxNiIsInNjaGVtYV92ZXJzaW9uIjoiMS4wIn0="/>
+              <p:cNvSpPr txBox="1"/>
+              <p:nvPr/>
+            </p:nvSpPr>
+            <p:spPr>
+              <a:xfrm>
+                <a:off x="12777168" y="2903696"/>
+                <a:ext cx="306038" cy="202406"/>
+              </a:xfrm>
+              <a:prstGeom prst="rect">
+                <a:avLst/>
+              </a:prstGeom>
+              <a:noFill/>
+              <a:effectLst/>
+            </p:spPr>
+            <p:txBody>
+              <a:bodyPr wrap="none" anchor="t" lIns="0" rIns="0" tIns="0" bIns="0">
+                <a:spAutoFit/>
+              </a:bodyPr>
+              <a:lstStyle/>
+              <a:p>
+                <a:pPr algn="ctr"/>
+                <a:r>
+                  <a:rPr lang="en-US" dirty="0" sz="1275">
+                    <a:solidFill>
+                      <a:srgbClr val="FFFFFF"/>
+                    </a:solidFill>
+                  </a:rPr>
+                  <a:t>\(z_{t+h}\)</a:t>
+                </a:r>
+                <a:endParaRPr lang="en-US" dirty="0" sz="1275">
+                  <a:solidFill>
+                    <a:srgbClr val="FFFFFF"/>
+                  </a:solidFill>
+                </a:endParaRPr>
+              </a:p>
+            </p:txBody>
+          </p:sp>
+        </mc:Fallback>
+      </mc:AlternateContent>
       <p:cxnSp>
         <p:nvCxnSpPr>
           <p:cNvPr id="169" name="Connector 168"/>
@@ -9979,6 +11121,10 @@
             <a:srgbClr val="8D6A00"/>
           </a:solidFill>
         </p:spPr>
+        <p:txBody>
+          <a:bodyPr/>
+          <a:p/>
+        </p:txBody>
       </p:sp>
       <p:cxnSp>
         <p:nvCxnSpPr>
@@ -10052,6 +11198,10 @@
             <a:srgbClr val="8D6A00"/>
           </a:solidFill>
         </p:spPr>
+        <p:txBody>
+          <a:bodyPr/>
+          <a:p/>
+        </p:txBody>
       </p:sp>
       <p:cxnSp>
         <p:nvCxnSpPr>
@@ -10125,6 +11275,10 @@
             <a:srgbClr val="8D6A00"/>
           </a:solidFill>
         </p:spPr>
+        <p:txBody>
+          <a:bodyPr/>
+          <a:p/>
+        </p:txBody>
       </p:sp>
       <p:sp>
         <p:nvSpPr>
@@ -10203,42 +11357,98 @@
           </a:p>
         </p:txBody>
       </p:sp>
-      <p:sp>
-        <p:nvSpPr>
-          <p:cNvPr id="177" name="TextBox 176"/>
-          <p:cNvSpPr txBox="1"/>
-          <p:nvPr/>
-        </p:nvSpPr>
-        <p:spPr>
-          <a:xfrm>
-            <a:off x="9792176" y="3961448"/>
-            <a:ext cx="94298" cy="214312"/>
-          </a:xfrm>
-          <a:prstGeom prst="rect">
-            <a:avLst/>
-          </a:prstGeom>
-          <a:noFill/>
-          <a:effectLst/>
-        </p:spPr>
-        <p:txBody>
-          <a:bodyPr wrap="none" anchor="t" lIns="0" rIns="0" tIns="0" bIns="0">
-            <a:spAutoFit/>
-          </a:bodyPr>
-          <a:lstStyle/>
-          <a:p>
-            <a:pPr algn="ctr"/>
-            <a:r>
-              <a:rPr sz="1350" i="1" b="1">
-                <a:solidFill>
-                  <a:srgbClr val="FFFFFF"/>
-                </a:solidFill>
-                <a:latin typeface="Times New Roman"/>
-              </a:rPr>
-              <a:t>π</a:t>
-            </a:r>
-          </a:p>
-        </p:txBody>
-      </p:sp>
+      <mc:AlternateContent xmlns:mc="http://schemas.openxmlformats.org/markup-compatibility/2006">
+        <mc:Choice xmlns:a14="http://schemas.microsoft.com/office/drawing/2010/main" Requires="a14">
+          <p:sp>
+            <p:nvSpPr>
+              <p:cNvPr id="177" name="math:017" descr="AI_AUTOFIGURE_NATIVE_MATH_V1:eyJjb250ZW50X3J1bnMiOlt7ImNhbm9uaWNhbF9sYXRleCI6IlxccGkiLCJmb3JtdWxhX2lkIjoiRVEwMTciLCJraW5kIjoibWF0aCIsImxhdGV4X3NoYTI1NiI6ImYxY2YwNDA5M2QwOGI2ZGMwZDU4YTg3Mzk2NDA1Y2I5MDkzYTIyZTllZDYyYTk1YmI5NWVkNDZlNWRhOTcwOTciLCJtb2RlIjoiaW5saW5lIiwib21tbF9zaGEyNTYiOiI4MGIzNzkwZWVkMDMxOWQ1MWJmZDZkZDA4MmQ2YTU3YTNjOTllNjU4Njc3MTA3ZDQyMTYyN2MxZjc0OGY3NjU5Iiwic2VtYW50aWNfb21tbF9wcm9maWxlIjoib2ZmaWNlLW1hdGgtc2VtYW50aWMtdjIiLCJzZW1hbnRpY19vbW1sX3NoYTI1NiI6ImU4OWQxNDFjNDBjNmI1MjM0M2IwNjM4ZWY3ZjUyODE2ZTg0ODU4NWY2MjU1MWFhYzMwNThjZWQwNGY3NjllYjYifV0sImZvcm11bGFzIjpbeyJjYW5vbmljYWxfbGF0ZXgiOiJcXHBpIiwiZm9ybXVsYV9pZCI6IkVRMDE3IiwibGF0ZXhfc2hhMjU2IjoiZjFjZjA0MDkzZDA4YjZkYzBkNThhODczOTY0MDVjYjkwOTNhMjJlOWVkNjJhOTViYjk1ZWQ0NmU1ZGE5NzA5NyIsIm1vZGUiOiJpbmxpbmUiLCJvbW1sX3NoYTI1NiI6IjgwYjM3OTBlZWQwMzE5ZDUxYmZkNmRkMDgyZDZhNTdhM2M5OWU2NTg2NzcxMDdkNDIxNjI3YzFmNzQ4Zjc2NTkiLCJzZW1hbnRpY19vbW1sX3Byb2ZpbGUiOiJvZmZpY2UtbWF0aC1zZW1hbnRpYy12MiIsInNlbWFudGljX29tbWxfc2hhMjU2IjoiZTg5ZDE0MWM0MGM2YjUyMzQzYjA2MzhlZjdmNTI4MTZlODQ4NTg1ZjYyNTUxYWFjMzA1OGNlZDA0Zjc2OWViNiJ9XSwia2luZCI6Im5hdGl2ZV9vZmZpY2VfbWF0aCIsInBsYWNlaG9sZGVyX25hbWUiOiJtYXRoOjAxNyIsInNjaGVtYV92ZXJzaW9uIjoiMS4wIn0="/>
+              <p:cNvSpPr txBox="1"/>
+              <p:nvPr/>
+            </p:nvSpPr>
+            <p:spPr>
+              <a:xfrm>
+                <a:off x="9792176" y="3961448"/>
+                <a:ext cx="94298" cy="214312"/>
+              </a:xfrm>
+              <a:prstGeom prst="rect">
+                <a:avLst/>
+              </a:prstGeom>
+              <a:noFill/>
+              <a:effectLst/>
+            </p:spPr>
+            <p:txBody>
+              <a:bodyPr wrap="none" anchor="t" lIns="0" rIns="0" tIns="0" bIns="0">
+                <a:spAutoFit/>
+              </a:bodyPr>
+              <a:lstStyle/>
+              <a:p>
+                <a:pPr algn="ctr"/>
+                <a14:m>
+                  <m:oMath xmlns:m="http://schemas.openxmlformats.org/officeDocument/2006/math">
+                    <m:r>
+                      <a:rPr lang="en-US" dirty="0" sz="1350">
+                        <a:solidFill>
+                          <a:srgbClr val="FFFFFF"/>
+                        </a:solidFill>
+                        <a:latin typeface="Cambria Math"/>
+                      </a:rPr>
+                      <m:t>π</m:t>
+                    </m:r>
+                  </m:oMath>
+                </a14:m>
+                <a:endParaRPr lang="en-US" dirty="0" sz="1350">
+                  <a:solidFill>
+                    <a:srgbClr val="FFFFFF"/>
+                  </a:solidFill>
+                  <a:latin typeface="Cambria Math"/>
+                </a:endParaRPr>
+              </a:p>
+            </p:txBody>
+          </p:sp>
+        </mc:Choice>
+        <mc:Fallback>
+          <p:sp>
+            <p:nvSpPr>
+              <p:cNvPr id="177" name="math:017" descr="AI_AUTOFIGURE_MATH_FALLBACK_ONLY_V1:eyJjb250ZW50X3J1bnMiOlt7ImNhbm9uaWNhbF9sYXRleCI6IlxccGkiLCJmb3JtdWxhX2lkIjoiRVEwMTciLCJraW5kIjoibWF0aCIsImxhdGV4X3NoYTI1NiI6ImYxY2YwNDA5M2QwOGI2ZGMwZDU4YTg3Mzk2NDA1Y2I5MDkzYTIyZTllZDYyYTk1YmI5NWVkNDZlNWRhOTcwOTciLCJtb2RlIjoiaW5saW5lIiwib21tbF9zaGEyNTYiOiI4MGIzNzkwZWVkMDMxOWQ1MWJmZDZkZDA4MmQ2YTU3YTNjOTllNjU4Njc3MTA3ZDQyMTYyN2MxZjc0OGY3NjU5Iiwic2VtYW50aWNfb21tbF9wcm9maWxlIjoib2ZmaWNlLW1hdGgtc2VtYW50aWMtdjIiLCJzZW1hbnRpY19vbW1sX3NoYTI1NiI6ImU4OWQxNDFjNDBjNmI1MjM0M2IwNjM4ZWY3ZjUyODE2ZTg0ODU4NWY2MjU1MWFhYzMwNThjZWQwNGY3NjllYjYifV0sImZvcm11bGFzIjpbeyJjYW5vbmljYWxfbGF0ZXgiOiJcXHBpIiwiZm9ybXVsYV9pZCI6IkVRMDE3IiwibGF0ZXhfc2hhMjU2IjoiZjFjZjA0MDkzZDA4YjZkYzBkNThhODczOTY0MDVjYjkwOTNhMjJlOWVkNjJhOTViYjk1ZWQ0NmU1ZGE5NzA5NyIsIm1vZGUiOiJpbmxpbmUiLCJvbW1sX3NoYTI1NiI6IjgwYjM3OTBlZWQwMzE5ZDUxYmZkNmRkMDgyZDZhNTdhM2M5OWU2NTg2NzcxMDdkNDIxNjI3YzFmNzQ4Zjc2NTkiLCJzZW1hbnRpY19vbW1sX3Byb2ZpbGUiOiJvZmZpY2UtbWF0aC1zZW1hbnRpYy12MiIsInNlbWFudGljX29tbWxfc2hhMjU2IjoiZTg5ZDE0MWM0MGM2YjUyMzQzYjA2MzhlZjdmNTI4MTZlODQ4NTg1ZjYyNTUxYWFjMzA1OGNlZDA0Zjc2OWViNiJ9XSwia2luZCI6Im5hdGl2ZV9vZmZpY2VfbWF0aCIsInBsYWNlaG9sZGVyX25hbWUiOiJtYXRoOjAxNyIsInNjaGVtYV92ZXJzaW9uIjoiMS4wIn0="/>
+              <p:cNvSpPr txBox="1"/>
+              <p:nvPr/>
+            </p:nvSpPr>
+            <p:spPr>
+              <a:xfrm>
+                <a:off x="9792176" y="3961448"/>
+                <a:ext cx="94298" cy="214312"/>
+              </a:xfrm>
+              <a:prstGeom prst="rect">
+                <a:avLst/>
+              </a:prstGeom>
+              <a:noFill/>
+              <a:effectLst/>
+            </p:spPr>
+            <p:txBody>
+              <a:bodyPr wrap="none" anchor="t" lIns="0" rIns="0" tIns="0" bIns="0">
+                <a:spAutoFit/>
+              </a:bodyPr>
+              <a:lstStyle/>
+              <a:p>
+                <a:pPr algn="ctr"/>
+                <a:r>
+                  <a:rPr lang="en-US" dirty="0" sz="1350">
+                    <a:solidFill>
+                      <a:srgbClr val="FFFFFF"/>
+                    </a:solidFill>
+                  </a:rPr>
+                  <a:t>\(\pi\)</a:t>
+                </a:r>
+                <a:endParaRPr lang="en-US" dirty="0" sz="1350">
+                  <a:solidFill>
+                    <a:srgbClr val="FFFFFF"/>
+                  </a:solidFill>
+                </a:endParaRPr>
+              </a:p>
+            </p:txBody>
+          </p:sp>
+        </mc:Fallback>
+      </mc:AlternateContent>
       <p:sp>
         <p:nvSpPr>
           <p:cNvPr id="178" name="Oval 177"/>
@@ -10280,42 +11490,98 @@
           </a:p>
         </p:txBody>
       </p:sp>
-      <p:sp>
-        <p:nvSpPr>
-          <p:cNvPr id="179" name="TextBox 178"/>
-          <p:cNvSpPr txBox="1"/>
-          <p:nvPr/>
-        </p:nvSpPr>
-        <p:spPr>
-          <a:xfrm>
-            <a:off x="10725626" y="3961448"/>
-            <a:ext cx="94298" cy="214312"/>
-          </a:xfrm>
-          <a:prstGeom prst="rect">
-            <a:avLst/>
-          </a:prstGeom>
-          <a:noFill/>
-          <a:effectLst/>
-        </p:spPr>
-        <p:txBody>
-          <a:bodyPr wrap="none" anchor="t" lIns="0" rIns="0" tIns="0" bIns="0">
-            <a:spAutoFit/>
-          </a:bodyPr>
-          <a:lstStyle/>
-          <a:p>
-            <a:pPr algn="ctr"/>
-            <a:r>
-              <a:rPr sz="1350" i="1" b="1">
-                <a:solidFill>
-                  <a:srgbClr val="FFFFFF"/>
-                </a:solidFill>
-                <a:latin typeface="Times New Roman"/>
-              </a:rPr>
-              <a:t>π</a:t>
-            </a:r>
-          </a:p>
-        </p:txBody>
-      </p:sp>
+      <mc:AlternateContent xmlns:mc="http://schemas.openxmlformats.org/markup-compatibility/2006">
+        <mc:Choice xmlns:a14="http://schemas.microsoft.com/office/drawing/2010/main" Requires="a14">
+          <p:sp>
+            <p:nvSpPr>
+              <p:cNvPr id="179" name="math:018" descr="AI_AUTOFIGURE_NATIVE_MATH_V1:eyJjb250ZW50X3J1bnMiOlt7ImNhbm9uaWNhbF9sYXRleCI6IlxccGkiLCJmb3JtdWxhX2lkIjoiRVEwMTgiLCJraW5kIjoibWF0aCIsImxhdGV4X3NoYTI1NiI6ImYxY2YwNDA5M2QwOGI2ZGMwZDU4YTg3Mzk2NDA1Y2I5MDkzYTIyZTllZDYyYTk1YmI5NWVkNDZlNWRhOTcwOTciLCJtb2RlIjoiaW5saW5lIiwib21tbF9zaGEyNTYiOiI4MGIzNzkwZWVkMDMxOWQ1MWJmZDZkZDA4MmQ2YTU3YTNjOTllNjU4Njc3MTA3ZDQyMTYyN2MxZjc0OGY3NjU5Iiwic2VtYW50aWNfb21tbF9wcm9maWxlIjoib2ZmaWNlLW1hdGgtc2VtYW50aWMtdjIiLCJzZW1hbnRpY19vbW1sX3NoYTI1NiI6ImU4OWQxNDFjNDBjNmI1MjM0M2IwNjM4ZWY3ZjUyODE2ZTg0ODU4NWY2MjU1MWFhYzMwNThjZWQwNGY3NjllYjYifV0sImZvcm11bGFzIjpbeyJjYW5vbmljYWxfbGF0ZXgiOiJcXHBpIiwiZm9ybXVsYV9pZCI6IkVRMDE4IiwibGF0ZXhfc2hhMjU2IjoiZjFjZjA0MDkzZDA4YjZkYzBkNThhODczOTY0MDVjYjkwOTNhMjJlOWVkNjJhOTViYjk1ZWQ0NmU1ZGE5NzA5NyIsIm1vZGUiOiJpbmxpbmUiLCJvbW1sX3NoYTI1NiI6IjgwYjM3OTBlZWQwMzE5ZDUxYmZkNmRkMDgyZDZhNTdhM2M5OWU2NTg2NzcxMDdkNDIxNjI3YzFmNzQ4Zjc2NTkiLCJzZW1hbnRpY19vbW1sX3Byb2ZpbGUiOiJvZmZpY2UtbWF0aC1zZW1hbnRpYy12MiIsInNlbWFudGljX29tbWxfc2hhMjU2IjoiZTg5ZDE0MWM0MGM2YjUyMzQzYjA2MzhlZjdmNTI4MTZlODQ4NTg1ZjYyNTUxYWFjMzA1OGNlZDA0Zjc2OWViNiJ9XSwia2luZCI6Im5hdGl2ZV9vZmZpY2VfbWF0aCIsInBsYWNlaG9sZGVyX25hbWUiOiJtYXRoOjAxOCIsInNjaGVtYV92ZXJzaW9uIjoiMS4wIn0="/>
+              <p:cNvSpPr txBox="1"/>
+              <p:nvPr/>
+            </p:nvSpPr>
+            <p:spPr>
+              <a:xfrm>
+                <a:off x="10725626" y="3961448"/>
+                <a:ext cx="94298" cy="214312"/>
+              </a:xfrm>
+              <a:prstGeom prst="rect">
+                <a:avLst/>
+              </a:prstGeom>
+              <a:noFill/>
+              <a:effectLst/>
+            </p:spPr>
+            <p:txBody>
+              <a:bodyPr wrap="none" anchor="t" lIns="0" rIns="0" tIns="0" bIns="0">
+                <a:spAutoFit/>
+              </a:bodyPr>
+              <a:lstStyle/>
+              <a:p>
+                <a:pPr algn="ctr"/>
+                <a14:m>
+                  <m:oMath xmlns:m="http://schemas.openxmlformats.org/officeDocument/2006/math">
+                    <m:r>
+                      <a:rPr lang="en-US" dirty="0" sz="1350">
+                        <a:solidFill>
+                          <a:srgbClr val="FFFFFF"/>
+                        </a:solidFill>
+                        <a:latin typeface="Cambria Math"/>
+                      </a:rPr>
+                      <m:t>π</m:t>
+                    </m:r>
+                  </m:oMath>
+                </a14:m>
+                <a:endParaRPr lang="en-US" dirty="0" sz="1350">
+                  <a:solidFill>
+                    <a:srgbClr val="FFFFFF"/>
+                  </a:solidFill>
+                  <a:latin typeface="Cambria Math"/>
+                </a:endParaRPr>
+              </a:p>
+            </p:txBody>
+          </p:sp>
+        </mc:Choice>
+        <mc:Fallback>
+          <p:sp>
+            <p:nvSpPr>
+              <p:cNvPr id="179" name="math:018" descr="AI_AUTOFIGURE_MATH_FALLBACK_ONLY_V1:eyJjb250ZW50X3J1bnMiOlt7ImNhbm9uaWNhbF9sYXRleCI6IlxccGkiLCJmb3JtdWxhX2lkIjoiRVEwMTgiLCJraW5kIjoibWF0aCIsImxhdGV4X3NoYTI1NiI6ImYxY2YwNDA5M2QwOGI2ZGMwZDU4YTg3Mzk2NDA1Y2I5MDkzYTIyZTllZDYyYTk1YmI5NWVkNDZlNWRhOTcwOTciLCJtb2RlIjoiaW5saW5lIiwib21tbF9zaGEyNTYiOiI4MGIzNzkwZWVkMDMxOWQ1MWJmZDZkZDA4MmQ2YTU3YTNjOTllNjU4Njc3MTA3ZDQyMTYyN2MxZjc0OGY3NjU5Iiwic2VtYW50aWNfb21tbF9wcm9maWxlIjoib2ZmaWNlLW1hdGgtc2VtYW50aWMtdjIiLCJzZW1hbnRpY19vbW1sX3NoYTI1NiI6ImU4OWQxNDFjNDBjNmI1MjM0M2IwNjM4ZWY3ZjUyODE2ZTg0ODU4NWY2MjU1MWFhYzMwNThjZWQwNGY3NjllYjYifV0sImZvcm11bGFzIjpbeyJjYW5vbmljYWxfbGF0ZXgiOiJcXHBpIiwiZm9ybXVsYV9pZCI6IkVRMDE4IiwibGF0ZXhfc2hhMjU2IjoiZjFjZjA0MDkzZDA4YjZkYzBkNThhODczOTY0MDVjYjkwOTNhMjJlOWVkNjJhOTViYjk1ZWQ0NmU1ZGE5NzA5NyIsIm1vZGUiOiJpbmxpbmUiLCJvbW1sX3NoYTI1NiI6IjgwYjM3OTBlZWQwMzE5ZDUxYmZkNmRkMDgyZDZhNTdhM2M5OWU2NTg2NzcxMDdkNDIxNjI3YzFmNzQ4Zjc2NTkiLCJzZW1hbnRpY19vbW1sX3Byb2ZpbGUiOiJvZmZpY2UtbWF0aC1zZW1hbnRpYy12MiIsInNlbWFudGljX29tbWxfc2hhMjU2IjoiZTg5ZDE0MWM0MGM2YjUyMzQzYjA2MzhlZjdmNTI4MTZlODQ4NTg1ZjYyNTUxYWFjMzA1OGNlZDA0Zjc2OWViNiJ9XSwia2luZCI6Im5hdGl2ZV9vZmZpY2VfbWF0aCIsInBsYWNlaG9sZGVyX25hbWUiOiJtYXRoOjAxOCIsInNjaGVtYV92ZXJzaW9uIjoiMS4wIn0="/>
+              <p:cNvSpPr txBox="1"/>
+              <p:nvPr/>
+            </p:nvSpPr>
+            <p:spPr>
+              <a:xfrm>
+                <a:off x="10725626" y="3961448"/>
+                <a:ext cx="94298" cy="214312"/>
+              </a:xfrm>
+              <a:prstGeom prst="rect">
+                <a:avLst/>
+              </a:prstGeom>
+              <a:noFill/>
+              <a:effectLst/>
+            </p:spPr>
+            <p:txBody>
+              <a:bodyPr wrap="none" anchor="t" lIns="0" rIns="0" tIns="0" bIns="0">
+                <a:spAutoFit/>
+              </a:bodyPr>
+              <a:lstStyle/>
+              <a:p>
+                <a:pPr algn="ctr"/>
+                <a:r>
+                  <a:rPr lang="en-US" dirty="0" sz="1350">
+                    <a:solidFill>
+                      <a:srgbClr val="FFFFFF"/>
+                    </a:solidFill>
+                  </a:rPr>
+                  <a:t>\(\pi\)</a:t>
+                </a:r>
+                <a:endParaRPr lang="en-US" dirty="0" sz="1350">
+                  <a:solidFill>
+                    <a:srgbClr val="FFFFFF"/>
+                  </a:solidFill>
+                </a:endParaRPr>
+              </a:p>
+            </p:txBody>
+          </p:sp>
+        </mc:Fallback>
+      </mc:AlternateContent>
       <p:sp>
         <p:nvSpPr>
           <p:cNvPr id="180" name="Oval 179"/>
@@ -10357,42 +11623,98 @@
           </a:p>
         </p:txBody>
       </p:sp>
-      <p:sp>
-        <p:nvSpPr>
-          <p:cNvPr id="181" name="TextBox 180"/>
-          <p:cNvSpPr txBox="1"/>
-          <p:nvPr/>
-        </p:nvSpPr>
-        <p:spPr>
-          <a:xfrm>
-            <a:off x="11668601" y="3961448"/>
-            <a:ext cx="94298" cy="214312"/>
-          </a:xfrm>
-          <a:prstGeom prst="rect">
-            <a:avLst/>
-          </a:prstGeom>
-          <a:noFill/>
-          <a:effectLst/>
-        </p:spPr>
-        <p:txBody>
-          <a:bodyPr wrap="none" anchor="t" lIns="0" rIns="0" tIns="0" bIns="0">
-            <a:spAutoFit/>
-          </a:bodyPr>
-          <a:lstStyle/>
-          <a:p>
-            <a:pPr algn="ctr"/>
-            <a:r>
-              <a:rPr sz="1350" i="1" b="1">
-                <a:solidFill>
-                  <a:srgbClr val="FFFFFF"/>
-                </a:solidFill>
-                <a:latin typeface="Times New Roman"/>
-              </a:rPr>
-              <a:t>π</a:t>
-            </a:r>
-          </a:p>
-        </p:txBody>
-      </p:sp>
+      <mc:AlternateContent xmlns:mc="http://schemas.openxmlformats.org/markup-compatibility/2006">
+        <mc:Choice xmlns:a14="http://schemas.microsoft.com/office/drawing/2010/main" Requires="a14">
+          <p:sp>
+            <p:nvSpPr>
+              <p:cNvPr id="181" name="math:019" descr="AI_AUTOFIGURE_NATIVE_MATH_V1:eyJjb250ZW50X3J1bnMiOlt7ImNhbm9uaWNhbF9sYXRleCI6IlxccGkiLCJmb3JtdWxhX2lkIjoiRVEwMTkiLCJraW5kIjoibWF0aCIsImxhdGV4X3NoYTI1NiI6ImYxY2YwNDA5M2QwOGI2ZGMwZDU4YTg3Mzk2NDA1Y2I5MDkzYTIyZTllZDYyYTk1YmI5NWVkNDZlNWRhOTcwOTciLCJtb2RlIjoiaW5saW5lIiwib21tbF9zaGEyNTYiOiI4MGIzNzkwZWVkMDMxOWQ1MWJmZDZkZDA4MmQ2YTU3YTNjOTllNjU4Njc3MTA3ZDQyMTYyN2MxZjc0OGY3NjU5Iiwic2VtYW50aWNfb21tbF9wcm9maWxlIjoib2ZmaWNlLW1hdGgtc2VtYW50aWMtdjIiLCJzZW1hbnRpY19vbW1sX3NoYTI1NiI6ImU4OWQxNDFjNDBjNmI1MjM0M2IwNjM4ZWY3ZjUyODE2ZTg0ODU4NWY2MjU1MWFhYzMwNThjZWQwNGY3NjllYjYifV0sImZvcm11bGFzIjpbeyJjYW5vbmljYWxfbGF0ZXgiOiJcXHBpIiwiZm9ybXVsYV9pZCI6IkVRMDE5IiwibGF0ZXhfc2hhMjU2IjoiZjFjZjA0MDkzZDA4YjZkYzBkNThhODczOTY0MDVjYjkwOTNhMjJlOWVkNjJhOTViYjk1ZWQ0NmU1ZGE5NzA5NyIsIm1vZGUiOiJpbmxpbmUiLCJvbW1sX3NoYTI1NiI6IjgwYjM3OTBlZWQwMzE5ZDUxYmZkNmRkMDgyZDZhNTdhM2M5OWU2NTg2NzcxMDdkNDIxNjI3YzFmNzQ4Zjc2NTkiLCJzZW1hbnRpY19vbW1sX3Byb2ZpbGUiOiJvZmZpY2UtbWF0aC1zZW1hbnRpYy12MiIsInNlbWFudGljX29tbWxfc2hhMjU2IjoiZTg5ZDE0MWM0MGM2YjUyMzQzYjA2MzhlZjdmNTI4MTZlODQ4NTg1ZjYyNTUxYWFjMzA1OGNlZDA0Zjc2OWViNiJ9XSwia2luZCI6Im5hdGl2ZV9vZmZpY2VfbWF0aCIsInBsYWNlaG9sZGVyX25hbWUiOiJtYXRoOjAxOSIsInNjaGVtYV92ZXJzaW9uIjoiMS4wIn0="/>
+              <p:cNvSpPr txBox="1"/>
+              <p:nvPr/>
+            </p:nvSpPr>
+            <p:spPr>
+              <a:xfrm>
+                <a:off x="11668601" y="3961448"/>
+                <a:ext cx="94298" cy="214312"/>
+              </a:xfrm>
+              <a:prstGeom prst="rect">
+                <a:avLst/>
+              </a:prstGeom>
+              <a:noFill/>
+              <a:effectLst/>
+            </p:spPr>
+            <p:txBody>
+              <a:bodyPr wrap="none" anchor="t" lIns="0" rIns="0" tIns="0" bIns="0">
+                <a:spAutoFit/>
+              </a:bodyPr>
+              <a:lstStyle/>
+              <a:p>
+                <a:pPr algn="ctr"/>
+                <a14:m>
+                  <m:oMath xmlns:m="http://schemas.openxmlformats.org/officeDocument/2006/math">
+                    <m:r>
+                      <a:rPr lang="en-US" dirty="0" sz="1350">
+                        <a:solidFill>
+                          <a:srgbClr val="FFFFFF"/>
+                        </a:solidFill>
+                        <a:latin typeface="Cambria Math"/>
+                      </a:rPr>
+                      <m:t>π</m:t>
+                    </m:r>
+                  </m:oMath>
+                </a14:m>
+                <a:endParaRPr lang="en-US" dirty="0" sz="1350">
+                  <a:solidFill>
+                    <a:srgbClr val="FFFFFF"/>
+                  </a:solidFill>
+                  <a:latin typeface="Cambria Math"/>
+                </a:endParaRPr>
+              </a:p>
+            </p:txBody>
+          </p:sp>
+        </mc:Choice>
+        <mc:Fallback>
+          <p:sp>
+            <p:nvSpPr>
+              <p:cNvPr id="181" name="math:019" descr="AI_AUTOFIGURE_MATH_FALLBACK_ONLY_V1:eyJjb250ZW50X3J1bnMiOlt7ImNhbm9uaWNhbF9sYXRleCI6IlxccGkiLCJmb3JtdWxhX2lkIjoiRVEwMTkiLCJraW5kIjoibWF0aCIsImxhdGV4X3NoYTI1NiI6ImYxY2YwNDA5M2QwOGI2ZGMwZDU4YTg3Mzk2NDA1Y2I5MDkzYTIyZTllZDYyYTk1YmI5NWVkNDZlNWRhOTcwOTciLCJtb2RlIjoiaW5saW5lIiwib21tbF9zaGEyNTYiOiI4MGIzNzkwZWVkMDMxOWQ1MWJmZDZkZDA4MmQ2YTU3YTNjOTllNjU4Njc3MTA3ZDQyMTYyN2MxZjc0OGY3NjU5Iiwic2VtYW50aWNfb21tbF9wcm9maWxlIjoib2ZmaWNlLW1hdGgtc2VtYW50aWMtdjIiLCJzZW1hbnRpY19vbW1sX3NoYTI1NiI6ImU4OWQxNDFjNDBjNmI1MjM0M2IwNjM4ZWY3ZjUyODE2ZTg0ODU4NWY2MjU1MWFhYzMwNThjZWQwNGY3NjllYjYifV0sImZvcm11bGFzIjpbeyJjYW5vbmljYWxfbGF0ZXgiOiJcXHBpIiwiZm9ybXVsYV9pZCI6IkVRMDE5IiwibGF0ZXhfc2hhMjU2IjoiZjFjZjA0MDkzZDA4YjZkYzBkNThhODczOTY0MDVjYjkwOTNhMjJlOWVkNjJhOTViYjk1ZWQ0NmU1ZGE5NzA5NyIsIm1vZGUiOiJpbmxpbmUiLCJvbW1sX3NoYTI1NiI6IjgwYjM3OTBlZWQwMzE5ZDUxYmZkNmRkMDgyZDZhNTdhM2M5OWU2NTg2NzcxMDdkNDIxNjI3YzFmNzQ4Zjc2NTkiLCJzZW1hbnRpY19vbW1sX3Byb2ZpbGUiOiJvZmZpY2UtbWF0aC1zZW1hbnRpYy12MiIsInNlbWFudGljX29tbWxfc2hhMjU2IjoiZTg5ZDE0MWM0MGM2YjUyMzQzYjA2MzhlZjdmNTI4MTZlODQ4NTg1ZjYyNTUxYWFjMzA1OGNlZDA0Zjc2OWViNiJ9XSwia2luZCI6Im5hdGl2ZV9vZmZpY2VfbWF0aCIsInBsYWNlaG9sZGVyX25hbWUiOiJtYXRoOjAxOSIsInNjaGVtYV92ZXJzaW9uIjoiMS4wIn0="/>
+              <p:cNvSpPr txBox="1"/>
+              <p:nvPr/>
+            </p:nvSpPr>
+            <p:spPr>
+              <a:xfrm>
+                <a:off x="11668601" y="3961448"/>
+                <a:ext cx="94298" cy="214312"/>
+              </a:xfrm>
+              <a:prstGeom prst="rect">
+                <a:avLst/>
+              </a:prstGeom>
+              <a:noFill/>
+              <a:effectLst/>
+            </p:spPr>
+            <p:txBody>
+              <a:bodyPr wrap="none" anchor="t" lIns="0" rIns="0" tIns="0" bIns="0">
+                <a:spAutoFit/>
+              </a:bodyPr>
+              <a:lstStyle/>
+              <a:p>
+                <a:pPr algn="ctr"/>
+                <a:r>
+                  <a:rPr lang="en-US" dirty="0" sz="1350">
+                    <a:solidFill>
+                      <a:srgbClr val="FFFFFF"/>
+                    </a:solidFill>
+                  </a:rPr>
+                  <a:t>\(\pi\)</a:t>
+                </a:r>
+                <a:endParaRPr lang="en-US" dirty="0" sz="1350">
+                  <a:solidFill>
+                    <a:srgbClr val="FFFFFF"/>
+                  </a:solidFill>
+                </a:endParaRPr>
+              </a:p>
+            </p:txBody>
+          </p:sp>
+        </mc:Fallback>
+      </mc:AlternateContent>
       <p:sp>
         <p:nvSpPr>
           <p:cNvPr id="182" name="Oval 181"/>
@@ -10434,51 +11756,113 @@
           </a:p>
         </p:txBody>
       </p:sp>
-      <p:sp>
-        <p:nvSpPr>
-          <p:cNvPr id="183" name="TextBox 182"/>
-          <p:cNvSpPr txBox="1"/>
-          <p:nvPr/>
-        </p:nvSpPr>
-        <p:spPr>
-          <a:xfrm>
-            <a:off x="10250805" y="3493770"/>
-            <a:ext cx="129540" cy="190500"/>
-          </a:xfrm>
-          <a:prstGeom prst="rect">
-            <a:avLst/>
-          </a:prstGeom>
-          <a:noFill/>
-          <a:effectLst/>
-        </p:spPr>
-        <p:txBody>
-          <a:bodyPr wrap="none" anchor="t" lIns="0" rIns="0" tIns="0" bIns="0">
-            <a:spAutoFit/>
-          </a:bodyPr>
-          <a:lstStyle/>
-          <a:p>
-            <a:pPr algn="ctr"/>
-            <a:r>
-              <a:rPr sz="1200" i="1" b="1">
-                <a:solidFill>
-                  <a:srgbClr val="FFFFFF"/>
-                </a:solidFill>
-                <a:latin typeface="Times New Roman"/>
-              </a:rPr>
-              <a:t>a</a:t>
-            </a:r>
-            <a:r>
-              <a:rPr sz="750" i="1" b="1" baseline="-25000">
-                <a:solidFill>
-                  <a:srgbClr val="FFFFFF"/>
-                </a:solidFill>
-                <a:latin typeface="Times New Roman"/>
-              </a:rPr>
-              <a:t>t</a:t>
-            </a:r>
-          </a:p>
-        </p:txBody>
-      </p:sp>
+      <mc:AlternateContent xmlns:mc="http://schemas.openxmlformats.org/markup-compatibility/2006">
+        <mc:Choice xmlns:a14="http://schemas.microsoft.com/office/drawing/2010/main" Requires="a14">
+          <p:sp>
+            <p:nvSpPr>
+              <p:cNvPr id="183" name="math:020" descr="AI_AUTOFIGURE_NATIVE_MATH_V1:eyJjb250ZW50X3J1bnMiOlt7ImNhbm9uaWNhbF9sYXRleCI6ImFfe3R9IiwiZm9ybXVsYV9pZCI6IkVRMDIwIiwia2luZCI6Im1hdGgiLCJsYXRleF9zaGEyNTYiOiJiMjM2YTRmNjc5MDRhMDkzYjk2N2E2NTYxMjY2OTM2Yjc1MDczMTAwMjc5YjZjZGRkYzhlMTc3Nzc2ZDVmZDdlIiwibW9kZSI6ImlubGluZSIsIm9tbWxfc2hhMjU2IjoiOTRjNWE5YzNlOGZiOWY5NmRhOWFiZDJkYTJiMTA4ZDdlNzUyNDU2YzJkYzZlNDJiNzlmZDZmYTAwNGRmNmMzYyIsInNlbWFudGljX29tbWxfcHJvZmlsZSI6Im9mZmljZS1tYXRoLXNlbWFudGljLXYyIiwic2VtYW50aWNfb21tbF9zaGEyNTYiOiI1OGYyMTBlMTVmNzM4YjY1YTk3MmYyODI4MTFjYTllMjBkODE0MWU4ZTk2N2JjYWE4NGRkN2VlZTBlZmU4MzFhIn1dLCJmb3JtdWxhcyI6W3siY2Fub25pY2FsX2xhdGV4IjoiYV97dH0iLCJmb3JtdWxhX2lkIjoiRVEwMjAiLCJsYXRleF9zaGEyNTYiOiJiMjM2YTRmNjc5MDRhMDkzYjk2N2E2NTYxMjY2OTM2Yjc1MDczMTAwMjc5YjZjZGRkYzhlMTc3Nzc2ZDVmZDdlIiwibW9kZSI6ImlubGluZSIsIm9tbWxfc2hhMjU2IjoiOTRjNWE5YzNlOGZiOWY5NmRhOWFiZDJkYTJiMTA4ZDdlNzUyNDU2YzJkYzZlNDJiNzlmZDZmYTAwNGRmNmMzYyIsInNlbWFudGljX29tbWxfcHJvZmlsZSI6Im9mZmljZS1tYXRoLXNlbWFudGljLXYyIiwic2VtYW50aWNfb21tbF9zaGEyNTYiOiI1OGYyMTBlMTVmNzM4YjY1YTk3MmYyODI4MTFjYTllMjBkODE0MWU4ZTk2N2JjYWE4NGRkN2VlZTBlZmU4MzFhIn1dLCJraW5kIjoibmF0aXZlX29mZmljZV9tYXRoIiwicGxhY2Vob2xkZXJfbmFtZSI6Im1hdGg6MDIwIiwic2NoZW1hX3ZlcnNpb24iOiIxLjAifQ=="/>
+              <p:cNvSpPr txBox="1"/>
+              <p:nvPr/>
+            </p:nvSpPr>
+            <p:spPr>
+              <a:xfrm>
+                <a:off x="10250805" y="3493770"/>
+                <a:ext cx="129540" cy="190500"/>
+              </a:xfrm>
+              <a:prstGeom prst="rect">
+                <a:avLst/>
+              </a:prstGeom>
+              <a:noFill/>
+              <a:effectLst/>
+            </p:spPr>
+            <p:txBody>
+              <a:bodyPr wrap="none" anchor="t" lIns="0" rIns="0" tIns="0" bIns="0">
+                <a:spAutoFit/>
+              </a:bodyPr>
+              <a:lstStyle/>
+              <a:p>
+                <a:pPr algn="ctr"/>
+                <a14:m>
+                  <m:oMath xmlns:m="http://schemas.openxmlformats.org/officeDocument/2006/math">
+                    <m:sSub>
+                      <m:e>
+                        <m:r>
+                          <a:rPr lang="en-US" dirty="0" sz="1200">
+                            <a:solidFill>
+                              <a:srgbClr val="FFFFFF"/>
+                            </a:solidFill>
+                            <a:latin typeface="Cambria Math"/>
+                          </a:rPr>
+                          <m:t>a</m:t>
+                        </m:r>
+                      </m:e>
+                      <m:sub>
+                        <m:r>
+                          <a:rPr lang="en-US" dirty="0" sz="1200">
+                            <a:solidFill>
+                              <a:srgbClr val="FFFFFF"/>
+                            </a:solidFill>
+                            <a:latin typeface="Cambria Math"/>
+                          </a:rPr>
+                          <m:t>t</m:t>
+                        </m:r>
+                      </m:sub>
+                    </m:sSub>
+                  </m:oMath>
+                </a14:m>
+                <a:endParaRPr lang="en-US" dirty="0" sz="1200">
+                  <a:solidFill>
+                    <a:srgbClr val="FFFFFF"/>
+                  </a:solidFill>
+                  <a:latin typeface="Cambria Math"/>
+                </a:endParaRPr>
+              </a:p>
+            </p:txBody>
+          </p:sp>
+        </mc:Choice>
+        <mc:Fallback>
+          <p:sp>
+            <p:nvSpPr>
+              <p:cNvPr id="183" name="math:020" descr="AI_AUTOFIGURE_MATH_FALLBACK_ONLY_V1:eyJjb250ZW50X3J1bnMiOlt7ImNhbm9uaWNhbF9sYXRleCI6ImFfe3R9IiwiZm9ybXVsYV9pZCI6IkVRMDIwIiwia2luZCI6Im1hdGgiLCJsYXRleF9zaGEyNTYiOiJiMjM2YTRmNjc5MDRhMDkzYjk2N2E2NTYxMjY2OTM2Yjc1MDczMTAwMjc5YjZjZGRkYzhlMTc3Nzc2ZDVmZDdlIiwibW9kZSI6ImlubGluZSIsIm9tbWxfc2hhMjU2IjoiOTRjNWE5YzNlOGZiOWY5NmRhOWFiZDJkYTJiMTA4ZDdlNzUyNDU2YzJkYzZlNDJiNzlmZDZmYTAwNGRmNmMzYyIsInNlbWFudGljX29tbWxfcHJvZmlsZSI6Im9mZmljZS1tYXRoLXNlbWFudGljLXYyIiwic2VtYW50aWNfb21tbF9zaGEyNTYiOiI1OGYyMTBlMTVmNzM4YjY1YTk3MmYyODI4MTFjYTllMjBkODE0MWU4ZTk2N2JjYWE4NGRkN2VlZTBlZmU4MzFhIn1dLCJmb3JtdWxhcyI6W3siY2Fub25pY2FsX2xhdGV4IjoiYV97dH0iLCJmb3JtdWxhX2lkIjoiRVEwMjAiLCJsYXRleF9zaGEyNTYiOiJiMjM2YTRmNjc5MDRhMDkzYjk2N2E2NTYxMjY2OTM2Yjc1MDczMTAwMjc5YjZjZGRkYzhlMTc3Nzc2ZDVmZDdlIiwibW9kZSI6ImlubGluZSIsIm9tbWxfc2hhMjU2IjoiOTRjNWE5YzNlOGZiOWY5NmRhOWFiZDJkYTJiMTA4ZDdlNzUyNDU2YzJkYzZlNDJiNzlmZDZmYTAwNGRmNmMzYyIsInNlbWFudGljX29tbWxfcHJvZmlsZSI6Im9mZmljZS1tYXRoLXNlbWFudGljLXYyIiwic2VtYW50aWNfb21tbF9zaGEyNTYiOiI1OGYyMTBlMTVmNzM4YjY1YTk3MmYyODI4MTFjYTllMjBkODE0MWU4ZTk2N2JjYWE4NGRkN2VlZTBlZmU4MzFhIn1dLCJraW5kIjoibmF0aXZlX29mZmljZV9tYXRoIiwicGxhY2Vob2xkZXJfbmFtZSI6Im1hdGg6MDIwIiwic2NoZW1hX3ZlcnNpb24iOiIxLjAifQ=="/>
+              <p:cNvSpPr txBox="1"/>
+              <p:nvPr/>
+            </p:nvSpPr>
+            <p:spPr>
+              <a:xfrm>
+                <a:off x="10250805" y="3493770"/>
+                <a:ext cx="129540" cy="190500"/>
+              </a:xfrm>
+              <a:prstGeom prst="rect">
+                <a:avLst/>
+              </a:prstGeom>
+              <a:noFill/>
+              <a:effectLst/>
+            </p:spPr>
+            <p:txBody>
+              <a:bodyPr wrap="none" anchor="t" lIns="0" rIns="0" tIns="0" bIns="0">
+                <a:spAutoFit/>
+              </a:bodyPr>
+              <a:lstStyle/>
+              <a:p>
+                <a:pPr algn="ctr"/>
+                <a:r>
+                  <a:rPr lang="en-US" dirty="0" sz="1200">
+                    <a:solidFill>
+                      <a:srgbClr val="FFFFFF"/>
+                    </a:solidFill>
+                  </a:rPr>
+                  <a:t>\(a_{t}\)</a:t>
+                </a:r>
+                <a:endParaRPr lang="en-US" dirty="0" sz="1200">
+                  <a:solidFill>
+                    <a:srgbClr val="FFFFFF"/>
+                  </a:solidFill>
+                </a:endParaRPr>
+              </a:p>
+            </p:txBody>
+          </p:sp>
+        </mc:Fallback>
+      </mc:AlternateContent>
       <p:sp>
         <p:nvSpPr>
           <p:cNvPr id="184" name="Oval 183"/>
@@ -10520,51 +11904,113 @@
           </a:p>
         </p:txBody>
       </p:sp>
-      <p:sp>
-        <p:nvSpPr>
-          <p:cNvPr id="185" name="TextBox 184"/>
-          <p:cNvSpPr txBox="1"/>
-          <p:nvPr/>
-        </p:nvSpPr>
-        <p:spPr>
-          <a:xfrm>
-            <a:off x="11092434" y="3493770"/>
-            <a:ext cx="294132" cy="190500"/>
-          </a:xfrm>
-          <a:prstGeom prst="rect">
-            <a:avLst/>
-          </a:prstGeom>
-          <a:noFill/>
-          <a:effectLst/>
-        </p:spPr>
-        <p:txBody>
-          <a:bodyPr wrap="none" anchor="t" lIns="0" rIns="0" tIns="0" bIns="0">
-            <a:spAutoFit/>
-          </a:bodyPr>
-          <a:lstStyle/>
-          <a:p>
-            <a:pPr algn="ctr"/>
-            <a:r>
-              <a:rPr sz="1200" i="1" b="1">
-                <a:solidFill>
-                  <a:srgbClr val="FFFFFF"/>
-                </a:solidFill>
-                <a:latin typeface="Times New Roman"/>
-              </a:rPr>
-              <a:t>a</a:t>
-            </a:r>
-            <a:r>
-              <a:rPr sz="750" i="1" b="1" baseline="-25000">
-                <a:solidFill>
-                  <a:srgbClr val="FFFFFF"/>
-                </a:solidFill>
-                <a:latin typeface="Times New Roman"/>
-              </a:rPr>
-              <a:t>t+1</a:t>
-            </a:r>
-          </a:p>
-        </p:txBody>
-      </p:sp>
+      <mc:AlternateContent xmlns:mc="http://schemas.openxmlformats.org/markup-compatibility/2006">
+        <mc:Choice xmlns:a14="http://schemas.microsoft.com/office/drawing/2010/main" Requires="a14">
+          <p:sp>
+            <p:nvSpPr>
+              <p:cNvPr id="185" name="math:021" descr="AI_AUTOFIGURE_NATIVE_MATH_V1:eyJjb250ZW50X3J1bnMiOlt7ImNhbm9uaWNhbF9sYXRleCI6ImFfe3QrMX0iLCJmb3JtdWxhX2lkIjoiRVEwMjEiLCJraW5kIjoibWF0aCIsImxhdGV4X3NoYTI1NiI6ImNkNTFlODVhMWRhMGJkNjU2MGEzOGU0NTVmNWIzMDNkYjcxNzUzMzc3NmRhZTFjZjU0NGM0ZTEwOGJmM2VhZWEiLCJtb2RlIjoiaW5saW5lIiwib21tbF9zaGEyNTYiOiJiYzc2NzNhNjFlZDE1OTBkYmJjNzQzYzMzNjI2NWU0Zjk4ZTYzOGZhMGE3NzMxZjRlMzk2MmE3NDdmNmY1MmYwIiwic2VtYW50aWNfb21tbF9wcm9maWxlIjoib2ZmaWNlLW1hdGgtc2VtYW50aWMtdjIiLCJzZW1hbnRpY19vbW1sX3NoYTI1NiI6IjM1ZmU0NTJiNDQ4ZWY4MTUxMWJlOTA3ZjVlZWRjOWM1YjYwMWMzN2U2NTVmY2ZmNDY3ZmQ5NzFiYWM4ZTllZTEifV0sImZvcm11bGFzIjpbeyJjYW5vbmljYWxfbGF0ZXgiOiJhX3t0KzF9IiwiZm9ybXVsYV9pZCI6IkVRMDIxIiwibGF0ZXhfc2hhMjU2IjoiY2Q1MWU4NWExZGEwYmQ2NTYwYTM4ZTQ1NWY1YjMwM2RiNzE3NTMzNzc2ZGFlMWNmNTQ0YzRlMTA4YmYzZWFlYSIsIm1vZGUiOiJpbmxpbmUiLCJvbW1sX3NoYTI1NiI6ImJjNzY3M2E2MWVkMTU5MGRiYmM3NDNjMzM2MjY1ZTRmOThlNjM4ZmEwYTc3MzFmNGUzOTYyYTc0N2Y2ZjUyZjAiLCJzZW1hbnRpY19vbW1sX3Byb2ZpbGUiOiJvZmZpY2UtbWF0aC1zZW1hbnRpYy12MiIsInNlbWFudGljX29tbWxfc2hhMjU2IjoiMzVmZTQ1MmI0NDhlZjgxNTExYmU5MDdmNWVlZGM5YzViNjAxYzM3ZTY1NWZjZmY0NjdmZDk3MWJhYzhlOWVlMSJ9XSwia2luZCI6Im5hdGl2ZV9vZmZpY2VfbWF0aCIsInBsYWNlaG9sZGVyX25hbWUiOiJtYXRoOjAyMSIsInNjaGVtYV92ZXJzaW9uIjoiMS4wIn0="/>
+              <p:cNvSpPr txBox="1"/>
+              <p:nvPr/>
+            </p:nvSpPr>
+            <p:spPr>
+              <a:xfrm>
+                <a:off x="11092434" y="3493770"/>
+                <a:ext cx="294132" cy="190500"/>
+              </a:xfrm>
+              <a:prstGeom prst="rect">
+                <a:avLst/>
+              </a:prstGeom>
+              <a:noFill/>
+              <a:effectLst/>
+            </p:spPr>
+            <p:txBody>
+              <a:bodyPr wrap="none" anchor="t" lIns="0" rIns="0" tIns="0" bIns="0">
+                <a:spAutoFit/>
+              </a:bodyPr>
+              <a:lstStyle/>
+              <a:p>
+                <a:pPr algn="ctr"/>
+                <a14:m>
+                  <m:oMath xmlns:m="http://schemas.openxmlformats.org/officeDocument/2006/math">
+                    <m:sSub>
+                      <m:e>
+                        <m:r>
+                          <a:rPr lang="en-US" dirty="0" sz="1200">
+                            <a:solidFill>
+                              <a:srgbClr val="FFFFFF"/>
+                            </a:solidFill>
+                            <a:latin typeface="Cambria Math"/>
+                          </a:rPr>
+                          <m:t>a</m:t>
+                        </m:r>
+                      </m:e>
+                      <m:sub>
+                        <m:r>
+                          <a:rPr lang="en-US" dirty="0" sz="1200">
+                            <a:solidFill>
+                              <a:srgbClr val="FFFFFF"/>
+                            </a:solidFill>
+                            <a:latin typeface="Cambria Math"/>
+                          </a:rPr>
+                          <m:t>t+1</m:t>
+                        </m:r>
+                      </m:sub>
+                    </m:sSub>
+                  </m:oMath>
+                </a14:m>
+                <a:endParaRPr lang="en-US" dirty="0" sz="1200">
+                  <a:solidFill>
+                    <a:srgbClr val="FFFFFF"/>
+                  </a:solidFill>
+                  <a:latin typeface="Cambria Math"/>
+                </a:endParaRPr>
+              </a:p>
+            </p:txBody>
+          </p:sp>
+        </mc:Choice>
+        <mc:Fallback>
+          <p:sp>
+            <p:nvSpPr>
+              <p:cNvPr id="185" name="math:021" descr="AI_AUTOFIGURE_MATH_FALLBACK_ONLY_V1:eyJjb250ZW50X3J1bnMiOlt7ImNhbm9uaWNhbF9sYXRleCI6ImFfe3QrMX0iLCJmb3JtdWxhX2lkIjoiRVEwMjEiLCJraW5kIjoibWF0aCIsImxhdGV4X3NoYTI1NiI6ImNkNTFlODVhMWRhMGJkNjU2MGEzOGU0NTVmNWIzMDNkYjcxNzUzMzc3NmRhZTFjZjU0NGM0ZTEwOGJmM2VhZWEiLCJtb2RlIjoiaW5saW5lIiwib21tbF9zaGEyNTYiOiJiYzc2NzNhNjFlZDE1OTBkYmJjNzQzYzMzNjI2NWU0Zjk4ZTYzOGZhMGE3NzMxZjRlMzk2MmE3NDdmNmY1MmYwIiwic2VtYW50aWNfb21tbF9wcm9maWxlIjoib2ZmaWNlLW1hdGgtc2VtYW50aWMtdjIiLCJzZW1hbnRpY19vbW1sX3NoYTI1NiI6IjM1ZmU0NTJiNDQ4ZWY4MTUxMWJlOTA3ZjVlZWRjOWM1YjYwMWMzN2U2NTVmY2ZmNDY3ZmQ5NzFiYWM4ZTllZTEifV0sImZvcm11bGFzIjpbeyJjYW5vbmljYWxfbGF0ZXgiOiJhX3t0KzF9IiwiZm9ybXVsYV9pZCI6IkVRMDIxIiwibGF0ZXhfc2hhMjU2IjoiY2Q1MWU4NWExZGEwYmQ2NTYwYTM4ZTQ1NWY1YjMwM2RiNzE3NTMzNzc2ZGFlMWNmNTQ0YzRlMTA4YmYzZWFlYSIsIm1vZGUiOiJpbmxpbmUiLCJvbW1sX3NoYTI1NiI6ImJjNzY3M2E2MWVkMTU5MGRiYmM3NDNjMzM2MjY1ZTRmOThlNjM4ZmEwYTc3MzFmNGUzOTYyYTc0N2Y2ZjUyZjAiLCJzZW1hbnRpY19vbW1sX3Byb2ZpbGUiOiJvZmZpY2UtbWF0aC1zZW1hbnRpYy12MiIsInNlbWFudGljX29tbWxfc2hhMjU2IjoiMzVmZTQ1MmI0NDhlZjgxNTExYmU5MDdmNWVlZGM5YzViNjAxYzM3ZTY1NWZjZmY0NjdmZDk3MWJhYzhlOWVlMSJ9XSwia2luZCI6Im5hdGl2ZV9vZmZpY2VfbWF0aCIsInBsYWNlaG9sZGVyX25hbWUiOiJtYXRoOjAyMSIsInNjaGVtYV92ZXJzaW9uIjoiMS4wIn0="/>
+              <p:cNvSpPr txBox="1"/>
+              <p:nvPr/>
+            </p:nvSpPr>
+            <p:spPr>
+              <a:xfrm>
+                <a:off x="11092434" y="3493770"/>
+                <a:ext cx="294132" cy="190500"/>
+              </a:xfrm>
+              <a:prstGeom prst="rect">
+                <a:avLst/>
+              </a:prstGeom>
+              <a:noFill/>
+              <a:effectLst/>
+            </p:spPr>
+            <p:txBody>
+              <a:bodyPr wrap="none" anchor="t" lIns="0" rIns="0" tIns="0" bIns="0">
+                <a:spAutoFit/>
+              </a:bodyPr>
+              <a:lstStyle/>
+              <a:p>
+                <a:pPr algn="ctr"/>
+                <a:r>
+                  <a:rPr lang="en-US" dirty="0" sz="1200">
+                    <a:solidFill>
+                      <a:srgbClr val="FFFFFF"/>
+                    </a:solidFill>
+                  </a:rPr>
+                  <a:t>\(a_{t+1}\)</a:t>
+                </a:r>
+                <a:endParaRPr lang="en-US" dirty="0" sz="1200">
+                  <a:solidFill>
+                    <a:srgbClr val="FFFFFF"/>
+                  </a:solidFill>
+                </a:endParaRPr>
+              </a:p>
+            </p:txBody>
+          </p:sp>
+        </mc:Fallback>
+      </mc:AlternateContent>
       <p:sp>
         <p:nvSpPr>
           <p:cNvPr id="186" name="Oval 185"/>
@@ -10606,51 +12052,113 @@
           </a:p>
         </p:txBody>
       </p:sp>
-      <p:sp>
-        <p:nvSpPr>
-          <p:cNvPr id="187" name="TextBox 186"/>
-          <p:cNvSpPr txBox="1"/>
-          <p:nvPr/>
-        </p:nvSpPr>
-        <p:spPr>
-          <a:xfrm>
-            <a:off x="12035409" y="3493770"/>
-            <a:ext cx="294132" cy="190500"/>
-          </a:xfrm>
-          <a:prstGeom prst="rect">
-            <a:avLst/>
-          </a:prstGeom>
-          <a:noFill/>
-          <a:effectLst/>
-        </p:spPr>
-        <p:txBody>
-          <a:bodyPr wrap="none" anchor="t" lIns="0" rIns="0" tIns="0" bIns="0">
-            <a:spAutoFit/>
-          </a:bodyPr>
-          <a:lstStyle/>
-          <a:p>
-            <a:pPr algn="ctr"/>
-            <a:r>
-              <a:rPr sz="1200" i="1" b="1">
-                <a:solidFill>
-                  <a:srgbClr val="FFFFFF"/>
-                </a:solidFill>
-                <a:latin typeface="Times New Roman"/>
-              </a:rPr>
-              <a:t>a</a:t>
-            </a:r>
-            <a:r>
-              <a:rPr sz="750" i="1" b="1" baseline="-25000">
-                <a:solidFill>
-                  <a:srgbClr val="FFFFFF"/>
-                </a:solidFill>
-                <a:latin typeface="Times New Roman"/>
-              </a:rPr>
-              <a:t>t+2</a:t>
-            </a:r>
-          </a:p>
-        </p:txBody>
-      </p:sp>
+      <mc:AlternateContent xmlns:mc="http://schemas.openxmlformats.org/markup-compatibility/2006">
+        <mc:Choice xmlns:a14="http://schemas.microsoft.com/office/drawing/2010/main" Requires="a14">
+          <p:sp>
+            <p:nvSpPr>
+              <p:cNvPr id="187" name="math:022" descr="AI_AUTOFIGURE_NATIVE_MATH_V1:eyJjb250ZW50X3J1bnMiOlt7ImNhbm9uaWNhbF9sYXRleCI6ImFfe3QrMn0iLCJmb3JtdWxhX2lkIjoiRVEwMjIiLCJraW5kIjoibWF0aCIsImxhdGV4X3NoYTI1NiI6ImZkYWYzMzQzZjgxNjEyYjY0OWZlNDcyZDc0Mzk4M2U2YTBmMTI4MzdiOGZmY2M4NjUwMTVhNjZkYWU0Zjc2YjQiLCJtb2RlIjoiaW5saW5lIiwib21tbF9zaGEyNTYiOiI4MWRjMWE4MmFlNGVmY2JmMDYxYmYzM2E2NmNjZmE4OGNkOTg5NzQzZjM2NjExMzhmZWRiYmU1OTNlZjJjOTVlIiwic2VtYW50aWNfb21tbF9wcm9maWxlIjoib2ZmaWNlLW1hdGgtc2VtYW50aWMtdjIiLCJzZW1hbnRpY19vbW1sX3NoYTI1NiI6ImYzNmQyNDY3MzZjNjAyNjZkODBmMWI0MGY3ODU1MTk0NDgzNjE4ZjcyYWM1ZjlmMWJhZTg5YTQwZGZjYmM3MWIifV0sImZvcm11bGFzIjpbeyJjYW5vbmljYWxfbGF0ZXgiOiJhX3t0KzJ9IiwiZm9ybXVsYV9pZCI6IkVRMDIyIiwibGF0ZXhfc2hhMjU2IjoiZmRhZjMzNDNmODE2MTJiNjQ5ZmU0NzJkNzQzOTgzZTZhMGYxMjgzN2I4ZmZjYzg2NTAxNWE2NmRhZTRmNzZiNCIsIm1vZGUiOiJpbmxpbmUiLCJvbW1sX3NoYTI1NiI6IjgxZGMxYTgyYWU0ZWZjYmYwNjFiZjMzYTY2Y2NmYTg4Y2Q5ODk3NDNmMzY2MTEzOGZlZGJiZTU5M2VmMmM5NWUiLCJzZW1hbnRpY19vbW1sX3Byb2ZpbGUiOiJvZmZpY2UtbWF0aC1zZW1hbnRpYy12MiIsInNlbWFudGljX29tbWxfc2hhMjU2IjoiZjM2ZDI0NjczNmM2MDI2NmQ4MGYxYjQwZjc4NTUxOTQ0ODM2MThmNzJhYzVmOWYxYmFlODlhNDBkZmNiYzcxYiJ9XSwia2luZCI6Im5hdGl2ZV9vZmZpY2VfbWF0aCIsInBsYWNlaG9sZGVyX25hbWUiOiJtYXRoOjAyMiIsInNjaGVtYV92ZXJzaW9uIjoiMS4wIn0="/>
+              <p:cNvSpPr txBox="1"/>
+              <p:nvPr/>
+            </p:nvSpPr>
+            <p:spPr>
+              <a:xfrm>
+                <a:off x="12035409" y="3493770"/>
+                <a:ext cx="294132" cy="190500"/>
+              </a:xfrm>
+              <a:prstGeom prst="rect">
+                <a:avLst/>
+              </a:prstGeom>
+              <a:noFill/>
+              <a:effectLst/>
+            </p:spPr>
+            <p:txBody>
+              <a:bodyPr wrap="none" anchor="t" lIns="0" rIns="0" tIns="0" bIns="0">
+                <a:spAutoFit/>
+              </a:bodyPr>
+              <a:lstStyle/>
+              <a:p>
+                <a:pPr algn="ctr"/>
+                <a14:m>
+                  <m:oMath xmlns:m="http://schemas.openxmlformats.org/officeDocument/2006/math">
+                    <m:sSub>
+                      <m:e>
+                        <m:r>
+                          <a:rPr lang="en-US" dirty="0" sz="1200">
+                            <a:solidFill>
+                              <a:srgbClr val="FFFFFF"/>
+                            </a:solidFill>
+                            <a:latin typeface="Cambria Math"/>
+                          </a:rPr>
+                          <m:t>a</m:t>
+                        </m:r>
+                      </m:e>
+                      <m:sub>
+                        <m:r>
+                          <a:rPr lang="en-US" dirty="0" sz="1200">
+                            <a:solidFill>
+                              <a:srgbClr val="FFFFFF"/>
+                            </a:solidFill>
+                            <a:latin typeface="Cambria Math"/>
+                          </a:rPr>
+                          <m:t>t+2</m:t>
+                        </m:r>
+                      </m:sub>
+                    </m:sSub>
+                  </m:oMath>
+                </a14:m>
+                <a:endParaRPr lang="en-US" dirty="0" sz="1200">
+                  <a:solidFill>
+                    <a:srgbClr val="FFFFFF"/>
+                  </a:solidFill>
+                  <a:latin typeface="Cambria Math"/>
+                </a:endParaRPr>
+              </a:p>
+            </p:txBody>
+          </p:sp>
+        </mc:Choice>
+        <mc:Fallback>
+          <p:sp>
+            <p:nvSpPr>
+              <p:cNvPr id="187" name="math:022" descr="AI_AUTOFIGURE_MATH_FALLBACK_ONLY_V1:eyJjb250ZW50X3J1bnMiOlt7ImNhbm9uaWNhbF9sYXRleCI6ImFfe3QrMn0iLCJmb3JtdWxhX2lkIjoiRVEwMjIiLCJraW5kIjoibWF0aCIsImxhdGV4X3NoYTI1NiI6ImZkYWYzMzQzZjgxNjEyYjY0OWZlNDcyZDc0Mzk4M2U2YTBmMTI4MzdiOGZmY2M4NjUwMTVhNjZkYWU0Zjc2YjQiLCJtb2RlIjoiaW5saW5lIiwib21tbF9zaGEyNTYiOiI4MWRjMWE4MmFlNGVmY2JmMDYxYmYzM2E2NmNjZmE4OGNkOTg5NzQzZjM2NjExMzhmZWRiYmU1OTNlZjJjOTVlIiwic2VtYW50aWNfb21tbF9wcm9maWxlIjoib2ZmaWNlLW1hdGgtc2VtYW50aWMtdjIiLCJzZW1hbnRpY19vbW1sX3NoYTI1NiI6ImYzNmQyNDY3MzZjNjAyNjZkODBmMWI0MGY3ODU1MTk0NDgzNjE4ZjcyYWM1ZjlmMWJhZTg5YTQwZGZjYmM3MWIifV0sImZvcm11bGFzIjpbeyJjYW5vbmljYWxfbGF0ZXgiOiJhX3t0KzJ9IiwiZm9ybXVsYV9pZCI6IkVRMDIyIiwibGF0ZXhfc2hhMjU2IjoiZmRhZjMzNDNmODE2MTJiNjQ5ZmU0NzJkNzQzOTgzZTZhMGYxMjgzN2I4ZmZjYzg2NTAxNWE2NmRhZTRmNzZiNCIsIm1vZGUiOiJpbmxpbmUiLCJvbW1sX3NoYTI1NiI6IjgxZGMxYTgyYWU0ZWZjYmYwNjFiZjMzYTY2Y2NmYTg4Y2Q5ODk3NDNmMzY2MTEzOGZlZGJiZTU5M2VmMmM5NWUiLCJzZW1hbnRpY19vbW1sX3Byb2ZpbGUiOiJvZmZpY2UtbWF0aC1zZW1hbnRpYy12MiIsInNlbWFudGljX29tbWxfc2hhMjU2IjoiZjM2ZDI0NjczNmM2MDI2NmQ4MGYxYjQwZjc4NTUxOTQ0ODM2MThmNzJhYzVmOWYxYmFlODlhNDBkZmNiYzcxYiJ9XSwia2luZCI6Im5hdGl2ZV9vZmZpY2VfbWF0aCIsInBsYWNlaG9sZGVyX25hbWUiOiJtYXRoOjAyMiIsInNjaGVtYV92ZXJzaW9uIjoiMS4wIn0="/>
+              <p:cNvSpPr txBox="1"/>
+              <p:nvPr/>
+            </p:nvSpPr>
+            <p:spPr>
+              <a:xfrm>
+                <a:off x="12035409" y="3493770"/>
+                <a:ext cx="294132" cy="190500"/>
+              </a:xfrm>
+              <a:prstGeom prst="rect">
+                <a:avLst/>
+              </a:prstGeom>
+              <a:noFill/>
+              <a:effectLst/>
+            </p:spPr>
+            <p:txBody>
+              <a:bodyPr wrap="none" anchor="t" lIns="0" rIns="0" tIns="0" bIns="0">
+                <a:spAutoFit/>
+              </a:bodyPr>
+              <a:lstStyle/>
+              <a:p>
+                <a:pPr algn="ctr"/>
+                <a:r>
+                  <a:rPr lang="en-US" dirty="0" sz="1200">
+                    <a:solidFill>
+                      <a:srgbClr val="FFFFFF"/>
+                    </a:solidFill>
+                  </a:rPr>
+                  <a:t>\(a_{t+2}\)</a:t>
+                </a:r>
+                <a:endParaRPr lang="en-US" dirty="0" sz="1200">
+                  <a:solidFill>
+                    <a:srgbClr val="FFFFFF"/>
+                  </a:solidFill>
+                </a:endParaRPr>
+              </a:p>
+            </p:txBody>
+          </p:sp>
+        </mc:Fallback>
+      </mc:AlternateContent>
       <p:cxnSp>
         <p:nvCxnSpPr>
           <p:cNvPr id="188" name="Connector 187"/>
@@ -10723,6 +12231,10 @@
             <a:srgbClr val="8D6A00"/>
           </a:solidFill>
         </p:spPr>
+        <p:txBody>
+          <a:bodyPr/>
+          <a:p/>
+        </p:txBody>
       </p:sp>
       <p:cxnSp>
         <p:nvCxnSpPr>
@@ -10796,6 +12308,10 @@
             <a:srgbClr val="8D6A00"/>
           </a:solidFill>
         </p:spPr>
+        <p:txBody>
+          <a:bodyPr/>
+          <a:p/>
+        </p:txBody>
       </p:sp>
       <p:cxnSp>
         <p:nvCxnSpPr>
@@ -10869,6 +12385,10 @@
             <a:srgbClr val="8D6A00"/>
           </a:solidFill>
         </p:spPr>
+        <p:txBody>
+          <a:bodyPr/>
+          <a:p/>
+        </p:txBody>
       </p:sp>
       <p:sp>
         <p:nvSpPr>
@@ -10907,6 +12427,10 @@
             </a:solidFill>
           </a:ln>
         </p:spPr>
+        <p:txBody>
+          <a:bodyPr/>
+          <a:p/>
+        </p:txBody>
       </p:sp>
       <p:sp>
         <p:nvSpPr>
@@ -10944,6 +12468,10 @@
             <a:srgbClr val="8D6A00"/>
           </a:solidFill>
         </p:spPr>
+        <p:txBody>
+          <a:bodyPr/>
+          <a:p/>
+        </p:txBody>
       </p:sp>
       <p:sp>
         <p:nvSpPr>
@@ -10982,6 +12510,10 @@
             </a:solidFill>
           </a:ln>
         </p:spPr>
+        <p:txBody>
+          <a:bodyPr/>
+          <a:p/>
+        </p:txBody>
       </p:sp>
       <p:sp>
         <p:nvSpPr>
@@ -11019,6 +12551,10 @@
             <a:srgbClr val="8D6A00"/>
           </a:solidFill>
         </p:spPr>
+        <p:txBody>
+          <a:bodyPr/>
+          <a:p/>
+        </p:txBody>
       </p:sp>
       <p:sp>
         <p:nvSpPr>
@@ -11057,6 +12593,10 @@
             </a:solidFill>
           </a:ln>
         </p:spPr>
+        <p:txBody>
+          <a:bodyPr/>
+          <a:p/>
+        </p:txBody>
       </p:sp>
       <p:sp>
         <p:nvSpPr>
@@ -11094,6 +12634,10 @@
             <a:srgbClr val="8D6A00"/>
           </a:solidFill>
         </p:spPr>
+        <p:txBody>
+          <a:bodyPr/>
+          <a:p/>
+        </p:txBody>
       </p:sp>
       <p:sp>
         <p:nvSpPr>
@@ -11132,6 +12676,10 @@
             </a:solidFill>
           </a:ln>
         </p:spPr>
+        <p:txBody>
+          <a:bodyPr/>
+          <a:p/>
+        </p:txBody>
       </p:sp>
       <p:sp>
         <p:nvSpPr>
@@ -11169,6 +12717,10 @@
             <a:srgbClr val="8D6A00"/>
           </a:solidFill>
         </p:spPr>
+        <p:txBody>
+          <a:bodyPr/>
+          <a:p/>
+        </p:txBody>
       </p:sp>
       <p:sp>
         <p:nvSpPr>
@@ -11207,6 +12759,10 @@
             </a:solidFill>
           </a:ln>
         </p:spPr>
+        <p:txBody>
+          <a:bodyPr/>
+          <a:p/>
+        </p:txBody>
       </p:sp>
       <p:sp>
         <p:nvSpPr>
@@ -11244,6 +12800,10 @@
             <a:srgbClr val="8D6A00"/>
           </a:solidFill>
         </p:spPr>
+        <p:txBody>
+          <a:bodyPr/>
+          <a:p/>
+        </p:txBody>
       </p:sp>
       <p:sp>
         <p:nvSpPr>
@@ -11282,6 +12842,10 @@
             </a:solidFill>
           </a:ln>
         </p:spPr>
+        <p:txBody>
+          <a:bodyPr/>
+          <a:p/>
+        </p:txBody>
       </p:sp>
       <p:sp>
         <p:nvSpPr>
@@ -11319,6 +12883,10 @@
             <a:srgbClr val="8D6A00"/>
           </a:solidFill>
         </p:spPr>
+        <p:txBody>
+          <a:bodyPr/>
+          <a:p/>
+        </p:txBody>
       </p:sp>
       <p:cxnSp>
         <p:nvCxnSpPr>
@@ -11392,6 +12960,10 @@
             <a:srgbClr val="8D6A00"/>
           </a:solidFill>
         </p:spPr>
+        <p:txBody>
+          <a:bodyPr/>
+          <a:p/>
+        </p:txBody>
       </p:sp>
       <p:cxnSp>
         <p:nvCxnSpPr>
@@ -11465,6 +13037,10 @@
             <a:srgbClr val="8D6A00"/>
           </a:solidFill>
         </p:spPr>
+        <p:txBody>
+          <a:bodyPr/>
+          <a:p/>
+        </p:txBody>
       </p:sp>
       <p:cxnSp>
         <p:nvCxnSpPr>
@@ -11538,6 +13114,10 @@
             <a:srgbClr val="8D6A00"/>
           </a:solidFill>
         </p:spPr>
+        <p:txBody>
+          <a:bodyPr/>
+          <a:p/>
+        </p:txBody>
       </p:sp>
       <p:sp>
         <p:nvSpPr>
@@ -11737,6 +13317,10 @@
             </a:solidFill>
           </a:ln>
         </p:spPr>
+        <p:txBody>
+          <a:bodyPr/>
+          <a:p/>
+        </p:txBody>
       </p:sp>
       <p:sp>
         <p:nvSpPr>
@@ -11774,6 +13358,10 @@
             <a:srgbClr val="D87478"/>
           </a:solidFill>
         </p:spPr>
+        <p:txBody>
+          <a:bodyPr/>
+          <a:p/>
+        </p:txBody>
       </p:sp>
       <p:sp>
         <p:nvSpPr>
@@ -11867,6 +13455,10 @@
             </a:solidFill>
           </a:ln>
         </p:spPr>
+        <p:txBody>
+          <a:bodyPr/>
+          <a:p/>
+        </p:txBody>
       </p:sp>
       <p:sp>
         <p:nvSpPr>
@@ -11910,6 +13502,10 @@
             </a:solidFill>
           </a:ln>
         </p:spPr>
+        <p:txBody>
+          <a:bodyPr/>
+          <a:p/>
+        </p:txBody>
       </p:sp>
       <p:sp>
         <p:nvSpPr>
@@ -11953,6 +13549,10 @@
             </a:solidFill>
           </a:ln>
         </p:spPr>
+        <p:txBody>
+          <a:bodyPr/>
+          <a:p/>
+        </p:txBody>
       </p:sp>
       <p:cxnSp>
         <p:nvCxnSpPr>
@@ -12147,6 +13747,10 @@
             </a:solidFill>
           </a:ln>
         </p:spPr>
+        <p:txBody>
+          <a:bodyPr/>
+          <a:p/>
+        </p:txBody>
       </p:sp>
       <p:sp>
         <p:nvSpPr>
@@ -12189,6 +13793,10 @@
             </a:solidFill>
           </a:ln>
         </p:spPr>
+        <p:txBody>
+          <a:bodyPr/>
+          <a:p/>
+        </p:txBody>
       </p:sp>
       <p:cxnSp>
         <p:nvCxnSpPr>
@@ -12334,6 +13942,10 @@
             <a:srgbClr val="D87478"/>
           </a:solidFill>
         </p:spPr>
+        <p:txBody>
+          <a:bodyPr/>
+          <a:p/>
+        </p:txBody>
       </p:sp>
       <p:sp>
         <p:nvSpPr>
@@ -12370,6 +13982,10 @@
             </a:solidFill>
           </a:ln>
         </p:spPr>
+        <p:txBody>
+          <a:bodyPr/>
+          <a:p/>
+        </p:txBody>
       </p:sp>
       <p:sp>
         <p:nvSpPr>
@@ -12407,6 +14023,10 @@
             <a:srgbClr val="D87478"/>
           </a:solidFill>
         </p:spPr>
+        <p:txBody>
+          <a:bodyPr/>
+          <a:p/>
+        </p:txBody>
       </p:sp>
       <p:cxnSp>
         <p:nvCxnSpPr>
@@ -12480,6 +14100,10 @@
             <a:srgbClr val="777777"/>
           </a:solidFill>
         </p:spPr>
+        <p:txBody>
+          <a:bodyPr/>
+          <a:p/>
+        </p:txBody>
       </p:sp>
       <p:sp>
         <p:nvSpPr>
@@ -12517,6 +14141,10 @@
             <a:srgbClr val="777777"/>
           </a:solidFill>
         </p:spPr>
+        <p:txBody>
+          <a:bodyPr/>
+          <a:p/>
+        </p:txBody>
       </p:sp>
       <p:sp>
         <p:nvSpPr>
@@ -12655,6 +14283,10 @@
             </a:solidFill>
           </a:ln>
         </p:spPr>
+        <p:txBody>
+          <a:bodyPr/>
+          <a:p/>
+        </p:txBody>
       </p:sp>
       <p:sp>
         <p:nvSpPr>
@@ -12712,6 +14344,10 @@
             </a:solidFill>
           </a:ln>
         </p:spPr>
+        <p:txBody>
+          <a:bodyPr/>
+          <a:p/>
+        </p:txBody>
       </p:sp>
       <p:sp>
         <p:nvSpPr>
@@ -12765,6 +14401,10 @@
             </a:solidFill>
           </a:ln>
         </p:spPr>
+        <p:txBody>
+          <a:bodyPr/>
+          <a:p/>
+        </p:txBody>
       </p:sp>
       <p:sp>
         <p:nvSpPr>
@@ -12819,6 +14459,10 @@
             </a:solidFill>
           </a:ln>
         </p:spPr>
+        <p:txBody>
+          <a:bodyPr/>
+          <a:p/>
+        </p:txBody>
       </p:sp>
       <p:sp>
         <p:nvSpPr>
@@ -12865,6 +14509,10 @@
             </a:solidFill>
           </a:ln>
         </p:spPr>
+        <p:txBody>
+          <a:bodyPr/>
+          <a:p/>
+        </p:txBody>
       </p:sp>
       <p:sp>
         <p:nvSpPr>

--- a/examples/01-modular-agent/redraw.pptx
+++ b/examples/01-modular-agent/redraw.pptx
@@ -3435,7 +3435,7 @@
         </p:nvSpPr>
         <p:spPr>
           <a:xfrm>
-            <a:off x="3924300" y="466725"/>
+            <a:off x="3905250" y="466725"/>
             <a:ext cx="114300" cy="114300"/>
           </a:xfrm>
           <a:custGeom>
@@ -3627,7 +3627,7 @@
         </p:nvSpPr>
         <p:spPr>
           <a:xfrm>
-            <a:off x="5514975" y="466725"/>
+            <a:off x="5495925" y="466725"/>
             <a:ext cx="114300" cy="114300"/>
           </a:xfrm>
           <a:custGeom>
@@ -3965,7 +3965,7 @@
         </p:nvSpPr>
         <p:spPr>
           <a:xfrm>
-            <a:off x="7124700" y="466725"/>
+            <a:off x="7105650" y="466725"/>
             <a:ext cx="114300" cy="114300"/>
           </a:xfrm>
           <a:custGeom>
@@ -4232,7 +4232,7 @@
         </p:nvSpPr>
         <p:spPr>
           <a:xfrm>
-            <a:off x="9676831" y="1271595"/>
+            <a:off x="9664447" y="1257119"/>
             <a:ext cx="117728" cy="124006"/>
           </a:xfrm>
           <a:custGeom>
@@ -4309,8 +4309,8 @@
         </p:nvSpPr>
         <p:spPr>
           <a:xfrm>
-            <a:off x="6253162" y="1119188"/>
-            <a:ext cx="85725" cy="85725"/>
+            <a:off x="6254115" y="1106805"/>
+            <a:ext cx="83820" cy="83820"/>
           </a:xfrm>
           <a:custGeom>
             <a:avLst/>
@@ -4319,12 +4319,12 @@
             <a:cxnLst/>
             <a:rect l="0" t="0" r="0" b="0"/>
             <a:pathLst>
-              <a:path w="85725" h="85725">
+              <a:path w="83820" h="83820">
                 <a:moveTo>
-                  <a:pt x="85725" y="0"/>
+                  <a:pt x="83820" y="0"/>
                 </a:moveTo>
                 <a:lnTo>
-                  <a:pt x="42862" y="85725"/>
+                  <a:pt x="41910" y="83820"/>
                 </a:lnTo>
                 <a:lnTo>
                   <a:pt x="0" y="0"/>
@@ -4977,7 +4977,7 @@
         </p:nvSpPr>
         <p:spPr>
           <a:xfrm>
-            <a:off x="1572649" y="2809801"/>
+            <a:off x="1556194" y="2819400"/>
             <a:ext cx="148781" cy="124784"/>
           </a:xfrm>
           <a:custGeom>
@@ -5058,7 +5058,7 @@
         </p:nvSpPr>
         <p:spPr>
           <a:xfrm>
-            <a:off x="1572758" y="3682750"/>
+            <a:off x="1556704" y="3672494"/>
             <a:ext cx="148271" cy="127981"/>
           </a:xfrm>
           <a:custGeom>
@@ -5365,7 +5365,7 @@
         </p:nvSpPr>
         <p:spPr>
           <a:xfrm>
-            <a:off x="3133725" y="2543175"/>
+            <a:off x="3114675" y="2543175"/>
             <a:ext cx="133350" cy="133350"/>
           </a:xfrm>
           <a:custGeom>
@@ -5442,7 +5442,7 @@
         </p:nvSpPr>
         <p:spPr>
           <a:xfrm>
-            <a:off x="3133725" y="4086225"/>
+            <a:off x="3114675" y="4086225"/>
             <a:ext cx="133350" cy="133350"/>
           </a:xfrm>
           <a:custGeom>
@@ -5795,7 +5795,7 @@
         </p:nvSpPr>
         <p:spPr>
           <a:xfrm>
-            <a:off x="3895725" y="2543175"/>
+            <a:off x="3876675" y="2543175"/>
             <a:ext cx="133350" cy="133350"/>
           </a:xfrm>
           <a:custGeom>
@@ -6148,7 +6148,7 @@
         </p:nvSpPr>
         <p:spPr>
           <a:xfrm>
-            <a:off x="3895725" y="4086225"/>
+            <a:off x="3876675" y="4086225"/>
             <a:ext cx="133350" cy="133350"/>
           </a:xfrm>
           <a:custGeom>
@@ -7558,8 +7558,8 @@
         </p:nvSpPr>
         <p:spPr>
           <a:xfrm>
-            <a:off x="5847868" y="3136465"/>
-            <a:ext cx="85085" cy="94539"/>
+            <a:off x="5848918" y="3135415"/>
+            <a:ext cx="75632" cy="84035"/>
           </a:xfrm>
           <a:custGeom>
             <a:avLst/>
@@ -7568,15 +7568,15 @@
             <a:cxnLst/>
             <a:rect l="0" t="0" r="0" b="0"/>
             <a:pathLst>
-              <a:path w="85085" h="94539">
+              <a:path w="75632" h="84035">
                 <a:moveTo>
-                  <a:pt x="69329" y="0"/>
+                  <a:pt x="61626" y="0"/>
                 </a:moveTo>
                 <a:lnTo>
-                  <a:pt x="85085" y="94539"/>
+                  <a:pt x="75632" y="84035"/>
                 </a:lnTo>
                 <a:lnTo>
-                  <a:pt x="0" y="50421"/>
+                  <a:pt x="0" y="44819"/>
                 </a:lnTo>
                 <a:close/>
               </a:path>
@@ -7639,8 +7639,8 @@
         </p:nvSpPr>
         <p:spPr>
           <a:xfrm>
-            <a:off x="6588004" y="3118531"/>
-            <a:ext cx="88988" cy="92548"/>
+            <a:off x="6588399" y="3118135"/>
+            <a:ext cx="79101" cy="82265"/>
           </a:xfrm>
           <a:custGeom>
             <a:avLst/>
@@ -7649,15 +7649,15 @@
             <a:cxnLst/>
             <a:rect l="0" t="0" r="0" b="0"/>
             <a:pathLst>
-              <a:path w="88988" h="92548">
+              <a:path w="79101" h="82265">
                 <a:moveTo>
-                  <a:pt x="64072" y="0"/>
+                  <a:pt x="56953" y="0"/>
                 </a:moveTo>
                 <a:lnTo>
-                  <a:pt x="88988" y="92548"/>
+                  <a:pt x="79101" y="82265"/>
                 </a:lnTo>
                 <a:lnTo>
-                  <a:pt x="0" y="56953"/>
+                  <a:pt x="0" y="50625"/>
                 </a:lnTo>
                 <a:close/>
               </a:path>
@@ -7720,8 +7720,8 @@
         </p:nvSpPr>
         <p:spPr>
           <a:xfrm>
-            <a:off x="7497350" y="3865621"/>
-            <a:ext cx="89254" cy="85373"/>
+            <a:off x="7493039" y="3869933"/>
+            <a:ext cx="79336" cy="75887"/>
           </a:xfrm>
           <a:custGeom>
             <a:avLst/>
@@ -7730,15 +7730,15 @@
             <a:cxnLst/>
             <a:rect l="0" t="0" r="0" b="0"/>
             <a:pathLst>
-              <a:path w="89254" h="85373">
+              <a:path w="79336" h="75887">
                 <a:moveTo>
-                  <a:pt x="7761" y="0"/>
+                  <a:pt x="6899" y="0"/>
                 </a:moveTo>
                 <a:lnTo>
-                  <a:pt x="89254" y="50448"/>
+                  <a:pt x="79336" y="44842"/>
                 </a:lnTo>
                 <a:lnTo>
-                  <a:pt x="0" y="85373"/>
+                  <a:pt x="0" y="75887"/>
                 </a:lnTo>
                 <a:close/>
               </a:path>
@@ -8330,8 +8330,8 @@
         </p:nvSpPr>
         <p:spPr>
           <a:xfrm>
-            <a:off x="9498907" y="2896783"/>
-            <a:ext cx="95191" cy="82851"/>
+            <a:off x="9510228" y="2909201"/>
+            <a:ext cx="71922" cy="62599"/>
           </a:xfrm>
           <a:custGeom>
             <a:avLst/>
@@ -8340,15 +8340,15 @@
             <a:cxnLst/>
             <a:rect l="0" t="0" r="0" b="0"/>
             <a:pathLst>
-              <a:path w="95191" h="82851">
+              <a:path w="71922" h="62599">
                 <a:moveTo>
-                  <a:pt x="47008" y="0"/>
+                  <a:pt x="35517" y="0"/>
                 </a:moveTo>
                 <a:lnTo>
-                  <a:pt x="95191" y="82851"/>
+                  <a:pt x="71922" y="62599"/>
                 </a:lnTo>
                 <a:lnTo>
-                  <a:pt x="0" y="71687"/>
+                  <a:pt x="0" y="54164"/>
                 </a:lnTo>
                 <a:close/>
               </a:path>
@@ -8411,8 +8411,8 @@
         </p:nvSpPr>
         <p:spPr>
           <a:xfrm>
-            <a:off x="9498238" y="3064495"/>
-            <a:ext cx="82016" cy="95368"/>
+            <a:off x="9510657" y="3076575"/>
+            <a:ext cx="61968" cy="72056"/>
           </a:xfrm>
           <a:custGeom>
             <a:avLst/>
@@ -8421,15 +8421,15 @@
             <a:cxnLst/>
             <a:rect l="0" t="0" r="0" b="0"/>
             <a:pathLst>
-              <a:path w="82016" h="95368">
+              <a:path w="61968" h="72056">
                 <a:moveTo>
-                  <a:pt x="0" y="49591"/>
+                  <a:pt x="0" y="37469"/>
                 </a:moveTo>
                 <a:lnTo>
-                  <a:pt x="82016" y="0"/>
+                  <a:pt x="61968" y="0"/>
                 </a:lnTo>
                 <a:lnTo>
-                  <a:pt x="72480" y="95368"/>
+                  <a:pt x="54762" y="72056"/>
                 </a:lnTo>
                 <a:close/>
               </a:path>
@@ -9216,8 +9216,8 @@
         </p:nvSpPr>
         <p:spPr>
           <a:xfrm>
-            <a:off x="10444162" y="1690688"/>
-            <a:ext cx="85725" cy="85725"/>
+            <a:off x="10450830" y="1701165"/>
+            <a:ext cx="64770" cy="64770"/>
           </a:xfrm>
           <a:custGeom>
             <a:avLst/>
@@ -9226,15 +9226,15 @@
             <a:cxnLst/>
             <a:rect l="0" t="0" r="0" b="0"/>
             <a:pathLst>
-              <a:path w="85725" h="85725">
+              <a:path w="64770" h="64770">
                 <a:moveTo>
                   <a:pt x="0" y="0"/>
                 </a:moveTo>
                 <a:lnTo>
-                  <a:pt x="85725" y="42862"/>
+                  <a:pt x="64770" y="32385"/>
                 </a:lnTo>
                 <a:lnTo>
-                  <a:pt x="0" y="85725"/>
+                  <a:pt x="0" y="64770"/>
                 </a:lnTo>
                 <a:close/>
               </a:path>
@@ -9293,8 +9293,8 @@
         </p:nvSpPr>
         <p:spPr>
           <a:xfrm>
-            <a:off x="11377612" y="1690688"/>
-            <a:ext cx="85725" cy="85725"/>
+            <a:off x="11384280" y="1701165"/>
+            <a:ext cx="64770" cy="64770"/>
           </a:xfrm>
           <a:custGeom>
             <a:avLst/>
@@ -9303,15 +9303,15 @@
             <a:cxnLst/>
             <a:rect l="0" t="0" r="0" b="0"/>
             <a:pathLst>
-              <a:path w="85725" h="85725">
+              <a:path w="64770" h="64770">
                 <a:moveTo>
                   <a:pt x="0" y="0"/>
                 </a:moveTo>
                 <a:lnTo>
-                  <a:pt x="85725" y="42862"/>
+                  <a:pt x="64770" y="32385"/>
                 </a:lnTo>
                 <a:lnTo>
-                  <a:pt x="0" y="85725"/>
+                  <a:pt x="0" y="64770"/>
                 </a:lnTo>
                 <a:close/>
               </a:path>
@@ -9370,8 +9370,8 @@
         </p:nvSpPr>
         <p:spPr>
           <a:xfrm>
-            <a:off x="12634912" y="1690688"/>
-            <a:ext cx="85725" cy="85725"/>
+            <a:off x="12641580" y="1701165"/>
+            <a:ext cx="64770" cy="64770"/>
           </a:xfrm>
           <a:custGeom>
             <a:avLst/>
@@ -9380,15 +9380,15 @@
             <a:cxnLst/>
             <a:rect l="0" t="0" r="0" b="0"/>
             <a:pathLst>
-              <a:path w="85725" h="85725">
+              <a:path w="64770" h="64770">
                 <a:moveTo>
                   <a:pt x="0" y="0"/>
                 </a:moveTo>
                 <a:lnTo>
-                  <a:pt x="85725" y="42862"/>
+                  <a:pt x="64770" y="32385"/>
                 </a:lnTo>
                 <a:lnTo>
-                  <a:pt x="0" y="85725"/>
+                  <a:pt x="0" y="64770"/>
                 </a:lnTo>
                 <a:close/>
               </a:path>
@@ -9483,8 +9483,8 @@
         </p:nvSpPr>
         <p:spPr>
           <a:xfrm>
-            <a:off x="9786938" y="2081212"/>
-            <a:ext cx="85725" cy="85725"/>
+            <a:off x="9797415" y="2087880"/>
+            <a:ext cx="64770" cy="64770"/>
           </a:xfrm>
           <a:custGeom>
             <a:avLst/>
@@ -9493,12 +9493,12 @@
             <a:cxnLst/>
             <a:rect l="0" t="0" r="0" b="0"/>
             <a:pathLst>
-              <a:path w="85725" h="85725">
+              <a:path w="64770" h="64770">
                 <a:moveTo>
-                  <a:pt x="85725" y="0"/>
+                  <a:pt x="64770" y="0"/>
                 </a:moveTo>
                 <a:lnTo>
-                  <a:pt x="42862" y="85725"/>
+                  <a:pt x="32385" y="64770"/>
                 </a:lnTo>
                 <a:lnTo>
                   <a:pt x="0" y="0"/>
@@ -9560,8 +9560,8 @@
         </p:nvSpPr>
         <p:spPr>
           <a:xfrm>
-            <a:off x="10710862" y="2081212"/>
-            <a:ext cx="85725" cy="85725"/>
+            <a:off x="10721340" y="2087880"/>
+            <a:ext cx="64770" cy="64770"/>
           </a:xfrm>
           <a:custGeom>
             <a:avLst/>
@@ -9570,12 +9570,12 @@
             <a:cxnLst/>
             <a:rect l="0" t="0" r="0" b="0"/>
             <a:pathLst>
-              <a:path w="85725" h="85725">
+              <a:path w="64770" h="64770">
                 <a:moveTo>
-                  <a:pt x="85725" y="0"/>
+                  <a:pt x="64770" y="0"/>
                 </a:moveTo>
                 <a:lnTo>
-                  <a:pt x="42862" y="85725"/>
+                  <a:pt x="32385" y="64770"/>
                 </a:lnTo>
                 <a:lnTo>
                   <a:pt x="0" y="0"/>
@@ -9637,8 +9637,8 @@
         </p:nvSpPr>
         <p:spPr>
           <a:xfrm>
-            <a:off x="11644312" y="2081212"/>
-            <a:ext cx="85725" cy="85725"/>
+            <a:off x="11654790" y="2087880"/>
+            <a:ext cx="64770" cy="64770"/>
           </a:xfrm>
           <a:custGeom>
             <a:avLst/>
@@ -9647,12 +9647,12 @@
             <a:cxnLst/>
             <a:rect l="0" t="0" r="0" b="0"/>
             <a:pathLst>
-              <a:path w="85725" h="85725">
+              <a:path w="64770" h="64770">
                 <a:moveTo>
-                  <a:pt x="85725" y="0"/>
+                  <a:pt x="64770" y="0"/>
                 </a:moveTo>
                 <a:lnTo>
-                  <a:pt x="42862" y="85725"/>
+                  <a:pt x="32385" y="64770"/>
                 </a:lnTo>
                 <a:lnTo>
                   <a:pt x="0" y="0"/>
@@ -11093,8 +11093,8 @@
         </p:nvSpPr>
         <p:spPr>
           <a:xfrm>
-            <a:off x="10453688" y="2947988"/>
-            <a:ext cx="85725" cy="85725"/>
+            <a:off x="10460355" y="2958465"/>
+            <a:ext cx="64770" cy="64770"/>
           </a:xfrm>
           <a:custGeom>
             <a:avLst/>
@@ -11103,15 +11103,15 @@
             <a:cxnLst/>
             <a:rect l="0" t="0" r="0" b="0"/>
             <a:pathLst>
-              <a:path w="85725" h="85725">
+              <a:path w="64770" h="64770">
                 <a:moveTo>
                   <a:pt x="0" y="0"/>
                 </a:moveTo>
                 <a:lnTo>
-                  <a:pt x="85725" y="42862"/>
+                  <a:pt x="64770" y="32385"/>
                 </a:lnTo>
                 <a:lnTo>
-                  <a:pt x="0" y="85725"/>
+                  <a:pt x="0" y="64770"/>
                 </a:lnTo>
                 <a:close/>
               </a:path>
@@ -11170,8 +11170,8 @@
         </p:nvSpPr>
         <p:spPr>
           <a:xfrm>
-            <a:off x="11377612" y="2947988"/>
-            <a:ext cx="85725" cy="85725"/>
+            <a:off x="11384280" y="2958465"/>
+            <a:ext cx="64770" cy="64770"/>
           </a:xfrm>
           <a:custGeom>
             <a:avLst/>
@@ -11180,15 +11180,15 @@
             <a:cxnLst/>
             <a:rect l="0" t="0" r="0" b="0"/>
             <a:pathLst>
-              <a:path w="85725" h="85725">
+              <a:path w="64770" h="64770">
                 <a:moveTo>
                   <a:pt x="0" y="0"/>
                 </a:moveTo>
                 <a:lnTo>
-                  <a:pt x="85725" y="42862"/>
+                  <a:pt x="64770" y="32385"/>
                 </a:lnTo>
                 <a:lnTo>
-                  <a:pt x="0" y="85725"/>
+                  <a:pt x="0" y="64770"/>
                 </a:lnTo>
                 <a:close/>
               </a:path>
@@ -11247,8 +11247,8 @@
         </p:nvSpPr>
         <p:spPr>
           <a:xfrm>
-            <a:off x="12625388" y="2947988"/>
-            <a:ext cx="85725" cy="85725"/>
+            <a:off x="12632055" y="2958465"/>
+            <a:ext cx="64770" cy="64770"/>
           </a:xfrm>
           <a:custGeom>
             <a:avLst/>
@@ -11257,15 +11257,15 @@
             <a:cxnLst/>
             <a:rect l="0" t="0" r="0" b="0"/>
             <a:pathLst>
-              <a:path w="85725" h="85725">
+              <a:path w="64770" h="64770">
                 <a:moveTo>
                   <a:pt x="0" y="0"/>
                 </a:moveTo>
                 <a:lnTo>
-                  <a:pt x="85725" y="42862"/>
+                  <a:pt x="64770" y="32385"/>
                 </a:lnTo>
                 <a:lnTo>
-                  <a:pt x="0" y="85725"/>
+                  <a:pt x="0" y="64770"/>
                 </a:lnTo>
                 <a:close/>
               </a:path>
@@ -12203,8 +12203,8 @@
         </p:nvSpPr>
         <p:spPr>
           <a:xfrm>
-            <a:off x="9796462" y="3805238"/>
-            <a:ext cx="85725" cy="85725"/>
+            <a:off x="9806940" y="3811905"/>
+            <a:ext cx="64770" cy="64770"/>
           </a:xfrm>
           <a:custGeom>
             <a:avLst/>
@@ -12213,12 +12213,12 @@
             <a:cxnLst/>
             <a:rect l="0" t="0" r="0" b="0"/>
             <a:pathLst>
-              <a:path w="85725" h="85725">
+              <a:path w="64770" h="64770">
                 <a:moveTo>
-                  <a:pt x="85725" y="0"/>
+                  <a:pt x="64770" y="0"/>
                 </a:moveTo>
                 <a:lnTo>
-                  <a:pt x="42862" y="85725"/>
+                  <a:pt x="32385" y="64770"/>
                 </a:lnTo>
                 <a:lnTo>
                   <a:pt x="0" y="0"/>
@@ -12280,8 +12280,8 @@
         </p:nvSpPr>
         <p:spPr>
           <a:xfrm>
-            <a:off x="10729912" y="3805238"/>
-            <a:ext cx="85725" cy="85725"/>
+            <a:off x="10740390" y="3811905"/>
+            <a:ext cx="64770" cy="64770"/>
           </a:xfrm>
           <a:custGeom>
             <a:avLst/>
@@ -12290,12 +12290,12 @@
             <a:cxnLst/>
             <a:rect l="0" t="0" r="0" b="0"/>
             <a:pathLst>
-              <a:path w="85725" h="85725">
+              <a:path w="64770" h="64770">
                 <a:moveTo>
-                  <a:pt x="85725" y="0"/>
+                  <a:pt x="64770" y="0"/>
                 </a:moveTo>
                 <a:lnTo>
-                  <a:pt x="42862" y="85725"/>
+                  <a:pt x="32385" y="64770"/>
                 </a:lnTo>
                 <a:lnTo>
                   <a:pt x="0" y="0"/>
@@ -12357,8 +12357,8 @@
         </p:nvSpPr>
         <p:spPr>
           <a:xfrm>
-            <a:off x="11672888" y="3805238"/>
-            <a:ext cx="85725" cy="85725"/>
+            <a:off x="11683365" y="3811905"/>
+            <a:ext cx="64770" cy="64770"/>
           </a:xfrm>
           <a:custGeom>
             <a:avLst/>
@@ -12367,12 +12367,12 @@
             <a:cxnLst/>
             <a:rect l="0" t="0" r="0" b="0"/>
             <a:pathLst>
-              <a:path w="85725" h="85725">
+              <a:path w="64770" h="64770">
                 <a:moveTo>
-                  <a:pt x="85725" y="0"/>
+                  <a:pt x="64770" y="0"/>
                 </a:moveTo>
                 <a:lnTo>
-                  <a:pt x="42862" y="85725"/>
+                  <a:pt x="32385" y="64770"/>
                 </a:lnTo>
                 <a:lnTo>
                   <a:pt x="0" y="0"/>
@@ -12440,8 +12440,8 @@
         </p:nvSpPr>
         <p:spPr>
           <a:xfrm>
-            <a:off x="10234143" y="3762128"/>
-            <a:ext cx="91855" cy="89901"/>
+            <a:off x="10278658" y="3771900"/>
+            <a:ext cx="64605" cy="66913"/>
           </a:xfrm>
           <a:custGeom>
             <a:avLst/>
@@ -12450,15 +12450,15 @@
             <a:cxnLst/>
             <a:rect l="0" t="0" r="0" b="0"/>
             <a:pathLst>
-              <a:path w="91855" h="89901">
+              <a:path w="64605" h="66913">
                 <a:moveTo>
-                  <a:pt x="0" y="27361"/>
+                  <a:pt x="0" y="62298"/>
                 </a:moveTo>
                 <a:lnTo>
-                  <a:pt x="91855" y="0"/>
+                  <a:pt x="36917" y="0"/>
                 </a:lnTo>
                 <a:lnTo>
-                  <a:pt x="58631" y="89901"/>
+                  <a:pt x="64605" y="66913"/>
                 </a:lnTo>
                 <a:close/>
               </a:path>
@@ -12523,8 +12523,8 @@
         </p:nvSpPr>
         <p:spPr>
           <a:xfrm>
-            <a:off x="11158357" y="3761964"/>
-            <a:ext cx="91410" cy="90416"/>
+            <a:off x="11202583" y="3771900"/>
+            <a:ext cx="64605" cy="66913"/>
           </a:xfrm>
           <a:custGeom>
             <a:avLst/>
@@ -12533,15 +12533,15 @@
             <a:cxnLst/>
             <a:rect l="0" t="0" r="0" b="0"/>
             <a:pathLst>
-              <a:path w="91410" h="90416">
+              <a:path w="64605" h="66913">
                 <a:moveTo>
-                  <a:pt x="0" y="28814"/>
+                  <a:pt x="0" y="62298"/>
                 </a:moveTo>
                 <a:lnTo>
-                  <a:pt x="91410" y="0"/>
+                  <a:pt x="36917" y="0"/>
                 </a:lnTo>
                 <a:lnTo>
-                  <a:pt x="59615" y="90416"/>
+                  <a:pt x="64605" y="66913"/>
                 </a:lnTo>
                 <a:close/>
               </a:path>
@@ -12606,8 +12606,8 @@
         </p:nvSpPr>
         <p:spPr>
           <a:xfrm>
-            <a:off x="12101332" y="3761964"/>
-            <a:ext cx="91410" cy="90416"/>
+            <a:off x="12145558" y="3771900"/>
+            <a:ext cx="64605" cy="66913"/>
           </a:xfrm>
           <a:custGeom>
             <a:avLst/>
@@ -12616,15 +12616,15 @@
             <a:cxnLst/>
             <a:rect l="0" t="0" r="0" b="0"/>
             <a:pathLst>
-              <a:path w="91410" h="90416">
+              <a:path w="64605" h="66913">
                 <a:moveTo>
-                  <a:pt x="0" y="28814"/>
+                  <a:pt x="0" y="62298"/>
                 </a:moveTo>
                 <a:lnTo>
-                  <a:pt x="91410" y="0"/>
+                  <a:pt x="36917" y="0"/>
                 </a:lnTo>
                 <a:lnTo>
-                  <a:pt x="59615" y="90416"/>
+                  <a:pt x="64605" y="66913"/>
                 </a:lnTo>
                 <a:close/>
               </a:path>
@@ -12689,8 +12689,8 @@
         </p:nvSpPr>
         <p:spPr>
           <a:xfrm>
-            <a:off x="10670563" y="3165216"/>
-            <a:ext cx="95829" cy="77655"/>
+            <a:off x="10682038" y="3161584"/>
+            <a:ext cx="71687" cy="61446"/>
           </a:xfrm>
           <a:custGeom>
             <a:avLst/>
@@ -12699,15 +12699,15 @@
             <a:cxnLst/>
             <a:rect l="0" t="0" r="0" b="0"/>
             <a:pathLst>
-              <a:path w="95829" h="77655">
+              <a:path w="71687" h="61446">
                 <a:moveTo>
-                  <a:pt x="0" y="1652"/>
+                  <a:pt x="0" y="0"/>
                 </a:moveTo>
                 <a:lnTo>
-                  <a:pt x="95829" y="0"/>
+                  <a:pt x="71687" y="10241"/>
                 </a:lnTo>
                 <a:lnTo>
-                  <a:pt x="39653" y="77655"/>
+                  <a:pt x="20482" y="61446"/>
                 </a:lnTo>
                 <a:close/>
               </a:path>
@@ -12772,8 +12772,8 @@
         </p:nvSpPr>
         <p:spPr>
           <a:xfrm>
-            <a:off x="11604060" y="3165327"/>
-            <a:ext cx="95840" cy="77159"/>
+            <a:off x="11615071" y="3165118"/>
+            <a:ext cx="72104" cy="60366"/>
           </a:xfrm>
           <a:custGeom>
             <a:avLst/>
@@ -12782,15 +12782,15 @@
             <a:cxnLst/>
             <a:rect l="0" t="0" r="0" b="0"/>
             <a:pathLst>
-              <a:path w="95840" h="77159">
+              <a:path w="72104" h="60366">
                 <a:moveTo>
-                  <a:pt x="0" y="812"/>
+                  <a:pt x="0" y="0"/>
                 </a:moveTo>
                 <a:lnTo>
-                  <a:pt x="95840" y="0"/>
+                  <a:pt x="72104" y="6707"/>
                 </a:lnTo>
                 <a:lnTo>
-                  <a:pt x="38986" y="77159"/>
+                  <a:pt x="23476" y="60366"/>
                 </a:lnTo>
                 <a:close/>
               </a:path>
@@ -12855,8 +12855,8 @@
         </p:nvSpPr>
         <p:spPr>
           <a:xfrm>
-            <a:off x="12330253" y="3161722"/>
-            <a:ext cx="90925" cy="90925"/>
+            <a:off x="12378690" y="3171825"/>
+            <a:ext cx="64770" cy="64770"/>
           </a:xfrm>
           <a:custGeom>
             <a:avLst/>
@@ -12865,15 +12865,15 @@
             <a:cxnLst/>
             <a:rect l="0" t="0" r="0" b="0"/>
             <a:pathLst>
-              <a:path w="90925" h="90925">
+              <a:path w="64770" h="64770">
                 <a:moveTo>
-                  <a:pt x="0" y="30308"/>
+                  <a:pt x="0" y="64770"/>
                 </a:moveTo>
                 <a:lnTo>
-                  <a:pt x="90925" y="0"/>
+                  <a:pt x="32385" y="0"/>
                 </a:lnTo>
                 <a:lnTo>
-                  <a:pt x="60617" y="90925"/>
+                  <a:pt x="64770" y="64770"/>
                 </a:lnTo>
                 <a:close/>
               </a:path>
@@ -12932,8 +12932,8 @@
         </p:nvSpPr>
         <p:spPr>
           <a:xfrm>
-            <a:off x="9786938" y="2538412"/>
-            <a:ext cx="85725" cy="85725"/>
+            <a:off x="9797415" y="2552700"/>
+            <a:ext cx="64770" cy="64770"/>
           </a:xfrm>
           <a:custGeom>
             <a:avLst/>
@@ -12942,15 +12942,15 @@
             <a:cxnLst/>
             <a:rect l="0" t="0" r="0" b="0"/>
             <a:pathLst>
-              <a:path w="85725" h="85725">
+              <a:path w="64770" h="64770">
                 <a:moveTo>
-                  <a:pt x="0" y="85725"/>
+                  <a:pt x="0" y="64770"/>
                 </a:moveTo>
                 <a:lnTo>
-                  <a:pt x="42862" y="0"/>
+                  <a:pt x="32385" y="0"/>
                 </a:lnTo>
                 <a:lnTo>
-                  <a:pt x="85725" y="85725"/>
+                  <a:pt x="64770" y="64770"/>
                 </a:lnTo>
                 <a:close/>
               </a:path>
@@ -13009,8 +13009,8 @@
         </p:nvSpPr>
         <p:spPr>
           <a:xfrm>
-            <a:off x="10710862" y="2538412"/>
-            <a:ext cx="85725" cy="85725"/>
+            <a:off x="10721340" y="2552700"/>
+            <a:ext cx="64770" cy="64770"/>
           </a:xfrm>
           <a:custGeom>
             <a:avLst/>
@@ -13019,15 +13019,15 @@
             <a:cxnLst/>
             <a:rect l="0" t="0" r="0" b="0"/>
             <a:pathLst>
-              <a:path w="85725" h="85725">
+              <a:path w="64770" h="64770">
                 <a:moveTo>
-                  <a:pt x="0" y="85725"/>
+                  <a:pt x="0" y="64770"/>
                 </a:moveTo>
                 <a:lnTo>
-                  <a:pt x="42862" y="0"/>
+                  <a:pt x="32385" y="0"/>
                 </a:lnTo>
                 <a:lnTo>
-                  <a:pt x="85725" y="85725"/>
+                  <a:pt x="64770" y="64770"/>
                 </a:lnTo>
                 <a:close/>
               </a:path>
@@ -13086,8 +13086,8 @@
         </p:nvSpPr>
         <p:spPr>
           <a:xfrm>
-            <a:off x="11644312" y="2538412"/>
-            <a:ext cx="85725" cy="85725"/>
+            <a:off x="11654790" y="2552700"/>
+            <a:ext cx="64770" cy="64770"/>
           </a:xfrm>
           <a:custGeom>
             <a:avLst/>
@@ -13096,15 +13096,15 @@
             <a:cxnLst/>
             <a:rect l="0" t="0" r="0" b="0"/>
             <a:pathLst>
-              <a:path w="85725" h="85725">
+              <a:path w="64770" h="64770">
                 <a:moveTo>
-                  <a:pt x="0" y="85725"/>
+                  <a:pt x="0" y="64770"/>
                 </a:moveTo>
                 <a:lnTo>
-                  <a:pt x="42862" y="0"/>
+                  <a:pt x="32385" y="0"/>
                 </a:lnTo>
                 <a:lnTo>
-                  <a:pt x="85725" y="85725"/>
+                  <a:pt x="64770" y="64770"/>
                 </a:lnTo>
                 <a:close/>
               </a:path>
@@ -13330,7 +13330,7 @@
         </p:nvSpPr>
         <p:spPr>
           <a:xfrm>
-            <a:off x="1009650" y="4981575"/>
+            <a:off x="1009650" y="5000625"/>
             <a:ext cx="190500" cy="190500"/>
           </a:xfrm>
           <a:custGeom>
@@ -13914,7 +13914,7 @@
         </p:nvSpPr>
         <p:spPr>
           <a:xfrm>
-            <a:off x="5829300" y="5353050"/>
+            <a:off x="5848350" y="5353050"/>
             <a:ext cx="190500" cy="190500"/>
           </a:xfrm>
           <a:custGeom>
@@ -13995,7 +13995,7 @@
         </p:nvSpPr>
         <p:spPr>
           <a:xfrm>
-            <a:off x="9583747" y="5016091"/>
+            <a:off x="9601200" y="5008455"/>
             <a:ext cx="212706" cy="174528"/>
           </a:xfrm>
           <a:custGeom>
@@ -14072,7 +14072,7 @@
         </p:nvSpPr>
         <p:spPr>
           <a:xfrm>
-            <a:off x="9601200" y="5391150"/>
+            <a:off x="9696450" y="5391150"/>
             <a:ext cx="114300" cy="114300"/>
           </a:xfrm>
           <a:custGeom>
@@ -14084,13 +14084,13 @@
             <a:pathLst>
               <a:path w="114300" h="114300">
                 <a:moveTo>
-                  <a:pt x="0" y="114300"/>
+                  <a:pt x="114300" y="0"/>
                 </a:moveTo>
                 <a:lnTo>
-                  <a:pt x="114300" y="57150"/>
+                  <a:pt x="0" y="57150"/>
                 </a:lnTo>
                 <a:lnTo>
-                  <a:pt x="0" y="0"/>
+                  <a:pt x="114300" y="114300"/>
                 </a:lnTo>
                 <a:close/>
               </a:path>
@@ -14113,7 +14113,7 @@
         </p:nvSpPr>
         <p:spPr>
           <a:xfrm>
-            <a:off x="11077575" y="5391150"/>
+            <a:off x="11058525" y="5391150"/>
             <a:ext cx="114300" cy="114300"/>
           </a:xfrm>
           <a:custGeom>

--- a/examples/01-modular-agent/redraw.pptx
+++ b/examples/01-modular-agent/redraw.pptx
@@ -8330,8 +8330,8 @@
         </p:nvSpPr>
         <p:spPr>
           <a:xfrm>
-            <a:off x="9510228" y="2909201"/>
-            <a:ext cx="71922" cy="62599"/>
+            <a:off x="9486959" y="2888949"/>
+            <a:ext cx="95191" cy="82851"/>
           </a:xfrm>
           <a:custGeom>
             <a:avLst/>
@@ -8340,15 +8340,15 @@
             <a:cxnLst/>
             <a:rect l="0" t="0" r="0" b="0"/>
             <a:pathLst>
-              <a:path w="71922" h="62599">
+              <a:path w="95191" h="82851">
                 <a:moveTo>
-                  <a:pt x="35517" y="0"/>
+                  <a:pt x="47008" y="0"/>
                 </a:moveTo>
                 <a:lnTo>
-                  <a:pt x="71922" y="62599"/>
+                  <a:pt x="95191" y="82851"/>
                 </a:lnTo>
                 <a:lnTo>
-                  <a:pt x="0" y="54164"/>
+                  <a:pt x="0" y="71687"/>
                 </a:lnTo>
                 <a:close/>
               </a:path>
@@ -8411,8 +8411,8 @@
         </p:nvSpPr>
         <p:spPr>
           <a:xfrm>
-            <a:off x="9510657" y="3076575"/>
-            <a:ext cx="61968" cy="72056"/>
+            <a:off x="9490609" y="3076575"/>
+            <a:ext cx="82016" cy="95368"/>
           </a:xfrm>
           <a:custGeom>
             <a:avLst/>
@@ -8421,15 +8421,15 @@
             <a:cxnLst/>
             <a:rect l="0" t="0" r="0" b="0"/>
             <a:pathLst>
-              <a:path w="61968" h="72056">
+              <a:path w="82016" h="95368">
                 <a:moveTo>
-                  <a:pt x="0" y="37469"/>
+                  <a:pt x="0" y="49591"/>
                 </a:moveTo>
                 <a:lnTo>
-                  <a:pt x="61968" y="0"/>
+                  <a:pt x="82016" y="0"/>
                 </a:lnTo>
                 <a:lnTo>
-                  <a:pt x="54762" y="72056"/>
+                  <a:pt x="72480" y="95368"/>
                 </a:lnTo>
                 <a:close/>
               </a:path>
@@ -9216,8 +9216,8 @@
         </p:nvSpPr>
         <p:spPr>
           <a:xfrm>
-            <a:off x="10450830" y="1701165"/>
-            <a:ext cx="64770" cy="64770"/>
+            <a:off x="10429875" y="1690688"/>
+            <a:ext cx="85725" cy="85725"/>
           </a:xfrm>
           <a:custGeom>
             <a:avLst/>
@@ -9226,15 +9226,15 @@
             <a:cxnLst/>
             <a:rect l="0" t="0" r="0" b="0"/>
             <a:pathLst>
-              <a:path w="64770" h="64770">
+              <a:path w="85725" h="85725">
                 <a:moveTo>
                   <a:pt x="0" y="0"/>
                 </a:moveTo>
                 <a:lnTo>
-                  <a:pt x="64770" y="32385"/>
+                  <a:pt x="85725" y="42862"/>
                 </a:lnTo>
                 <a:lnTo>
-                  <a:pt x="0" y="64770"/>
+                  <a:pt x="0" y="85725"/>
                 </a:lnTo>
                 <a:close/>
               </a:path>
@@ -9293,8 +9293,8 @@
         </p:nvSpPr>
         <p:spPr>
           <a:xfrm>
-            <a:off x="11384280" y="1701165"/>
-            <a:ext cx="64770" cy="64770"/>
+            <a:off x="11363325" y="1690688"/>
+            <a:ext cx="85725" cy="85725"/>
           </a:xfrm>
           <a:custGeom>
             <a:avLst/>
@@ -9303,15 +9303,15 @@
             <a:cxnLst/>
             <a:rect l="0" t="0" r="0" b="0"/>
             <a:pathLst>
-              <a:path w="64770" h="64770">
+              <a:path w="85725" h="85725">
                 <a:moveTo>
                   <a:pt x="0" y="0"/>
                 </a:moveTo>
                 <a:lnTo>
-                  <a:pt x="64770" y="32385"/>
+                  <a:pt x="85725" y="42862"/>
                 </a:lnTo>
                 <a:lnTo>
-                  <a:pt x="0" y="64770"/>
+                  <a:pt x="0" y="85725"/>
                 </a:lnTo>
                 <a:close/>
               </a:path>
@@ -9370,8 +9370,8 @@
         </p:nvSpPr>
         <p:spPr>
           <a:xfrm>
-            <a:off x="12641580" y="1701165"/>
-            <a:ext cx="64770" cy="64770"/>
+            <a:off x="12620625" y="1690688"/>
+            <a:ext cx="85725" cy="85725"/>
           </a:xfrm>
           <a:custGeom>
             <a:avLst/>
@@ -9380,15 +9380,15 @@
             <a:cxnLst/>
             <a:rect l="0" t="0" r="0" b="0"/>
             <a:pathLst>
-              <a:path w="64770" h="64770">
+              <a:path w="85725" h="85725">
                 <a:moveTo>
                   <a:pt x="0" y="0"/>
                 </a:moveTo>
                 <a:lnTo>
-                  <a:pt x="64770" y="32385"/>
+                  <a:pt x="85725" y="42862"/>
                 </a:lnTo>
                 <a:lnTo>
-                  <a:pt x="0" y="64770"/>
+                  <a:pt x="0" y="85725"/>
                 </a:lnTo>
                 <a:close/>
               </a:path>
@@ -9483,8 +9483,8 @@
         </p:nvSpPr>
         <p:spPr>
           <a:xfrm>
-            <a:off x="9797415" y="2087880"/>
-            <a:ext cx="64770" cy="64770"/>
+            <a:off x="9786938" y="2066925"/>
+            <a:ext cx="85725" cy="85725"/>
           </a:xfrm>
           <a:custGeom>
             <a:avLst/>
@@ -9493,12 +9493,12 @@
             <a:cxnLst/>
             <a:rect l="0" t="0" r="0" b="0"/>
             <a:pathLst>
-              <a:path w="64770" h="64770">
+              <a:path w="85725" h="85725">
                 <a:moveTo>
-                  <a:pt x="64770" y="0"/>
+                  <a:pt x="85725" y="0"/>
                 </a:moveTo>
                 <a:lnTo>
-                  <a:pt x="32385" y="64770"/>
+                  <a:pt x="42862" y="85725"/>
                 </a:lnTo>
                 <a:lnTo>
                   <a:pt x="0" y="0"/>
@@ -9560,8 +9560,8 @@
         </p:nvSpPr>
         <p:spPr>
           <a:xfrm>
-            <a:off x="10721340" y="2087880"/>
-            <a:ext cx="64770" cy="64770"/>
+            <a:off x="10710862" y="2066925"/>
+            <a:ext cx="85725" cy="85725"/>
           </a:xfrm>
           <a:custGeom>
             <a:avLst/>
@@ -9570,12 +9570,12 @@
             <a:cxnLst/>
             <a:rect l="0" t="0" r="0" b="0"/>
             <a:pathLst>
-              <a:path w="64770" h="64770">
+              <a:path w="85725" h="85725">
                 <a:moveTo>
-                  <a:pt x="64770" y="0"/>
+                  <a:pt x="85725" y="0"/>
                 </a:moveTo>
                 <a:lnTo>
-                  <a:pt x="32385" y="64770"/>
+                  <a:pt x="42862" y="85725"/>
                 </a:lnTo>
                 <a:lnTo>
                   <a:pt x="0" y="0"/>
@@ -9637,8 +9637,8 @@
         </p:nvSpPr>
         <p:spPr>
           <a:xfrm>
-            <a:off x="11654790" y="2087880"/>
-            <a:ext cx="64770" cy="64770"/>
+            <a:off x="11644312" y="2066925"/>
+            <a:ext cx="85725" cy="85725"/>
           </a:xfrm>
           <a:custGeom>
             <a:avLst/>
@@ -9647,12 +9647,12 @@
             <a:cxnLst/>
             <a:rect l="0" t="0" r="0" b="0"/>
             <a:pathLst>
-              <a:path w="64770" h="64770">
+              <a:path w="85725" h="85725">
                 <a:moveTo>
-                  <a:pt x="64770" y="0"/>
+                  <a:pt x="85725" y="0"/>
                 </a:moveTo>
                 <a:lnTo>
-                  <a:pt x="32385" y="64770"/>
+                  <a:pt x="42862" y="85725"/>
                 </a:lnTo>
                 <a:lnTo>
                   <a:pt x="0" y="0"/>
@@ -11093,8 +11093,8 @@
         </p:nvSpPr>
         <p:spPr>
           <a:xfrm>
-            <a:off x="10460355" y="2958465"/>
-            <a:ext cx="64770" cy="64770"/>
+            <a:off x="10439400" y="2947988"/>
+            <a:ext cx="85725" cy="85725"/>
           </a:xfrm>
           <a:custGeom>
             <a:avLst/>
@@ -11103,15 +11103,15 @@
             <a:cxnLst/>
             <a:rect l="0" t="0" r="0" b="0"/>
             <a:pathLst>
-              <a:path w="64770" h="64770">
+              <a:path w="85725" h="85725">
                 <a:moveTo>
                   <a:pt x="0" y="0"/>
                 </a:moveTo>
                 <a:lnTo>
-                  <a:pt x="64770" y="32385"/>
+                  <a:pt x="85725" y="42862"/>
                 </a:lnTo>
                 <a:lnTo>
-                  <a:pt x="0" y="64770"/>
+                  <a:pt x="0" y="85725"/>
                 </a:lnTo>
                 <a:close/>
               </a:path>
@@ -11170,8 +11170,8 @@
         </p:nvSpPr>
         <p:spPr>
           <a:xfrm>
-            <a:off x="11384280" y="2958465"/>
-            <a:ext cx="64770" cy="64770"/>
+            <a:off x="11363325" y="2947988"/>
+            <a:ext cx="85725" cy="85725"/>
           </a:xfrm>
           <a:custGeom>
             <a:avLst/>
@@ -11180,15 +11180,15 @@
             <a:cxnLst/>
             <a:rect l="0" t="0" r="0" b="0"/>
             <a:pathLst>
-              <a:path w="64770" h="64770">
+              <a:path w="85725" h="85725">
                 <a:moveTo>
                   <a:pt x="0" y="0"/>
                 </a:moveTo>
                 <a:lnTo>
-                  <a:pt x="64770" y="32385"/>
+                  <a:pt x="85725" y="42862"/>
                 </a:lnTo>
                 <a:lnTo>
-                  <a:pt x="0" y="64770"/>
+                  <a:pt x="0" y="85725"/>
                 </a:lnTo>
                 <a:close/>
               </a:path>
@@ -11247,8 +11247,8 @@
         </p:nvSpPr>
         <p:spPr>
           <a:xfrm>
-            <a:off x="12632055" y="2958465"/>
-            <a:ext cx="64770" cy="64770"/>
+            <a:off x="12611100" y="2947988"/>
+            <a:ext cx="85725" cy="85725"/>
           </a:xfrm>
           <a:custGeom>
             <a:avLst/>
@@ -11257,15 +11257,15 @@
             <a:cxnLst/>
             <a:rect l="0" t="0" r="0" b="0"/>
             <a:pathLst>
-              <a:path w="64770" h="64770">
+              <a:path w="85725" h="85725">
                 <a:moveTo>
                   <a:pt x="0" y="0"/>
                 </a:moveTo>
                 <a:lnTo>
-                  <a:pt x="64770" y="32385"/>
+                  <a:pt x="85725" y="42862"/>
                 </a:lnTo>
                 <a:lnTo>
-                  <a:pt x="0" y="64770"/>
+                  <a:pt x="0" y="85725"/>
                 </a:lnTo>
                 <a:close/>
               </a:path>
@@ -12203,8 +12203,8 @@
         </p:nvSpPr>
         <p:spPr>
           <a:xfrm>
-            <a:off x="9806940" y="3811905"/>
-            <a:ext cx="64770" cy="64770"/>
+            <a:off x="9796462" y="3790950"/>
+            <a:ext cx="85725" cy="85725"/>
           </a:xfrm>
           <a:custGeom>
             <a:avLst/>
@@ -12213,12 +12213,12 @@
             <a:cxnLst/>
             <a:rect l="0" t="0" r="0" b="0"/>
             <a:pathLst>
-              <a:path w="64770" h="64770">
+              <a:path w="85725" h="85725">
                 <a:moveTo>
-                  <a:pt x="64770" y="0"/>
+                  <a:pt x="85725" y="0"/>
                 </a:moveTo>
                 <a:lnTo>
-                  <a:pt x="32385" y="64770"/>
+                  <a:pt x="42862" y="85725"/>
                 </a:lnTo>
                 <a:lnTo>
                   <a:pt x="0" y="0"/>
@@ -12280,8 +12280,8 @@
         </p:nvSpPr>
         <p:spPr>
           <a:xfrm>
-            <a:off x="10740390" y="3811905"/>
-            <a:ext cx="64770" cy="64770"/>
+            <a:off x="10729912" y="3790950"/>
+            <a:ext cx="85725" cy="85725"/>
           </a:xfrm>
           <a:custGeom>
             <a:avLst/>
@@ -12290,12 +12290,12 @@
             <a:cxnLst/>
             <a:rect l="0" t="0" r="0" b="0"/>
             <a:pathLst>
-              <a:path w="64770" h="64770">
+              <a:path w="85725" h="85725">
                 <a:moveTo>
-                  <a:pt x="64770" y="0"/>
+                  <a:pt x="85725" y="0"/>
                 </a:moveTo>
                 <a:lnTo>
-                  <a:pt x="32385" y="64770"/>
+                  <a:pt x="42862" y="85725"/>
                 </a:lnTo>
                 <a:lnTo>
                   <a:pt x="0" y="0"/>
@@ -12357,8 +12357,8 @@
         </p:nvSpPr>
         <p:spPr>
           <a:xfrm>
-            <a:off x="11683365" y="3811905"/>
-            <a:ext cx="64770" cy="64770"/>
+            <a:off x="11672888" y="3790950"/>
+            <a:ext cx="85725" cy="85725"/>
           </a:xfrm>
           <a:custGeom>
             <a:avLst/>
@@ -12367,12 +12367,12 @@
             <a:cxnLst/>
             <a:rect l="0" t="0" r="0" b="0"/>
             <a:pathLst>
-              <a:path w="64770" h="64770">
+              <a:path w="85725" h="85725">
                 <a:moveTo>
-                  <a:pt x="64770" y="0"/>
+                  <a:pt x="85725" y="0"/>
                 </a:moveTo>
                 <a:lnTo>
-                  <a:pt x="32385" y="64770"/>
+                  <a:pt x="42862" y="85725"/>
                 </a:lnTo>
                 <a:lnTo>
                   <a:pt x="0" y="0"/>
@@ -12440,8 +12440,8 @@
         </p:nvSpPr>
         <p:spPr>
           <a:xfrm>
-            <a:off x="10278658" y="3771900"/>
-            <a:ext cx="64605" cy="66913"/>
+            <a:off x="10266714" y="3771900"/>
+            <a:ext cx="85507" cy="88561"/>
           </a:xfrm>
           <a:custGeom>
             <a:avLst/>
@@ -12450,15 +12450,15 @@
             <a:cxnLst/>
             <a:rect l="0" t="0" r="0" b="0"/>
             <a:pathLst>
-              <a:path w="64605" h="66913">
+              <a:path w="85507" h="88561">
                 <a:moveTo>
-                  <a:pt x="0" y="62298"/>
+                  <a:pt x="0" y="82453"/>
                 </a:moveTo>
                 <a:lnTo>
-                  <a:pt x="36917" y="0"/>
+                  <a:pt x="48861" y="0"/>
                 </a:lnTo>
                 <a:lnTo>
-                  <a:pt x="64605" y="66913"/>
+                  <a:pt x="85507" y="88561"/>
                 </a:lnTo>
                 <a:close/>
               </a:path>
@@ -12523,8 +12523,8 @@
         </p:nvSpPr>
         <p:spPr>
           <a:xfrm>
-            <a:off x="11202583" y="3771900"/>
-            <a:ext cx="64605" cy="66913"/>
+            <a:off x="11190639" y="3771900"/>
+            <a:ext cx="85507" cy="88561"/>
           </a:xfrm>
           <a:custGeom>
             <a:avLst/>
@@ -12533,15 +12533,15 @@
             <a:cxnLst/>
             <a:rect l="0" t="0" r="0" b="0"/>
             <a:pathLst>
-              <a:path w="64605" h="66913">
+              <a:path w="85507" h="88561">
                 <a:moveTo>
-                  <a:pt x="0" y="62298"/>
+                  <a:pt x="0" y="82453"/>
                 </a:moveTo>
                 <a:lnTo>
-                  <a:pt x="36917" y="0"/>
+                  <a:pt x="48861" y="0"/>
                 </a:lnTo>
                 <a:lnTo>
-                  <a:pt x="64605" y="66913"/>
+                  <a:pt x="85507" y="88561"/>
                 </a:lnTo>
                 <a:close/>
               </a:path>
@@ -12606,8 +12606,8 @@
         </p:nvSpPr>
         <p:spPr>
           <a:xfrm>
-            <a:off x="12145558" y="3771900"/>
-            <a:ext cx="64605" cy="66913"/>
+            <a:off x="12133614" y="3771900"/>
+            <a:ext cx="85507" cy="88561"/>
           </a:xfrm>
           <a:custGeom>
             <a:avLst/>
@@ -12616,15 +12616,15 @@
             <a:cxnLst/>
             <a:rect l="0" t="0" r="0" b="0"/>
             <a:pathLst>
-              <a:path w="64605" h="66913">
+              <a:path w="85507" h="88561">
                 <a:moveTo>
-                  <a:pt x="0" y="62298"/>
+                  <a:pt x="0" y="82453"/>
                 </a:moveTo>
                 <a:lnTo>
-                  <a:pt x="36917" y="0"/>
+                  <a:pt x="48861" y="0"/>
                 </a:lnTo>
                 <a:lnTo>
-                  <a:pt x="64605" y="66913"/>
+                  <a:pt x="85507" y="88561"/>
                 </a:lnTo>
                 <a:close/>
               </a:path>
@@ -12689,8 +12689,8 @@
         </p:nvSpPr>
         <p:spPr>
           <a:xfrm>
-            <a:off x="10682038" y="3161584"/>
-            <a:ext cx="71687" cy="61446"/>
+            <a:off x="10658845" y="3158271"/>
+            <a:ext cx="94880" cy="81326"/>
           </a:xfrm>
           <a:custGeom>
             <a:avLst/>
@@ -12699,15 +12699,15 @@
             <a:cxnLst/>
             <a:rect l="0" t="0" r="0" b="0"/>
             <a:pathLst>
-              <a:path w="71687" h="61446">
+              <a:path w="94880" h="81326">
                 <a:moveTo>
                   <a:pt x="0" y="0"/>
                 </a:moveTo>
                 <a:lnTo>
-                  <a:pt x="71687" y="10241"/>
+                  <a:pt x="94880" y="13554"/>
                 </a:lnTo>
                 <a:lnTo>
-                  <a:pt x="20482" y="61446"/>
+                  <a:pt x="27109" y="81326"/>
                 </a:lnTo>
                 <a:close/>
               </a:path>
@@ -12772,8 +12772,8 @@
         </p:nvSpPr>
         <p:spPr>
           <a:xfrm>
-            <a:off x="11615071" y="3165118"/>
-            <a:ext cx="72104" cy="60366"/>
+            <a:off x="11591744" y="3162948"/>
+            <a:ext cx="95431" cy="79896"/>
           </a:xfrm>
           <a:custGeom>
             <a:avLst/>
@@ -12782,15 +12782,15 @@
             <a:cxnLst/>
             <a:rect l="0" t="0" r="0" b="0"/>
             <a:pathLst>
-              <a:path w="72104" h="60366">
+              <a:path w="95431" h="79896">
                 <a:moveTo>
                   <a:pt x="0" y="0"/>
                 </a:moveTo>
                 <a:lnTo>
-                  <a:pt x="72104" y="6707"/>
+                  <a:pt x="95431" y="8877"/>
                 </a:lnTo>
                 <a:lnTo>
-                  <a:pt x="23476" y="60366"/>
+                  <a:pt x="31071" y="79896"/>
                 </a:lnTo>
                 <a:close/>
               </a:path>
@@ -12855,8 +12855,8 @@
         </p:nvSpPr>
         <p:spPr>
           <a:xfrm>
-            <a:off x="12378690" y="3171825"/>
-            <a:ext cx="64770" cy="64770"/>
+            <a:off x="12368212" y="3171825"/>
+            <a:ext cx="85725" cy="85725"/>
           </a:xfrm>
           <a:custGeom>
             <a:avLst/>
@@ -12865,15 +12865,15 @@
             <a:cxnLst/>
             <a:rect l="0" t="0" r="0" b="0"/>
             <a:pathLst>
-              <a:path w="64770" h="64770">
+              <a:path w="85725" h="85725">
                 <a:moveTo>
-                  <a:pt x="0" y="64770"/>
+                  <a:pt x="0" y="85725"/>
                 </a:moveTo>
                 <a:lnTo>
-                  <a:pt x="32385" y="0"/>
+                  <a:pt x="42862" y="0"/>
                 </a:lnTo>
                 <a:lnTo>
-                  <a:pt x="64770" y="64770"/>
+                  <a:pt x="85725" y="85725"/>
                 </a:lnTo>
                 <a:close/>
               </a:path>
@@ -12932,8 +12932,8 @@
         </p:nvSpPr>
         <p:spPr>
           <a:xfrm>
-            <a:off x="9797415" y="2552700"/>
-            <a:ext cx="64770" cy="64770"/>
+            <a:off x="9786938" y="2552700"/>
+            <a:ext cx="85725" cy="85725"/>
           </a:xfrm>
           <a:custGeom>
             <a:avLst/>
@@ -12942,15 +12942,15 @@
             <a:cxnLst/>
             <a:rect l="0" t="0" r="0" b="0"/>
             <a:pathLst>
-              <a:path w="64770" h="64770">
+              <a:path w="85725" h="85725">
                 <a:moveTo>
-                  <a:pt x="0" y="64770"/>
+                  <a:pt x="0" y="85725"/>
                 </a:moveTo>
                 <a:lnTo>
-                  <a:pt x="32385" y="0"/>
+                  <a:pt x="42862" y="0"/>
                 </a:lnTo>
                 <a:lnTo>
-                  <a:pt x="64770" y="64770"/>
+                  <a:pt x="85725" y="85725"/>
                 </a:lnTo>
                 <a:close/>
               </a:path>
@@ -13009,8 +13009,8 @@
         </p:nvSpPr>
         <p:spPr>
           <a:xfrm>
-            <a:off x="10721340" y="2552700"/>
-            <a:ext cx="64770" cy="64770"/>
+            <a:off x="10710862" y="2552700"/>
+            <a:ext cx="85725" cy="85725"/>
           </a:xfrm>
           <a:custGeom>
             <a:avLst/>
@@ -13019,15 +13019,15 @@
             <a:cxnLst/>
             <a:rect l="0" t="0" r="0" b="0"/>
             <a:pathLst>
-              <a:path w="64770" h="64770">
+              <a:path w="85725" h="85725">
                 <a:moveTo>
-                  <a:pt x="0" y="64770"/>
+                  <a:pt x="0" y="85725"/>
                 </a:moveTo>
                 <a:lnTo>
-                  <a:pt x="32385" y="0"/>
+                  <a:pt x="42862" y="0"/>
                 </a:lnTo>
                 <a:lnTo>
-                  <a:pt x="64770" y="64770"/>
+                  <a:pt x="85725" y="85725"/>
                 </a:lnTo>
                 <a:close/>
               </a:path>
@@ -13086,8 +13086,8 @@
         </p:nvSpPr>
         <p:spPr>
           <a:xfrm>
-            <a:off x="11654790" y="2552700"/>
-            <a:ext cx="64770" cy="64770"/>
+            <a:off x="11644312" y="2552700"/>
+            <a:ext cx="85725" cy="85725"/>
           </a:xfrm>
           <a:custGeom>
             <a:avLst/>
@@ -13096,15 +13096,15 @@
             <a:cxnLst/>
             <a:rect l="0" t="0" r="0" b="0"/>
             <a:pathLst>
-              <a:path w="64770" h="64770">
+              <a:path w="85725" h="85725">
                 <a:moveTo>
-                  <a:pt x="0" y="64770"/>
+                  <a:pt x="0" y="85725"/>
                 </a:moveTo>
                 <a:lnTo>
-                  <a:pt x="32385" y="0"/>
+                  <a:pt x="42862" y="0"/>
                 </a:lnTo>
                 <a:lnTo>
-                  <a:pt x="64770" y="64770"/>
+                  <a:pt x="85725" y="85725"/>
                 </a:lnTo>
                 <a:close/>
               </a:path>
